--- a/docs/pitch/CodaCo-Pitch-Deck.pptx
+++ b/docs/pitch/CodaCo-Pitch-Deck.pptx
@@ -12,9 +12,10 @@
     <p:sldId id="260" r:id="rId6"/>
     <p:sldId id="261" r:id="rId7"/>
     <p:sldId id="262" r:id="rId8"/>
+    <p:sldId id="263" r:id="rId9"/>
   </p:sldIdLst>
   <p:notesMasterIdLst>
-    <p:notesMasterId r:id="rId9"/>
+    <p:notesMasterId r:id="rId10"/>
   </p:notesMasterIdLst>
   <p:sldSz cx="12192000" cy="6858000"/>
   <p:notesSz cx="6858000" cy="12192000"/>
@@ -201,57 +202,45 @@
           </c:dLbls>
           <c:cat>
             <c:multiLvlStrRef>
-              <c:f>Sheet1!$A$2:$A$17</c:f>
+              <c:f>Sheet1!$A$2:$A$13</c:f>
               <c:multiLvlStrCache>
-                <c:ptCount val="16"/>
+                <c:ptCount val="12"/>
                 <c:lvl>
                   <c:pt idx="0">
+                    <c:v>Nov '26</c:v>
+                  </c:pt>
+                  <c:pt idx="1">
+                    <c:v>Dec</c:v>
+                  </c:pt>
+                  <c:pt idx="2">
+                    <c:v>Jan '27</c:v>
+                  </c:pt>
+                  <c:pt idx="3">
+                    <c:v>Feb</c:v>
+                  </c:pt>
+                  <c:pt idx="4">
+                    <c:v>Mar</c:v>
+                  </c:pt>
+                  <c:pt idx="5">
+                    <c:v>Apr</c:v>
+                  </c:pt>
+                  <c:pt idx="6">
+                    <c:v>May</c:v>
+                  </c:pt>
+                  <c:pt idx="7">
+                    <c:v>Jun</c:v>
+                  </c:pt>
+                  <c:pt idx="8">
+                    <c:v>Jul</c:v>
+                  </c:pt>
+                  <c:pt idx="9">
+                    <c:v>Aug</c:v>
+                  </c:pt>
+                  <c:pt idx="10">
                     <c:v>Sep</c:v>
                   </c:pt>
-                  <c:pt idx="1">
-                    <c:v>Oct</c:v>
-                  </c:pt>
-                  <c:pt idx="2">
-                    <c:v>Nov</c:v>
-                  </c:pt>
-                  <c:pt idx="3">
-                    <c:v>Dec</c:v>
-                  </c:pt>
-                  <c:pt idx="4">
-                    <c:v>Jan '27</c:v>
-                  </c:pt>
-                  <c:pt idx="5">
-                    <c:v>Feb</c:v>
-                  </c:pt>
-                  <c:pt idx="6">
-                    <c:v>Mar</c:v>
-                  </c:pt>
-                  <c:pt idx="7">
-                    <c:v>Apr</c:v>
-                  </c:pt>
-                  <c:pt idx="8">
-                    <c:v>May</c:v>
-                  </c:pt>
-                  <c:pt idx="9">
-                    <c:v>Jun</c:v>
-                  </c:pt>
-                  <c:pt idx="10">
-                    <c:v>Jul</c:v>
-                  </c:pt>
                   <c:pt idx="11">
-                    <c:v>Aug</c:v>
-                  </c:pt>
-                  <c:pt idx="12">
-                    <c:v>Sep</c:v>
-                  </c:pt>
-                  <c:pt idx="13">
-                    <c:v>Oct</c:v>
-                  </c:pt>
-                  <c:pt idx="14">
-                    <c:v>Nov</c:v>
-                  </c:pt>
-                  <c:pt idx="15">
-                    <c:v>Dec</c:v>
+                    <c:v>Oct '27</c:v>
                   </c:pt>
                 </c:lvl>
               </c:multiLvlStrCache>
@@ -259,57 +248,45 @@
           </c:cat>
           <c:val>
             <c:numRef>
-              <c:f>Sheet1!$B$2:$B$17</c:f>
+              <c:f>Sheet1!$B$2:$B$13</c:f>
               <c:numCache>
                 <c:formatCode>General</c:formatCode>
-                <c:ptCount val="16"/>
+                <c:ptCount val="12"/>
                 <c:pt idx="0">
                   <c:v>0</c:v>
                 </c:pt>
                 <c:pt idx="1">
-                  <c:v>0</c:v>
+                  <c:v>870</c:v>
                 </c:pt>
                 <c:pt idx="2">
-                  <c:v>0</c:v>
+                  <c:v>1363</c:v>
                 </c:pt>
                 <c:pt idx="3">
-                  <c:v>435</c:v>
+                  <c:v>1885</c:v>
                 </c:pt>
                 <c:pt idx="4">
-                  <c:v>841</c:v>
+                  <c:v>2407</c:v>
                 </c:pt>
                 <c:pt idx="5">
-                  <c:v>1305</c:v>
+                  <c:v>2813</c:v>
                 </c:pt>
                 <c:pt idx="6">
-                  <c:v>1653</c:v>
+                  <c:v>3219</c:v>
                 </c:pt>
                 <c:pt idx="7">
-                  <c:v>1914</c:v>
+                  <c:v>3625</c:v>
                 </c:pt>
                 <c:pt idx="8">
-                  <c:v>2117</c:v>
+                  <c:v>4031</c:v>
                 </c:pt>
                 <c:pt idx="9">
-                  <c:v>2465</c:v>
+                  <c:v>4321</c:v>
                 </c:pt>
                 <c:pt idx="10">
-                  <c:v>2871</c:v>
+                  <c:v>4640</c:v>
                 </c:pt>
                 <c:pt idx="11">
-                  <c:v>3219</c:v>
-                </c:pt>
-                <c:pt idx="12">
-                  <c:v>3567</c:v>
-                </c:pt>
-                <c:pt idx="13">
-                  <c:v>3973</c:v>
-                </c:pt>
-                <c:pt idx="14">
-                  <c:v>4263</c:v>
-                </c:pt>
-                <c:pt idx="15">
-                  <c:v>4611</c:v>
+                  <c:v>4959</c:v>
                 </c:pt>
               </c:numCache>
             </c:numRef>
@@ -362,57 +339,45 @@
           </c:dLbls>
           <c:cat>
             <c:multiLvlStrRef>
-              <c:f>Sheet1!$A$2:$A$17</c:f>
+              <c:f>Sheet1!$A$2:$A$13</c:f>
               <c:multiLvlStrCache>
-                <c:ptCount val="16"/>
+                <c:ptCount val="12"/>
                 <c:lvl>
                   <c:pt idx="0">
+                    <c:v>Nov '26</c:v>
+                  </c:pt>
+                  <c:pt idx="1">
+                    <c:v>Dec</c:v>
+                  </c:pt>
+                  <c:pt idx="2">
+                    <c:v>Jan '27</c:v>
+                  </c:pt>
+                  <c:pt idx="3">
+                    <c:v>Feb</c:v>
+                  </c:pt>
+                  <c:pt idx="4">
+                    <c:v>Mar</c:v>
+                  </c:pt>
+                  <c:pt idx="5">
+                    <c:v>Apr</c:v>
+                  </c:pt>
+                  <c:pt idx="6">
+                    <c:v>May</c:v>
+                  </c:pt>
+                  <c:pt idx="7">
+                    <c:v>Jun</c:v>
+                  </c:pt>
+                  <c:pt idx="8">
+                    <c:v>Jul</c:v>
+                  </c:pt>
+                  <c:pt idx="9">
+                    <c:v>Aug</c:v>
+                  </c:pt>
+                  <c:pt idx="10">
                     <c:v>Sep</c:v>
                   </c:pt>
-                  <c:pt idx="1">
-                    <c:v>Oct</c:v>
-                  </c:pt>
-                  <c:pt idx="2">
-                    <c:v>Nov</c:v>
-                  </c:pt>
-                  <c:pt idx="3">
-                    <c:v>Dec</c:v>
-                  </c:pt>
-                  <c:pt idx="4">
-                    <c:v>Jan '27</c:v>
-                  </c:pt>
-                  <c:pt idx="5">
-                    <c:v>Feb</c:v>
-                  </c:pt>
-                  <c:pt idx="6">
-                    <c:v>Mar</c:v>
-                  </c:pt>
-                  <c:pt idx="7">
-                    <c:v>Apr</c:v>
-                  </c:pt>
-                  <c:pt idx="8">
-                    <c:v>May</c:v>
-                  </c:pt>
-                  <c:pt idx="9">
-                    <c:v>Jun</c:v>
-                  </c:pt>
-                  <c:pt idx="10">
-                    <c:v>Jul</c:v>
-                  </c:pt>
                   <c:pt idx="11">
-                    <c:v>Aug</c:v>
-                  </c:pt>
-                  <c:pt idx="12">
-                    <c:v>Sep</c:v>
-                  </c:pt>
-                  <c:pt idx="13">
-                    <c:v>Oct</c:v>
-                  </c:pt>
-                  <c:pt idx="14">
-                    <c:v>Nov</c:v>
-                  </c:pt>
-                  <c:pt idx="15">
-                    <c:v>Dec</c:v>
+                    <c:v>Oct '27</c:v>
                   </c:pt>
                 </c:lvl>
               </c:multiLvlStrCache>
@@ -420,57 +385,45 @@
           </c:cat>
           <c:val>
             <c:numRef>
-              <c:f>Sheet1!$C$2:$C$17</c:f>
+              <c:f>Sheet1!$C$2:$C$13</c:f>
               <c:numCache>
                 <c:formatCode>General</c:formatCode>
-                <c:ptCount val="16"/>
+                <c:ptCount val="12"/>
                 <c:pt idx="0">
                   <c:v>0</c:v>
                 </c:pt>
                 <c:pt idx="1">
-                  <c:v>0</c:v>
+                  <c:v>754</c:v>
                 </c:pt>
                 <c:pt idx="2">
-                  <c:v>0</c:v>
+                  <c:v>1363</c:v>
                 </c:pt>
                 <c:pt idx="3">
-                  <c:v>348</c:v>
+                  <c:v>2001</c:v>
                 </c:pt>
                 <c:pt idx="4">
-                  <c:v>754</c:v>
+                  <c:v>2639</c:v>
                 </c:pt>
                 <c:pt idx="5">
-                  <c:v>1102</c:v>
+                  <c:v>3161</c:v>
                 </c:pt>
                 <c:pt idx="6">
-                  <c:v>1537</c:v>
+                  <c:v>3683</c:v>
                 </c:pt>
                 <c:pt idx="7">
-                  <c:v>1827</c:v>
+                  <c:v>4205</c:v>
                 </c:pt>
                 <c:pt idx="8">
-                  <c:v>2088</c:v>
+                  <c:v>4437</c:v>
                 </c:pt>
                 <c:pt idx="9">
-                  <c:v>2407</c:v>
+                  <c:v>4698</c:v>
                 </c:pt>
                 <c:pt idx="10">
-                  <c:v>2697</c:v>
+                  <c:v>4959</c:v>
                 </c:pt>
                 <c:pt idx="11">
-                  <c:v>3045</c:v>
-                </c:pt>
-                <c:pt idx="12">
-                  <c:v>3335</c:v>
-                </c:pt>
-                <c:pt idx="13">
-                  <c:v>3654</c:v>
-                </c:pt>
-                <c:pt idx="14">
-                  <c:v>4002</c:v>
-                </c:pt>
-                <c:pt idx="15">
-                  <c:v>4321</c:v>
+                  <c:v>5220</c:v>
                 </c:pt>
               </c:numCache>
             </c:numRef>
@@ -485,7 +438,144 @@
               <c:strCache>
                 <c:ptCount val="1"/>
                 <c:pt idx="0">
-                  <c:v>Elsewhere (shipped goods)</c:v>
+                  <c:v>Seattle</c:v>
+                </c:pt>
+              </c:strCache>
+            </c:strRef>
+          </c:tx>
+          <c:spPr>
+            <a:solidFill>
+              <a:srgbClr val="D4876F"/>
+            </a:solidFill>
+            <a:effectLst/>
+          </c:spPr>
+          <c:invertIfNegative val="0"/>
+          <c:dLbls>
+            <c:numFmt formatCode="#,##0" sourceLinked="0"/>
+            <c:txPr>
+              <a:bodyPr/>
+              <a:lstStyle/>
+              <a:p>
+                <a:pPr>
+                  <a:defRPr b="0" i="0" strike="noStrike" sz="1200" u="none">
+                    <a:solidFill>
+                      <a:srgbClr val="000000"/>
+                    </a:solidFill>
+                    <a:latin typeface="Arial"/>
+                  </a:defRPr>
+                </a:pPr>
+              </a:p>
+            </c:txPr>
+            <c:showLegendKey val="0"/>
+            <c:showVal val="0"/>
+            <c:showCatName val="0"/>
+            <c:showSerName val="0"/>
+            <c:showPercent val="0"/>
+            <c:showBubbleSize val="0"/>
+            <c:showLeaderLines val="0"/>
+          </c:dLbls>
+          <c:cat>
+            <c:multiLvlStrRef>
+              <c:f>Sheet1!$A$2:$A$13</c:f>
+              <c:multiLvlStrCache>
+                <c:ptCount val="12"/>
+                <c:lvl>
+                  <c:pt idx="0">
+                    <c:v>Nov '26</c:v>
+                  </c:pt>
+                  <c:pt idx="1">
+                    <c:v>Dec</c:v>
+                  </c:pt>
+                  <c:pt idx="2">
+                    <c:v>Jan '27</c:v>
+                  </c:pt>
+                  <c:pt idx="3">
+                    <c:v>Feb</c:v>
+                  </c:pt>
+                  <c:pt idx="4">
+                    <c:v>Mar</c:v>
+                  </c:pt>
+                  <c:pt idx="5">
+                    <c:v>Apr</c:v>
+                  </c:pt>
+                  <c:pt idx="6">
+                    <c:v>May</c:v>
+                  </c:pt>
+                  <c:pt idx="7">
+                    <c:v>Jun</c:v>
+                  </c:pt>
+                  <c:pt idx="8">
+                    <c:v>Jul</c:v>
+                  </c:pt>
+                  <c:pt idx="9">
+                    <c:v>Aug</c:v>
+                  </c:pt>
+                  <c:pt idx="10">
+                    <c:v>Sep</c:v>
+                  </c:pt>
+                  <c:pt idx="11">
+                    <c:v>Oct '27</c:v>
+                  </c:pt>
+                </c:lvl>
+              </c:multiLvlStrCache>
+            </c:multiLvlStrRef>
+          </c:cat>
+          <c:val>
+            <c:numRef>
+              <c:f>Sheet1!$D$2:$D$13</c:f>
+              <c:numCache>
+                <c:formatCode>General</c:formatCode>
+                <c:ptCount val="12"/>
+                <c:pt idx="0">
+                  <c:v>0</c:v>
+                </c:pt>
+                <c:pt idx="1">
+                  <c:v>0</c:v>
+                </c:pt>
+                <c:pt idx="2">
+                  <c:v>0</c:v>
+                </c:pt>
+                <c:pt idx="3">
+                  <c:v>0</c:v>
+                </c:pt>
+                <c:pt idx="4">
+                  <c:v>0</c:v>
+                </c:pt>
+                <c:pt idx="5">
+                  <c:v>0</c:v>
+                </c:pt>
+                <c:pt idx="6">
+                  <c:v>0</c:v>
+                </c:pt>
+                <c:pt idx="7">
+                  <c:v>0</c:v>
+                </c:pt>
+                <c:pt idx="8">
+                  <c:v>0</c:v>
+                </c:pt>
+                <c:pt idx="9">
+                  <c:v>0</c:v>
+                </c:pt>
+                <c:pt idx="10">
+                  <c:v>0</c:v>
+                </c:pt>
+                <c:pt idx="11">
+                  <c:v>783</c:v>
+                </c:pt>
+              </c:numCache>
+            </c:numRef>
+          </c:val>
+        </c:ser>
+        <c:ser>
+          <c:idx val="3"/>
+          <c:order val="3"/>
+          <c:tx>
+            <c:strRef>
+              <c:f>Sheet1!$E$1</c:f>
+              <c:strCache>
+                <c:ptCount val="1"/>
+                <c:pt idx="0">
+                  <c:v>Shipped goods</c:v>
                 </c:pt>
               </c:strCache>
             </c:strRef>
@@ -523,57 +613,45 @@
           </c:dLbls>
           <c:cat>
             <c:multiLvlStrRef>
-              <c:f>Sheet1!$A$2:$A$17</c:f>
+              <c:f>Sheet1!$A$2:$A$13</c:f>
               <c:multiLvlStrCache>
-                <c:ptCount val="16"/>
+                <c:ptCount val="12"/>
                 <c:lvl>
                   <c:pt idx="0">
+                    <c:v>Nov '26</c:v>
+                  </c:pt>
+                  <c:pt idx="1">
+                    <c:v>Dec</c:v>
+                  </c:pt>
+                  <c:pt idx="2">
+                    <c:v>Jan '27</c:v>
+                  </c:pt>
+                  <c:pt idx="3">
+                    <c:v>Feb</c:v>
+                  </c:pt>
+                  <c:pt idx="4">
+                    <c:v>Mar</c:v>
+                  </c:pt>
+                  <c:pt idx="5">
+                    <c:v>Apr</c:v>
+                  </c:pt>
+                  <c:pt idx="6">
+                    <c:v>May</c:v>
+                  </c:pt>
+                  <c:pt idx="7">
+                    <c:v>Jun</c:v>
+                  </c:pt>
+                  <c:pt idx="8">
+                    <c:v>Jul</c:v>
+                  </c:pt>
+                  <c:pt idx="9">
+                    <c:v>Aug</c:v>
+                  </c:pt>
+                  <c:pt idx="10">
                     <c:v>Sep</c:v>
                   </c:pt>
-                  <c:pt idx="1">
-                    <c:v>Oct</c:v>
-                  </c:pt>
-                  <c:pt idx="2">
-                    <c:v>Nov</c:v>
-                  </c:pt>
-                  <c:pt idx="3">
-                    <c:v>Dec</c:v>
-                  </c:pt>
-                  <c:pt idx="4">
-                    <c:v>Jan '27</c:v>
-                  </c:pt>
-                  <c:pt idx="5">
-                    <c:v>Feb</c:v>
-                  </c:pt>
-                  <c:pt idx="6">
-                    <c:v>Mar</c:v>
-                  </c:pt>
-                  <c:pt idx="7">
-                    <c:v>Apr</c:v>
-                  </c:pt>
-                  <c:pt idx="8">
-                    <c:v>May</c:v>
-                  </c:pt>
-                  <c:pt idx="9">
-                    <c:v>Jun</c:v>
-                  </c:pt>
-                  <c:pt idx="10">
-                    <c:v>Jul</c:v>
-                  </c:pt>
                   <c:pt idx="11">
-                    <c:v>Aug</c:v>
-                  </c:pt>
-                  <c:pt idx="12">
-                    <c:v>Sep</c:v>
-                  </c:pt>
-                  <c:pt idx="13">
-                    <c:v>Oct</c:v>
-                  </c:pt>
-                  <c:pt idx="14">
-                    <c:v>Nov</c:v>
-                  </c:pt>
-                  <c:pt idx="15">
-                    <c:v>Dec</c:v>
+                    <c:v>Oct '27</c:v>
                   </c:pt>
                 </c:lvl>
               </c:multiLvlStrCache>
@@ -581,57 +659,45 @@
           </c:cat>
           <c:val>
             <c:numRef>
-              <c:f>Sheet1!$D$2:$D$17</c:f>
+              <c:f>Sheet1!$E$2:$E$13</c:f>
               <c:numCache>
                 <c:formatCode>General</c:formatCode>
-                <c:ptCount val="16"/>
+                <c:ptCount val="12"/>
                 <c:pt idx="0">
                   <c:v>0</c:v>
                 </c:pt>
                 <c:pt idx="1">
-                  <c:v>0</c:v>
+                  <c:v>348</c:v>
                 </c:pt>
                 <c:pt idx="2">
-                  <c:v>0</c:v>
+                  <c:v>667</c:v>
                 </c:pt>
                 <c:pt idx="3">
-                  <c:v>116</c:v>
+                  <c:v>986</c:v>
                 </c:pt>
                 <c:pt idx="4">
-                  <c:v>203</c:v>
+                  <c:v>1247</c:v>
                 </c:pt>
                 <c:pt idx="5">
-                  <c:v>261</c:v>
+                  <c:v>1508</c:v>
                 </c:pt>
                 <c:pt idx="6">
-                  <c:v>435</c:v>
+                  <c:v>1769</c:v>
                 </c:pt>
                 <c:pt idx="7">
-                  <c:v>580</c:v>
+                  <c:v>2030</c:v>
                 </c:pt>
                 <c:pt idx="8">
-                  <c:v>812</c:v>
+                  <c:v>2291</c:v>
                 </c:pt>
                 <c:pt idx="9">
-                  <c:v>928</c:v>
+                  <c:v>2552</c:v>
                 </c:pt>
                 <c:pt idx="10">
-                  <c:v>1015</c:v>
+                  <c:v>2755</c:v>
                 </c:pt>
                 <c:pt idx="11">
-                  <c:v>1102</c:v>
-                </c:pt>
-                <c:pt idx="12">
-                  <c:v>1131</c:v>
-                </c:pt>
-                <c:pt idx="13">
-                  <c:v>1218</c:v>
-                </c:pt>
-                <c:pt idx="14">
-                  <c:v>1276</c:v>
-                </c:pt>
-                <c:pt idx="15">
-                  <c:v>1363</c:v>
+                  <c:v>2958</c:v>
                 </c:pt>
               </c:numCache>
             </c:numRef>
@@ -782,6 +848,273 @@
         </a:p>
       </c:txPr>
     </c:legend>
+    <c:plotVisOnly val="1"/>
+    <c:dispBlanksAs val="span"/>
+  </c:chart>
+  <c:spPr>
+    <a:noFill/>
+    <a:ln>
+      <a:noFill/>
+    </a:ln>
+    <a:effectLst/>
+  </c:spPr>
+  <c:externalData r:id="rId1">
+    <c:autoUpdate val="0"/>
+  </c:externalData>
+</c:chartSpace>
+</file>
+
+<file path=ppt/charts/chart2.xml><?xml version="1.0" encoding="utf-8"?>
+<c:chartSpace xmlns:c="http://schemas.openxmlformats.org/drawingml/2006/chart" xmlns:a="http://schemas.openxmlformats.org/drawingml/2006/main" xmlns:r="http://schemas.openxmlformats.org/officeDocument/2006/relationships">
+  <c:date1904 val="0"/>
+  <c:roundedCorners val="1"/>
+  <c:chart>
+    <c:title>
+      <c:tx>
+        <c:rich>
+          <a:bodyPr/>
+          <a:lstStyle/>
+          <a:p>
+            <a:pPr>
+              <a:defRPr sz="1300" b="0" i="0" u="none" strike="noStrike">
+                <a:solidFill>
+                  <a:srgbClr val="2C2825"/>
+                </a:solidFill>
+                <a:latin typeface="Calibri"/>
+              </a:defRPr>
+            </a:pPr>
+            <a:r>
+              <a:rPr sz="1300" b="0" i="0" u="none" strike="noStrike">
+                <a:solidFill>
+                  <a:srgbClr val="2C2825"/>
+                </a:solidFill>
+                <a:latin typeface="Calibri"/>
+              </a:rPr>
+              <a:t>Annual subscription revenue</a:t>
+            </a:r>
+          </a:p>
+        </c:rich>
+      </c:tx>
+      <c:layout/>
+      <c:overlay val="0"/>
+    </c:title>
+    <c:autoTitleDeleted val="0"/>
+    <c:plotArea>
+      <c:layout/>
+      <c:barChart>
+        <c:barDir val="col"/>
+        <c:grouping val="clustered"/>
+        <c:varyColors val="0"/>
+        <c:ser>
+          <c:idx val="0"/>
+          <c:order val="0"/>
+          <c:tx>
+            <c:strRef>
+              <c:f>Sheet1!$B$1</c:f>
+              <c:strCache>
+                <c:ptCount val="1"/>
+                <c:pt idx="0">
+                  <c:v>Annual revenue</c:v>
+                </c:pt>
+              </c:strCache>
+            </c:strRef>
+          </c:tx>
+          <c:spPr>
+            <a:solidFill>
+              <a:srgbClr val="C1634F"/>
+            </a:solidFill>
+            <a:effectLst/>
+          </c:spPr>
+          <c:invertIfNegative val="0"/>
+          <c:dLbls>
+            <c:numFmt formatCode="&quot;$&quot;#,##0" sourceLinked="0"/>
+            <c:txPr>
+              <a:bodyPr/>
+              <a:lstStyle/>
+              <a:p>
+                <a:pPr>
+                  <a:defRPr b="1" i="0" strike="noStrike" sz="1200" u="none">
+                    <a:solidFill>
+                      <a:srgbClr val="2C2825"/>
+                    </a:solidFill>
+                    <a:latin typeface="Calibri"/>
+                  </a:defRPr>
+                </a:pPr>
+              </a:p>
+            </c:txPr>
+            <c:showLegendKey val="0"/>
+            <c:showVal val="1"/>
+            <c:showCatName val="0"/>
+            <c:showSerName val="0"/>
+            <c:showPercent val="0"/>
+            <c:showBubbleSize val="0"/>
+            <c:showLeaderLines val="0"/>
+          </c:dLbls>
+          <c:cat>
+            <c:multiLvlStrRef>
+              <c:f>Sheet1!$A$2:$A$4</c:f>
+              <c:multiLvlStrCache>
+                <c:ptCount val="3"/>
+                <c:lvl>
+                  <c:pt idx="0">
+                    <c:v>Year 1</c:v>
+                  </c:pt>
+                  <c:pt idx="1">
+                    <c:v>Year 2</c:v>
+                  </c:pt>
+                  <c:pt idx="2">
+                    <c:v>Year 3</c:v>
+                  </c:pt>
+                </c:lvl>
+              </c:multiLvlStrCache>
+            </c:multiLvlStrRef>
+          </c:cat>
+          <c:val>
+            <c:numRef>
+              <c:f>Sheet1!$B$2:$B$4</c:f>
+              <c:numCache>
+                <c:formatCode>General</c:formatCode>
+                <c:ptCount val="3"/>
+                <c:pt idx="0">
+                  <c:v>91147</c:v>
+                </c:pt>
+                <c:pt idx="1">
+                  <c:v>324104</c:v>
+                </c:pt>
+                <c:pt idx="2">
+                  <c:v>950244</c:v>
+                </c:pt>
+              </c:numCache>
+            </c:numRef>
+          </c:val>
+        </c:ser>
+        <c:dLbls>
+          <c:numFmt formatCode="&quot;$&quot;#,##0" sourceLinked="0"/>
+          <c:txPr>
+            <a:bodyPr/>
+            <a:lstStyle/>
+            <a:p>
+              <a:pPr>
+                <a:defRPr b="1" i="0" strike="noStrike" sz="1200" u="none">
+                  <a:solidFill>
+                    <a:srgbClr val="2C2825"/>
+                  </a:solidFill>
+                  <a:latin typeface="Calibri"/>
+                </a:defRPr>
+              </a:pPr>
+            </a:p>
+          </c:txPr>
+          <c:showLegendKey val="0"/>
+          <c:showVal val="1"/>
+          <c:showCatName val="0"/>
+          <c:showSerName val="0"/>
+          <c:showPercent val="0"/>
+          <c:showBubbleSize val="0"/>
+          <c:showLeaderLines val="0"/>
+        </c:dLbls>
+        <c:gapWidth val="90"/>
+        <c:overlap val="0"/>
+        <c:axId val="2094734554"/>
+        <c:axId val="2094734552"/>
+        <c:axId val="2094734556"/>
+      </c:barChart>
+      <c:catAx>
+        <c:axId val="2094734554"/>
+        <c:scaling>
+          <c:orientation val="minMax"/>
+        </c:scaling>
+        <c:delete val="0"/>
+        <c:axPos val="b"/>
+        <c:numFmt formatCode="General" sourceLinked="1"/>
+        <c:majorTickMark val="out"/>
+        <c:minorTickMark val="none"/>
+        <c:tickLblPos val="low"/>
+        <c:spPr>
+          <a:ln w="12700" cap="flat">
+            <a:noFill/>
+            <a:prstDash val="solid"/>
+            <a:round/>
+          </a:ln>
+        </c:spPr>
+        <c:txPr>
+          <a:bodyPr/>
+          <a:lstStyle/>
+          <a:p>
+            <a:pPr>
+              <a:defRPr sz="1100" b="0" i="0" u="none" strike="noStrike">
+                <a:solidFill>
+                  <a:srgbClr val="5A534C"/>
+                </a:solidFill>
+                <a:latin typeface="Calibri"/>
+              </a:defRPr>
+            </a:pPr>
+            <a:endParaRPr lang="en-US"/>
+          </a:p>
+        </c:txPr>
+        <c:crossAx val="2094734552"/>
+        <c:crosses val="autoZero"/>
+        <c:auto val="1"/>
+        <c:lblAlgn val="ctr"/>
+        <c:noMultiLvlLbl val="1"/>
+      </c:catAx>
+      <c:valAx>
+        <c:axId val="2094734552"/>
+        <c:scaling>
+          <c:orientation val="minMax"/>
+          <c:max val="1100000"/>
+          <c:min val="0"/>
+        </c:scaling>
+        <c:delete val="0"/>
+        <c:axPos val="l"/>
+        <c:majorGridlines>
+          <c:spPr>
+            <a:ln w="9525" cap="flat">
+              <a:solidFill>
+                <a:srgbClr val="E7E3DE"/>
+              </a:solidFill>
+              <a:prstDash val="solid"/>
+              <a:round/>
+            </a:ln>
+          </c:spPr>
+        </c:majorGridlines>
+        <c:numFmt formatCode="&quot;$&quot;#,##0" sourceLinked="0"/>
+        <c:majorTickMark val="out"/>
+        <c:minorTickMark val="none"/>
+        <c:tickLblPos val="nextTo"/>
+        <c:spPr>
+          <a:ln w="12700" cap="flat">
+            <a:noFill/>
+            <a:prstDash val="solid"/>
+            <a:round/>
+          </a:ln>
+        </c:spPr>
+        <c:txPr>
+          <a:bodyPr/>
+          <a:lstStyle/>
+          <a:p>
+            <a:pPr>
+              <a:defRPr sz="900" b="0" i="0" u="none" strike="noStrike">
+                <a:solidFill>
+                  <a:srgbClr val="5A534C"/>
+                </a:solidFill>
+                <a:latin typeface="Calibri"/>
+              </a:defRPr>
+            </a:pPr>
+            <a:endParaRPr lang="en-US"/>
+          </a:p>
+        </c:txPr>
+        <c:crossAx val="2094734554"/>
+        <c:crosses val="autoZero"/>
+        <c:crossBetween val="between"/>
+      </c:valAx>
+      <c:spPr>
+        <a:noFill/>
+        <a:ln>
+          <a:noFill/>
+        </a:ln>
+        <a:effectLst/>
+      </c:spPr>
+    </c:plotArea>
     <c:plotVisOnly val="1"/>
     <c:dispBlanksAs val="span"/>
   </c:chart>
@@ -1633,7 +1966,7 @@
           <a:p>
             <a:r>
               <a:rPr lang="en-US" dirty="0"/>
-              <a:t>These are the founders' conservative Year 1 numbers. Every dollar is a $29 subscription — no gift cards, no client billing, no sponsorship, and no goods transaction revenue. Zero churn is assumed, which is the model's most optimistic input; the offsetting conservatism is that upside revenue lines are excluded entirely.</a:t>
+              <a:t>Year 1 is deliberately narrow: two metros plus makers who ship. Every dollar here is a $29 subscription — no goods transaction revenue, no gift cards, no client billing, no sponsorship. Seattle opening in month twelve is what carries the ramp into Year 2.</a:t>
             </a:r>
             <a:endParaRPr lang="en-US" dirty="0"/>
           </a:p>
@@ -1721,7 +2054,7 @@
           <a:p>
             <a:r>
               <a:rPr lang="en-US" dirty="0"/>
-              <a:t>Replace [amount] with the raise before sending. Founders are operators in this space, not outsiders to it — the marketplace exists because they kept being asked for the referrals it now holds.</a:t>
+              <a:t>Three-year revenue totals $1.37M. The penetration assumption is the conservative part: even New York is modelled at one vendor per 48,309 residents, against one per 6,281 in Portland — the large metros are barely touched. Annual figures are the founders' own; the monthly build behind years 2 and 3 is not reproduced here.</a:t>
             </a:r>
             <a:endParaRPr lang="en-US" dirty="0"/>
           </a:p>
@@ -1745,6 +2078,94 @@
             <a:fld id="{F7021451-1387-4CA6-816F-3879F97B5CBC}" type="slidenum">
               <a:rPr lang="en-US"/>
               <a:t>7</a:t>
+            </a:fld>
+            <a:endParaRPr lang="en-US"/>
+          </a:p>
+        </p:txBody>
+      </p:sp>
+    </p:spTree>
+    <p:extLst>
+      <p:ext uri="{BB962C8B-B14F-4D97-AF65-F5344CB8AC3E}">
+        <p14:creationId xmlns:p14="http://schemas.microsoft.com/office/powerpoint/2010/main" val="1024086991"/>
+      </p:ext>
+    </p:extLst>
+  </p:cSld>
+  <p:clrMapOvr>
+    <a:masterClrMapping/>
+  </p:clrMapOvr>
+</p:notes>
+</file>
+
+<file path=ppt/notesSlides/notesSlide8.xml><?xml version="1.0" encoding="utf-8"?>
+<p:notes xmlns:a="http://schemas.openxmlformats.org/drawingml/2006/main" xmlns:r="http://schemas.openxmlformats.org/officeDocument/2006/relationships" xmlns:p="http://schemas.openxmlformats.org/presentationml/2006/main">
+  <p:cSld>
+    <p:spTree>
+      <p:nvGrpSpPr>
+        <p:cNvPr id="1" name=""/>
+        <p:cNvGrpSpPr/>
+        <p:nvPr/>
+      </p:nvGrpSpPr>
+      <p:grpSpPr>
+        <a:xfrm>
+          <a:off x="0" y="0"/>
+          <a:ext cx="0" cy="0"/>
+          <a:chOff x="0" y="0"/>
+          <a:chExt cx="0" cy="0"/>
+        </a:xfrm>
+      </p:grpSpPr>
+      <p:sp>
+        <p:nvSpPr>
+          <p:cNvPr id="2" name="Slide Image Placeholder 1"/>
+          <p:cNvSpPr>
+            <a:spLocks noGrp="1" noRot="1" noChangeAspect="1"/>
+          </p:cNvSpPr>
+          <p:nvPr>
+            <p:ph type="sldImg"/>
+          </p:nvPr>
+        </p:nvSpPr>
+        <p:spPr/>
+      </p:sp>
+      <p:sp>
+        <p:nvSpPr>
+          <p:cNvPr id="3" name="Notes Placeholder 2"/>
+          <p:cNvSpPr>
+            <a:spLocks noGrp="1"/>
+          </p:cNvSpPr>
+          <p:nvPr>
+            <p:ph type="body" idx="1"/>
+          </p:nvPr>
+        </p:nvSpPr>
+        <p:spPr/>
+        <p:txBody>
+          <a:bodyPr/>
+          <a:lstStyle/>
+          <a:p>
+            <a:r>
+              <a:rPr lang="en-US" dirty="0"/>
+              <a:t>Replace [amount] with the raise before sending. Founders are operators in this space, not outsiders to it — the marketplace exists because they kept being asked for the referrals it now holds.</a:t>
+            </a:r>
+            <a:endParaRPr lang="en-US" dirty="0"/>
+          </a:p>
+        </p:txBody>
+      </p:sp>
+      <p:sp>
+        <p:nvSpPr>
+          <p:cNvPr id="4" name="Slide Number Placeholder 3"/>
+          <p:cNvSpPr>
+            <a:spLocks noGrp="1"/>
+          </p:cNvSpPr>
+          <p:nvPr>
+            <p:ph type="sldNum" sz="quarter" idx="10"/>
+          </p:nvPr>
+        </p:nvSpPr>
+        <p:spPr/>
+        <p:txBody>
+          <a:bodyPr/>
+          <a:lstStyle/>
+          <a:p>
+            <a:fld id="{F7021451-1387-4CA6-816F-3879F97B5CBC}" type="slidenum">
+              <a:rPr lang="en-US"/>
+              <a:t>8</a:t>
             </a:fld>
             <a:endParaRPr lang="en-US"/>
           </a:p>
@@ -2353,7 +2774,7 @@
                 <a:ea typeface="Calibri" pitchFamily="34" charset="-122"/>
                 <a:cs typeface="Calibri" pitchFamily="34" charset="-120"/>
               </a:rPr>
-              <a:t>Investor overview  ·  Year 1 projections</a:t>
+              <a:t>Investor overview  ·  Three-year projections</a:t>
             </a:r>
             <a:endParaRPr lang="en-US" sz="1150" dirty="0"/>
           </a:p>
@@ -7305,7 +7726,7 @@
                 <a:ea typeface="Calibri" pitchFamily="34" charset="-122"/>
                 <a:cs typeface="Calibri" pitchFamily="34" charset="-120"/>
               </a:rPr>
-              <a:t>YEAR 1 PROJECTIONS</a:t>
+              <a:t>YEAR 1</a:t>
             </a:r>
             <a:endParaRPr lang="en-US" sz="1100" dirty="0"/>
           </a:p>
@@ -7344,7 +7765,7 @@
                 <a:ea typeface="Cambria" pitchFamily="34" charset="-122"/>
                 <a:cs typeface="Cambria" pitchFamily="34" charset="-120"/>
               </a:rPr>
-              <a:t>A conservative first year</a:t>
+              <a:t>Two cities and the mail</a:t>
             </a:r>
             <a:endParaRPr lang="en-US" sz="3600" dirty="0"/>
           </a:p>
@@ -7358,7 +7779,7 @@
         </p:nvSpPr>
         <p:spPr>
           <a:xfrm>
-            <a:off x="685800" y="1481328"/>
+            <a:off x="685800" y="1517904"/>
             <a:ext cx="7863840" cy="384048"/>
           </a:xfrm>
           <a:prstGeom prst="rect">
@@ -7386,7 +7807,7 @@
                 <a:ea typeface="Calibri" pitchFamily="34" charset="-122"/>
                 <a:cs typeface="Calibri" pitchFamily="34" charset="-120"/>
               </a:rPr>
-              <a:t>$29 per vendor per month after a 3-month free trial. Portland first, Denver second, shipped-goods makers nationwide. No churn assumed; no other revenue line included.</a:t>
+              <a:t>Portland and Denver open 1 November 2026, with shipped-goods makers nationwide. Seattle follows in the twelfth month.</a:t>
             </a:r>
             <a:endParaRPr lang="en-US" sz="1350" dirty="0"/>
           </a:p>
@@ -7475,7 +7896,7 @@
                 <a:ea typeface="Cambria" pitchFamily="34" charset="-122"/>
                 <a:cs typeface="Cambria" pitchFamily="34" charset="-120"/>
               </a:rPr>
-              <a:t>$38,077</a:t>
+              <a:t>$91,147</a:t>
             </a:r>
             <a:endParaRPr lang="en-US" sz="2600" dirty="0"/>
           </a:p>
@@ -7553,7 +7974,7 @@
                 <a:ea typeface="Calibri" pitchFamily="34" charset="-122"/>
                 <a:cs typeface="Calibri" pitchFamily="34" charset="-120"/>
               </a:rPr>
-              <a:t>Sep '26 – Aug '27</a:t>
+              <a:t>Nov '26 – Oct '27</a:t>
             </a:r>
             <a:endParaRPr lang="en-US" sz="1050" dirty="0"/>
           </a:p>
@@ -7626,7 +8047,7 @@
                 <a:ea typeface="Cambria" pitchFamily="34" charset="-122"/>
                 <a:cs typeface="Cambria" pitchFamily="34" charset="-120"/>
               </a:rPr>
-              <a:t>254</a:t>
+              <a:t>480</a:t>
             </a:r>
             <a:endParaRPr lang="en-US" sz="2600" dirty="0"/>
           </a:p>
@@ -7704,7 +8125,7 @@
                 <a:ea typeface="Calibri" pitchFamily="34" charset="-122"/>
                 <a:cs typeface="Calibri" pitchFamily="34" charset="-120"/>
               </a:rPr>
-              <a:t>at the end of Year 1</a:t>
+              <a:t>subscribing in Oct '27</a:t>
             </a:r>
             <a:endParaRPr lang="en-US" sz="1050" dirty="0"/>
           </a:p>
@@ -7777,7 +8198,7 @@
                 <a:ea typeface="Cambria" pitchFamily="34" charset="-122"/>
                 <a:cs typeface="Cambria" pitchFamily="34" charset="-120"/>
               </a:rPr>
-              <a:t>$10,295</a:t>
+              <a:t>$13,920</a:t>
             </a:r>
             <a:endParaRPr lang="en-US" sz="2600" dirty="0"/>
           </a:p>
@@ -7816,7 +8237,7 @@
                 <a:ea typeface="Calibri" pitchFamily="34" charset="-122"/>
                 <a:cs typeface="Calibri" pitchFamily="34" charset="-120"/>
               </a:rPr>
-              <a:t>monthly revenue</a:t>
+              <a:t>exit monthly revenue</a:t>
             </a:r>
             <a:endParaRPr lang="en-US" sz="1200" dirty="0"/>
           </a:p>
@@ -7855,7 +8276,7 @@
                 <a:ea typeface="Calibri" pitchFamily="34" charset="-122"/>
                 <a:cs typeface="Calibri" pitchFamily="34" charset="-120"/>
               </a:rPr>
-              <a:t>by Dec '27 — ≈ $124K ARR</a:t>
+              <a:t>Oct '27 — ≈ $167K ARR</a:t>
             </a:r>
             <a:endParaRPr lang="en-US" sz="1050" dirty="0"/>
           </a:p>
@@ -7928,7 +8349,7 @@
                 <a:ea typeface="Cambria" pitchFamily="34" charset="-122"/>
                 <a:cs typeface="Cambria" pitchFamily="34" charset="-120"/>
               </a:rPr>
-              <a:t>$74,791</a:t>
+              <a:t>3</a:t>
             </a:r>
             <a:endParaRPr lang="en-US" sz="2600" dirty="0"/>
           </a:p>
@@ -7967,7 +8388,7 @@
                 <a:ea typeface="Calibri" pitchFamily="34" charset="-122"/>
                 <a:cs typeface="Calibri" pitchFamily="34" charset="-120"/>
               </a:rPr>
-              <a:t>cumulative revenue</a:t>
+              <a:t>markets live</a:t>
             </a:r>
             <a:endParaRPr lang="en-US" sz="1200" dirty="0"/>
           </a:p>
@@ -8006,7 +8427,7 @@
                 <a:ea typeface="Calibri" pitchFamily="34" charset="-122"/>
                 <a:cs typeface="Calibri" pitchFamily="34" charset="-120"/>
               </a:rPr>
-              <a:t>through Dec '27</a:t>
+              <a:t>Portland, Denver, nationwide</a:t>
             </a:r>
             <a:endParaRPr lang="en-US" sz="1050" dirty="0"/>
           </a:p>
@@ -8045,7 +8466,7 @@
                 <a:ea typeface="Calibri" pitchFamily="34" charset="-122"/>
                 <a:cs typeface="Calibri" pitchFamily="34" charset="-120"/>
               </a:rPr>
-              <a:t>Model assumes launch 1 November 2026; a vendor’s first payment falls three months after signup, at the end of the free trial.</a:t>
+              <a:t>$29 per vendor per month, less 10% attrition on each converting cohort. A vendor’s first payment falls three months after signup, at the end of the free trial — so the first revenue month is December 2026.</a:t>
             </a:r>
             <a:endParaRPr lang="en-US" sz="1000" dirty="0"/>
           </a:p>
@@ -8062,6 +8483,3294 @@
 <file path=ppt/slides/slide7.xml><?xml version="1.0" encoding="utf-8"?>
 <p:sld xmlns:a="http://schemas.openxmlformats.org/drawingml/2006/main" xmlns:r="http://schemas.openxmlformats.org/officeDocument/2006/relationships" xmlns:p="http://schemas.openxmlformats.org/presentationml/2006/main">
   <p:cSld name="Slide 7">
+    <p:bg>
+      <p:bgPr>
+        <a:solidFill>
+          <a:srgbClr val="FAF9F7"/>
+        </a:solidFill>
+      </p:bgPr>
+    </p:bg>
+    <p:spTree>
+      <p:nvGrpSpPr>
+        <p:cNvPr id="1" name=""/>
+        <p:cNvGrpSpPr/>
+        <p:nvPr/>
+      </p:nvGrpSpPr>
+      <p:grpSpPr>
+        <a:xfrm>
+          <a:off x="0" y="0"/>
+          <a:ext cx="0" cy="0"/>
+          <a:chOff x="0" y="0"/>
+          <a:chExt cx="0" cy="0"/>
+        </a:xfrm>
+      </p:grpSpPr>
+      <p:sp>
+        <p:nvSpPr>
+          <p:cNvPr id="2" name="Text 0"/>
+          <p:cNvSpPr txBox="1"/>
+          <p:nvPr/>
+        </p:nvSpPr>
+        <p:spPr>
+          <a:xfrm>
+            <a:off x="685800" y="502920"/>
+            <a:ext cx="7315200" cy="256032"/>
+          </a:xfrm>
+          <a:prstGeom prst="rect">
+            <a:avLst/>
+          </a:prstGeom>
+          <a:noFill/>
+          <a:ln/>
+        </p:spPr>
+        <p:txBody>
+          <a:bodyPr wrap="square" lIns="0" tIns="0" rIns="0" bIns="0" rtlCol="0" anchor="ctr"/>
+          <a:lstStyle/>
+          <a:p>
+            <a:pPr indent="0" marL="0">
+              <a:buNone/>
+            </a:pPr>
+            <a:r>
+              <a:rPr lang="en-US" sz="1100" b="1" spc="220" kern="0" dirty="0">
+                <a:solidFill>
+                  <a:srgbClr val="4D7255"/>
+                </a:solidFill>
+                <a:latin typeface="Calibri" pitchFamily="34" charset="0"/>
+                <a:ea typeface="Calibri" pitchFamily="34" charset="-122"/>
+                <a:cs typeface="Calibri" pitchFamily="34" charset="-120"/>
+              </a:rPr>
+              <a:t>YEARS 1 – 3</a:t>
+            </a:r>
+            <a:endParaRPr lang="en-US" sz="1100" dirty="0"/>
+          </a:p>
+        </p:txBody>
+      </p:sp>
+      <p:sp>
+        <p:nvSpPr>
+          <p:cNvPr id="3" name="Text 1"/>
+          <p:cNvSpPr txBox="1"/>
+          <p:nvPr/>
+        </p:nvSpPr>
+        <p:spPr>
+          <a:xfrm>
+            <a:off x="685800" y="841248"/>
+            <a:ext cx="10789920" cy="658368"/>
+          </a:xfrm>
+          <a:prstGeom prst="rect">
+            <a:avLst/>
+          </a:prstGeom>
+          <a:noFill/>
+          <a:ln/>
+        </p:spPr>
+        <p:txBody>
+          <a:bodyPr wrap="square" lIns="0" tIns="0" rIns="0" bIns="0" rtlCol="0" anchor="t"/>
+          <a:lstStyle/>
+          <a:p>
+            <a:pPr indent="0" marL="0">
+              <a:buNone/>
+            </a:pPr>
+            <a:r>
+              <a:rPr lang="en-US" sz="3600" dirty="0">
+                <a:solidFill>
+                  <a:srgbClr val="2C2825"/>
+                </a:solidFill>
+                <a:latin typeface="Cambria" pitchFamily="34" charset="0"/>
+                <a:ea typeface="Cambria" pitchFamily="34" charset="-122"/>
+                <a:cs typeface="Cambria" pitchFamily="34" charset="-120"/>
+              </a:rPr>
+              <a:t>Five metros by the third year</a:t>
+            </a:r>
+            <a:endParaRPr lang="en-US" sz="3600" dirty="0"/>
+          </a:p>
+        </p:txBody>
+      </p:sp>
+      <p:sp>
+        <p:nvSpPr>
+          <p:cNvPr id="4" name="Text 2"/>
+          <p:cNvSpPr txBox="1"/>
+          <p:nvPr/>
+        </p:nvSpPr>
+        <p:spPr>
+          <a:xfrm>
+            <a:off x="685800" y="1481328"/>
+            <a:ext cx="10424160" cy="384048"/>
+          </a:xfrm>
+          <a:prstGeom prst="rect">
+            <a:avLst/>
+          </a:prstGeom>
+          <a:noFill/>
+          <a:ln/>
+        </p:spPr>
+        <p:txBody>
+          <a:bodyPr wrap="square" lIns="0" tIns="0" rIns="0" bIns="0" rtlCol="0" anchor="ctr"/>
+          <a:lstStyle/>
+          <a:p>
+            <a:pPr indent="0" marL="0">
+              <a:lnSpc>
+                <a:spcPts val="2000"/>
+              </a:lnSpc>
+              <a:buNone/>
+            </a:pPr>
+            <a:r>
+              <a:rPr lang="en-US" sz="1350" dirty="0">
+                <a:solidFill>
+                  <a:srgbClr val="5A534C"/>
+                </a:solidFill>
+                <a:latin typeface="Calibri" pitchFamily="34" charset="0"/>
+                <a:ea typeface="Calibri" pitchFamily="34" charset="-122"/>
+                <a:cs typeface="Calibri" pitchFamily="34" charset="-120"/>
+              </a:rPr>
+              <a:t>The same playbook run city by city. Revenue compounds because each new metro inherits a marketplace that already works — and because vendors signed in year one are still subscribing in year three.</a:t>
+            </a:r>
+            <a:endParaRPr lang="en-US" sz="1350" dirty="0"/>
+          </a:p>
+        </p:txBody>
+      </p:sp>
+      <p:graphicFrame>
+        <p:nvGraphicFramePr>
+          <p:cNvPr id="5" name="Chart 0" descr=""/>
+          <p:cNvGraphicFramePr/>
+          <p:nvPr/>
+        </p:nvGraphicFramePr>
+        <p:xfrm>
+          <a:off x="640080" y="2286000"/>
+          <a:ext cx="4846320" cy="3200400"/>
+        </p:xfrm>
+        <a:graphic xmlns:a="http://schemas.openxmlformats.org/drawingml/2006/main">
+          <a:graphicData uri="http://schemas.openxmlformats.org/drawingml/2006/chart">
+            <c:chart xmlns:c="http://schemas.openxmlformats.org/drawingml/2006/chart" r:id="rId1"/>
+          </a:graphicData>
+        </a:graphic>
+      </p:graphicFrame>
+      <p:sp>
+        <p:nvSpPr>
+          <p:cNvPr id="6" name="Text 3"/>
+          <p:cNvSpPr txBox="1"/>
+          <p:nvPr/>
+        </p:nvSpPr>
+        <p:spPr>
+          <a:xfrm>
+            <a:off x="5806440" y="2286000"/>
+            <a:ext cx="5669280" cy="274320"/>
+          </a:xfrm>
+          <a:prstGeom prst="rect">
+            <a:avLst/>
+          </a:prstGeom>
+          <a:noFill/>
+          <a:ln/>
+        </p:spPr>
+        <p:txBody>
+          <a:bodyPr wrap="square" lIns="0" tIns="0" rIns="0" bIns="0" rtlCol="0" anchor="ctr"/>
+          <a:lstStyle/>
+          <a:p>
+            <a:pPr indent="0" marL="0">
+              <a:buNone/>
+            </a:pPr>
+            <a:r>
+              <a:rPr lang="en-US" sz="1300" b="1" dirty="0">
+                <a:solidFill>
+                  <a:srgbClr val="2C2825"/>
+                </a:solidFill>
+                <a:latin typeface="Calibri" pitchFamily="34" charset="0"/>
+                <a:ea typeface="Calibri" pitchFamily="34" charset="-122"/>
+                <a:cs typeface="Calibri" pitchFamily="34" charset="-120"/>
+              </a:rPr>
+              <a:t>Market rollout</a:t>
+            </a:r>
+            <a:endParaRPr lang="en-US" sz="1300" dirty="0"/>
+          </a:p>
+        </p:txBody>
+      </p:sp>
+      <p:graphicFrame>
+        <p:nvGraphicFramePr>
+          <p:cNvPr id="8" name="Table 0"/>
+          <p:cNvGraphicFramePr>
+            <a:graphicFrameLocks noGrp="1"/>
+          </p:cNvGraphicFramePr>
+          <p:nvPr>
+            <p:extLst>
+              <p:ext uri="{D42A27DB-BD31-4B8C-83A1-F6EECF244321}">
+                <p14:modId xmlns:p14="http://schemas.microsoft.com/office/powerpoint/2010/main" val="1579011935"/>
+              </p:ext>
+            </p:extLst>
+          </p:nvPr>
+        </p:nvGraphicFramePr>
+        <p:xfrm>
+          <a:off x="5806440" y="2615184"/>
+          <a:ext cx="5669280" cy="914400"/>
+        </p:xfrm>
+        <a:graphic>
+          <a:graphicData uri="http://schemas.openxmlformats.org/drawingml/2006/table">
+            <a:tbl>
+              <a:tblPr/>
+              <a:tblGrid>
+                <a:gridCol w="1371600"/>
+                <a:gridCol w="777240"/>
+                <a:gridCol w="1051560"/>
+                <a:gridCol w="914400"/>
+                <a:gridCol w="1554480"/>
+              </a:tblGrid>
+              <a:tr h="283464">
+                <a:tc>
+                  <a:txBody>
+                    <a:bodyPr/>
+                    <a:lstStyle/>
+                    <a:p>
+                      <a:pPr indent="0" marL="0">
+                        <a:buNone/>
+                      </a:pPr>
+                      <a:r>
+                        <a:rPr lang="en-US" sz="1100" b="1" dirty="0">
+                          <a:solidFill>
+                            <a:srgbClr val="8B3E2D"/>
+                          </a:solidFill>
+                          <a:latin typeface="Calibri" pitchFamily="34" charset="0"/>
+                          <a:ea typeface="Calibri" pitchFamily="34" charset="-122"/>
+                          <a:cs typeface="Calibri" pitchFamily="34" charset="-120"/>
+                        </a:rPr>
+                        <a:t>Market</a:t>
+                      </a:r>
+                      <a:endParaRPr lang="en-US" sz="1100" dirty="0">
+                        <a:latin typeface="Calibri" charset="0"/>
+                        <a:ea typeface="Calibri" charset="0"/>
+                        <a:cs typeface="Calibri" charset="0"/>
+                      </a:endParaRPr>
+                    </a:p>
+                  </a:txBody>
+                  <a:tcPr marL="76200" marR="76200" marT="38100" marB="38100" anchor="ctr">
+                    <a:lnL w="9525" cap="flat" cmpd="sng" algn="ctr">
+                      <a:solidFill>
+                        <a:srgbClr val="E7E3DE"/>
+                      </a:solidFill>
+                      <a:prstDash val="solid"/>
+                      <a:round/>
+                      <a:headEnd type="none" w="med" len="med"/>
+                      <a:tailEnd type="none" w="med" len="med"/>
+                    </a:lnL>
+                    <a:lnR w="9525" cap="flat" cmpd="sng" algn="ctr">
+                      <a:solidFill>
+                        <a:srgbClr val="E7E3DE"/>
+                      </a:solidFill>
+                      <a:prstDash val="solid"/>
+                      <a:round/>
+                      <a:headEnd type="none" w="med" len="med"/>
+                      <a:tailEnd type="none" w="med" len="med"/>
+                    </a:lnR>
+                    <a:lnT w="9525" cap="flat" cmpd="sng" algn="ctr">
+                      <a:solidFill>
+                        <a:srgbClr val="E7E3DE"/>
+                      </a:solidFill>
+                      <a:prstDash val="solid"/>
+                      <a:round/>
+                      <a:headEnd type="none" w="med" len="med"/>
+                      <a:tailEnd type="none" w="med" len="med"/>
+                    </a:lnT>
+                    <a:lnB w="9525" cap="flat" cmpd="sng" algn="ctr">
+                      <a:solidFill>
+                        <a:srgbClr val="E7E3DE"/>
+                      </a:solidFill>
+                      <a:prstDash val="solid"/>
+                      <a:round/>
+                      <a:headEnd type="none" w="med" len="med"/>
+                      <a:tailEnd type="none" w="med" len="med"/>
+                    </a:lnB>
+                    <a:solidFill>
+                      <a:srgbClr val="FFFFFF"/>
+                    </a:solidFill>
+                  </a:tcPr>
+                </a:tc>
+                <a:tc>
+                  <a:txBody>
+                    <a:bodyPr/>
+                    <a:lstStyle/>
+                    <a:p>
+                      <a:pPr indent="0" marL="0">
+                        <a:buNone/>
+                      </a:pPr>
+                      <a:r>
+                        <a:rPr lang="en-US" sz="1100" b="1" dirty="0">
+                          <a:solidFill>
+                            <a:srgbClr val="8B3E2D"/>
+                          </a:solidFill>
+                          <a:latin typeface="Calibri" pitchFamily="34" charset="0"/>
+                          <a:ea typeface="Calibri" pitchFamily="34" charset="-122"/>
+                          <a:cs typeface="Calibri" pitchFamily="34" charset="-120"/>
+                        </a:rPr>
+                        <a:t>Opens</a:t>
+                      </a:r>
+                      <a:endParaRPr lang="en-US" sz="1100" dirty="0">
+                        <a:latin typeface="Calibri" charset="0"/>
+                        <a:ea typeface="Calibri" charset="0"/>
+                        <a:cs typeface="Calibri" charset="0"/>
+                      </a:endParaRPr>
+                    </a:p>
+                  </a:txBody>
+                  <a:tcPr marL="76200" marR="76200" marT="38100" marB="38100" anchor="ctr">
+                    <a:lnL w="9525" cap="flat" cmpd="sng" algn="ctr">
+                      <a:solidFill>
+                        <a:srgbClr val="E7E3DE"/>
+                      </a:solidFill>
+                      <a:prstDash val="solid"/>
+                      <a:round/>
+                      <a:headEnd type="none" w="med" len="med"/>
+                      <a:tailEnd type="none" w="med" len="med"/>
+                    </a:lnL>
+                    <a:lnR w="9525" cap="flat" cmpd="sng" algn="ctr">
+                      <a:solidFill>
+                        <a:srgbClr val="E7E3DE"/>
+                      </a:solidFill>
+                      <a:prstDash val="solid"/>
+                      <a:round/>
+                      <a:headEnd type="none" w="med" len="med"/>
+                      <a:tailEnd type="none" w="med" len="med"/>
+                    </a:lnR>
+                    <a:lnT w="9525" cap="flat" cmpd="sng" algn="ctr">
+                      <a:solidFill>
+                        <a:srgbClr val="E7E3DE"/>
+                      </a:solidFill>
+                      <a:prstDash val="solid"/>
+                      <a:round/>
+                      <a:headEnd type="none" w="med" len="med"/>
+                      <a:tailEnd type="none" w="med" len="med"/>
+                    </a:lnT>
+                    <a:lnB w="9525" cap="flat" cmpd="sng" algn="ctr">
+                      <a:solidFill>
+                        <a:srgbClr val="E7E3DE"/>
+                      </a:solidFill>
+                      <a:prstDash val="solid"/>
+                      <a:round/>
+                      <a:headEnd type="none" w="med" len="med"/>
+                      <a:tailEnd type="none" w="med" len="med"/>
+                    </a:lnB>
+                    <a:solidFill>
+                      <a:srgbClr val="FFFFFF"/>
+                    </a:solidFill>
+                  </a:tcPr>
+                </a:tc>
+                <a:tc>
+                  <a:txBody>
+                    <a:bodyPr/>
+                    <a:lstStyle/>
+                    <a:p>
+                      <a:pPr algn="r" indent="0" marL="0">
+                        <a:buNone/>
+                      </a:pPr>
+                      <a:r>
+                        <a:rPr lang="en-US" sz="1100" b="1" dirty="0">
+                          <a:solidFill>
+                            <a:srgbClr val="8B3E2D"/>
+                          </a:solidFill>
+                          <a:latin typeface="Calibri" pitchFamily="34" charset="0"/>
+                          <a:ea typeface="Calibri" pitchFamily="34" charset="-122"/>
+                          <a:cs typeface="Calibri" pitchFamily="34" charset="-120"/>
+                        </a:rPr>
+                        <a:t>Metro pop.</a:t>
+                      </a:r>
+                      <a:endParaRPr lang="en-US" sz="1100" dirty="0">
+                        <a:latin typeface="Calibri" charset="0"/>
+                        <a:ea typeface="Calibri" charset="0"/>
+                        <a:cs typeface="Calibri" charset="0"/>
+                      </a:endParaRPr>
+                    </a:p>
+                  </a:txBody>
+                  <a:tcPr marL="76200" marR="76200" marT="38100" marB="38100" anchor="ctr">
+                    <a:lnL w="9525" cap="flat" cmpd="sng" algn="ctr">
+                      <a:solidFill>
+                        <a:srgbClr val="E7E3DE"/>
+                      </a:solidFill>
+                      <a:prstDash val="solid"/>
+                      <a:round/>
+                      <a:headEnd type="none" w="med" len="med"/>
+                      <a:tailEnd type="none" w="med" len="med"/>
+                    </a:lnL>
+                    <a:lnR w="9525" cap="flat" cmpd="sng" algn="ctr">
+                      <a:solidFill>
+                        <a:srgbClr val="E7E3DE"/>
+                      </a:solidFill>
+                      <a:prstDash val="solid"/>
+                      <a:round/>
+                      <a:headEnd type="none" w="med" len="med"/>
+                      <a:tailEnd type="none" w="med" len="med"/>
+                    </a:lnR>
+                    <a:lnT w="9525" cap="flat" cmpd="sng" algn="ctr">
+                      <a:solidFill>
+                        <a:srgbClr val="E7E3DE"/>
+                      </a:solidFill>
+                      <a:prstDash val="solid"/>
+                      <a:round/>
+                      <a:headEnd type="none" w="med" len="med"/>
+                      <a:tailEnd type="none" w="med" len="med"/>
+                    </a:lnT>
+                    <a:lnB w="9525" cap="flat" cmpd="sng" algn="ctr">
+                      <a:solidFill>
+                        <a:srgbClr val="E7E3DE"/>
+                      </a:solidFill>
+                      <a:prstDash val="solid"/>
+                      <a:round/>
+                      <a:headEnd type="none" w="med" len="med"/>
+                      <a:tailEnd type="none" w="med" len="med"/>
+                    </a:lnB>
+                    <a:solidFill>
+                      <a:srgbClr val="FFFFFF"/>
+                    </a:solidFill>
+                  </a:tcPr>
+                </a:tc>
+                <a:tc>
+                  <a:txBody>
+                    <a:bodyPr/>
+                    <a:lstStyle/>
+                    <a:p>
+                      <a:pPr algn="r" indent="0" marL="0">
+                        <a:buNone/>
+                      </a:pPr>
+                      <a:r>
+                        <a:rPr lang="en-US" sz="1100" b="1" dirty="0">
+                          <a:solidFill>
+                            <a:srgbClr val="8B3E2D"/>
+                          </a:solidFill>
+                          <a:latin typeface="Calibri" pitchFamily="34" charset="0"/>
+                          <a:ea typeface="Calibri" pitchFamily="34" charset="-122"/>
+                          <a:cs typeface="Calibri" pitchFamily="34" charset="-120"/>
+                        </a:rPr>
+                        <a:t>Vendors</a:t>
+                      </a:r>
+                      <a:endParaRPr lang="en-US" sz="1100" dirty="0">
+                        <a:latin typeface="Calibri" charset="0"/>
+                        <a:ea typeface="Calibri" charset="0"/>
+                        <a:cs typeface="Calibri" charset="0"/>
+                      </a:endParaRPr>
+                    </a:p>
+                  </a:txBody>
+                  <a:tcPr marL="76200" marR="76200" marT="38100" marB="38100" anchor="ctr">
+                    <a:lnL w="9525" cap="flat" cmpd="sng" algn="ctr">
+                      <a:solidFill>
+                        <a:srgbClr val="E7E3DE"/>
+                      </a:solidFill>
+                      <a:prstDash val="solid"/>
+                      <a:round/>
+                      <a:headEnd type="none" w="med" len="med"/>
+                      <a:tailEnd type="none" w="med" len="med"/>
+                    </a:lnL>
+                    <a:lnR w="9525" cap="flat" cmpd="sng" algn="ctr">
+                      <a:solidFill>
+                        <a:srgbClr val="E7E3DE"/>
+                      </a:solidFill>
+                      <a:prstDash val="solid"/>
+                      <a:round/>
+                      <a:headEnd type="none" w="med" len="med"/>
+                      <a:tailEnd type="none" w="med" len="med"/>
+                    </a:lnR>
+                    <a:lnT w="9525" cap="flat" cmpd="sng" algn="ctr">
+                      <a:solidFill>
+                        <a:srgbClr val="E7E3DE"/>
+                      </a:solidFill>
+                      <a:prstDash val="solid"/>
+                      <a:round/>
+                      <a:headEnd type="none" w="med" len="med"/>
+                      <a:tailEnd type="none" w="med" len="med"/>
+                    </a:lnT>
+                    <a:lnB w="9525" cap="flat" cmpd="sng" algn="ctr">
+                      <a:solidFill>
+                        <a:srgbClr val="E7E3DE"/>
+                      </a:solidFill>
+                      <a:prstDash val="solid"/>
+                      <a:round/>
+                      <a:headEnd type="none" w="med" len="med"/>
+                      <a:tailEnd type="none" w="med" len="med"/>
+                    </a:lnB>
+                    <a:solidFill>
+                      <a:srgbClr val="FFFFFF"/>
+                    </a:solidFill>
+                  </a:tcPr>
+                </a:tc>
+                <a:tc>
+                  <a:txBody>
+                    <a:bodyPr/>
+                    <a:lstStyle/>
+                    <a:p>
+                      <a:pPr algn="r" indent="0" marL="0">
+                        <a:buNone/>
+                      </a:pPr>
+                      <a:r>
+                        <a:rPr lang="en-US" sz="1100" b="1" dirty="0">
+                          <a:solidFill>
+                            <a:srgbClr val="8B3E2D"/>
+                          </a:solidFill>
+                          <a:latin typeface="Calibri" pitchFamily="34" charset="0"/>
+                          <a:ea typeface="Calibri" pitchFamily="34" charset="-122"/>
+                          <a:cs typeface="Calibri" pitchFamily="34" charset="-120"/>
+                        </a:rPr>
+                        <a:t>Pop. per vendor</a:t>
+                      </a:r>
+                      <a:endParaRPr lang="en-US" sz="1100" dirty="0">
+                        <a:latin typeface="Calibri" charset="0"/>
+                        <a:ea typeface="Calibri" charset="0"/>
+                        <a:cs typeface="Calibri" charset="0"/>
+                      </a:endParaRPr>
+                    </a:p>
+                  </a:txBody>
+                  <a:tcPr marL="76200" marR="76200" marT="38100" marB="38100" anchor="ctr">
+                    <a:lnL w="9525" cap="flat" cmpd="sng" algn="ctr">
+                      <a:solidFill>
+                        <a:srgbClr val="E7E3DE"/>
+                      </a:solidFill>
+                      <a:prstDash val="solid"/>
+                      <a:round/>
+                      <a:headEnd type="none" w="med" len="med"/>
+                      <a:tailEnd type="none" w="med" len="med"/>
+                    </a:lnL>
+                    <a:lnR w="9525" cap="flat" cmpd="sng" algn="ctr">
+                      <a:solidFill>
+                        <a:srgbClr val="E7E3DE"/>
+                      </a:solidFill>
+                      <a:prstDash val="solid"/>
+                      <a:round/>
+                      <a:headEnd type="none" w="med" len="med"/>
+                      <a:tailEnd type="none" w="med" len="med"/>
+                    </a:lnR>
+                    <a:lnT w="9525" cap="flat" cmpd="sng" algn="ctr">
+                      <a:solidFill>
+                        <a:srgbClr val="E7E3DE"/>
+                      </a:solidFill>
+                      <a:prstDash val="solid"/>
+                      <a:round/>
+                      <a:headEnd type="none" w="med" len="med"/>
+                      <a:tailEnd type="none" w="med" len="med"/>
+                    </a:lnT>
+                    <a:lnB w="9525" cap="flat" cmpd="sng" algn="ctr">
+                      <a:solidFill>
+                        <a:srgbClr val="E7E3DE"/>
+                      </a:solidFill>
+                      <a:prstDash val="solid"/>
+                      <a:round/>
+                      <a:headEnd type="none" w="med" len="med"/>
+                      <a:tailEnd type="none" w="med" len="med"/>
+                    </a:lnB>
+                    <a:solidFill>
+                      <a:srgbClr val="FFFFFF"/>
+                    </a:solidFill>
+                  </a:tcPr>
+                </a:tc>
+              </a:tr>
+              <a:tr h="283464">
+                <a:tc>
+                  <a:txBody>
+                    <a:bodyPr/>
+                    <a:lstStyle/>
+                    <a:p>
+                      <a:pPr indent="0" marL="0">
+                        <a:buNone/>
+                      </a:pPr>
+                      <a:r>
+                        <a:rPr lang="en-US" sz="1100" b="1" dirty="0">
+                          <a:solidFill>
+                            <a:srgbClr val="2C2825"/>
+                          </a:solidFill>
+                          <a:latin typeface="Calibri" pitchFamily="34" charset="0"/>
+                          <a:ea typeface="Calibri" pitchFamily="34" charset="-122"/>
+                          <a:cs typeface="Calibri" pitchFamily="34" charset="-120"/>
+                        </a:rPr>
+                        <a:t>Portland</a:t>
+                      </a:r>
+                      <a:endParaRPr lang="en-US" sz="1100" dirty="0">
+                        <a:latin typeface="Calibri" charset="0"/>
+                        <a:ea typeface="Calibri" charset="0"/>
+                        <a:cs typeface="Calibri" charset="0"/>
+                      </a:endParaRPr>
+                    </a:p>
+                  </a:txBody>
+                  <a:tcPr marL="76200" marR="76200" marT="38100" marB="38100" anchor="ctr">
+                    <a:lnL w="9525" cap="flat" cmpd="sng" algn="ctr">
+                      <a:solidFill>
+                        <a:srgbClr val="E7E3DE"/>
+                      </a:solidFill>
+                      <a:prstDash val="solid"/>
+                      <a:round/>
+                      <a:headEnd type="none" w="med" len="med"/>
+                      <a:tailEnd type="none" w="med" len="med"/>
+                    </a:lnL>
+                    <a:lnR w="9525" cap="flat" cmpd="sng" algn="ctr">
+                      <a:solidFill>
+                        <a:srgbClr val="E7E3DE"/>
+                      </a:solidFill>
+                      <a:prstDash val="solid"/>
+                      <a:round/>
+                      <a:headEnd type="none" w="med" len="med"/>
+                      <a:tailEnd type="none" w="med" len="med"/>
+                    </a:lnR>
+                    <a:lnT w="9525" cap="flat" cmpd="sng" algn="ctr">
+                      <a:solidFill>
+                        <a:srgbClr val="E7E3DE"/>
+                      </a:solidFill>
+                      <a:prstDash val="solid"/>
+                      <a:round/>
+                      <a:headEnd type="none" w="med" len="med"/>
+                      <a:tailEnd type="none" w="med" len="med"/>
+                    </a:lnT>
+                    <a:lnB w="9525" cap="flat" cmpd="sng" algn="ctr">
+                      <a:solidFill>
+                        <a:srgbClr val="E7E3DE"/>
+                      </a:solidFill>
+                      <a:prstDash val="solid"/>
+                      <a:round/>
+                      <a:headEnd type="none" w="med" len="med"/>
+                      <a:tailEnd type="none" w="med" len="med"/>
+                    </a:lnB>
+                    <a:solidFill>
+                      <a:srgbClr val="FFFFFF"/>
+                    </a:solidFill>
+                  </a:tcPr>
+                </a:tc>
+                <a:tc>
+                  <a:txBody>
+                    <a:bodyPr/>
+                    <a:lstStyle/>
+                    <a:p>
+                      <a:pPr indent="0" marL="0">
+                        <a:buNone/>
+                      </a:pPr>
+                      <a:r>
+                        <a:rPr lang="en-US" sz="1100" dirty="0">
+                          <a:solidFill>
+                            <a:srgbClr val="5A534C"/>
+                          </a:solidFill>
+                          <a:latin typeface="Calibri" pitchFamily="34" charset="0"/>
+                          <a:ea typeface="Calibri" pitchFamily="34" charset="-122"/>
+                          <a:cs typeface="Calibri" pitchFamily="34" charset="-120"/>
+                        </a:rPr>
+                        <a:t>Nov '26</a:t>
+                      </a:r>
+                      <a:endParaRPr lang="en-US" sz="1100" dirty="0">
+                        <a:latin typeface="Calibri" charset="0"/>
+                        <a:ea typeface="Calibri" charset="0"/>
+                        <a:cs typeface="Calibri" charset="0"/>
+                      </a:endParaRPr>
+                    </a:p>
+                  </a:txBody>
+                  <a:tcPr marL="76200" marR="76200" marT="38100" marB="38100" anchor="ctr">
+                    <a:lnL w="9525" cap="flat" cmpd="sng" algn="ctr">
+                      <a:solidFill>
+                        <a:srgbClr val="E7E3DE"/>
+                      </a:solidFill>
+                      <a:prstDash val="solid"/>
+                      <a:round/>
+                      <a:headEnd type="none" w="med" len="med"/>
+                      <a:tailEnd type="none" w="med" len="med"/>
+                    </a:lnL>
+                    <a:lnR w="9525" cap="flat" cmpd="sng" algn="ctr">
+                      <a:solidFill>
+                        <a:srgbClr val="E7E3DE"/>
+                      </a:solidFill>
+                      <a:prstDash val="solid"/>
+                      <a:round/>
+                      <a:headEnd type="none" w="med" len="med"/>
+                      <a:tailEnd type="none" w="med" len="med"/>
+                    </a:lnR>
+                    <a:lnT w="9525" cap="flat" cmpd="sng" algn="ctr">
+                      <a:solidFill>
+                        <a:srgbClr val="E7E3DE"/>
+                      </a:solidFill>
+                      <a:prstDash val="solid"/>
+                      <a:round/>
+                      <a:headEnd type="none" w="med" len="med"/>
+                      <a:tailEnd type="none" w="med" len="med"/>
+                    </a:lnT>
+                    <a:lnB w="9525" cap="flat" cmpd="sng" algn="ctr">
+                      <a:solidFill>
+                        <a:srgbClr val="E7E3DE"/>
+                      </a:solidFill>
+                      <a:prstDash val="solid"/>
+                      <a:round/>
+                      <a:headEnd type="none" w="med" len="med"/>
+                      <a:tailEnd type="none" w="med" len="med"/>
+                    </a:lnB>
+                    <a:solidFill>
+                      <a:srgbClr val="FFFFFF"/>
+                    </a:solidFill>
+                  </a:tcPr>
+                </a:tc>
+                <a:tc>
+                  <a:txBody>
+                    <a:bodyPr/>
+                    <a:lstStyle/>
+                    <a:p>
+                      <a:pPr algn="r" indent="0" marL="0">
+                        <a:buNone/>
+                      </a:pPr>
+                      <a:r>
+                        <a:rPr lang="en-US" sz="1100" dirty="0">
+                          <a:solidFill>
+                            <a:srgbClr val="5A534C"/>
+                          </a:solidFill>
+                          <a:latin typeface="Calibri" pitchFamily="34" charset="0"/>
+                          <a:ea typeface="Calibri" pitchFamily="34" charset="-122"/>
+                          <a:cs typeface="Calibri" pitchFamily="34" charset="-120"/>
+                        </a:rPr>
+                        <a:t>2.5M</a:t>
+                      </a:r>
+                      <a:endParaRPr lang="en-US" sz="1100" dirty="0">
+                        <a:latin typeface="Calibri" charset="0"/>
+                        <a:ea typeface="Calibri" charset="0"/>
+                        <a:cs typeface="Calibri" charset="0"/>
+                      </a:endParaRPr>
+                    </a:p>
+                  </a:txBody>
+                  <a:tcPr marL="76200" marR="76200" marT="38100" marB="38100" anchor="ctr">
+                    <a:lnL w="9525" cap="flat" cmpd="sng" algn="ctr">
+                      <a:solidFill>
+                        <a:srgbClr val="E7E3DE"/>
+                      </a:solidFill>
+                      <a:prstDash val="solid"/>
+                      <a:round/>
+                      <a:headEnd type="none" w="med" len="med"/>
+                      <a:tailEnd type="none" w="med" len="med"/>
+                    </a:lnL>
+                    <a:lnR w="9525" cap="flat" cmpd="sng" algn="ctr">
+                      <a:solidFill>
+                        <a:srgbClr val="E7E3DE"/>
+                      </a:solidFill>
+                      <a:prstDash val="solid"/>
+                      <a:round/>
+                      <a:headEnd type="none" w="med" len="med"/>
+                      <a:tailEnd type="none" w="med" len="med"/>
+                    </a:lnR>
+                    <a:lnT w="9525" cap="flat" cmpd="sng" algn="ctr">
+                      <a:solidFill>
+                        <a:srgbClr val="E7E3DE"/>
+                      </a:solidFill>
+                      <a:prstDash val="solid"/>
+                      <a:round/>
+                      <a:headEnd type="none" w="med" len="med"/>
+                      <a:tailEnd type="none" w="med" len="med"/>
+                    </a:lnT>
+                    <a:lnB w="9525" cap="flat" cmpd="sng" algn="ctr">
+                      <a:solidFill>
+                        <a:srgbClr val="E7E3DE"/>
+                      </a:solidFill>
+                      <a:prstDash val="solid"/>
+                      <a:round/>
+                      <a:headEnd type="none" w="med" len="med"/>
+                      <a:tailEnd type="none" w="med" len="med"/>
+                    </a:lnB>
+                    <a:solidFill>
+                      <a:srgbClr val="FFFFFF"/>
+                    </a:solidFill>
+                  </a:tcPr>
+                </a:tc>
+                <a:tc>
+                  <a:txBody>
+                    <a:bodyPr/>
+                    <a:lstStyle/>
+                    <a:p>
+                      <a:pPr algn="r" indent="0" marL="0">
+                        <a:buNone/>
+                      </a:pPr>
+                      <a:r>
+                        <a:rPr lang="en-US" sz="1100" dirty="0">
+                          <a:solidFill>
+                            <a:srgbClr val="2C2825"/>
+                          </a:solidFill>
+                          <a:latin typeface="Calibri" pitchFamily="34" charset="0"/>
+                          <a:ea typeface="Calibri" pitchFamily="34" charset="-122"/>
+                          <a:cs typeface="Calibri" pitchFamily="34" charset="-120"/>
+                        </a:rPr>
+                        <a:t>398</a:t>
+                      </a:r>
+                      <a:endParaRPr lang="en-US" sz="1100" dirty="0">
+                        <a:latin typeface="Calibri" charset="0"/>
+                        <a:ea typeface="Calibri" charset="0"/>
+                        <a:cs typeface="Calibri" charset="0"/>
+                      </a:endParaRPr>
+                    </a:p>
+                  </a:txBody>
+                  <a:tcPr marL="76200" marR="76200" marT="38100" marB="38100" anchor="ctr">
+                    <a:lnL w="9525" cap="flat" cmpd="sng" algn="ctr">
+                      <a:solidFill>
+                        <a:srgbClr val="E7E3DE"/>
+                      </a:solidFill>
+                      <a:prstDash val="solid"/>
+                      <a:round/>
+                      <a:headEnd type="none" w="med" len="med"/>
+                      <a:tailEnd type="none" w="med" len="med"/>
+                    </a:lnL>
+                    <a:lnR w="9525" cap="flat" cmpd="sng" algn="ctr">
+                      <a:solidFill>
+                        <a:srgbClr val="E7E3DE"/>
+                      </a:solidFill>
+                      <a:prstDash val="solid"/>
+                      <a:round/>
+                      <a:headEnd type="none" w="med" len="med"/>
+                      <a:tailEnd type="none" w="med" len="med"/>
+                    </a:lnR>
+                    <a:lnT w="9525" cap="flat" cmpd="sng" algn="ctr">
+                      <a:solidFill>
+                        <a:srgbClr val="E7E3DE"/>
+                      </a:solidFill>
+                      <a:prstDash val="solid"/>
+                      <a:round/>
+                      <a:headEnd type="none" w="med" len="med"/>
+                      <a:tailEnd type="none" w="med" len="med"/>
+                    </a:lnT>
+                    <a:lnB w="9525" cap="flat" cmpd="sng" algn="ctr">
+                      <a:solidFill>
+                        <a:srgbClr val="E7E3DE"/>
+                      </a:solidFill>
+                      <a:prstDash val="solid"/>
+                      <a:round/>
+                      <a:headEnd type="none" w="med" len="med"/>
+                      <a:tailEnd type="none" w="med" len="med"/>
+                    </a:lnB>
+                    <a:solidFill>
+                      <a:srgbClr val="FFFFFF"/>
+                    </a:solidFill>
+                  </a:tcPr>
+                </a:tc>
+                <a:tc>
+                  <a:txBody>
+                    <a:bodyPr/>
+                    <a:lstStyle/>
+                    <a:p>
+                      <a:pPr algn="r" indent="0" marL="0">
+                        <a:buNone/>
+                      </a:pPr>
+                      <a:r>
+                        <a:rPr lang="en-US" sz="1100" dirty="0">
+                          <a:solidFill>
+                            <a:srgbClr val="5A534C"/>
+                          </a:solidFill>
+                          <a:latin typeface="Calibri" pitchFamily="34" charset="0"/>
+                          <a:ea typeface="Calibri" pitchFamily="34" charset="-122"/>
+                          <a:cs typeface="Calibri" pitchFamily="34" charset="-120"/>
+                        </a:rPr>
+                        <a:t>6,281</a:t>
+                      </a:r>
+                      <a:endParaRPr lang="en-US" sz="1100" dirty="0">
+                        <a:latin typeface="Calibri" charset="0"/>
+                        <a:ea typeface="Calibri" charset="0"/>
+                        <a:cs typeface="Calibri" charset="0"/>
+                      </a:endParaRPr>
+                    </a:p>
+                  </a:txBody>
+                  <a:tcPr marL="76200" marR="76200" marT="38100" marB="38100" anchor="ctr">
+                    <a:lnL w="9525" cap="flat" cmpd="sng" algn="ctr">
+                      <a:solidFill>
+                        <a:srgbClr val="E7E3DE"/>
+                      </a:solidFill>
+                      <a:prstDash val="solid"/>
+                      <a:round/>
+                      <a:headEnd type="none" w="med" len="med"/>
+                      <a:tailEnd type="none" w="med" len="med"/>
+                    </a:lnL>
+                    <a:lnR w="9525" cap="flat" cmpd="sng" algn="ctr">
+                      <a:solidFill>
+                        <a:srgbClr val="E7E3DE"/>
+                      </a:solidFill>
+                      <a:prstDash val="solid"/>
+                      <a:round/>
+                      <a:headEnd type="none" w="med" len="med"/>
+                      <a:tailEnd type="none" w="med" len="med"/>
+                    </a:lnR>
+                    <a:lnT w="9525" cap="flat" cmpd="sng" algn="ctr">
+                      <a:solidFill>
+                        <a:srgbClr val="E7E3DE"/>
+                      </a:solidFill>
+                      <a:prstDash val="solid"/>
+                      <a:round/>
+                      <a:headEnd type="none" w="med" len="med"/>
+                      <a:tailEnd type="none" w="med" len="med"/>
+                    </a:lnT>
+                    <a:lnB w="9525" cap="flat" cmpd="sng" algn="ctr">
+                      <a:solidFill>
+                        <a:srgbClr val="E7E3DE"/>
+                      </a:solidFill>
+                      <a:prstDash val="solid"/>
+                      <a:round/>
+                      <a:headEnd type="none" w="med" len="med"/>
+                      <a:tailEnd type="none" w="med" len="med"/>
+                    </a:lnB>
+                    <a:solidFill>
+                      <a:srgbClr val="FFFFFF"/>
+                    </a:solidFill>
+                  </a:tcPr>
+                </a:tc>
+              </a:tr>
+              <a:tr h="283464">
+                <a:tc>
+                  <a:txBody>
+                    <a:bodyPr/>
+                    <a:lstStyle/>
+                    <a:p>
+                      <a:pPr indent="0" marL="0">
+                        <a:buNone/>
+                      </a:pPr>
+                      <a:r>
+                        <a:rPr lang="en-US" sz="1100" b="1" dirty="0">
+                          <a:solidFill>
+                            <a:srgbClr val="2C2825"/>
+                          </a:solidFill>
+                          <a:latin typeface="Calibri" pitchFamily="34" charset="0"/>
+                          <a:ea typeface="Calibri" pitchFamily="34" charset="-122"/>
+                          <a:cs typeface="Calibri" pitchFamily="34" charset="-120"/>
+                        </a:rPr>
+                        <a:t>Denver</a:t>
+                      </a:r>
+                      <a:endParaRPr lang="en-US" sz="1100" dirty="0">
+                        <a:latin typeface="Calibri" charset="0"/>
+                        <a:ea typeface="Calibri" charset="0"/>
+                        <a:cs typeface="Calibri" charset="0"/>
+                      </a:endParaRPr>
+                    </a:p>
+                  </a:txBody>
+                  <a:tcPr marL="76200" marR="76200" marT="38100" marB="38100" anchor="ctr">
+                    <a:lnL w="9525" cap="flat" cmpd="sng" algn="ctr">
+                      <a:solidFill>
+                        <a:srgbClr val="E7E3DE"/>
+                      </a:solidFill>
+                      <a:prstDash val="solid"/>
+                      <a:round/>
+                      <a:headEnd type="none" w="med" len="med"/>
+                      <a:tailEnd type="none" w="med" len="med"/>
+                    </a:lnL>
+                    <a:lnR w="9525" cap="flat" cmpd="sng" algn="ctr">
+                      <a:solidFill>
+                        <a:srgbClr val="E7E3DE"/>
+                      </a:solidFill>
+                      <a:prstDash val="solid"/>
+                      <a:round/>
+                      <a:headEnd type="none" w="med" len="med"/>
+                      <a:tailEnd type="none" w="med" len="med"/>
+                    </a:lnR>
+                    <a:lnT w="9525" cap="flat" cmpd="sng" algn="ctr">
+                      <a:solidFill>
+                        <a:srgbClr val="E7E3DE"/>
+                      </a:solidFill>
+                      <a:prstDash val="solid"/>
+                      <a:round/>
+                      <a:headEnd type="none" w="med" len="med"/>
+                      <a:tailEnd type="none" w="med" len="med"/>
+                    </a:lnT>
+                    <a:lnB w="9525" cap="flat" cmpd="sng" algn="ctr">
+                      <a:solidFill>
+                        <a:srgbClr val="E7E3DE"/>
+                      </a:solidFill>
+                      <a:prstDash val="solid"/>
+                      <a:round/>
+                      <a:headEnd type="none" w="med" len="med"/>
+                      <a:tailEnd type="none" w="med" len="med"/>
+                    </a:lnB>
+                    <a:solidFill>
+                      <a:srgbClr val="FFFFFF"/>
+                    </a:solidFill>
+                  </a:tcPr>
+                </a:tc>
+                <a:tc>
+                  <a:txBody>
+                    <a:bodyPr/>
+                    <a:lstStyle/>
+                    <a:p>
+                      <a:pPr indent="0" marL="0">
+                        <a:buNone/>
+                      </a:pPr>
+                      <a:r>
+                        <a:rPr lang="en-US" sz="1100" dirty="0">
+                          <a:solidFill>
+                            <a:srgbClr val="5A534C"/>
+                          </a:solidFill>
+                          <a:latin typeface="Calibri" pitchFamily="34" charset="0"/>
+                          <a:ea typeface="Calibri" pitchFamily="34" charset="-122"/>
+                          <a:cs typeface="Calibri" pitchFamily="34" charset="-120"/>
+                        </a:rPr>
+                        <a:t>Nov '26</a:t>
+                      </a:r>
+                      <a:endParaRPr lang="en-US" sz="1100" dirty="0">
+                        <a:latin typeface="Calibri" charset="0"/>
+                        <a:ea typeface="Calibri" charset="0"/>
+                        <a:cs typeface="Calibri" charset="0"/>
+                      </a:endParaRPr>
+                    </a:p>
+                  </a:txBody>
+                  <a:tcPr marL="76200" marR="76200" marT="38100" marB="38100" anchor="ctr">
+                    <a:lnL w="9525" cap="flat" cmpd="sng" algn="ctr">
+                      <a:solidFill>
+                        <a:srgbClr val="E7E3DE"/>
+                      </a:solidFill>
+                      <a:prstDash val="solid"/>
+                      <a:round/>
+                      <a:headEnd type="none" w="med" len="med"/>
+                      <a:tailEnd type="none" w="med" len="med"/>
+                    </a:lnL>
+                    <a:lnR w="9525" cap="flat" cmpd="sng" algn="ctr">
+                      <a:solidFill>
+                        <a:srgbClr val="E7E3DE"/>
+                      </a:solidFill>
+                      <a:prstDash val="solid"/>
+                      <a:round/>
+                      <a:headEnd type="none" w="med" len="med"/>
+                      <a:tailEnd type="none" w="med" len="med"/>
+                    </a:lnR>
+                    <a:lnT w="9525" cap="flat" cmpd="sng" algn="ctr">
+                      <a:solidFill>
+                        <a:srgbClr val="E7E3DE"/>
+                      </a:solidFill>
+                      <a:prstDash val="solid"/>
+                      <a:round/>
+                      <a:headEnd type="none" w="med" len="med"/>
+                      <a:tailEnd type="none" w="med" len="med"/>
+                    </a:lnT>
+                    <a:lnB w="9525" cap="flat" cmpd="sng" algn="ctr">
+                      <a:solidFill>
+                        <a:srgbClr val="E7E3DE"/>
+                      </a:solidFill>
+                      <a:prstDash val="solid"/>
+                      <a:round/>
+                      <a:headEnd type="none" w="med" len="med"/>
+                      <a:tailEnd type="none" w="med" len="med"/>
+                    </a:lnB>
+                    <a:solidFill>
+                      <a:srgbClr val="FFFFFF"/>
+                    </a:solidFill>
+                  </a:tcPr>
+                </a:tc>
+                <a:tc>
+                  <a:txBody>
+                    <a:bodyPr/>
+                    <a:lstStyle/>
+                    <a:p>
+                      <a:pPr algn="r" indent="0" marL="0">
+                        <a:buNone/>
+                      </a:pPr>
+                      <a:r>
+                        <a:rPr lang="en-US" sz="1100" dirty="0">
+                          <a:solidFill>
+                            <a:srgbClr val="5A534C"/>
+                          </a:solidFill>
+                          <a:latin typeface="Calibri" pitchFamily="34" charset="0"/>
+                          <a:ea typeface="Calibri" pitchFamily="34" charset="-122"/>
+                          <a:cs typeface="Calibri" pitchFamily="34" charset="-120"/>
+                        </a:rPr>
+                        <a:t>3.0M</a:t>
+                      </a:r>
+                      <a:endParaRPr lang="en-US" sz="1100" dirty="0">
+                        <a:latin typeface="Calibri" charset="0"/>
+                        <a:ea typeface="Calibri" charset="0"/>
+                        <a:cs typeface="Calibri" charset="0"/>
+                      </a:endParaRPr>
+                    </a:p>
+                  </a:txBody>
+                  <a:tcPr marL="76200" marR="76200" marT="38100" marB="38100" anchor="ctr">
+                    <a:lnL w="9525" cap="flat" cmpd="sng" algn="ctr">
+                      <a:solidFill>
+                        <a:srgbClr val="E7E3DE"/>
+                      </a:solidFill>
+                      <a:prstDash val="solid"/>
+                      <a:round/>
+                      <a:headEnd type="none" w="med" len="med"/>
+                      <a:tailEnd type="none" w="med" len="med"/>
+                    </a:lnL>
+                    <a:lnR w="9525" cap="flat" cmpd="sng" algn="ctr">
+                      <a:solidFill>
+                        <a:srgbClr val="E7E3DE"/>
+                      </a:solidFill>
+                      <a:prstDash val="solid"/>
+                      <a:round/>
+                      <a:headEnd type="none" w="med" len="med"/>
+                      <a:tailEnd type="none" w="med" len="med"/>
+                    </a:lnR>
+                    <a:lnT w="9525" cap="flat" cmpd="sng" algn="ctr">
+                      <a:solidFill>
+                        <a:srgbClr val="E7E3DE"/>
+                      </a:solidFill>
+                      <a:prstDash val="solid"/>
+                      <a:round/>
+                      <a:headEnd type="none" w="med" len="med"/>
+                      <a:tailEnd type="none" w="med" len="med"/>
+                    </a:lnT>
+                    <a:lnB w="9525" cap="flat" cmpd="sng" algn="ctr">
+                      <a:solidFill>
+                        <a:srgbClr val="E7E3DE"/>
+                      </a:solidFill>
+                      <a:prstDash val="solid"/>
+                      <a:round/>
+                      <a:headEnd type="none" w="med" len="med"/>
+                      <a:tailEnd type="none" w="med" len="med"/>
+                    </a:lnB>
+                    <a:solidFill>
+                      <a:srgbClr val="FFFFFF"/>
+                    </a:solidFill>
+                  </a:tcPr>
+                </a:tc>
+                <a:tc>
+                  <a:txBody>
+                    <a:bodyPr/>
+                    <a:lstStyle/>
+                    <a:p>
+                      <a:pPr algn="r" indent="0" marL="0">
+                        <a:buNone/>
+                      </a:pPr>
+                      <a:r>
+                        <a:rPr lang="en-US" sz="1100" dirty="0">
+                          <a:solidFill>
+                            <a:srgbClr val="2C2825"/>
+                          </a:solidFill>
+                          <a:latin typeface="Calibri" pitchFamily="34" charset="0"/>
+                          <a:ea typeface="Calibri" pitchFamily="34" charset="-122"/>
+                          <a:cs typeface="Calibri" pitchFamily="34" charset="-120"/>
+                        </a:rPr>
+                        <a:t>418</a:t>
+                      </a:r>
+                      <a:endParaRPr lang="en-US" sz="1100" dirty="0">
+                        <a:latin typeface="Calibri" charset="0"/>
+                        <a:ea typeface="Calibri" charset="0"/>
+                        <a:cs typeface="Calibri" charset="0"/>
+                      </a:endParaRPr>
+                    </a:p>
+                  </a:txBody>
+                  <a:tcPr marL="76200" marR="76200" marT="38100" marB="38100" anchor="ctr">
+                    <a:lnL w="9525" cap="flat" cmpd="sng" algn="ctr">
+                      <a:solidFill>
+                        <a:srgbClr val="E7E3DE"/>
+                      </a:solidFill>
+                      <a:prstDash val="solid"/>
+                      <a:round/>
+                      <a:headEnd type="none" w="med" len="med"/>
+                      <a:tailEnd type="none" w="med" len="med"/>
+                    </a:lnL>
+                    <a:lnR w="9525" cap="flat" cmpd="sng" algn="ctr">
+                      <a:solidFill>
+                        <a:srgbClr val="E7E3DE"/>
+                      </a:solidFill>
+                      <a:prstDash val="solid"/>
+                      <a:round/>
+                      <a:headEnd type="none" w="med" len="med"/>
+                      <a:tailEnd type="none" w="med" len="med"/>
+                    </a:lnR>
+                    <a:lnT w="9525" cap="flat" cmpd="sng" algn="ctr">
+                      <a:solidFill>
+                        <a:srgbClr val="E7E3DE"/>
+                      </a:solidFill>
+                      <a:prstDash val="solid"/>
+                      <a:round/>
+                      <a:headEnd type="none" w="med" len="med"/>
+                      <a:tailEnd type="none" w="med" len="med"/>
+                    </a:lnT>
+                    <a:lnB w="9525" cap="flat" cmpd="sng" algn="ctr">
+                      <a:solidFill>
+                        <a:srgbClr val="E7E3DE"/>
+                      </a:solidFill>
+                      <a:prstDash val="solid"/>
+                      <a:round/>
+                      <a:headEnd type="none" w="med" len="med"/>
+                      <a:tailEnd type="none" w="med" len="med"/>
+                    </a:lnB>
+                    <a:solidFill>
+                      <a:srgbClr val="FFFFFF"/>
+                    </a:solidFill>
+                  </a:tcPr>
+                </a:tc>
+                <a:tc>
+                  <a:txBody>
+                    <a:bodyPr/>
+                    <a:lstStyle/>
+                    <a:p>
+                      <a:pPr algn="r" indent="0" marL="0">
+                        <a:buNone/>
+                      </a:pPr>
+                      <a:r>
+                        <a:rPr lang="en-US" sz="1100" dirty="0">
+                          <a:solidFill>
+                            <a:srgbClr val="5A534C"/>
+                          </a:solidFill>
+                          <a:latin typeface="Calibri" pitchFamily="34" charset="0"/>
+                          <a:ea typeface="Calibri" pitchFamily="34" charset="-122"/>
+                          <a:cs typeface="Calibri" pitchFamily="34" charset="-120"/>
+                        </a:rPr>
+                        <a:t>7,177</a:t>
+                      </a:r>
+                      <a:endParaRPr lang="en-US" sz="1100" dirty="0">
+                        <a:latin typeface="Calibri" charset="0"/>
+                        <a:ea typeface="Calibri" charset="0"/>
+                        <a:cs typeface="Calibri" charset="0"/>
+                      </a:endParaRPr>
+                    </a:p>
+                  </a:txBody>
+                  <a:tcPr marL="76200" marR="76200" marT="38100" marB="38100" anchor="ctr">
+                    <a:lnL w="9525" cap="flat" cmpd="sng" algn="ctr">
+                      <a:solidFill>
+                        <a:srgbClr val="E7E3DE"/>
+                      </a:solidFill>
+                      <a:prstDash val="solid"/>
+                      <a:round/>
+                      <a:headEnd type="none" w="med" len="med"/>
+                      <a:tailEnd type="none" w="med" len="med"/>
+                    </a:lnL>
+                    <a:lnR w="9525" cap="flat" cmpd="sng" algn="ctr">
+                      <a:solidFill>
+                        <a:srgbClr val="E7E3DE"/>
+                      </a:solidFill>
+                      <a:prstDash val="solid"/>
+                      <a:round/>
+                      <a:headEnd type="none" w="med" len="med"/>
+                      <a:tailEnd type="none" w="med" len="med"/>
+                    </a:lnR>
+                    <a:lnT w="9525" cap="flat" cmpd="sng" algn="ctr">
+                      <a:solidFill>
+                        <a:srgbClr val="E7E3DE"/>
+                      </a:solidFill>
+                      <a:prstDash val="solid"/>
+                      <a:round/>
+                      <a:headEnd type="none" w="med" len="med"/>
+                      <a:tailEnd type="none" w="med" len="med"/>
+                    </a:lnT>
+                    <a:lnB w="9525" cap="flat" cmpd="sng" algn="ctr">
+                      <a:solidFill>
+                        <a:srgbClr val="E7E3DE"/>
+                      </a:solidFill>
+                      <a:prstDash val="solid"/>
+                      <a:round/>
+                      <a:headEnd type="none" w="med" len="med"/>
+                      <a:tailEnd type="none" w="med" len="med"/>
+                    </a:lnB>
+                    <a:solidFill>
+                      <a:srgbClr val="FFFFFF"/>
+                    </a:solidFill>
+                  </a:tcPr>
+                </a:tc>
+              </a:tr>
+              <a:tr h="283464">
+                <a:tc>
+                  <a:txBody>
+                    <a:bodyPr/>
+                    <a:lstStyle/>
+                    <a:p>
+                      <a:pPr indent="0" marL="0">
+                        <a:buNone/>
+                      </a:pPr>
+                      <a:r>
+                        <a:rPr lang="en-US" sz="1100" b="1" dirty="0">
+                          <a:solidFill>
+                            <a:srgbClr val="2C2825"/>
+                          </a:solidFill>
+                          <a:latin typeface="Calibri" pitchFamily="34" charset="0"/>
+                          <a:ea typeface="Calibri" pitchFamily="34" charset="-122"/>
+                          <a:cs typeface="Calibri" pitchFamily="34" charset="-120"/>
+                        </a:rPr>
+                        <a:t>Seattle</a:t>
+                      </a:r>
+                      <a:endParaRPr lang="en-US" sz="1100" dirty="0">
+                        <a:latin typeface="Calibri" charset="0"/>
+                        <a:ea typeface="Calibri" charset="0"/>
+                        <a:cs typeface="Calibri" charset="0"/>
+                      </a:endParaRPr>
+                    </a:p>
+                  </a:txBody>
+                  <a:tcPr marL="76200" marR="76200" marT="38100" marB="38100" anchor="ctr">
+                    <a:lnL w="9525" cap="flat" cmpd="sng" algn="ctr">
+                      <a:solidFill>
+                        <a:srgbClr val="E7E3DE"/>
+                      </a:solidFill>
+                      <a:prstDash val="solid"/>
+                      <a:round/>
+                      <a:headEnd type="none" w="med" len="med"/>
+                      <a:tailEnd type="none" w="med" len="med"/>
+                    </a:lnL>
+                    <a:lnR w="9525" cap="flat" cmpd="sng" algn="ctr">
+                      <a:solidFill>
+                        <a:srgbClr val="E7E3DE"/>
+                      </a:solidFill>
+                      <a:prstDash val="solid"/>
+                      <a:round/>
+                      <a:headEnd type="none" w="med" len="med"/>
+                      <a:tailEnd type="none" w="med" len="med"/>
+                    </a:lnR>
+                    <a:lnT w="9525" cap="flat" cmpd="sng" algn="ctr">
+                      <a:solidFill>
+                        <a:srgbClr val="E7E3DE"/>
+                      </a:solidFill>
+                      <a:prstDash val="solid"/>
+                      <a:round/>
+                      <a:headEnd type="none" w="med" len="med"/>
+                      <a:tailEnd type="none" w="med" len="med"/>
+                    </a:lnT>
+                    <a:lnB w="9525" cap="flat" cmpd="sng" algn="ctr">
+                      <a:solidFill>
+                        <a:srgbClr val="E7E3DE"/>
+                      </a:solidFill>
+                      <a:prstDash val="solid"/>
+                      <a:round/>
+                      <a:headEnd type="none" w="med" len="med"/>
+                      <a:tailEnd type="none" w="med" len="med"/>
+                    </a:lnB>
+                    <a:solidFill>
+                      <a:srgbClr val="FFFFFF"/>
+                    </a:solidFill>
+                  </a:tcPr>
+                </a:tc>
+                <a:tc>
+                  <a:txBody>
+                    <a:bodyPr/>
+                    <a:lstStyle/>
+                    <a:p>
+                      <a:pPr indent="0" marL="0">
+                        <a:buNone/>
+                      </a:pPr>
+                      <a:r>
+                        <a:rPr lang="en-US" sz="1100" dirty="0">
+                          <a:solidFill>
+                            <a:srgbClr val="5A534C"/>
+                          </a:solidFill>
+                          <a:latin typeface="Calibri" pitchFamily="34" charset="0"/>
+                          <a:ea typeface="Calibri" pitchFamily="34" charset="-122"/>
+                          <a:cs typeface="Calibri" pitchFamily="34" charset="-120"/>
+                        </a:rPr>
+                        <a:t>Oct '27</a:t>
+                      </a:r>
+                      <a:endParaRPr lang="en-US" sz="1100" dirty="0">
+                        <a:latin typeface="Calibri" charset="0"/>
+                        <a:ea typeface="Calibri" charset="0"/>
+                        <a:cs typeface="Calibri" charset="0"/>
+                      </a:endParaRPr>
+                    </a:p>
+                  </a:txBody>
+                  <a:tcPr marL="76200" marR="76200" marT="38100" marB="38100" anchor="ctr">
+                    <a:lnL w="9525" cap="flat" cmpd="sng" algn="ctr">
+                      <a:solidFill>
+                        <a:srgbClr val="E7E3DE"/>
+                      </a:solidFill>
+                      <a:prstDash val="solid"/>
+                      <a:round/>
+                      <a:headEnd type="none" w="med" len="med"/>
+                      <a:tailEnd type="none" w="med" len="med"/>
+                    </a:lnL>
+                    <a:lnR w="9525" cap="flat" cmpd="sng" algn="ctr">
+                      <a:solidFill>
+                        <a:srgbClr val="E7E3DE"/>
+                      </a:solidFill>
+                      <a:prstDash val="solid"/>
+                      <a:round/>
+                      <a:headEnd type="none" w="med" len="med"/>
+                      <a:tailEnd type="none" w="med" len="med"/>
+                    </a:lnR>
+                    <a:lnT w="9525" cap="flat" cmpd="sng" algn="ctr">
+                      <a:solidFill>
+                        <a:srgbClr val="E7E3DE"/>
+                      </a:solidFill>
+                      <a:prstDash val="solid"/>
+                      <a:round/>
+                      <a:headEnd type="none" w="med" len="med"/>
+                      <a:tailEnd type="none" w="med" len="med"/>
+                    </a:lnT>
+                    <a:lnB w="9525" cap="flat" cmpd="sng" algn="ctr">
+                      <a:solidFill>
+                        <a:srgbClr val="E7E3DE"/>
+                      </a:solidFill>
+                      <a:prstDash val="solid"/>
+                      <a:round/>
+                      <a:headEnd type="none" w="med" len="med"/>
+                      <a:tailEnd type="none" w="med" len="med"/>
+                    </a:lnB>
+                    <a:solidFill>
+                      <a:srgbClr val="FFFFFF"/>
+                    </a:solidFill>
+                  </a:tcPr>
+                </a:tc>
+                <a:tc>
+                  <a:txBody>
+                    <a:bodyPr/>
+                    <a:lstStyle/>
+                    <a:p>
+                      <a:pPr algn="r" indent="0" marL="0">
+                        <a:buNone/>
+                      </a:pPr>
+                      <a:r>
+                        <a:rPr lang="en-US" sz="1100" dirty="0">
+                          <a:solidFill>
+                            <a:srgbClr val="5A534C"/>
+                          </a:solidFill>
+                          <a:latin typeface="Calibri" pitchFamily="34" charset="0"/>
+                          <a:ea typeface="Calibri" pitchFamily="34" charset="-122"/>
+                          <a:cs typeface="Calibri" pitchFamily="34" charset="-120"/>
+                        </a:rPr>
+                        <a:t>4.1M</a:t>
+                      </a:r>
+                      <a:endParaRPr lang="en-US" sz="1100" dirty="0">
+                        <a:latin typeface="Calibri" charset="0"/>
+                        <a:ea typeface="Calibri" charset="0"/>
+                        <a:cs typeface="Calibri" charset="0"/>
+                      </a:endParaRPr>
+                    </a:p>
+                  </a:txBody>
+                  <a:tcPr marL="76200" marR="76200" marT="38100" marB="38100" anchor="ctr">
+                    <a:lnL w="9525" cap="flat" cmpd="sng" algn="ctr">
+                      <a:solidFill>
+                        <a:srgbClr val="E7E3DE"/>
+                      </a:solidFill>
+                      <a:prstDash val="solid"/>
+                      <a:round/>
+                      <a:headEnd type="none" w="med" len="med"/>
+                      <a:tailEnd type="none" w="med" len="med"/>
+                    </a:lnL>
+                    <a:lnR w="9525" cap="flat" cmpd="sng" algn="ctr">
+                      <a:solidFill>
+                        <a:srgbClr val="E7E3DE"/>
+                      </a:solidFill>
+                      <a:prstDash val="solid"/>
+                      <a:round/>
+                      <a:headEnd type="none" w="med" len="med"/>
+                      <a:tailEnd type="none" w="med" len="med"/>
+                    </a:lnR>
+                    <a:lnT w="9525" cap="flat" cmpd="sng" algn="ctr">
+                      <a:solidFill>
+                        <a:srgbClr val="E7E3DE"/>
+                      </a:solidFill>
+                      <a:prstDash val="solid"/>
+                      <a:round/>
+                      <a:headEnd type="none" w="med" len="med"/>
+                      <a:tailEnd type="none" w="med" len="med"/>
+                    </a:lnT>
+                    <a:lnB w="9525" cap="flat" cmpd="sng" algn="ctr">
+                      <a:solidFill>
+                        <a:srgbClr val="E7E3DE"/>
+                      </a:solidFill>
+                      <a:prstDash val="solid"/>
+                      <a:round/>
+                      <a:headEnd type="none" w="med" len="med"/>
+                      <a:tailEnd type="none" w="med" len="med"/>
+                    </a:lnB>
+                    <a:solidFill>
+                      <a:srgbClr val="FFFFFF"/>
+                    </a:solidFill>
+                  </a:tcPr>
+                </a:tc>
+                <a:tc>
+                  <a:txBody>
+                    <a:bodyPr/>
+                    <a:lstStyle/>
+                    <a:p>
+                      <a:pPr algn="r" indent="0" marL="0">
+                        <a:buNone/>
+                      </a:pPr>
+                      <a:r>
+                        <a:rPr lang="en-US" sz="1100" dirty="0">
+                          <a:solidFill>
+                            <a:srgbClr val="2C2825"/>
+                          </a:solidFill>
+                          <a:latin typeface="Calibri" pitchFamily="34" charset="0"/>
+                          <a:ea typeface="Calibri" pitchFamily="34" charset="-122"/>
+                          <a:cs typeface="Calibri" pitchFamily="34" charset="-120"/>
+                        </a:rPr>
+                        <a:t>447</a:t>
+                      </a:r>
+                      <a:endParaRPr lang="en-US" sz="1100" dirty="0">
+                        <a:latin typeface="Calibri" charset="0"/>
+                        <a:ea typeface="Calibri" charset="0"/>
+                        <a:cs typeface="Calibri" charset="0"/>
+                      </a:endParaRPr>
+                    </a:p>
+                  </a:txBody>
+                  <a:tcPr marL="76200" marR="76200" marT="38100" marB="38100" anchor="ctr">
+                    <a:lnL w="9525" cap="flat" cmpd="sng" algn="ctr">
+                      <a:solidFill>
+                        <a:srgbClr val="E7E3DE"/>
+                      </a:solidFill>
+                      <a:prstDash val="solid"/>
+                      <a:round/>
+                      <a:headEnd type="none" w="med" len="med"/>
+                      <a:tailEnd type="none" w="med" len="med"/>
+                    </a:lnL>
+                    <a:lnR w="9525" cap="flat" cmpd="sng" algn="ctr">
+                      <a:solidFill>
+                        <a:srgbClr val="E7E3DE"/>
+                      </a:solidFill>
+                      <a:prstDash val="solid"/>
+                      <a:round/>
+                      <a:headEnd type="none" w="med" len="med"/>
+                      <a:tailEnd type="none" w="med" len="med"/>
+                    </a:lnR>
+                    <a:lnT w="9525" cap="flat" cmpd="sng" algn="ctr">
+                      <a:solidFill>
+                        <a:srgbClr val="E7E3DE"/>
+                      </a:solidFill>
+                      <a:prstDash val="solid"/>
+                      <a:round/>
+                      <a:headEnd type="none" w="med" len="med"/>
+                      <a:tailEnd type="none" w="med" len="med"/>
+                    </a:lnT>
+                    <a:lnB w="9525" cap="flat" cmpd="sng" algn="ctr">
+                      <a:solidFill>
+                        <a:srgbClr val="E7E3DE"/>
+                      </a:solidFill>
+                      <a:prstDash val="solid"/>
+                      <a:round/>
+                      <a:headEnd type="none" w="med" len="med"/>
+                      <a:tailEnd type="none" w="med" len="med"/>
+                    </a:lnB>
+                    <a:solidFill>
+                      <a:srgbClr val="FFFFFF"/>
+                    </a:solidFill>
+                  </a:tcPr>
+                </a:tc>
+                <a:tc>
+                  <a:txBody>
+                    <a:bodyPr/>
+                    <a:lstStyle/>
+                    <a:p>
+                      <a:pPr algn="r" indent="0" marL="0">
+                        <a:buNone/>
+                      </a:pPr>
+                      <a:r>
+                        <a:rPr lang="en-US" sz="1100" dirty="0">
+                          <a:solidFill>
+                            <a:srgbClr val="5A534C"/>
+                          </a:solidFill>
+                          <a:latin typeface="Calibri" pitchFamily="34" charset="0"/>
+                          <a:ea typeface="Calibri" pitchFamily="34" charset="-122"/>
+                          <a:cs typeface="Calibri" pitchFamily="34" charset="-120"/>
+                        </a:rPr>
+                        <a:t>9,172</a:t>
+                      </a:r>
+                      <a:endParaRPr lang="en-US" sz="1100" dirty="0">
+                        <a:latin typeface="Calibri" charset="0"/>
+                        <a:ea typeface="Calibri" charset="0"/>
+                        <a:cs typeface="Calibri" charset="0"/>
+                      </a:endParaRPr>
+                    </a:p>
+                  </a:txBody>
+                  <a:tcPr marL="76200" marR="76200" marT="38100" marB="38100" anchor="ctr">
+                    <a:lnL w="9525" cap="flat" cmpd="sng" algn="ctr">
+                      <a:solidFill>
+                        <a:srgbClr val="E7E3DE"/>
+                      </a:solidFill>
+                      <a:prstDash val="solid"/>
+                      <a:round/>
+                      <a:headEnd type="none" w="med" len="med"/>
+                      <a:tailEnd type="none" w="med" len="med"/>
+                    </a:lnL>
+                    <a:lnR w="9525" cap="flat" cmpd="sng" algn="ctr">
+                      <a:solidFill>
+                        <a:srgbClr val="E7E3DE"/>
+                      </a:solidFill>
+                      <a:prstDash val="solid"/>
+                      <a:round/>
+                      <a:headEnd type="none" w="med" len="med"/>
+                      <a:tailEnd type="none" w="med" len="med"/>
+                    </a:lnR>
+                    <a:lnT w="9525" cap="flat" cmpd="sng" algn="ctr">
+                      <a:solidFill>
+                        <a:srgbClr val="E7E3DE"/>
+                      </a:solidFill>
+                      <a:prstDash val="solid"/>
+                      <a:round/>
+                      <a:headEnd type="none" w="med" len="med"/>
+                      <a:tailEnd type="none" w="med" len="med"/>
+                    </a:lnT>
+                    <a:lnB w="9525" cap="flat" cmpd="sng" algn="ctr">
+                      <a:solidFill>
+                        <a:srgbClr val="E7E3DE"/>
+                      </a:solidFill>
+                      <a:prstDash val="solid"/>
+                      <a:round/>
+                      <a:headEnd type="none" w="med" len="med"/>
+                      <a:tailEnd type="none" w="med" len="med"/>
+                    </a:lnB>
+                    <a:solidFill>
+                      <a:srgbClr val="FFFFFF"/>
+                    </a:solidFill>
+                  </a:tcPr>
+                </a:tc>
+              </a:tr>
+              <a:tr h="283464">
+                <a:tc>
+                  <a:txBody>
+                    <a:bodyPr/>
+                    <a:lstStyle/>
+                    <a:p>
+                      <a:pPr indent="0" marL="0">
+                        <a:buNone/>
+                      </a:pPr>
+                      <a:r>
+                        <a:rPr lang="en-US" sz="1100" b="1" dirty="0">
+                          <a:solidFill>
+                            <a:srgbClr val="2C2825"/>
+                          </a:solidFill>
+                          <a:latin typeface="Calibri" pitchFamily="34" charset="0"/>
+                          <a:ea typeface="Calibri" pitchFamily="34" charset="-122"/>
+                          <a:cs typeface="Calibri" pitchFamily="34" charset="-120"/>
+                        </a:rPr>
+                        <a:t>Los Angeles</a:t>
+                      </a:r>
+                      <a:endParaRPr lang="en-US" sz="1100" dirty="0">
+                        <a:latin typeface="Calibri" charset="0"/>
+                        <a:ea typeface="Calibri" charset="0"/>
+                        <a:cs typeface="Calibri" charset="0"/>
+                      </a:endParaRPr>
+                    </a:p>
+                  </a:txBody>
+                  <a:tcPr marL="76200" marR="76200" marT="38100" marB="38100" anchor="ctr">
+                    <a:lnL w="9525" cap="flat" cmpd="sng" algn="ctr">
+                      <a:solidFill>
+                        <a:srgbClr val="E7E3DE"/>
+                      </a:solidFill>
+                      <a:prstDash val="solid"/>
+                      <a:round/>
+                      <a:headEnd type="none" w="med" len="med"/>
+                      <a:tailEnd type="none" w="med" len="med"/>
+                    </a:lnL>
+                    <a:lnR w="9525" cap="flat" cmpd="sng" algn="ctr">
+                      <a:solidFill>
+                        <a:srgbClr val="E7E3DE"/>
+                      </a:solidFill>
+                      <a:prstDash val="solid"/>
+                      <a:round/>
+                      <a:headEnd type="none" w="med" len="med"/>
+                      <a:tailEnd type="none" w="med" len="med"/>
+                    </a:lnR>
+                    <a:lnT w="9525" cap="flat" cmpd="sng" algn="ctr">
+                      <a:solidFill>
+                        <a:srgbClr val="E7E3DE"/>
+                      </a:solidFill>
+                      <a:prstDash val="solid"/>
+                      <a:round/>
+                      <a:headEnd type="none" w="med" len="med"/>
+                      <a:tailEnd type="none" w="med" len="med"/>
+                    </a:lnT>
+                    <a:lnB w="9525" cap="flat" cmpd="sng" algn="ctr">
+                      <a:solidFill>
+                        <a:srgbClr val="E7E3DE"/>
+                      </a:solidFill>
+                      <a:prstDash val="solid"/>
+                      <a:round/>
+                      <a:headEnd type="none" w="med" len="med"/>
+                      <a:tailEnd type="none" w="med" len="med"/>
+                    </a:lnB>
+                    <a:solidFill>
+                      <a:srgbClr val="FFFFFF"/>
+                    </a:solidFill>
+                  </a:tcPr>
+                </a:tc>
+                <a:tc>
+                  <a:txBody>
+                    <a:bodyPr/>
+                    <a:lstStyle/>
+                    <a:p>
+                      <a:pPr indent="0" marL="0">
+                        <a:buNone/>
+                      </a:pPr>
+                      <a:r>
+                        <a:rPr lang="en-US" sz="1100" dirty="0">
+                          <a:solidFill>
+                            <a:srgbClr val="5A534C"/>
+                          </a:solidFill>
+                          <a:latin typeface="Calibri" pitchFamily="34" charset="0"/>
+                          <a:ea typeface="Calibri" pitchFamily="34" charset="-122"/>
+                          <a:cs typeface="Calibri" pitchFamily="34" charset="-120"/>
+                        </a:rPr>
+                        <a:t>Apr '28</a:t>
+                      </a:r>
+                      <a:endParaRPr lang="en-US" sz="1100" dirty="0">
+                        <a:latin typeface="Calibri" charset="0"/>
+                        <a:ea typeface="Calibri" charset="0"/>
+                        <a:cs typeface="Calibri" charset="0"/>
+                      </a:endParaRPr>
+                    </a:p>
+                  </a:txBody>
+                  <a:tcPr marL="76200" marR="76200" marT="38100" marB="38100" anchor="ctr">
+                    <a:lnL w="9525" cap="flat" cmpd="sng" algn="ctr">
+                      <a:solidFill>
+                        <a:srgbClr val="E7E3DE"/>
+                      </a:solidFill>
+                      <a:prstDash val="solid"/>
+                      <a:round/>
+                      <a:headEnd type="none" w="med" len="med"/>
+                      <a:tailEnd type="none" w="med" len="med"/>
+                    </a:lnL>
+                    <a:lnR w="9525" cap="flat" cmpd="sng" algn="ctr">
+                      <a:solidFill>
+                        <a:srgbClr val="E7E3DE"/>
+                      </a:solidFill>
+                      <a:prstDash val="solid"/>
+                      <a:round/>
+                      <a:headEnd type="none" w="med" len="med"/>
+                      <a:tailEnd type="none" w="med" len="med"/>
+                    </a:lnR>
+                    <a:lnT w="9525" cap="flat" cmpd="sng" algn="ctr">
+                      <a:solidFill>
+                        <a:srgbClr val="E7E3DE"/>
+                      </a:solidFill>
+                      <a:prstDash val="solid"/>
+                      <a:round/>
+                      <a:headEnd type="none" w="med" len="med"/>
+                      <a:tailEnd type="none" w="med" len="med"/>
+                    </a:lnT>
+                    <a:lnB w="9525" cap="flat" cmpd="sng" algn="ctr">
+                      <a:solidFill>
+                        <a:srgbClr val="E7E3DE"/>
+                      </a:solidFill>
+                      <a:prstDash val="solid"/>
+                      <a:round/>
+                      <a:headEnd type="none" w="med" len="med"/>
+                      <a:tailEnd type="none" w="med" len="med"/>
+                    </a:lnB>
+                    <a:solidFill>
+                      <a:srgbClr val="FFFFFF"/>
+                    </a:solidFill>
+                  </a:tcPr>
+                </a:tc>
+                <a:tc>
+                  <a:txBody>
+                    <a:bodyPr/>
+                    <a:lstStyle/>
+                    <a:p>
+                      <a:pPr algn="r" indent="0" marL="0">
+                        <a:buNone/>
+                      </a:pPr>
+                      <a:r>
+                        <a:rPr lang="en-US" sz="1100" dirty="0">
+                          <a:solidFill>
+                            <a:srgbClr val="5A534C"/>
+                          </a:solidFill>
+                          <a:latin typeface="Calibri" pitchFamily="34" charset="0"/>
+                          <a:ea typeface="Calibri" pitchFamily="34" charset="-122"/>
+                          <a:cs typeface="Calibri" pitchFamily="34" charset="-120"/>
+                        </a:rPr>
+                        <a:t>12.9M</a:t>
+                      </a:r>
+                      <a:endParaRPr lang="en-US" sz="1100" dirty="0">
+                        <a:latin typeface="Calibri" charset="0"/>
+                        <a:ea typeface="Calibri" charset="0"/>
+                        <a:cs typeface="Calibri" charset="0"/>
+                      </a:endParaRPr>
+                    </a:p>
+                  </a:txBody>
+                  <a:tcPr marL="76200" marR="76200" marT="38100" marB="38100" anchor="ctr">
+                    <a:lnL w="9525" cap="flat" cmpd="sng" algn="ctr">
+                      <a:solidFill>
+                        <a:srgbClr val="E7E3DE"/>
+                      </a:solidFill>
+                      <a:prstDash val="solid"/>
+                      <a:round/>
+                      <a:headEnd type="none" w="med" len="med"/>
+                      <a:tailEnd type="none" w="med" len="med"/>
+                    </a:lnL>
+                    <a:lnR w="9525" cap="flat" cmpd="sng" algn="ctr">
+                      <a:solidFill>
+                        <a:srgbClr val="E7E3DE"/>
+                      </a:solidFill>
+                      <a:prstDash val="solid"/>
+                      <a:round/>
+                      <a:headEnd type="none" w="med" len="med"/>
+                      <a:tailEnd type="none" w="med" len="med"/>
+                    </a:lnR>
+                    <a:lnT w="9525" cap="flat" cmpd="sng" algn="ctr">
+                      <a:solidFill>
+                        <a:srgbClr val="E7E3DE"/>
+                      </a:solidFill>
+                      <a:prstDash val="solid"/>
+                      <a:round/>
+                      <a:headEnd type="none" w="med" len="med"/>
+                      <a:tailEnd type="none" w="med" len="med"/>
+                    </a:lnT>
+                    <a:lnB w="9525" cap="flat" cmpd="sng" algn="ctr">
+                      <a:solidFill>
+                        <a:srgbClr val="E7E3DE"/>
+                      </a:solidFill>
+                      <a:prstDash val="solid"/>
+                      <a:round/>
+                      <a:headEnd type="none" w="med" len="med"/>
+                      <a:tailEnd type="none" w="med" len="med"/>
+                    </a:lnB>
+                    <a:solidFill>
+                      <a:srgbClr val="FFFFFF"/>
+                    </a:solidFill>
+                  </a:tcPr>
+                </a:tc>
+                <a:tc>
+                  <a:txBody>
+                    <a:bodyPr/>
+                    <a:lstStyle/>
+                    <a:p>
+                      <a:pPr algn="r" indent="0" marL="0">
+                        <a:buNone/>
+                      </a:pPr>
+                      <a:r>
+                        <a:rPr lang="en-US" sz="1100" dirty="0">
+                          <a:solidFill>
+                            <a:srgbClr val="2C2825"/>
+                          </a:solidFill>
+                          <a:latin typeface="Calibri" pitchFamily="34" charset="0"/>
+                          <a:ea typeface="Calibri" pitchFamily="34" charset="-122"/>
+                          <a:cs typeface="Calibri" pitchFamily="34" charset="-120"/>
+                        </a:rPr>
+                        <a:t>450</a:t>
+                      </a:r>
+                      <a:endParaRPr lang="en-US" sz="1100" dirty="0">
+                        <a:latin typeface="Calibri" charset="0"/>
+                        <a:ea typeface="Calibri" charset="0"/>
+                        <a:cs typeface="Calibri" charset="0"/>
+                      </a:endParaRPr>
+                    </a:p>
+                  </a:txBody>
+                  <a:tcPr marL="76200" marR="76200" marT="38100" marB="38100" anchor="ctr">
+                    <a:lnL w="9525" cap="flat" cmpd="sng" algn="ctr">
+                      <a:solidFill>
+                        <a:srgbClr val="E7E3DE"/>
+                      </a:solidFill>
+                      <a:prstDash val="solid"/>
+                      <a:round/>
+                      <a:headEnd type="none" w="med" len="med"/>
+                      <a:tailEnd type="none" w="med" len="med"/>
+                    </a:lnL>
+                    <a:lnR w="9525" cap="flat" cmpd="sng" algn="ctr">
+                      <a:solidFill>
+                        <a:srgbClr val="E7E3DE"/>
+                      </a:solidFill>
+                      <a:prstDash val="solid"/>
+                      <a:round/>
+                      <a:headEnd type="none" w="med" len="med"/>
+                      <a:tailEnd type="none" w="med" len="med"/>
+                    </a:lnR>
+                    <a:lnT w="9525" cap="flat" cmpd="sng" algn="ctr">
+                      <a:solidFill>
+                        <a:srgbClr val="E7E3DE"/>
+                      </a:solidFill>
+                      <a:prstDash val="solid"/>
+                      <a:round/>
+                      <a:headEnd type="none" w="med" len="med"/>
+                      <a:tailEnd type="none" w="med" len="med"/>
+                    </a:lnT>
+                    <a:lnB w="9525" cap="flat" cmpd="sng" algn="ctr">
+                      <a:solidFill>
+                        <a:srgbClr val="E7E3DE"/>
+                      </a:solidFill>
+                      <a:prstDash val="solid"/>
+                      <a:round/>
+                      <a:headEnd type="none" w="med" len="med"/>
+                      <a:tailEnd type="none" w="med" len="med"/>
+                    </a:lnB>
+                    <a:solidFill>
+                      <a:srgbClr val="FFFFFF"/>
+                    </a:solidFill>
+                  </a:tcPr>
+                </a:tc>
+                <a:tc>
+                  <a:txBody>
+                    <a:bodyPr/>
+                    <a:lstStyle/>
+                    <a:p>
+                      <a:pPr algn="r" indent="0" marL="0">
+                        <a:buNone/>
+                      </a:pPr>
+                      <a:r>
+                        <a:rPr lang="en-US" sz="1100" dirty="0">
+                          <a:solidFill>
+                            <a:srgbClr val="5A534C"/>
+                          </a:solidFill>
+                          <a:latin typeface="Calibri" pitchFamily="34" charset="0"/>
+                          <a:ea typeface="Calibri" pitchFamily="34" charset="-122"/>
+                          <a:cs typeface="Calibri" pitchFamily="34" charset="-120"/>
+                        </a:rPr>
+                        <a:t>28,667</a:t>
+                      </a:r>
+                      <a:endParaRPr lang="en-US" sz="1100" dirty="0">
+                        <a:latin typeface="Calibri" charset="0"/>
+                        <a:ea typeface="Calibri" charset="0"/>
+                        <a:cs typeface="Calibri" charset="0"/>
+                      </a:endParaRPr>
+                    </a:p>
+                  </a:txBody>
+                  <a:tcPr marL="76200" marR="76200" marT="38100" marB="38100" anchor="ctr">
+                    <a:lnL w="9525" cap="flat" cmpd="sng" algn="ctr">
+                      <a:solidFill>
+                        <a:srgbClr val="E7E3DE"/>
+                      </a:solidFill>
+                      <a:prstDash val="solid"/>
+                      <a:round/>
+                      <a:headEnd type="none" w="med" len="med"/>
+                      <a:tailEnd type="none" w="med" len="med"/>
+                    </a:lnL>
+                    <a:lnR w="9525" cap="flat" cmpd="sng" algn="ctr">
+                      <a:solidFill>
+                        <a:srgbClr val="E7E3DE"/>
+                      </a:solidFill>
+                      <a:prstDash val="solid"/>
+                      <a:round/>
+                      <a:headEnd type="none" w="med" len="med"/>
+                      <a:tailEnd type="none" w="med" len="med"/>
+                    </a:lnR>
+                    <a:lnT w="9525" cap="flat" cmpd="sng" algn="ctr">
+                      <a:solidFill>
+                        <a:srgbClr val="E7E3DE"/>
+                      </a:solidFill>
+                      <a:prstDash val="solid"/>
+                      <a:round/>
+                      <a:headEnd type="none" w="med" len="med"/>
+                      <a:tailEnd type="none" w="med" len="med"/>
+                    </a:lnT>
+                    <a:lnB w="9525" cap="flat" cmpd="sng" algn="ctr">
+                      <a:solidFill>
+                        <a:srgbClr val="E7E3DE"/>
+                      </a:solidFill>
+                      <a:prstDash val="solid"/>
+                      <a:round/>
+                      <a:headEnd type="none" w="med" len="med"/>
+                      <a:tailEnd type="none" w="med" len="med"/>
+                    </a:lnB>
+                    <a:solidFill>
+                      <a:srgbClr val="FFFFFF"/>
+                    </a:solidFill>
+                  </a:tcPr>
+                </a:tc>
+              </a:tr>
+              <a:tr h="283464">
+                <a:tc>
+                  <a:txBody>
+                    <a:bodyPr/>
+                    <a:lstStyle/>
+                    <a:p>
+                      <a:pPr indent="0" marL="0">
+                        <a:buNone/>
+                      </a:pPr>
+                      <a:r>
+                        <a:rPr lang="en-US" sz="1100" b="1" dirty="0">
+                          <a:solidFill>
+                            <a:srgbClr val="2C2825"/>
+                          </a:solidFill>
+                          <a:latin typeface="Calibri" pitchFamily="34" charset="0"/>
+                          <a:ea typeface="Calibri" pitchFamily="34" charset="-122"/>
+                          <a:cs typeface="Calibri" pitchFamily="34" charset="-120"/>
+                        </a:rPr>
+                        <a:t>New York</a:t>
+                      </a:r>
+                      <a:endParaRPr lang="en-US" sz="1100" dirty="0">
+                        <a:latin typeface="Calibri" charset="0"/>
+                        <a:ea typeface="Calibri" charset="0"/>
+                        <a:cs typeface="Calibri" charset="0"/>
+                      </a:endParaRPr>
+                    </a:p>
+                  </a:txBody>
+                  <a:tcPr marL="76200" marR="76200" marT="38100" marB="38100" anchor="ctr">
+                    <a:lnL w="9525" cap="flat" cmpd="sng" algn="ctr">
+                      <a:solidFill>
+                        <a:srgbClr val="E7E3DE"/>
+                      </a:solidFill>
+                      <a:prstDash val="solid"/>
+                      <a:round/>
+                      <a:headEnd type="none" w="med" len="med"/>
+                      <a:tailEnd type="none" w="med" len="med"/>
+                    </a:lnL>
+                    <a:lnR w="9525" cap="flat" cmpd="sng" algn="ctr">
+                      <a:solidFill>
+                        <a:srgbClr val="E7E3DE"/>
+                      </a:solidFill>
+                      <a:prstDash val="solid"/>
+                      <a:round/>
+                      <a:headEnd type="none" w="med" len="med"/>
+                      <a:tailEnd type="none" w="med" len="med"/>
+                    </a:lnR>
+                    <a:lnT w="9525" cap="flat" cmpd="sng" algn="ctr">
+                      <a:solidFill>
+                        <a:srgbClr val="E7E3DE"/>
+                      </a:solidFill>
+                      <a:prstDash val="solid"/>
+                      <a:round/>
+                      <a:headEnd type="none" w="med" len="med"/>
+                      <a:tailEnd type="none" w="med" len="med"/>
+                    </a:lnT>
+                    <a:lnB w="9525" cap="flat" cmpd="sng" algn="ctr">
+                      <a:solidFill>
+                        <a:srgbClr val="E7E3DE"/>
+                      </a:solidFill>
+                      <a:prstDash val="solid"/>
+                      <a:round/>
+                      <a:headEnd type="none" w="med" len="med"/>
+                      <a:tailEnd type="none" w="med" len="med"/>
+                    </a:lnB>
+                    <a:solidFill>
+                      <a:srgbClr val="FFFFFF"/>
+                    </a:solidFill>
+                  </a:tcPr>
+                </a:tc>
+                <a:tc>
+                  <a:txBody>
+                    <a:bodyPr/>
+                    <a:lstStyle/>
+                    <a:p>
+                      <a:pPr indent="0" marL="0">
+                        <a:buNone/>
+                      </a:pPr>
+                      <a:r>
+                        <a:rPr lang="en-US" sz="1100" dirty="0">
+                          <a:solidFill>
+                            <a:srgbClr val="5A534C"/>
+                          </a:solidFill>
+                          <a:latin typeface="Calibri" pitchFamily="34" charset="0"/>
+                          <a:ea typeface="Calibri" pitchFamily="34" charset="-122"/>
+                          <a:cs typeface="Calibri" pitchFamily="34" charset="-120"/>
+                        </a:rPr>
+                        <a:t>Apr '28</a:t>
+                      </a:r>
+                      <a:endParaRPr lang="en-US" sz="1100" dirty="0">
+                        <a:latin typeface="Calibri" charset="0"/>
+                        <a:ea typeface="Calibri" charset="0"/>
+                        <a:cs typeface="Calibri" charset="0"/>
+                      </a:endParaRPr>
+                    </a:p>
+                  </a:txBody>
+                  <a:tcPr marL="76200" marR="76200" marT="38100" marB="38100" anchor="ctr">
+                    <a:lnL w="9525" cap="flat" cmpd="sng" algn="ctr">
+                      <a:solidFill>
+                        <a:srgbClr val="E7E3DE"/>
+                      </a:solidFill>
+                      <a:prstDash val="solid"/>
+                      <a:round/>
+                      <a:headEnd type="none" w="med" len="med"/>
+                      <a:tailEnd type="none" w="med" len="med"/>
+                    </a:lnL>
+                    <a:lnR w="9525" cap="flat" cmpd="sng" algn="ctr">
+                      <a:solidFill>
+                        <a:srgbClr val="E7E3DE"/>
+                      </a:solidFill>
+                      <a:prstDash val="solid"/>
+                      <a:round/>
+                      <a:headEnd type="none" w="med" len="med"/>
+                      <a:tailEnd type="none" w="med" len="med"/>
+                    </a:lnR>
+                    <a:lnT w="9525" cap="flat" cmpd="sng" algn="ctr">
+                      <a:solidFill>
+                        <a:srgbClr val="E7E3DE"/>
+                      </a:solidFill>
+                      <a:prstDash val="solid"/>
+                      <a:round/>
+                      <a:headEnd type="none" w="med" len="med"/>
+                      <a:tailEnd type="none" w="med" len="med"/>
+                    </a:lnT>
+                    <a:lnB w="9525" cap="flat" cmpd="sng" algn="ctr">
+                      <a:solidFill>
+                        <a:srgbClr val="E7E3DE"/>
+                      </a:solidFill>
+                      <a:prstDash val="solid"/>
+                      <a:round/>
+                      <a:headEnd type="none" w="med" len="med"/>
+                      <a:tailEnd type="none" w="med" len="med"/>
+                    </a:lnB>
+                    <a:solidFill>
+                      <a:srgbClr val="FFFFFF"/>
+                    </a:solidFill>
+                  </a:tcPr>
+                </a:tc>
+                <a:tc>
+                  <a:txBody>
+                    <a:bodyPr/>
+                    <a:lstStyle/>
+                    <a:p>
+                      <a:pPr algn="r" indent="0" marL="0">
+                        <a:buNone/>
+                      </a:pPr>
+                      <a:r>
+                        <a:rPr lang="en-US" sz="1100" dirty="0">
+                          <a:solidFill>
+                            <a:srgbClr val="5A534C"/>
+                          </a:solidFill>
+                          <a:latin typeface="Calibri" pitchFamily="34" charset="0"/>
+                          <a:ea typeface="Calibri" pitchFamily="34" charset="-122"/>
+                          <a:cs typeface="Calibri" pitchFamily="34" charset="-120"/>
+                        </a:rPr>
+                        <a:t>20.0M</a:t>
+                      </a:r>
+                      <a:endParaRPr lang="en-US" sz="1100" dirty="0">
+                        <a:latin typeface="Calibri" charset="0"/>
+                        <a:ea typeface="Calibri" charset="0"/>
+                        <a:cs typeface="Calibri" charset="0"/>
+                      </a:endParaRPr>
+                    </a:p>
+                  </a:txBody>
+                  <a:tcPr marL="76200" marR="76200" marT="38100" marB="38100" anchor="ctr">
+                    <a:lnL w="9525" cap="flat" cmpd="sng" algn="ctr">
+                      <a:solidFill>
+                        <a:srgbClr val="E7E3DE"/>
+                      </a:solidFill>
+                      <a:prstDash val="solid"/>
+                      <a:round/>
+                      <a:headEnd type="none" w="med" len="med"/>
+                      <a:tailEnd type="none" w="med" len="med"/>
+                    </a:lnL>
+                    <a:lnR w="9525" cap="flat" cmpd="sng" algn="ctr">
+                      <a:solidFill>
+                        <a:srgbClr val="E7E3DE"/>
+                      </a:solidFill>
+                      <a:prstDash val="solid"/>
+                      <a:round/>
+                      <a:headEnd type="none" w="med" len="med"/>
+                      <a:tailEnd type="none" w="med" len="med"/>
+                    </a:lnR>
+                    <a:lnT w="9525" cap="flat" cmpd="sng" algn="ctr">
+                      <a:solidFill>
+                        <a:srgbClr val="E7E3DE"/>
+                      </a:solidFill>
+                      <a:prstDash val="solid"/>
+                      <a:round/>
+                      <a:headEnd type="none" w="med" len="med"/>
+                      <a:tailEnd type="none" w="med" len="med"/>
+                    </a:lnT>
+                    <a:lnB w="9525" cap="flat" cmpd="sng" algn="ctr">
+                      <a:solidFill>
+                        <a:srgbClr val="E7E3DE"/>
+                      </a:solidFill>
+                      <a:prstDash val="solid"/>
+                      <a:round/>
+                      <a:headEnd type="none" w="med" len="med"/>
+                      <a:tailEnd type="none" w="med" len="med"/>
+                    </a:lnB>
+                    <a:solidFill>
+                      <a:srgbClr val="FFFFFF"/>
+                    </a:solidFill>
+                  </a:tcPr>
+                </a:tc>
+                <a:tc>
+                  <a:txBody>
+                    <a:bodyPr/>
+                    <a:lstStyle/>
+                    <a:p>
+                      <a:pPr algn="r" indent="0" marL="0">
+                        <a:buNone/>
+                      </a:pPr>
+                      <a:r>
+                        <a:rPr lang="en-US" sz="1100" dirty="0">
+                          <a:solidFill>
+                            <a:srgbClr val="2C2825"/>
+                          </a:solidFill>
+                          <a:latin typeface="Calibri" pitchFamily="34" charset="0"/>
+                          <a:ea typeface="Calibri" pitchFamily="34" charset="-122"/>
+                          <a:cs typeface="Calibri" pitchFamily="34" charset="-120"/>
+                        </a:rPr>
+                        <a:t>414</a:t>
+                      </a:r>
+                      <a:endParaRPr lang="en-US" sz="1100" dirty="0">
+                        <a:latin typeface="Calibri" charset="0"/>
+                        <a:ea typeface="Calibri" charset="0"/>
+                        <a:cs typeface="Calibri" charset="0"/>
+                      </a:endParaRPr>
+                    </a:p>
+                  </a:txBody>
+                  <a:tcPr marL="76200" marR="76200" marT="38100" marB="38100" anchor="ctr">
+                    <a:lnL w="9525" cap="flat" cmpd="sng" algn="ctr">
+                      <a:solidFill>
+                        <a:srgbClr val="E7E3DE"/>
+                      </a:solidFill>
+                      <a:prstDash val="solid"/>
+                      <a:round/>
+                      <a:headEnd type="none" w="med" len="med"/>
+                      <a:tailEnd type="none" w="med" len="med"/>
+                    </a:lnL>
+                    <a:lnR w="9525" cap="flat" cmpd="sng" algn="ctr">
+                      <a:solidFill>
+                        <a:srgbClr val="E7E3DE"/>
+                      </a:solidFill>
+                      <a:prstDash val="solid"/>
+                      <a:round/>
+                      <a:headEnd type="none" w="med" len="med"/>
+                      <a:tailEnd type="none" w="med" len="med"/>
+                    </a:lnR>
+                    <a:lnT w="9525" cap="flat" cmpd="sng" algn="ctr">
+                      <a:solidFill>
+                        <a:srgbClr val="E7E3DE"/>
+                      </a:solidFill>
+                      <a:prstDash val="solid"/>
+                      <a:round/>
+                      <a:headEnd type="none" w="med" len="med"/>
+                      <a:tailEnd type="none" w="med" len="med"/>
+                    </a:lnT>
+                    <a:lnB w="9525" cap="flat" cmpd="sng" algn="ctr">
+                      <a:solidFill>
+                        <a:srgbClr val="E7E3DE"/>
+                      </a:solidFill>
+                      <a:prstDash val="solid"/>
+                      <a:round/>
+                      <a:headEnd type="none" w="med" len="med"/>
+                      <a:tailEnd type="none" w="med" len="med"/>
+                    </a:lnB>
+                    <a:solidFill>
+                      <a:srgbClr val="FFFFFF"/>
+                    </a:solidFill>
+                  </a:tcPr>
+                </a:tc>
+                <a:tc>
+                  <a:txBody>
+                    <a:bodyPr/>
+                    <a:lstStyle/>
+                    <a:p>
+                      <a:pPr algn="r" indent="0" marL="0">
+                        <a:buNone/>
+                      </a:pPr>
+                      <a:r>
+                        <a:rPr lang="en-US" sz="1100" dirty="0">
+                          <a:solidFill>
+                            <a:srgbClr val="5A534C"/>
+                          </a:solidFill>
+                          <a:latin typeface="Calibri" pitchFamily="34" charset="0"/>
+                          <a:ea typeface="Calibri" pitchFamily="34" charset="-122"/>
+                          <a:cs typeface="Calibri" pitchFamily="34" charset="-120"/>
+                        </a:rPr>
+                        <a:t>48,309</a:t>
+                      </a:r>
+                      <a:endParaRPr lang="en-US" sz="1100" dirty="0">
+                        <a:latin typeface="Calibri" charset="0"/>
+                        <a:ea typeface="Calibri" charset="0"/>
+                        <a:cs typeface="Calibri" charset="0"/>
+                      </a:endParaRPr>
+                    </a:p>
+                  </a:txBody>
+                  <a:tcPr marL="76200" marR="76200" marT="38100" marB="38100" anchor="ctr">
+                    <a:lnL w="9525" cap="flat" cmpd="sng" algn="ctr">
+                      <a:solidFill>
+                        <a:srgbClr val="E7E3DE"/>
+                      </a:solidFill>
+                      <a:prstDash val="solid"/>
+                      <a:round/>
+                      <a:headEnd type="none" w="med" len="med"/>
+                      <a:tailEnd type="none" w="med" len="med"/>
+                    </a:lnL>
+                    <a:lnR w="9525" cap="flat" cmpd="sng" algn="ctr">
+                      <a:solidFill>
+                        <a:srgbClr val="E7E3DE"/>
+                      </a:solidFill>
+                      <a:prstDash val="solid"/>
+                      <a:round/>
+                      <a:headEnd type="none" w="med" len="med"/>
+                      <a:tailEnd type="none" w="med" len="med"/>
+                    </a:lnR>
+                    <a:lnT w="9525" cap="flat" cmpd="sng" algn="ctr">
+                      <a:solidFill>
+                        <a:srgbClr val="E7E3DE"/>
+                      </a:solidFill>
+                      <a:prstDash val="solid"/>
+                      <a:round/>
+                      <a:headEnd type="none" w="med" len="med"/>
+                      <a:tailEnd type="none" w="med" len="med"/>
+                    </a:lnT>
+                    <a:lnB w="9525" cap="flat" cmpd="sng" algn="ctr">
+                      <a:solidFill>
+                        <a:srgbClr val="E7E3DE"/>
+                      </a:solidFill>
+                      <a:prstDash val="solid"/>
+                      <a:round/>
+                      <a:headEnd type="none" w="med" len="med"/>
+                      <a:tailEnd type="none" w="med" len="med"/>
+                    </a:lnB>
+                    <a:solidFill>
+                      <a:srgbClr val="FFFFFF"/>
+                    </a:solidFill>
+                  </a:tcPr>
+                </a:tc>
+              </a:tr>
+              <a:tr h="283464">
+                <a:tc>
+                  <a:txBody>
+                    <a:bodyPr/>
+                    <a:lstStyle/>
+                    <a:p>
+                      <a:pPr indent="0" marL="0">
+                        <a:buNone/>
+                      </a:pPr>
+                      <a:r>
+                        <a:rPr lang="en-US" sz="1100" b="1" dirty="0">
+                          <a:solidFill>
+                            <a:srgbClr val="2C2825"/>
+                          </a:solidFill>
+                          <a:latin typeface="Calibri" pitchFamily="34" charset="0"/>
+                          <a:ea typeface="Calibri" pitchFamily="34" charset="-122"/>
+                          <a:cs typeface="Calibri" pitchFamily="34" charset="-120"/>
+                        </a:rPr>
+                        <a:t>Shipped goods</a:t>
+                      </a:r>
+                      <a:endParaRPr lang="en-US" sz="1100" dirty="0">
+                        <a:latin typeface="Calibri" charset="0"/>
+                        <a:ea typeface="Calibri" charset="0"/>
+                        <a:cs typeface="Calibri" charset="0"/>
+                      </a:endParaRPr>
+                    </a:p>
+                  </a:txBody>
+                  <a:tcPr marL="76200" marR="76200" marT="38100" marB="38100" anchor="ctr">
+                    <a:lnL w="9525" cap="flat" cmpd="sng" algn="ctr">
+                      <a:solidFill>
+                        <a:srgbClr val="E7E3DE"/>
+                      </a:solidFill>
+                      <a:prstDash val="solid"/>
+                      <a:round/>
+                      <a:headEnd type="none" w="med" len="med"/>
+                      <a:tailEnd type="none" w="med" len="med"/>
+                    </a:lnL>
+                    <a:lnR w="9525" cap="flat" cmpd="sng" algn="ctr">
+                      <a:solidFill>
+                        <a:srgbClr val="E7E3DE"/>
+                      </a:solidFill>
+                      <a:prstDash val="solid"/>
+                      <a:round/>
+                      <a:headEnd type="none" w="med" len="med"/>
+                      <a:tailEnd type="none" w="med" len="med"/>
+                    </a:lnR>
+                    <a:lnT w="9525" cap="flat" cmpd="sng" algn="ctr">
+                      <a:solidFill>
+                        <a:srgbClr val="E7E3DE"/>
+                      </a:solidFill>
+                      <a:prstDash val="solid"/>
+                      <a:round/>
+                      <a:headEnd type="none" w="med" len="med"/>
+                      <a:tailEnd type="none" w="med" len="med"/>
+                    </a:lnT>
+                    <a:lnB w="9525" cap="flat" cmpd="sng" algn="ctr">
+                      <a:solidFill>
+                        <a:srgbClr val="E7E3DE"/>
+                      </a:solidFill>
+                      <a:prstDash val="solid"/>
+                      <a:round/>
+                      <a:headEnd type="none" w="med" len="med"/>
+                      <a:tailEnd type="none" w="med" len="med"/>
+                    </a:lnB>
+                    <a:solidFill>
+                      <a:srgbClr val="FFFFFF"/>
+                    </a:solidFill>
+                  </a:tcPr>
+                </a:tc>
+                <a:tc>
+                  <a:txBody>
+                    <a:bodyPr/>
+                    <a:lstStyle/>
+                    <a:p>
+                      <a:pPr indent="0" marL="0">
+                        <a:buNone/>
+                      </a:pPr>
+                      <a:r>
+                        <a:rPr lang="en-US" sz="1100" dirty="0">
+                          <a:solidFill>
+                            <a:srgbClr val="5A534C"/>
+                          </a:solidFill>
+                          <a:latin typeface="Calibri" pitchFamily="34" charset="0"/>
+                          <a:ea typeface="Calibri" pitchFamily="34" charset="-122"/>
+                          <a:cs typeface="Calibri" pitchFamily="34" charset="-120"/>
+                        </a:rPr>
+                        <a:t>Nov '26</a:t>
+                      </a:r>
+                      <a:endParaRPr lang="en-US" sz="1100" dirty="0">
+                        <a:latin typeface="Calibri" charset="0"/>
+                        <a:ea typeface="Calibri" charset="0"/>
+                        <a:cs typeface="Calibri" charset="0"/>
+                      </a:endParaRPr>
+                    </a:p>
+                  </a:txBody>
+                  <a:tcPr marL="76200" marR="76200" marT="38100" marB="38100" anchor="ctr">
+                    <a:lnL w="9525" cap="flat" cmpd="sng" algn="ctr">
+                      <a:solidFill>
+                        <a:srgbClr val="E7E3DE"/>
+                      </a:solidFill>
+                      <a:prstDash val="solid"/>
+                      <a:round/>
+                      <a:headEnd type="none" w="med" len="med"/>
+                      <a:tailEnd type="none" w="med" len="med"/>
+                    </a:lnL>
+                    <a:lnR w="9525" cap="flat" cmpd="sng" algn="ctr">
+                      <a:solidFill>
+                        <a:srgbClr val="E7E3DE"/>
+                      </a:solidFill>
+                      <a:prstDash val="solid"/>
+                      <a:round/>
+                      <a:headEnd type="none" w="med" len="med"/>
+                      <a:tailEnd type="none" w="med" len="med"/>
+                    </a:lnR>
+                    <a:lnT w="9525" cap="flat" cmpd="sng" algn="ctr">
+                      <a:solidFill>
+                        <a:srgbClr val="E7E3DE"/>
+                      </a:solidFill>
+                      <a:prstDash val="solid"/>
+                      <a:round/>
+                      <a:headEnd type="none" w="med" len="med"/>
+                      <a:tailEnd type="none" w="med" len="med"/>
+                    </a:lnT>
+                    <a:lnB w="9525" cap="flat" cmpd="sng" algn="ctr">
+                      <a:solidFill>
+                        <a:srgbClr val="E7E3DE"/>
+                      </a:solidFill>
+                      <a:prstDash val="solid"/>
+                      <a:round/>
+                      <a:headEnd type="none" w="med" len="med"/>
+                      <a:tailEnd type="none" w="med" len="med"/>
+                    </a:lnB>
+                    <a:solidFill>
+                      <a:srgbClr val="FFFFFF"/>
+                    </a:solidFill>
+                  </a:tcPr>
+                </a:tc>
+                <a:tc>
+                  <a:txBody>
+                    <a:bodyPr/>
+                    <a:lstStyle/>
+                    <a:p>
+                      <a:pPr algn="r" indent="0" marL="0">
+                        <a:buNone/>
+                      </a:pPr>
+                      <a:r>
+                        <a:rPr lang="en-US" sz="1100" dirty="0">
+                          <a:solidFill>
+                            <a:srgbClr val="5A534C"/>
+                          </a:solidFill>
+                          <a:latin typeface="Calibri" pitchFamily="34" charset="0"/>
+                          <a:ea typeface="Calibri" pitchFamily="34" charset="-122"/>
+                          <a:cs typeface="Calibri" pitchFamily="34" charset="-120"/>
+                        </a:rPr>
+                        <a:t>Nationwide</a:t>
+                      </a:r>
+                      <a:endParaRPr lang="en-US" sz="1100" dirty="0">
+                        <a:latin typeface="Calibri" charset="0"/>
+                        <a:ea typeface="Calibri" charset="0"/>
+                        <a:cs typeface="Calibri" charset="0"/>
+                      </a:endParaRPr>
+                    </a:p>
+                  </a:txBody>
+                  <a:tcPr marL="76200" marR="76200" marT="38100" marB="38100" anchor="ctr">
+                    <a:lnL w="9525" cap="flat" cmpd="sng" algn="ctr">
+                      <a:solidFill>
+                        <a:srgbClr val="E7E3DE"/>
+                      </a:solidFill>
+                      <a:prstDash val="solid"/>
+                      <a:round/>
+                      <a:headEnd type="none" w="med" len="med"/>
+                      <a:tailEnd type="none" w="med" len="med"/>
+                    </a:lnL>
+                    <a:lnR w="9525" cap="flat" cmpd="sng" algn="ctr">
+                      <a:solidFill>
+                        <a:srgbClr val="E7E3DE"/>
+                      </a:solidFill>
+                      <a:prstDash val="solid"/>
+                      <a:round/>
+                      <a:headEnd type="none" w="med" len="med"/>
+                      <a:tailEnd type="none" w="med" len="med"/>
+                    </a:lnR>
+                    <a:lnT w="9525" cap="flat" cmpd="sng" algn="ctr">
+                      <a:solidFill>
+                        <a:srgbClr val="E7E3DE"/>
+                      </a:solidFill>
+                      <a:prstDash val="solid"/>
+                      <a:round/>
+                      <a:headEnd type="none" w="med" len="med"/>
+                      <a:tailEnd type="none" w="med" len="med"/>
+                    </a:lnT>
+                    <a:lnB w="9525" cap="flat" cmpd="sng" algn="ctr">
+                      <a:solidFill>
+                        <a:srgbClr val="E7E3DE"/>
+                      </a:solidFill>
+                      <a:prstDash val="solid"/>
+                      <a:round/>
+                      <a:headEnd type="none" w="med" len="med"/>
+                      <a:tailEnd type="none" w="med" len="med"/>
+                    </a:lnB>
+                    <a:solidFill>
+                      <a:srgbClr val="FFFFFF"/>
+                    </a:solidFill>
+                  </a:tcPr>
+                </a:tc>
+                <a:tc>
+                  <a:txBody>
+                    <a:bodyPr/>
+                    <a:lstStyle/>
+                    <a:p>
+                      <a:pPr algn="r" indent="0" marL="0">
+                        <a:buNone/>
+                      </a:pPr>
+                      <a:r>
+                        <a:rPr lang="en-US" sz="1100" dirty="0">
+                          <a:solidFill>
+                            <a:srgbClr val="2C2825"/>
+                          </a:solidFill>
+                          <a:latin typeface="Calibri" pitchFamily="34" charset="0"/>
+                          <a:ea typeface="Calibri" pitchFamily="34" charset="-122"/>
+                          <a:cs typeface="Calibri" pitchFamily="34" charset="-120"/>
+                        </a:rPr>
+                        <a:t>148</a:t>
+                      </a:r>
+                      <a:endParaRPr lang="en-US" sz="1100" dirty="0">
+                        <a:latin typeface="Calibri" charset="0"/>
+                        <a:ea typeface="Calibri" charset="0"/>
+                        <a:cs typeface="Calibri" charset="0"/>
+                      </a:endParaRPr>
+                    </a:p>
+                  </a:txBody>
+                  <a:tcPr marL="76200" marR="76200" marT="38100" marB="38100" anchor="ctr">
+                    <a:lnL w="9525" cap="flat" cmpd="sng" algn="ctr">
+                      <a:solidFill>
+                        <a:srgbClr val="E7E3DE"/>
+                      </a:solidFill>
+                      <a:prstDash val="solid"/>
+                      <a:round/>
+                      <a:headEnd type="none" w="med" len="med"/>
+                      <a:tailEnd type="none" w="med" len="med"/>
+                    </a:lnL>
+                    <a:lnR w="9525" cap="flat" cmpd="sng" algn="ctr">
+                      <a:solidFill>
+                        <a:srgbClr val="E7E3DE"/>
+                      </a:solidFill>
+                      <a:prstDash val="solid"/>
+                      <a:round/>
+                      <a:headEnd type="none" w="med" len="med"/>
+                      <a:tailEnd type="none" w="med" len="med"/>
+                    </a:lnR>
+                    <a:lnT w="9525" cap="flat" cmpd="sng" algn="ctr">
+                      <a:solidFill>
+                        <a:srgbClr val="E7E3DE"/>
+                      </a:solidFill>
+                      <a:prstDash val="solid"/>
+                      <a:round/>
+                      <a:headEnd type="none" w="med" len="med"/>
+                      <a:tailEnd type="none" w="med" len="med"/>
+                    </a:lnT>
+                    <a:lnB w="9525" cap="flat" cmpd="sng" algn="ctr">
+                      <a:solidFill>
+                        <a:srgbClr val="E7E3DE"/>
+                      </a:solidFill>
+                      <a:prstDash val="solid"/>
+                      <a:round/>
+                      <a:headEnd type="none" w="med" len="med"/>
+                      <a:tailEnd type="none" w="med" len="med"/>
+                    </a:lnB>
+                    <a:solidFill>
+                      <a:srgbClr val="FFFFFF"/>
+                    </a:solidFill>
+                  </a:tcPr>
+                </a:tc>
+                <a:tc>
+                  <a:txBody>
+                    <a:bodyPr/>
+                    <a:lstStyle/>
+                    <a:p>
+                      <a:pPr algn="r" indent="0" marL="0">
+                        <a:buNone/>
+                      </a:pPr>
+                      <a:r>
+                        <a:rPr lang="en-US" sz="1100" dirty="0">
+                          <a:solidFill>
+                            <a:srgbClr val="5A534C"/>
+                          </a:solidFill>
+                          <a:latin typeface="Calibri" pitchFamily="34" charset="0"/>
+                          <a:ea typeface="Calibri" pitchFamily="34" charset="-122"/>
+                          <a:cs typeface="Calibri" pitchFamily="34" charset="-120"/>
+                        </a:rPr>
+                        <a:t>—</a:t>
+                      </a:r>
+                      <a:endParaRPr lang="en-US" sz="1100" dirty="0">
+                        <a:latin typeface="Calibri" charset="0"/>
+                        <a:ea typeface="Calibri" charset="0"/>
+                        <a:cs typeface="Calibri" charset="0"/>
+                      </a:endParaRPr>
+                    </a:p>
+                  </a:txBody>
+                  <a:tcPr marL="76200" marR="76200" marT="38100" marB="38100" anchor="ctr">
+                    <a:lnL w="9525" cap="flat" cmpd="sng" algn="ctr">
+                      <a:solidFill>
+                        <a:srgbClr val="E7E3DE"/>
+                      </a:solidFill>
+                      <a:prstDash val="solid"/>
+                      <a:round/>
+                      <a:headEnd type="none" w="med" len="med"/>
+                      <a:tailEnd type="none" w="med" len="med"/>
+                    </a:lnL>
+                    <a:lnR w="9525" cap="flat" cmpd="sng" algn="ctr">
+                      <a:solidFill>
+                        <a:srgbClr val="E7E3DE"/>
+                      </a:solidFill>
+                      <a:prstDash val="solid"/>
+                      <a:round/>
+                      <a:headEnd type="none" w="med" len="med"/>
+                      <a:tailEnd type="none" w="med" len="med"/>
+                    </a:lnR>
+                    <a:lnT w="9525" cap="flat" cmpd="sng" algn="ctr">
+                      <a:solidFill>
+                        <a:srgbClr val="E7E3DE"/>
+                      </a:solidFill>
+                      <a:prstDash val="solid"/>
+                      <a:round/>
+                      <a:headEnd type="none" w="med" len="med"/>
+                      <a:tailEnd type="none" w="med" len="med"/>
+                    </a:lnT>
+                    <a:lnB w="9525" cap="flat" cmpd="sng" algn="ctr">
+                      <a:solidFill>
+                        <a:srgbClr val="E7E3DE"/>
+                      </a:solidFill>
+                      <a:prstDash val="solid"/>
+                      <a:round/>
+                      <a:headEnd type="none" w="med" len="med"/>
+                      <a:tailEnd type="none" w="med" len="med"/>
+                    </a:lnB>
+                    <a:solidFill>
+                      <a:srgbClr val="FFFFFF"/>
+                    </a:solidFill>
+                  </a:tcPr>
+                </a:tc>
+              </a:tr>
+              <a:tr h="283464">
+                <a:tc>
+                  <a:txBody>
+                    <a:bodyPr/>
+                    <a:lstStyle/>
+                    <a:p>
+                      <a:pPr indent="0" marL="0">
+                        <a:buNone/>
+                      </a:pPr>
+                      <a:r>
+                        <a:rPr lang="en-US" sz="1100" b="1" dirty="0">
+                          <a:solidFill>
+                            <a:srgbClr val="2C2825"/>
+                          </a:solidFill>
+                          <a:latin typeface="Calibri" pitchFamily="34" charset="0"/>
+                          <a:ea typeface="Calibri" pitchFamily="34" charset="-122"/>
+                          <a:cs typeface="Calibri" pitchFamily="34" charset="-120"/>
+                        </a:rPr>
+                        <a:t>Total</a:t>
+                      </a:r>
+                      <a:endParaRPr lang="en-US" sz="1100" dirty="0">
+                        <a:latin typeface="Calibri" charset="0"/>
+                        <a:ea typeface="Calibri" charset="0"/>
+                        <a:cs typeface="Calibri" charset="0"/>
+                      </a:endParaRPr>
+                    </a:p>
+                  </a:txBody>
+                  <a:tcPr marL="76200" marR="76200" marT="38100" marB="38100" anchor="ctr">
+                    <a:lnL w="9525" cap="flat" cmpd="sng" algn="ctr">
+                      <a:solidFill>
+                        <a:srgbClr val="E7E3DE"/>
+                      </a:solidFill>
+                      <a:prstDash val="solid"/>
+                      <a:round/>
+                      <a:headEnd type="none" w="med" len="med"/>
+                      <a:tailEnd type="none" w="med" len="med"/>
+                    </a:lnL>
+                    <a:lnR w="9525" cap="flat" cmpd="sng" algn="ctr">
+                      <a:solidFill>
+                        <a:srgbClr val="E7E3DE"/>
+                      </a:solidFill>
+                      <a:prstDash val="solid"/>
+                      <a:round/>
+                      <a:headEnd type="none" w="med" len="med"/>
+                      <a:tailEnd type="none" w="med" len="med"/>
+                    </a:lnR>
+                    <a:lnT w="9525" cap="flat" cmpd="sng" algn="ctr">
+                      <a:solidFill>
+                        <a:srgbClr val="E7E3DE"/>
+                      </a:solidFill>
+                      <a:prstDash val="solid"/>
+                      <a:round/>
+                      <a:headEnd type="none" w="med" len="med"/>
+                      <a:tailEnd type="none" w="med" len="med"/>
+                    </a:lnT>
+                    <a:lnB w="9525" cap="flat" cmpd="sng" algn="ctr">
+                      <a:solidFill>
+                        <a:srgbClr val="E7E3DE"/>
+                      </a:solidFill>
+                      <a:prstDash val="solid"/>
+                      <a:round/>
+                      <a:headEnd type="none" w="med" len="med"/>
+                      <a:tailEnd type="none" w="med" len="med"/>
+                    </a:lnB>
+                    <a:solidFill>
+                      <a:srgbClr val="FFFFFF"/>
+                    </a:solidFill>
+                  </a:tcPr>
+                </a:tc>
+                <a:tc>
+                  <a:txBody>
+                    <a:bodyPr/>
+                    <a:lstStyle/>
+                    <a:p>
+                      <a:pPr indent="0" marL="0">
+                        <a:buNone/>
+                      </a:pPr>
+                      <a:endParaRPr lang="en-US" sz="1100" dirty="0">
+                        <a:latin typeface="Calibri" charset="0"/>
+                        <a:ea typeface="Calibri" charset="0"/>
+                        <a:cs typeface="Calibri" charset="0"/>
+                      </a:endParaRPr>
+                    </a:p>
+                  </a:txBody>
+                  <a:tcPr marL="76200" marR="76200" marT="38100" marB="38100" anchor="ctr">
+                    <a:lnL w="9525" cap="flat" cmpd="sng" algn="ctr">
+                      <a:solidFill>
+                        <a:srgbClr val="E7E3DE"/>
+                      </a:solidFill>
+                      <a:prstDash val="solid"/>
+                      <a:round/>
+                      <a:headEnd type="none" w="med" len="med"/>
+                      <a:tailEnd type="none" w="med" len="med"/>
+                    </a:lnL>
+                    <a:lnR w="9525" cap="flat" cmpd="sng" algn="ctr">
+                      <a:solidFill>
+                        <a:srgbClr val="E7E3DE"/>
+                      </a:solidFill>
+                      <a:prstDash val="solid"/>
+                      <a:round/>
+                      <a:headEnd type="none" w="med" len="med"/>
+                      <a:tailEnd type="none" w="med" len="med"/>
+                    </a:lnR>
+                    <a:lnT w="9525" cap="flat" cmpd="sng" algn="ctr">
+                      <a:solidFill>
+                        <a:srgbClr val="E7E3DE"/>
+                      </a:solidFill>
+                      <a:prstDash val="solid"/>
+                      <a:round/>
+                      <a:headEnd type="none" w="med" len="med"/>
+                      <a:tailEnd type="none" w="med" len="med"/>
+                    </a:lnT>
+                    <a:lnB w="9525" cap="flat" cmpd="sng" algn="ctr">
+                      <a:solidFill>
+                        <a:srgbClr val="E7E3DE"/>
+                      </a:solidFill>
+                      <a:prstDash val="solid"/>
+                      <a:round/>
+                      <a:headEnd type="none" w="med" len="med"/>
+                      <a:tailEnd type="none" w="med" len="med"/>
+                    </a:lnB>
+                    <a:solidFill>
+                      <a:srgbClr val="FFFFFF"/>
+                    </a:solidFill>
+                  </a:tcPr>
+                </a:tc>
+                <a:tc>
+                  <a:txBody>
+                    <a:bodyPr/>
+                    <a:lstStyle/>
+                    <a:p>
+                      <a:pPr indent="0" marL="0">
+                        <a:buNone/>
+                      </a:pPr>
+                      <a:endParaRPr lang="en-US" sz="1100" dirty="0">
+                        <a:latin typeface="Calibri" charset="0"/>
+                        <a:ea typeface="Calibri" charset="0"/>
+                        <a:cs typeface="Calibri" charset="0"/>
+                      </a:endParaRPr>
+                    </a:p>
+                  </a:txBody>
+                  <a:tcPr marL="76200" marR="76200" marT="38100" marB="38100" anchor="ctr">
+                    <a:lnL w="9525" cap="flat" cmpd="sng" algn="ctr">
+                      <a:solidFill>
+                        <a:srgbClr val="E7E3DE"/>
+                      </a:solidFill>
+                      <a:prstDash val="solid"/>
+                      <a:round/>
+                      <a:headEnd type="none" w="med" len="med"/>
+                      <a:tailEnd type="none" w="med" len="med"/>
+                    </a:lnL>
+                    <a:lnR w="9525" cap="flat" cmpd="sng" algn="ctr">
+                      <a:solidFill>
+                        <a:srgbClr val="E7E3DE"/>
+                      </a:solidFill>
+                      <a:prstDash val="solid"/>
+                      <a:round/>
+                      <a:headEnd type="none" w="med" len="med"/>
+                      <a:tailEnd type="none" w="med" len="med"/>
+                    </a:lnR>
+                    <a:lnT w="9525" cap="flat" cmpd="sng" algn="ctr">
+                      <a:solidFill>
+                        <a:srgbClr val="E7E3DE"/>
+                      </a:solidFill>
+                      <a:prstDash val="solid"/>
+                      <a:round/>
+                      <a:headEnd type="none" w="med" len="med"/>
+                      <a:tailEnd type="none" w="med" len="med"/>
+                    </a:lnT>
+                    <a:lnB w="9525" cap="flat" cmpd="sng" algn="ctr">
+                      <a:solidFill>
+                        <a:srgbClr val="E7E3DE"/>
+                      </a:solidFill>
+                      <a:prstDash val="solid"/>
+                      <a:round/>
+                      <a:headEnd type="none" w="med" len="med"/>
+                      <a:tailEnd type="none" w="med" len="med"/>
+                    </a:lnB>
+                    <a:solidFill>
+                      <a:srgbClr val="FFFFFF"/>
+                    </a:solidFill>
+                  </a:tcPr>
+                </a:tc>
+                <a:tc>
+                  <a:txBody>
+                    <a:bodyPr/>
+                    <a:lstStyle/>
+                    <a:p>
+                      <a:pPr algn="r" indent="0" marL="0">
+                        <a:buNone/>
+                      </a:pPr>
+                      <a:r>
+                        <a:rPr lang="en-US" sz="1100" b="1" dirty="0">
+                          <a:solidFill>
+                            <a:srgbClr val="2C2825"/>
+                          </a:solidFill>
+                          <a:latin typeface="Calibri" pitchFamily="34" charset="0"/>
+                          <a:ea typeface="Calibri" pitchFamily="34" charset="-122"/>
+                          <a:cs typeface="Calibri" pitchFamily="34" charset="-120"/>
+                        </a:rPr>
+                        <a:t>2,275</a:t>
+                      </a:r>
+                      <a:endParaRPr lang="en-US" sz="1100" dirty="0">
+                        <a:latin typeface="Calibri" charset="0"/>
+                        <a:ea typeface="Calibri" charset="0"/>
+                        <a:cs typeface="Calibri" charset="0"/>
+                      </a:endParaRPr>
+                    </a:p>
+                  </a:txBody>
+                  <a:tcPr marL="76200" marR="76200" marT="38100" marB="38100" anchor="ctr">
+                    <a:lnL w="9525" cap="flat" cmpd="sng" algn="ctr">
+                      <a:solidFill>
+                        <a:srgbClr val="E7E3DE"/>
+                      </a:solidFill>
+                      <a:prstDash val="solid"/>
+                      <a:round/>
+                      <a:headEnd type="none" w="med" len="med"/>
+                      <a:tailEnd type="none" w="med" len="med"/>
+                    </a:lnL>
+                    <a:lnR w="9525" cap="flat" cmpd="sng" algn="ctr">
+                      <a:solidFill>
+                        <a:srgbClr val="E7E3DE"/>
+                      </a:solidFill>
+                      <a:prstDash val="solid"/>
+                      <a:round/>
+                      <a:headEnd type="none" w="med" len="med"/>
+                      <a:tailEnd type="none" w="med" len="med"/>
+                    </a:lnR>
+                    <a:lnT w="9525" cap="flat" cmpd="sng" algn="ctr">
+                      <a:solidFill>
+                        <a:srgbClr val="E7E3DE"/>
+                      </a:solidFill>
+                      <a:prstDash val="solid"/>
+                      <a:round/>
+                      <a:headEnd type="none" w="med" len="med"/>
+                      <a:tailEnd type="none" w="med" len="med"/>
+                    </a:lnT>
+                    <a:lnB w="9525" cap="flat" cmpd="sng" algn="ctr">
+                      <a:solidFill>
+                        <a:srgbClr val="E7E3DE"/>
+                      </a:solidFill>
+                      <a:prstDash val="solid"/>
+                      <a:round/>
+                      <a:headEnd type="none" w="med" len="med"/>
+                      <a:tailEnd type="none" w="med" len="med"/>
+                    </a:lnB>
+                    <a:solidFill>
+                      <a:srgbClr val="FFFFFF"/>
+                    </a:solidFill>
+                  </a:tcPr>
+                </a:tc>
+                <a:tc>
+                  <a:txBody>
+                    <a:bodyPr/>
+                    <a:lstStyle/>
+                    <a:p>
+                      <a:pPr indent="0" marL="0">
+                        <a:buNone/>
+                      </a:pPr>
+                      <a:endParaRPr lang="en-US" sz="1100" dirty="0">
+                        <a:latin typeface="Calibri" charset="0"/>
+                        <a:ea typeface="Calibri" charset="0"/>
+                        <a:cs typeface="Calibri" charset="0"/>
+                      </a:endParaRPr>
+                    </a:p>
+                  </a:txBody>
+                  <a:tcPr marL="76200" marR="76200" marT="38100" marB="38100" anchor="ctr">
+                    <a:lnL w="9525" cap="flat" cmpd="sng" algn="ctr">
+                      <a:solidFill>
+                        <a:srgbClr val="E7E3DE"/>
+                      </a:solidFill>
+                      <a:prstDash val="solid"/>
+                      <a:round/>
+                      <a:headEnd type="none" w="med" len="med"/>
+                      <a:tailEnd type="none" w="med" len="med"/>
+                    </a:lnL>
+                    <a:lnR w="9525" cap="flat" cmpd="sng" algn="ctr">
+                      <a:solidFill>
+                        <a:srgbClr val="E7E3DE"/>
+                      </a:solidFill>
+                      <a:prstDash val="solid"/>
+                      <a:round/>
+                      <a:headEnd type="none" w="med" len="med"/>
+                      <a:tailEnd type="none" w="med" len="med"/>
+                    </a:lnR>
+                    <a:lnT w="9525" cap="flat" cmpd="sng" algn="ctr">
+                      <a:solidFill>
+                        <a:srgbClr val="E7E3DE"/>
+                      </a:solidFill>
+                      <a:prstDash val="solid"/>
+                      <a:round/>
+                      <a:headEnd type="none" w="med" len="med"/>
+                      <a:tailEnd type="none" w="med" len="med"/>
+                    </a:lnT>
+                    <a:lnB w="9525" cap="flat" cmpd="sng" algn="ctr">
+                      <a:solidFill>
+                        <a:srgbClr val="E7E3DE"/>
+                      </a:solidFill>
+                      <a:prstDash val="solid"/>
+                      <a:round/>
+                      <a:headEnd type="none" w="med" len="med"/>
+                      <a:tailEnd type="none" w="med" len="med"/>
+                    </a:lnB>
+                    <a:solidFill>
+                      <a:srgbClr val="FFFFFF"/>
+                    </a:solidFill>
+                  </a:tcPr>
+                </a:tc>
+              </a:tr>
+            </a:tbl>
+          </a:graphicData>
+        </a:graphic>
+      </p:graphicFrame>
+      <p:sp>
+        <p:nvSpPr>
+          <p:cNvPr id="8" name="Shape 4"/>
+          <p:cNvSpPr/>
+          <p:nvPr/>
+        </p:nvSpPr>
+        <p:spPr>
+          <a:xfrm>
+            <a:off x="685800" y="5632704"/>
+            <a:ext cx="3429000" cy="841248"/>
+          </a:xfrm>
+          <a:prstGeom prst="roundRect">
+            <a:avLst>
+              <a:gd name="adj" fmla="val 11957"/>
+            </a:avLst>
+          </a:prstGeom>
+          <a:solidFill>
+            <a:srgbClr val="F5EAE6"/>
+          </a:solidFill>
+          <a:ln w="9525">
+            <a:solidFill>
+              <a:srgbClr val="EBD8D1"/>
+            </a:solidFill>
+            <a:prstDash val="solid"/>
+          </a:ln>
+          <a:effectLst>
+            <a:outerShdw sx="100000" sy="100000" kx="0" ky="0" algn="bl" rotWithShape="0" blurRad="101600" dist="25400" dir="5400000">
+              <a:srgbClr val="2C2825">
+                <a:alpha val="6000"/>
+              </a:srgbClr>
+            </a:outerShdw>
+          </a:effectLst>
+        </p:spPr>
+      </p:sp>
+      <p:sp>
+        <p:nvSpPr>
+          <p:cNvPr id="9" name="Text 5"/>
+          <p:cNvSpPr txBox="1"/>
+          <p:nvPr/>
+        </p:nvSpPr>
+        <p:spPr>
+          <a:xfrm>
+            <a:off x="886968" y="5724144"/>
+            <a:ext cx="3035808" cy="237744"/>
+          </a:xfrm>
+          <a:prstGeom prst="rect">
+            <a:avLst/>
+          </a:prstGeom>
+          <a:noFill/>
+          <a:ln/>
+        </p:spPr>
+        <p:txBody>
+          <a:bodyPr wrap="square" lIns="0" tIns="0" rIns="0" bIns="0" rtlCol="0" anchor="ctr"/>
+          <a:lstStyle/>
+          <a:p>
+            <a:pPr indent="0" marL="0">
+              <a:buNone/>
+            </a:pPr>
+            <a:r>
+              <a:rPr lang="en-US" sz="1250" b="1" dirty="0">
+                <a:solidFill>
+                  <a:srgbClr val="8B3E2D"/>
+                </a:solidFill>
+                <a:latin typeface="Calibri" pitchFamily="34" charset="0"/>
+                <a:ea typeface="Calibri" pitchFamily="34" charset="-122"/>
+                <a:cs typeface="Calibri" pitchFamily="34" charset="-120"/>
+              </a:rPr>
+              <a:t>3-month free trial</a:t>
+            </a:r>
+            <a:endParaRPr lang="en-US" sz="1250" dirty="0"/>
+          </a:p>
+        </p:txBody>
+      </p:sp>
+      <p:sp>
+        <p:nvSpPr>
+          <p:cNvPr id="10" name="Text 6"/>
+          <p:cNvSpPr txBox="1"/>
+          <p:nvPr/>
+        </p:nvSpPr>
+        <p:spPr>
+          <a:xfrm>
+            <a:off x="886968" y="5980176"/>
+            <a:ext cx="3035808" cy="438912"/>
+          </a:xfrm>
+          <a:prstGeom prst="rect">
+            <a:avLst/>
+          </a:prstGeom>
+          <a:noFill/>
+          <a:ln/>
+        </p:spPr>
+        <p:txBody>
+          <a:bodyPr wrap="square" lIns="0" tIns="0" rIns="0" bIns="0" rtlCol="0" anchor="ctr"/>
+          <a:lstStyle/>
+          <a:p>
+            <a:pPr indent="0" marL="0">
+              <a:lnSpc>
+                <a:spcPts val="1350"/>
+              </a:lnSpc>
+              <a:buNone/>
+            </a:pPr>
+            <a:r>
+              <a:rPr lang="en-US" sz="1050" dirty="0">
+                <a:solidFill>
+                  <a:srgbClr val="5A534C"/>
+                </a:solidFill>
+                <a:latin typeface="Calibri" pitchFamily="34" charset="0"/>
+                <a:ea typeface="Calibri" pitchFamily="34" charset="-122"/>
+                <a:cs typeface="Calibri" pitchFamily="34" charset="-120"/>
+              </a:rPr>
+              <a:t>Every vendor starts free, so the first payment lands three months after signup.</a:t>
+            </a:r>
+            <a:endParaRPr lang="en-US" sz="1050" dirty="0"/>
+          </a:p>
+        </p:txBody>
+      </p:sp>
+      <p:sp>
+        <p:nvSpPr>
+          <p:cNvPr id="11" name="Shape 7"/>
+          <p:cNvSpPr/>
+          <p:nvPr/>
+        </p:nvSpPr>
+        <p:spPr>
+          <a:xfrm>
+            <a:off x="4343400" y="5632704"/>
+            <a:ext cx="3429000" cy="841248"/>
+          </a:xfrm>
+          <a:prstGeom prst="roundRect">
+            <a:avLst>
+              <a:gd name="adj" fmla="val 11957"/>
+            </a:avLst>
+          </a:prstGeom>
+          <a:solidFill>
+            <a:srgbClr val="EAF0EB"/>
+          </a:solidFill>
+          <a:ln w="9525">
+            <a:solidFill>
+              <a:srgbClr val="D8E3D9"/>
+            </a:solidFill>
+            <a:prstDash val="solid"/>
+          </a:ln>
+          <a:effectLst>
+            <a:outerShdw sx="100000" sy="100000" kx="0" ky="0" algn="bl" rotWithShape="0" blurRad="101600" dist="25400" dir="5400000">
+              <a:srgbClr val="2C2825">
+                <a:alpha val="6000"/>
+              </a:srgbClr>
+            </a:outerShdw>
+          </a:effectLst>
+        </p:spPr>
+      </p:sp>
+      <p:sp>
+        <p:nvSpPr>
+          <p:cNvPr id="12" name="Text 8"/>
+          <p:cNvSpPr txBox="1"/>
+          <p:nvPr/>
+        </p:nvSpPr>
+        <p:spPr>
+          <a:xfrm>
+            <a:off x="4544568" y="5724144"/>
+            <a:ext cx="3035808" cy="237744"/>
+          </a:xfrm>
+          <a:prstGeom prst="rect">
+            <a:avLst/>
+          </a:prstGeom>
+          <a:noFill/>
+          <a:ln/>
+        </p:spPr>
+        <p:txBody>
+          <a:bodyPr wrap="square" lIns="0" tIns="0" rIns="0" bIns="0" rtlCol="0" anchor="ctr"/>
+          <a:lstStyle/>
+          <a:p>
+            <a:pPr indent="0" marL="0">
+              <a:buNone/>
+            </a:pPr>
+            <a:r>
+              <a:rPr lang="en-US" sz="1250" b="1" dirty="0">
+                <a:solidFill>
+                  <a:srgbClr val="4D7255"/>
+                </a:solidFill>
+                <a:latin typeface="Calibri" pitchFamily="34" charset="0"/>
+                <a:ea typeface="Calibri" pitchFamily="34" charset="-122"/>
+                <a:cs typeface="Calibri" pitchFamily="34" charset="-120"/>
+              </a:rPr>
+              <a:t>10% attrition</a:t>
+            </a:r>
+            <a:endParaRPr lang="en-US" sz="1250" dirty="0"/>
+          </a:p>
+        </p:txBody>
+      </p:sp>
+      <p:sp>
+        <p:nvSpPr>
+          <p:cNvPr id="13" name="Text 9"/>
+          <p:cNvSpPr txBox="1"/>
+          <p:nvPr/>
+        </p:nvSpPr>
+        <p:spPr>
+          <a:xfrm>
+            <a:off x="4544568" y="5980176"/>
+            <a:ext cx="3035808" cy="438912"/>
+          </a:xfrm>
+          <a:prstGeom prst="rect">
+            <a:avLst/>
+          </a:prstGeom>
+          <a:noFill/>
+          <a:ln/>
+        </p:spPr>
+        <p:txBody>
+          <a:bodyPr wrap="square" lIns="0" tIns="0" rIns="0" bIns="0" rtlCol="0" anchor="ctr"/>
+          <a:lstStyle/>
+          <a:p>
+            <a:pPr indent="0" marL="0">
+              <a:lnSpc>
+                <a:spcPts val="1350"/>
+              </a:lnSpc>
+              <a:buNone/>
+            </a:pPr>
+            <a:r>
+              <a:rPr lang="en-US" sz="1050" dirty="0">
+                <a:solidFill>
+                  <a:srgbClr val="5A534C"/>
+                </a:solidFill>
+                <a:latin typeface="Calibri" pitchFamily="34" charset="0"/>
+                <a:ea typeface="Calibri" pitchFamily="34" charset="-122"/>
+                <a:cs typeface="Calibri" pitchFamily="34" charset="-120"/>
+              </a:rPr>
+              <a:t>A tenth of each converting cohort is written off — churn is in the model, not assumed away.</a:t>
+            </a:r>
+            <a:endParaRPr lang="en-US" sz="1050" dirty="0"/>
+          </a:p>
+        </p:txBody>
+      </p:sp>
+      <p:sp>
+        <p:nvSpPr>
+          <p:cNvPr id="14" name="Shape 10"/>
+          <p:cNvSpPr/>
+          <p:nvPr/>
+        </p:nvSpPr>
+        <p:spPr>
+          <a:xfrm>
+            <a:off x="8001000" y="5632704"/>
+            <a:ext cx="3429000" cy="841248"/>
+          </a:xfrm>
+          <a:prstGeom prst="roundRect">
+            <a:avLst>
+              <a:gd name="adj" fmla="val 11957"/>
+            </a:avLst>
+          </a:prstGeom>
+          <a:solidFill>
+            <a:srgbClr val="F5EAE6"/>
+          </a:solidFill>
+          <a:ln w="9525">
+            <a:solidFill>
+              <a:srgbClr val="EBD8D1"/>
+            </a:solidFill>
+            <a:prstDash val="solid"/>
+          </a:ln>
+          <a:effectLst>
+            <a:outerShdw sx="100000" sy="100000" kx="0" ky="0" algn="bl" rotWithShape="0" blurRad="101600" dist="25400" dir="5400000">
+              <a:srgbClr val="2C2825">
+                <a:alpha val="6000"/>
+              </a:srgbClr>
+            </a:outerShdw>
+          </a:effectLst>
+        </p:spPr>
+      </p:sp>
+      <p:sp>
+        <p:nvSpPr>
+          <p:cNvPr id="15" name="Text 11"/>
+          <p:cNvSpPr txBox="1"/>
+          <p:nvPr/>
+        </p:nvSpPr>
+        <p:spPr>
+          <a:xfrm>
+            <a:off x="8202168" y="5724144"/>
+            <a:ext cx="3035808" cy="237744"/>
+          </a:xfrm>
+          <a:prstGeom prst="rect">
+            <a:avLst/>
+          </a:prstGeom>
+          <a:noFill/>
+          <a:ln/>
+        </p:spPr>
+        <p:txBody>
+          <a:bodyPr wrap="square" lIns="0" tIns="0" rIns="0" bIns="0" rtlCol="0" anchor="ctr"/>
+          <a:lstStyle/>
+          <a:p>
+            <a:pPr indent="0" marL="0">
+              <a:buNone/>
+            </a:pPr>
+            <a:r>
+              <a:rPr lang="en-US" sz="1250" b="1" dirty="0">
+                <a:solidFill>
+                  <a:srgbClr val="8B3E2D"/>
+                </a:solidFill>
+                <a:latin typeface="Calibri" pitchFamily="34" charset="0"/>
+                <a:ea typeface="Calibri" pitchFamily="34" charset="-122"/>
+                <a:cs typeface="Calibri" pitchFamily="34" charset="-120"/>
+              </a:rPr>
+              <a:t>$29 → $39 from Dec '28</a:t>
+            </a:r>
+            <a:endParaRPr lang="en-US" sz="1250" dirty="0"/>
+          </a:p>
+        </p:txBody>
+      </p:sp>
+      <p:sp>
+        <p:nvSpPr>
+          <p:cNvPr id="16" name="Text 12"/>
+          <p:cNvSpPr txBox="1"/>
+          <p:nvPr/>
+        </p:nvSpPr>
+        <p:spPr>
+          <a:xfrm>
+            <a:off x="8202168" y="5980176"/>
+            <a:ext cx="3035808" cy="438912"/>
+          </a:xfrm>
+          <a:prstGeom prst="rect">
+            <a:avLst/>
+          </a:prstGeom>
+          <a:noFill/>
+          <a:ln/>
+        </p:spPr>
+        <p:txBody>
+          <a:bodyPr wrap="square" lIns="0" tIns="0" rIns="0" bIns="0" rtlCol="0" anchor="ctr"/>
+          <a:lstStyle/>
+          <a:p>
+            <a:pPr indent="0" marL="0">
+              <a:lnSpc>
+                <a:spcPts val="1350"/>
+              </a:lnSpc>
+              <a:buNone/>
+            </a:pPr>
+            <a:r>
+              <a:rPr lang="en-US" sz="1050" dirty="0">
+                <a:solidFill>
+                  <a:srgbClr val="5A534C"/>
+                </a:solidFill>
+                <a:latin typeface="Calibri" pitchFamily="34" charset="0"/>
+                <a:ea typeface="Calibri" pitchFamily="34" charset="-122"/>
+                <a:cs typeface="Calibri" pitchFamily="34" charset="-120"/>
+              </a:rPr>
+              <a:t>One price step in year three, once the marketplace has depth in five metros.</a:t>
+            </a:r>
+            <a:endParaRPr lang="en-US" sz="1050" dirty="0"/>
+          </a:p>
+        </p:txBody>
+      </p:sp>
+    </p:spTree>
+  </p:cSld>
+  <p:clrMapOvr>
+    <a:masterClrMapping/>
+  </p:clrMapOvr>
+</p:sld>
+</file>
+
+<file path=ppt/slides/slide8.xml><?xml version="1.0" encoding="utf-8"?>
+<p:sld xmlns:a="http://schemas.openxmlformats.org/drawingml/2006/main" xmlns:r="http://schemas.openxmlformats.org/officeDocument/2006/relationships" xmlns:p="http://schemas.openxmlformats.org/presentationml/2006/main">
+  <p:cSld name="Slide 8">
     <p:bg>
       <p:bgPr>
         <a:solidFill>

--- a/docs/pitch/CodaCo-Pitch-Deck.pptx
+++ b/docs/pitch/CodaCo-Pitch-Deck.pptx
@@ -545,22 +545,22 @@
                   <c:v>0</c:v>
                 </c:pt>
                 <c:pt idx="6">
-                  <c:v>0</c:v>
+                  <c:v>522</c:v>
                 </c:pt>
                 <c:pt idx="7">
-                  <c:v>0</c:v>
+                  <c:v>1363</c:v>
                 </c:pt>
                 <c:pt idx="8">
-                  <c:v>0</c:v>
+                  <c:v>2233</c:v>
                 </c:pt>
                 <c:pt idx="9">
-                  <c:v>0</c:v>
+                  <c:v>638</c:v>
                 </c:pt>
                 <c:pt idx="10">
-                  <c:v>0</c:v>
+                  <c:v>638</c:v>
                 </c:pt>
                 <c:pt idx="11">
-                  <c:v>783</c:v>
+                  <c:v>522</c:v>
                 </c:pt>
               </c:numCache>
             </c:numRef>
@@ -572,6 +572,143 @@
           <c:tx>
             <c:strRef>
               <c:f>Sheet1!$E$1</c:f>
+              <c:strCache>
+                <c:ptCount val="1"/>
+                <c:pt idx="0">
+                  <c:v>Los Angeles</c:v>
+                </c:pt>
+              </c:strCache>
+            </c:strRef>
+          </c:tx>
+          <c:spPr>
+            <a:solidFill>
+              <a:srgbClr val="4D7255"/>
+            </a:solidFill>
+            <a:effectLst/>
+          </c:spPr>
+          <c:invertIfNegative val="0"/>
+          <c:dLbls>
+            <c:numFmt formatCode="#,##0" sourceLinked="0"/>
+            <c:txPr>
+              <a:bodyPr/>
+              <a:lstStyle/>
+              <a:p>
+                <a:pPr>
+                  <a:defRPr b="0" i="0" strike="noStrike" sz="1200" u="none">
+                    <a:solidFill>
+                      <a:srgbClr val="000000"/>
+                    </a:solidFill>
+                    <a:latin typeface="Arial"/>
+                  </a:defRPr>
+                </a:pPr>
+              </a:p>
+            </c:txPr>
+            <c:showLegendKey val="0"/>
+            <c:showVal val="0"/>
+            <c:showCatName val="0"/>
+            <c:showSerName val="0"/>
+            <c:showPercent val="0"/>
+            <c:showBubbleSize val="0"/>
+            <c:showLeaderLines val="0"/>
+          </c:dLbls>
+          <c:cat>
+            <c:multiLvlStrRef>
+              <c:f>Sheet1!$A$2:$A$13</c:f>
+              <c:multiLvlStrCache>
+                <c:ptCount val="12"/>
+                <c:lvl>
+                  <c:pt idx="0">
+                    <c:v>Nov '26</c:v>
+                  </c:pt>
+                  <c:pt idx="1">
+                    <c:v>Dec</c:v>
+                  </c:pt>
+                  <c:pt idx="2">
+                    <c:v>Jan '27</c:v>
+                  </c:pt>
+                  <c:pt idx="3">
+                    <c:v>Feb</c:v>
+                  </c:pt>
+                  <c:pt idx="4">
+                    <c:v>Mar</c:v>
+                  </c:pt>
+                  <c:pt idx="5">
+                    <c:v>Apr</c:v>
+                  </c:pt>
+                  <c:pt idx="6">
+                    <c:v>May</c:v>
+                  </c:pt>
+                  <c:pt idx="7">
+                    <c:v>Jun</c:v>
+                  </c:pt>
+                  <c:pt idx="8">
+                    <c:v>Jul</c:v>
+                  </c:pt>
+                  <c:pt idx="9">
+                    <c:v>Aug</c:v>
+                  </c:pt>
+                  <c:pt idx="10">
+                    <c:v>Sep</c:v>
+                  </c:pt>
+                  <c:pt idx="11">
+                    <c:v>Oct '27</c:v>
+                  </c:pt>
+                </c:lvl>
+              </c:multiLvlStrCache>
+            </c:multiLvlStrRef>
+          </c:cat>
+          <c:val>
+            <c:numRef>
+              <c:f>Sheet1!$E$2:$E$13</c:f>
+              <c:numCache>
+                <c:formatCode>General</c:formatCode>
+                <c:ptCount val="12"/>
+                <c:pt idx="0">
+                  <c:v>0</c:v>
+                </c:pt>
+                <c:pt idx="1">
+                  <c:v>0</c:v>
+                </c:pt>
+                <c:pt idx="2">
+                  <c:v>0</c:v>
+                </c:pt>
+                <c:pt idx="3">
+                  <c:v>0</c:v>
+                </c:pt>
+                <c:pt idx="4">
+                  <c:v>0</c:v>
+                </c:pt>
+                <c:pt idx="5">
+                  <c:v>0</c:v>
+                </c:pt>
+                <c:pt idx="6">
+                  <c:v>0</c:v>
+                </c:pt>
+                <c:pt idx="7">
+                  <c:v>0</c:v>
+                </c:pt>
+                <c:pt idx="8">
+                  <c:v>0</c:v>
+                </c:pt>
+                <c:pt idx="9">
+                  <c:v>928</c:v>
+                </c:pt>
+                <c:pt idx="10">
+                  <c:v>1856</c:v>
+                </c:pt>
+                <c:pt idx="11">
+                  <c:v>2784</c:v>
+                </c:pt>
+              </c:numCache>
+            </c:numRef>
+          </c:val>
+        </c:ser>
+        <c:ser>
+          <c:idx val="4"/>
+          <c:order val="4"/>
+          <c:tx>
+            <c:strRef>
+              <c:f>Sheet1!$F$1</c:f>
               <c:strCache>
                 <c:ptCount val="1"/>
                 <c:pt idx="0">
@@ -659,7 +796,7 @@
           </c:cat>
           <c:val>
             <c:numRef>
-              <c:f>Sheet1!$E$2:$E$13</c:f>
+              <c:f>Sheet1!$F$2:$F$13</c:f>
               <c:numCache>
                 <c:formatCode>General</c:formatCode>
                 <c:ptCount val="12"/>
@@ -976,13 +1113,13 @@
                 <c:formatCode>General</c:formatCode>
                 <c:ptCount val="3"/>
                 <c:pt idx="0">
-                  <c:v>91147</c:v>
+                  <c:v>101848</c:v>
                 </c:pt>
                 <c:pt idx="1">
-                  <c:v>324104</c:v>
+                  <c:v>369837</c:v>
                 </c:pt>
                 <c:pt idx="2">
-                  <c:v>950244</c:v>
+                  <c:v>953420</c:v>
                 </c:pt>
               </c:numCache>
             </c:numRef>
@@ -1061,7 +1198,7 @@
         <c:axId val="2094734552"/>
         <c:scaling>
           <c:orientation val="minMax"/>
-          <c:max val="1100000"/>
+          <c:max val="1000000"/>
           <c:min val="0"/>
         </c:scaling>
         <c:delete val="0"/>
@@ -1966,7 +2103,7 @@
           <a:p>
             <a:r>
               <a:rPr lang="en-US" dirty="0"/>
-              <a:t>Year 1 is deliberately narrow: two metros plus makers who ship. Every dollar here is a $29 subscription — no goods transaction revenue, no gift cards, no client billing, no sponsorship. Seattle opening in month twelve is what carries the ramp into Year 2.</a:t>
+              <a:t>Every dollar here is a $29 subscription — no goods transaction revenue, no gift cards, no client billing, no sponsorship. Portland and Denver carry the first six months; Seattle and Los Angeles arriving mid-year is what compounds into Year 2. New York opens just after this window, in December 2027.</a:t>
             </a:r>
             <a:endParaRPr lang="en-US" dirty="0"/>
           </a:p>
@@ -2054,7 +2191,7 @@
           <a:p>
             <a:r>
               <a:rPr lang="en-US" dirty="0"/>
-              <a:t>Three-year revenue totals $1.37M. The penetration assumption is the conservative part: even New York is modelled at one vendor per 48,309 residents, against one per 6,281 in Portland — the large metros are barely touched. Annual figures are the founders' own; the monthly build behind years 2 and 3 is not reproduced here.</a:t>
+              <a:t>Three-year revenue totals $1.43M, exiting December 2029 at $92,781 a month — roughly $1.11M of annual run rate. The penetration assumption is the conservative part: New York is modelled at one vendor per 42,017 residents against one per 6,281 in Portland, so the largest metros are barely touched. All three annual figures tie exactly to the spreadsheet's own monthly revenue row.</a:t>
             </a:r>
             <a:endParaRPr lang="en-US" dirty="0"/>
           </a:p>
@@ -7765,7 +7902,7 @@
                 <a:ea typeface="Cambria" pitchFamily="34" charset="-122"/>
                 <a:cs typeface="Cambria" pitchFamily="34" charset="-120"/>
               </a:rPr>
-              <a:t>Two cities and the mail</a:t>
+              <a:t>Four cities in the first year</a:t>
             </a:r>
             <a:endParaRPr lang="en-US" sz="3600" dirty="0"/>
           </a:p>
@@ -7807,7 +7944,7 @@
                 <a:ea typeface="Calibri" pitchFamily="34" charset="-122"/>
                 <a:cs typeface="Calibri" pitchFamily="34" charset="-120"/>
               </a:rPr>
-              <a:t>Portland and Denver open 1 November 2026, with shipped-goods makers nationwide. Seattle follows in the twelfth month.</a:t>
+              <a:t>Portland and Denver open 1 November 2026, with shipped-goods makers nationwide. Seattle follows in May, Los Angeles in August.</a:t>
             </a:r>
             <a:endParaRPr lang="en-US" sz="1350" dirty="0"/>
           </a:p>
@@ -7896,7 +8033,7 @@
                 <a:ea typeface="Cambria" pitchFamily="34" charset="-122"/>
                 <a:cs typeface="Cambria" pitchFamily="34" charset="-120"/>
               </a:rPr>
-              <a:t>$91,147</a:t>
+              <a:t>$101,848</a:t>
             </a:r>
             <a:endParaRPr lang="en-US" sz="2600" dirty="0"/>
           </a:p>
@@ -8047,7 +8184,7 @@
                 <a:ea typeface="Cambria" pitchFamily="34" charset="-122"/>
                 <a:cs typeface="Cambria" pitchFamily="34" charset="-120"/>
               </a:rPr>
-              <a:t>480</a:t>
+              <a:t>567</a:t>
             </a:r>
             <a:endParaRPr lang="en-US" sz="2600" dirty="0"/>
           </a:p>
@@ -8198,7 +8335,7 @@
                 <a:ea typeface="Cambria" pitchFamily="34" charset="-122"/>
                 <a:cs typeface="Cambria" pitchFamily="34" charset="-120"/>
               </a:rPr>
-              <a:t>$13,920</a:t>
+              <a:t>$16,443</a:t>
             </a:r>
             <a:endParaRPr lang="en-US" sz="2600" dirty="0"/>
           </a:p>
@@ -8276,7 +8413,7 @@
                 <a:ea typeface="Calibri" pitchFamily="34" charset="-122"/>
                 <a:cs typeface="Calibri" pitchFamily="34" charset="-120"/>
               </a:rPr>
-              <a:t>Oct '27 — ≈ $167K ARR</a:t>
+              <a:t>Oct '27 — ≈ $197K ARR</a:t>
             </a:r>
             <a:endParaRPr lang="en-US" sz="1050" dirty="0"/>
           </a:p>
@@ -8349,7 +8486,7 @@
                 <a:ea typeface="Cambria" pitchFamily="34" charset="-122"/>
                 <a:cs typeface="Cambria" pitchFamily="34" charset="-120"/>
               </a:rPr>
-              <a:t>3</a:t>
+              <a:t>4</a:t>
             </a:r>
             <a:endParaRPr lang="en-US" sz="2600" dirty="0"/>
           </a:p>
@@ -8388,7 +8525,7 @@
                 <a:ea typeface="Calibri" pitchFamily="34" charset="-122"/>
                 <a:cs typeface="Calibri" pitchFamily="34" charset="-120"/>
               </a:rPr>
-              <a:t>markets live</a:t>
+              <a:t>metros live</a:t>
             </a:r>
             <a:endParaRPr lang="en-US" sz="1200" dirty="0"/>
           </a:p>
@@ -8427,7 +8564,7 @@
                 <a:ea typeface="Calibri" pitchFamily="34" charset="-122"/>
                 <a:cs typeface="Calibri" pitchFamily="34" charset="-120"/>
               </a:rPr>
-              <a:t>Portland, Denver, nationwide</a:t>
+              <a:t>plus nationwide shipping</a:t>
             </a:r>
             <a:endParaRPr lang="en-US" sz="1050" dirty="0"/>
           </a:p>
@@ -8618,7 +8755,7 @@
                 <a:ea typeface="Calibri" pitchFamily="34" charset="-122"/>
                 <a:cs typeface="Calibri" pitchFamily="34" charset="-120"/>
               </a:rPr>
-              <a:t>The same playbook run city by city. Revenue compounds because each new metro inherits a marketplace that already works — and because vendors signed in year one are still subscribing in year three.</a:t>
+              <a:t>The same playbook run city by city, each new metro inheriting a marketplace that already works. Revenue compounds because vendors signed in year one are still subscribing in year three.</a:t>
             </a:r>
             <a:endParaRPr lang="en-US" sz="1350" dirty="0"/>
           </a:p>
@@ -8632,7 +8769,7 @@
         </p:nvGraphicFramePr>
         <p:xfrm>
           <a:off x="640080" y="2286000"/>
-          <a:ext cx="4846320" cy="3200400"/>
+          <a:ext cx="4846320" cy="2926080"/>
         </p:xfrm>
         <a:graphic xmlns:a="http://schemas.openxmlformats.org/drawingml/2006/main">
           <a:graphicData uri="http://schemas.openxmlformats.org/drawingml/2006/chart">
@@ -8643,6 +8780,87 @@
       <p:sp>
         <p:nvSpPr>
           <p:cNvPr id="6" name="Text 3"/>
+          <p:cNvSpPr txBox="1"/>
+          <p:nvPr/>
+        </p:nvSpPr>
+        <p:spPr>
+          <a:xfrm>
+            <a:off x="640080" y="5285232"/>
+            <a:ext cx="4937760" cy="274320"/>
+          </a:xfrm>
+          <a:prstGeom prst="rect">
+            <a:avLst/>
+          </a:prstGeom>
+          <a:noFill/>
+          <a:ln/>
+        </p:spPr>
+        <p:txBody>
+          <a:bodyPr wrap="square" lIns="0" tIns="0" rIns="0" bIns="0" rtlCol="0" anchor="ctr"/>
+          <a:lstStyle/>
+          <a:p>
+            <a:pPr algn="ctr" indent="0" marL="0">
+              <a:buNone/>
+            </a:pPr>
+            <a:r>
+              <a:rPr lang="en-US" sz="1200" b="1" dirty="0">
+                <a:solidFill>
+                  <a:srgbClr val="8B3E2D"/>
+                </a:solidFill>
+                <a:latin typeface="Calibri" pitchFamily="34" charset="0"/>
+                <a:ea typeface="Calibri" pitchFamily="34" charset="-122"/>
+                <a:cs typeface="Calibri" pitchFamily="34" charset="-120"/>
+              </a:rPr>
+              <a:t>$1,425,105</a:t>
+            </a:r>
+            <a:pPr algn="ctr" indent="0" marL="0">
+              <a:buNone/>
+            </a:pPr>
+            <a:r>
+              <a:rPr lang="en-US" sz="1200" dirty="0">
+                <a:solidFill>
+                  <a:srgbClr val="5A534C"/>
+                </a:solidFill>
+                <a:latin typeface="Calibri" pitchFamily="34" charset="0"/>
+                <a:ea typeface="Calibri" pitchFamily="34" charset="-122"/>
+                <a:cs typeface="Calibri" pitchFamily="34" charset="-120"/>
+              </a:rPr>
+              <a:t> over three years — exiting at ≈ </a:t>
+            </a:r>
+            <a:pPr algn="ctr" indent="0" marL="0">
+              <a:buNone/>
+            </a:pPr>
+            <a:r>
+              <a:rPr lang="en-US" sz="1200" b="1" dirty="0">
+                <a:solidFill>
+                  <a:srgbClr val="8B3E2D"/>
+                </a:solidFill>
+                <a:latin typeface="Calibri" pitchFamily="34" charset="0"/>
+                <a:ea typeface="Calibri" pitchFamily="34" charset="-122"/>
+                <a:cs typeface="Calibri" pitchFamily="34" charset="-120"/>
+              </a:rPr>
+              <a:t>$1.11M ARR</a:t>
+            </a:r>
+            <a:pPr algn="ctr" indent="0" marL="0">
+              <a:buNone/>
+            </a:pPr>
+            <a:r>
+              <a:rPr lang="en-US" sz="1200" dirty="0">
+                <a:solidFill>
+                  <a:srgbClr val="5A534C"/>
+                </a:solidFill>
+                <a:latin typeface="Calibri" pitchFamily="34" charset="0"/>
+                <a:ea typeface="Calibri" pitchFamily="34" charset="-122"/>
+                <a:cs typeface="Calibri" pitchFamily="34" charset="-120"/>
+              </a:rPr>
+              <a:t>.</a:t>
+            </a:r>
+            <a:endParaRPr lang="en-US" sz="1200" dirty="0"/>
+          </a:p>
+        </p:txBody>
+      </p:sp>
+      <p:sp>
+        <p:nvSpPr>
+          <p:cNvPr id="7" name="Text 4"/>
           <p:cNvSpPr txBox="1"/>
           <p:nvPr/>
         </p:nvSpPr>
@@ -8702,10 +8920,10 @@
             <a:tbl>
               <a:tblPr/>
               <a:tblGrid>
-                <a:gridCol w="1371600"/>
-                <a:gridCol w="777240"/>
-                <a:gridCol w="1051560"/>
+                <a:gridCol w="1325880"/>
                 <a:gridCol w="914400"/>
+                <a:gridCol w="1005840"/>
+                <a:gridCol w="868680"/>
                 <a:gridCol w="1554480"/>
               </a:tblGrid>
               <a:tr h="283464">
@@ -8718,7 +8936,7 @@
                         <a:buNone/>
                       </a:pPr>
                       <a:r>
-                        <a:rPr lang="en-US" sz="1100" b="1" dirty="0">
+                        <a:rPr lang="en-US" sz="1000" b="1" dirty="0">
                           <a:solidFill>
                             <a:srgbClr val="8B3E2D"/>
                           </a:solidFill>
@@ -8728,7 +8946,7 @@
                         </a:rPr>
                         <a:t>Market</a:t>
                       </a:r>
-                      <a:endParaRPr lang="en-US" sz="1100" dirty="0">
+                      <a:endParaRPr lang="en-US" sz="1000" dirty="0">
                         <a:latin typeface="Calibri" charset="0"/>
                         <a:ea typeface="Calibri" charset="0"/>
                         <a:cs typeface="Calibri" charset="0"/>
@@ -8786,7 +9004,7 @@
                         <a:buNone/>
                       </a:pPr>
                       <a:r>
-                        <a:rPr lang="en-US" sz="1100" b="1" dirty="0">
+                        <a:rPr lang="en-US" sz="1000" b="1" dirty="0">
                           <a:solidFill>
                             <a:srgbClr val="8B3E2D"/>
                           </a:solidFill>
@@ -8794,9 +9012,9 @@
                           <a:ea typeface="Calibri" pitchFamily="34" charset="-122"/>
                           <a:cs typeface="Calibri" pitchFamily="34" charset="-120"/>
                         </a:rPr>
-                        <a:t>Opens</a:t>
+                        <a:t>First rev.</a:t>
                       </a:r>
-                      <a:endParaRPr lang="en-US" sz="1100" dirty="0">
+                      <a:endParaRPr lang="en-US" sz="1000" dirty="0">
                         <a:latin typeface="Calibri" charset="0"/>
                         <a:ea typeface="Calibri" charset="0"/>
                         <a:cs typeface="Calibri" charset="0"/>
@@ -8854,7 +9072,7 @@
                         <a:buNone/>
                       </a:pPr>
                       <a:r>
-                        <a:rPr lang="en-US" sz="1100" b="1" dirty="0">
+                        <a:rPr lang="en-US" sz="1000" b="1" dirty="0">
                           <a:solidFill>
                             <a:srgbClr val="8B3E2D"/>
                           </a:solidFill>
@@ -8864,7 +9082,7 @@
                         </a:rPr>
                         <a:t>Metro pop.</a:t>
                       </a:r>
-                      <a:endParaRPr lang="en-US" sz="1100" dirty="0">
+                      <a:endParaRPr lang="en-US" sz="1000" dirty="0">
                         <a:latin typeface="Calibri" charset="0"/>
                         <a:ea typeface="Calibri" charset="0"/>
                         <a:cs typeface="Calibri" charset="0"/>
@@ -8922,7 +9140,7 @@
                         <a:buNone/>
                       </a:pPr>
                       <a:r>
-                        <a:rPr lang="en-US" sz="1100" b="1" dirty="0">
+                        <a:rPr lang="en-US" sz="1000" b="1" dirty="0">
                           <a:solidFill>
                             <a:srgbClr val="8B3E2D"/>
                           </a:solidFill>
@@ -8932,7 +9150,7 @@
                         </a:rPr>
                         <a:t>Vendors</a:t>
                       </a:r>
-                      <a:endParaRPr lang="en-US" sz="1100" dirty="0">
+                      <a:endParaRPr lang="en-US" sz="1000" dirty="0">
                         <a:latin typeface="Calibri" charset="0"/>
                         <a:ea typeface="Calibri" charset="0"/>
                         <a:cs typeface="Calibri" charset="0"/>
@@ -8990,7 +9208,7 @@
                         <a:buNone/>
                       </a:pPr>
                       <a:r>
-                        <a:rPr lang="en-US" sz="1100" b="1" dirty="0">
+                        <a:rPr lang="en-US" sz="1000" b="1" dirty="0">
                           <a:solidFill>
                             <a:srgbClr val="8B3E2D"/>
                           </a:solidFill>
@@ -9000,7 +9218,7 @@
                         </a:rPr>
                         <a:t>Pop. per vendor</a:t>
                       </a:r>
-                      <a:endParaRPr lang="en-US" sz="1100" dirty="0">
+                      <a:endParaRPr lang="en-US" sz="1000" dirty="0">
                         <a:latin typeface="Calibri" charset="0"/>
                         <a:ea typeface="Calibri" charset="0"/>
                         <a:cs typeface="Calibri" charset="0"/>
@@ -9136,7 +9354,7 @@
                           <a:ea typeface="Calibri" pitchFamily="34" charset="-122"/>
                           <a:cs typeface="Calibri" pitchFamily="34" charset="-120"/>
                         </a:rPr>
-                        <a:t>Nov '26</a:t>
+                        <a:t>Dec '26</a:t>
                       </a:r>
                       <a:endParaRPr lang="en-US" sz="1100" dirty="0">
                         <a:latin typeface="Calibri" charset="0"/>
@@ -9478,7 +9696,7 @@
                           <a:ea typeface="Calibri" pitchFamily="34" charset="-122"/>
                           <a:cs typeface="Calibri" pitchFamily="34" charset="-120"/>
                         </a:rPr>
-                        <a:t>Nov '26</a:t>
+                        <a:t>Dec '26</a:t>
                       </a:r>
                       <a:endParaRPr lang="en-US" sz="1100" dirty="0">
                         <a:latin typeface="Calibri" charset="0"/>
@@ -9820,7 +10038,7 @@
                           <a:ea typeface="Calibri" pitchFamily="34" charset="-122"/>
                           <a:cs typeface="Calibri" pitchFamily="34" charset="-120"/>
                         </a:rPr>
-                        <a:t>Oct '27</a:t>
+                        <a:t>May '27</a:t>
                       </a:r>
                       <a:endParaRPr lang="en-US" sz="1100" dirty="0">
                         <a:latin typeface="Calibri" charset="0"/>
@@ -9956,7 +10174,7 @@
                           <a:ea typeface="Calibri" pitchFamily="34" charset="-122"/>
                           <a:cs typeface="Calibri" pitchFamily="34" charset="-120"/>
                         </a:rPr>
-                        <a:t>447</a:t>
+                        <a:t>495</a:t>
                       </a:r>
                       <a:endParaRPr lang="en-US" sz="1100" dirty="0">
                         <a:latin typeface="Calibri" charset="0"/>
@@ -10024,7 +10242,7 @@
                           <a:ea typeface="Calibri" pitchFamily="34" charset="-122"/>
                           <a:cs typeface="Calibri" pitchFamily="34" charset="-120"/>
                         </a:rPr>
-                        <a:t>9,172</a:t>
+                        <a:t>8,283</a:t>
                       </a:r>
                       <a:endParaRPr lang="en-US" sz="1100" dirty="0">
                         <a:latin typeface="Calibri" charset="0"/>
@@ -10162,7 +10380,7 @@
                           <a:ea typeface="Calibri" pitchFamily="34" charset="-122"/>
                           <a:cs typeface="Calibri" pitchFamily="34" charset="-120"/>
                         </a:rPr>
-                        <a:t>Apr '28</a:t>
+                        <a:t>Aug '27</a:t>
                       </a:r>
                       <a:endParaRPr lang="en-US" sz="1100" dirty="0">
                         <a:latin typeface="Calibri" charset="0"/>
@@ -10298,7 +10516,7 @@
                           <a:ea typeface="Calibri" pitchFamily="34" charset="-122"/>
                           <a:cs typeface="Calibri" pitchFamily="34" charset="-120"/>
                         </a:rPr>
-                        <a:t>450</a:t>
+                        <a:t>644</a:t>
                       </a:r>
                       <a:endParaRPr lang="en-US" sz="1100" dirty="0">
                         <a:latin typeface="Calibri" charset="0"/>
@@ -10366,7 +10584,7 @@
                           <a:ea typeface="Calibri" pitchFamily="34" charset="-122"/>
                           <a:cs typeface="Calibri" pitchFamily="34" charset="-120"/>
                         </a:rPr>
-                        <a:t>28,667</a:t>
+                        <a:t>20,031</a:t>
                       </a:r>
                       <a:endParaRPr lang="en-US" sz="1100" dirty="0">
                         <a:latin typeface="Calibri" charset="0"/>
@@ -10504,7 +10722,7 @@
                           <a:ea typeface="Calibri" pitchFamily="34" charset="-122"/>
                           <a:cs typeface="Calibri" pitchFamily="34" charset="-120"/>
                         </a:rPr>
-                        <a:t>Apr '28</a:t>
+                        <a:t>Dec '27</a:t>
                       </a:r>
                       <a:endParaRPr lang="en-US" sz="1100" dirty="0">
                         <a:latin typeface="Calibri" charset="0"/>
@@ -10640,7 +10858,7 @@
                           <a:ea typeface="Calibri" pitchFamily="34" charset="-122"/>
                           <a:cs typeface="Calibri" pitchFamily="34" charset="-120"/>
                         </a:rPr>
-                        <a:t>414</a:t>
+                        <a:t>476</a:t>
                       </a:r>
                       <a:endParaRPr lang="en-US" sz="1100" dirty="0">
                         <a:latin typeface="Calibri" charset="0"/>
@@ -10708,7 +10926,7 @@
                           <a:ea typeface="Calibri" pitchFamily="34" charset="-122"/>
                           <a:cs typeface="Calibri" pitchFamily="34" charset="-120"/>
                         </a:rPr>
-                        <a:t>48,309</a:t>
+                        <a:t>42,017</a:t>
                       </a:r>
                       <a:endParaRPr lang="en-US" sz="1100" dirty="0">
                         <a:latin typeface="Calibri" charset="0"/>
@@ -10846,7 +11064,7 @@
                           <a:ea typeface="Calibri" pitchFamily="34" charset="-122"/>
                           <a:cs typeface="Calibri" pitchFamily="34" charset="-120"/>
                         </a:rPr>
-                        <a:t>Nov '26</a:t>
+                        <a:t>Dec '26</a:t>
                       </a:r>
                       <a:endParaRPr lang="en-US" sz="1100" dirty="0">
                         <a:latin typeface="Calibri" charset="0"/>
@@ -10982,7 +11200,7 @@
                           <a:ea typeface="Calibri" pitchFamily="34" charset="-122"/>
                           <a:cs typeface="Calibri" pitchFamily="34" charset="-120"/>
                         </a:rPr>
-                        <a:t>148</a:t>
+                        <a:t>—</a:t>
                       </a:r>
                       <a:endParaRPr lang="en-US" sz="1100" dirty="0">
                         <a:latin typeface="Calibri" charset="0"/>
@@ -11120,7 +11338,7 @@
                           <a:ea typeface="Calibri" pitchFamily="34" charset="-122"/>
                           <a:cs typeface="Calibri" pitchFamily="34" charset="-120"/>
                         </a:rPr>
-                        <a:t>Total</a:t>
+                        <a:t>Five metros</a:t>
                       </a:r>
                       <a:endParaRPr lang="en-US" sz="1100" dirty="0">
                         <a:latin typeface="Calibri" charset="0"/>
@@ -11302,7 +11520,7 @@
                           <a:ea typeface="Calibri" pitchFamily="34" charset="-122"/>
                           <a:cs typeface="Calibri" pitchFamily="34" charset="-120"/>
                         </a:rPr>
-                        <a:t>2,275</a:t>
+                        <a:t>2,431</a:t>
                       </a:r>
                       <a:endParaRPr lang="en-US" sz="1100" dirty="0">
                         <a:latin typeface="Calibri" charset="0"/>
@@ -11417,7 +11635,7 @@
       </p:graphicFrame>
       <p:sp>
         <p:nvSpPr>
-          <p:cNvPr id="8" name="Shape 4"/>
+          <p:cNvPr id="9" name="Shape 5"/>
           <p:cNvSpPr/>
           <p:nvPr/>
         </p:nvSpPr>
@@ -11451,7 +11669,7 @@
       </p:sp>
       <p:sp>
         <p:nvSpPr>
-          <p:cNvPr id="9" name="Text 5"/>
+          <p:cNvPr id="10" name="Text 6"/>
           <p:cNvSpPr txBox="1"/>
           <p:nvPr/>
         </p:nvSpPr>
@@ -11490,7 +11708,7 @@
       </p:sp>
       <p:sp>
         <p:nvSpPr>
-          <p:cNvPr id="10" name="Text 6"/>
+          <p:cNvPr id="11" name="Text 7"/>
           <p:cNvSpPr txBox="1"/>
           <p:nvPr/>
         </p:nvSpPr>
@@ -11532,7 +11750,7 @@
       </p:sp>
       <p:sp>
         <p:nvSpPr>
-          <p:cNvPr id="11" name="Shape 7"/>
+          <p:cNvPr id="12" name="Shape 8"/>
           <p:cNvSpPr/>
           <p:nvPr/>
         </p:nvSpPr>
@@ -11566,7 +11784,7 @@
       </p:sp>
       <p:sp>
         <p:nvSpPr>
-          <p:cNvPr id="12" name="Text 8"/>
+          <p:cNvPr id="13" name="Text 9"/>
           <p:cNvSpPr txBox="1"/>
           <p:nvPr/>
         </p:nvSpPr>
@@ -11597,7 +11815,7 @@
                 <a:ea typeface="Calibri" pitchFamily="34" charset="-122"/>
                 <a:cs typeface="Calibri" pitchFamily="34" charset="-120"/>
               </a:rPr>
-              <a:t>10% attrition</a:t>
+              <a:t>~10% attrition</a:t>
             </a:r>
             <a:endParaRPr lang="en-US" sz="1250" dirty="0"/>
           </a:p>
@@ -11605,7 +11823,7 @@
       </p:sp>
       <p:sp>
         <p:nvSpPr>
-          <p:cNvPr id="13" name="Text 9"/>
+          <p:cNvPr id="14" name="Text 10"/>
           <p:cNvSpPr txBox="1"/>
           <p:nvPr/>
         </p:nvSpPr>
@@ -11639,7 +11857,7 @@
                 <a:ea typeface="Calibri" pitchFamily="34" charset="-122"/>
                 <a:cs typeface="Calibri" pitchFamily="34" charset="-120"/>
               </a:rPr>
-              <a:t>A tenth of each converting cohort is written off — churn is in the model, not assumed away.</a:t>
+              <a:t>A tenth of each arriving cohort is written off — churn is in the model, not assumed away.</a:t>
             </a:r>
             <a:endParaRPr lang="en-US" sz="1050" dirty="0"/>
           </a:p>
@@ -11647,7 +11865,7 @@
       </p:sp>
       <p:sp>
         <p:nvSpPr>
-          <p:cNvPr id="14" name="Shape 10"/>
+          <p:cNvPr id="15" name="Shape 11"/>
           <p:cNvSpPr/>
           <p:nvPr/>
         </p:nvSpPr>
@@ -11681,7 +11899,7 @@
       </p:sp>
       <p:sp>
         <p:nvSpPr>
-          <p:cNvPr id="15" name="Text 11"/>
+          <p:cNvPr id="16" name="Text 12"/>
           <p:cNvSpPr txBox="1"/>
           <p:nvPr/>
         </p:nvSpPr>
@@ -11720,7 +11938,7 @@
       </p:sp>
       <p:sp>
         <p:nvSpPr>
-          <p:cNvPr id="16" name="Text 12"/>
+          <p:cNvPr id="17" name="Text 13"/>
           <p:cNvSpPr txBox="1"/>
           <p:nvPr/>
         </p:nvSpPr>

--- a/docs/pitch/CodaCo-Pitch-Deck.pptx
+++ b/docs/pitch/CodaCo-Pitch-Deck.pptx
@@ -548,19 +548,19 @@
                   <c:v>522</c:v>
                 </c:pt>
                 <c:pt idx="7">
-                  <c:v>1363</c:v>
+                  <c:v>1305</c:v>
                 </c:pt>
                 <c:pt idx="8">
-                  <c:v>2233</c:v>
+                  <c:v>2088</c:v>
                 </c:pt>
                 <c:pt idx="9">
-                  <c:v>638</c:v>
+                  <c:v>2726</c:v>
                 </c:pt>
                 <c:pt idx="10">
-                  <c:v>638</c:v>
+                  <c:v>3364</c:v>
                 </c:pt>
                 <c:pt idx="11">
-                  <c:v>522</c:v>
+                  <c:v>4031</c:v>
                 </c:pt>
               </c:numCache>
             </c:numRef>
@@ -694,10 +694,10 @@
                   <c:v>928</c:v>
                 </c:pt>
                 <c:pt idx="10">
-                  <c:v>1856</c:v>
+                  <c:v>1769</c:v>
                 </c:pt>
                 <c:pt idx="11">
-                  <c:v>2784</c:v>
+                  <c:v>2610</c:v>
                 </c:pt>
               </c:numCache>
             </c:numRef>
@@ -1113,13 +1113,13 @@
                 <c:formatCode>General</c:formatCode>
                 <c:ptCount val="3"/>
                 <c:pt idx="0">
-                  <c:v>101848</c:v>
+                  <c:v>109707</c:v>
                 </c:pt>
                 <c:pt idx="1">
-                  <c:v>369837</c:v>
+                  <c:v>411916</c:v>
                 </c:pt>
                 <c:pt idx="2">
-                  <c:v>953420</c:v>
+                  <c:v>1046949</c:v>
                 </c:pt>
               </c:numCache>
             </c:numRef>
@@ -1198,7 +1198,7 @@
         <c:axId val="2094734552"/>
         <c:scaling>
           <c:orientation val="minMax"/>
-          <c:max val="1000000"/>
+          <c:max val="1200000"/>
           <c:min val="0"/>
         </c:scaling>
         <c:delete val="0"/>
@@ -2103,7 +2103,7 @@
           <a:p>
             <a:r>
               <a:rPr lang="en-US" dirty="0"/>
-              <a:t>Every dollar here is a $29 subscription — no goods transaction revenue, no gift cards, no client billing, no sponsorship. Portland and Denver carry the first six months; Seattle and Los Angeles arriving mid-year is what compounds into Year 2. New York opens just after this window, in December 2027.</a:t>
+              <a:t>Every dollar here is a $29 subscription — no goods transaction revenue, no gift cards, no client billing, no sponsorship. Portland and Denver carry the first six months; Seattle arriving in May and Los Angeles in August is what compounds into Year 2, and the year exits at nearly double its mid-year run rate. New York opens just after this window, in December 2027.</a:t>
             </a:r>
             <a:endParaRPr lang="en-US" dirty="0"/>
           </a:p>
@@ -2191,7 +2191,7 @@
           <a:p>
             <a:r>
               <a:rPr lang="en-US" dirty="0"/>
-              <a:t>Three-year revenue totals $1.43M, exiting December 2029 at $92,781 a month — roughly $1.11M of annual run rate. The penetration assumption is the conservative part: New York is modelled at one vendor per 42,017 residents against one per 6,281 in Portland, so the largest metros are barely touched. All three annual figures tie exactly to the spreadsheet's own monthly revenue row.</a:t>
+              <a:t>Three-year revenue totals $1.57M, exiting December 2029 at $100,503 a month — roughly $1.21M of annual run rate. The penetration assumption is the conservative part: New York is modelled at one vendor per 42,017 residents against one per 6,281 in Portland, so the largest metros are barely touched. All three annual figures are the spreadsheet's own; Year 1 and Year 3 also tie exactly to the sum of the market columns.</a:t>
             </a:r>
             <a:endParaRPr lang="en-US" dirty="0"/>
           </a:p>
@@ -8033,7 +8033,7 @@
                 <a:ea typeface="Cambria" pitchFamily="34" charset="-122"/>
                 <a:cs typeface="Cambria" pitchFamily="34" charset="-120"/>
               </a:rPr>
-              <a:t>$101,848</a:t>
+              <a:t>$109,707</a:t>
             </a:r>
             <a:endParaRPr lang="en-US" sz="2600" dirty="0"/>
           </a:p>
@@ -8184,7 +8184,7 @@
                 <a:ea typeface="Cambria" pitchFamily="34" charset="-122"/>
                 <a:cs typeface="Cambria" pitchFamily="34" charset="-120"/>
               </a:rPr>
-              <a:t>567</a:t>
+              <a:t>682</a:t>
             </a:r>
             <a:endParaRPr lang="en-US" sz="2600" dirty="0"/>
           </a:p>
@@ -8335,7 +8335,7 @@
                 <a:ea typeface="Cambria" pitchFamily="34" charset="-122"/>
                 <a:cs typeface="Cambria" pitchFamily="34" charset="-120"/>
               </a:rPr>
-              <a:t>$16,443</a:t>
+              <a:t>$19,778</a:t>
             </a:r>
             <a:endParaRPr lang="en-US" sz="2600" dirty="0"/>
           </a:p>
@@ -8413,7 +8413,7 @@
                 <a:ea typeface="Calibri" pitchFamily="34" charset="-122"/>
                 <a:cs typeface="Calibri" pitchFamily="34" charset="-120"/>
               </a:rPr>
-              <a:t>Oct '27 — ≈ $197K ARR</a:t>
+              <a:t>Oct '27 — ≈ $237K ARR</a:t>
             </a:r>
             <a:endParaRPr lang="en-US" sz="1050" dirty="0"/>
           </a:p>
@@ -8810,7 +8810,7 @@
                 <a:ea typeface="Calibri" pitchFamily="34" charset="-122"/>
                 <a:cs typeface="Calibri" pitchFamily="34" charset="-120"/>
               </a:rPr>
-              <a:t>$1,425,105</a:t>
+              <a:t>$1,568,572</a:t>
             </a:r>
             <a:pPr algn="ctr" indent="0" marL="0">
               <a:buNone/>
@@ -8838,7 +8838,7 @@
                 <a:ea typeface="Calibri" pitchFamily="34" charset="-122"/>
                 <a:cs typeface="Calibri" pitchFamily="34" charset="-120"/>
               </a:rPr>
-              <a:t>$1.11M ARR</a:t>
+              <a:t>$1.21M ARR</a:t>
             </a:r>
             <a:pPr algn="ctr" indent="0" marL="0">
               <a:buNone/>

--- a/docs/pitch/CodaCo-Pitch-Deck.pptx
+++ b/docs/pitch/CodaCo-Pitch-Deck.pptx
@@ -1116,7 +1116,7 @@
                   <c:v>109707</c:v>
                 </c:pt>
                 <c:pt idx="1">
-                  <c:v>411916</c:v>
+                  <c:v>421863</c:v>
                 </c:pt>
                 <c:pt idx="2">
                   <c:v>1046949</c:v>
@@ -2191,7 +2191,7 @@
           <a:p>
             <a:r>
               <a:rPr lang="en-US" dirty="0"/>
-              <a:t>Three-year revenue totals $1.57M, exiting December 2029 at $100,503 a month — roughly $1.21M of annual run rate. The penetration assumption is the conservative part: New York is modelled at one vendor per 42,017 residents against one per 6,281 in Portland, so the largest metros are barely touched. All three annual figures are the spreadsheet's own; Year 1 and Year 3 also tie exactly to the sum of the market columns.</a:t>
+              <a:t>Three-year revenue totals $1.58M, exiting December 2029 at $100,503 a month — roughly $1.21M of annual run rate. The penetration assumption is the conservative part: New York is modelled at one vendor per 42,017 residents against one per 6,281 in Portland, so the largest metros are barely touched. Every one of the model's forty months reconciles: each market's revenue is an exact vendor count times price, and the three annual totals agree with both the spreadsheet's own monthly row and the sum of its market columns.</a:t>
             </a:r>
             <a:endParaRPr lang="en-US" dirty="0"/>
           </a:p>
@@ -8810,7 +8810,7 @@
                 <a:ea typeface="Calibri" pitchFamily="34" charset="-122"/>
                 <a:cs typeface="Calibri" pitchFamily="34" charset="-120"/>
               </a:rPr>
-              <a:t>$1,568,572</a:t>
+              <a:t>$1,578,519</a:t>
             </a:r>
             <a:pPr algn="ctr" indent="0" marL="0">
               <a:buNone/>

--- a/docs/pitch/CodaCo-Pitch-Deck.pptx
+++ b/docs/pitch/CodaCo-Pitch-Deck.pptx
@@ -545,22 +545,22 @@
                   <c:v>0</c:v>
                 </c:pt>
                 <c:pt idx="6">
-                  <c:v>522</c:v>
+                  <c:v>377</c:v>
                 </c:pt>
                 <c:pt idx="7">
-                  <c:v>1305</c:v>
+                  <c:v>899</c:v>
                 </c:pt>
                 <c:pt idx="8">
-                  <c:v>2088</c:v>
+                  <c:v>1421</c:v>
                 </c:pt>
                 <c:pt idx="9">
-                  <c:v>2726</c:v>
+                  <c:v>1798</c:v>
                 </c:pt>
                 <c:pt idx="10">
-                  <c:v>3364</c:v>
+                  <c:v>2175</c:v>
                 </c:pt>
                 <c:pt idx="11">
-                  <c:v>4031</c:v>
+                  <c:v>2697</c:v>
                 </c:pt>
               </c:numCache>
             </c:numRef>
@@ -691,13 +691,13 @@
                   <c:v>0</c:v>
                 </c:pt>
                 <c:pt idx="9">
-                  <c:v>928</c:v>
+                  <c:v>406</c:v>
                 </c:pt>
                 <c:pt idx="10">
-                  <c:v>1769</c:v>
+                  <c:v>783</c:v>
                 </c:pt>
                 <c:pt idx="11">
-                  <c:v>2610</c:v>
+                  <c:v>1160</c:v>
                 </c:pt>
               </c:numCache>
             </c:numRef>
@@ -807,34 +807,34 @@
                   <c:v>348</c:v>
                 </c:pt>
                 <c:pt idx="2">
-                  <c:v>667</c:v>
+                  <c:v>754</c:v>
                 </c:pt>
                 <c:pt idx="3">
-                  <c:v>986</c:v>
+                  <c:v>1102</c:v>
                 </c:pt>
                 <c:pt idx="4">
-                  <c:v>1247</c:v>
+                  <c:v>1421</c:v>
                 </c:pt>
                 <c:pt idx="5">
-                  <c:v>1508</c:v>
+                  <c:v>1682</c:v>
                 </c:pt>
                 <c:pt idx="6">
-                  <c:v>1769</c:v>
+                  <c:v>1943</c:v>
                 </c:pt>
                 <c:pt idx="7">
-                  <c:v>2030</c:v>
+                  <c:v>2204</c:v>
                 </c:pt>
                 <c:pt idx="8">
-                  <c:v>2291</c:v>
+                  <c:v>2465</c:v>
                 </c:pt>
                 <c:pt idx="9">
-                  <c:v>2552</c:v>
+                  <c:v>2726</c:v>
                 </c:pt>
                 <c:pt idx="10">
-                  <c:v>2755</c:v>
+                  <c:v>2929</c:v>
                 </c:pt>
                 <c:pt idx="11">
-                  <c:v>2958</c:v>
+                  <c:v>3132</c:v>
                 </c:pt>
               </c:numCache>
             </c:numRef>
@@ -1113,13 +1113,13 @@
                 <c:formatCode>General</c:formatCode>
                 <c:ptCount val="3"/>
                 <c:pt idx="0">
-                  <c:v>109707</c:v>
+                  <c:v>103675</c:v>
                 </c:pt>
                 <c:pt idx="1">
-                  <c:v>421863</c:v>
+                  <c:v>372795</c:v>
                 </c:pt>
                 <c:pt idx="2">
-                  <c:v>1046949</c:v>
+                  <c:v>933011</c:v>
                 </c:pt>
               </c:numCache>
             </c:numRef>
@@ -1198,7 +1198,7 @@
         <c:axId val="2094734552"/>
         <c:scaling>
           <c:orientation val="minMax"/>
-          <c:max val="1200000"/>
+          <c:max val="1000000"/>
           <c:min val="0"/>
         </c:scaling>
         <c:delete val="0"/>
@@ -2103,7 +2103,7 @@
           <a:p>
             <a:r>
               <a:rPr lang="en-US" dirty="0"/>
-              <a:t>Every dollar here is a $29 subscription — no goods transaction revenue, no gift cards, no client billing, no sponsorship. Portland and Denver carry the first six months; Seattle arriving in May and Los Angeles in August is what compounds into Year 2, and the year exits at nearly double its mid-year run rate. New York opens just after this window, in December 2027.</a:t>
+              <a:t>Every dollar here is a $29 subscription — no goods transaction revenue, no gift cards, no client billing, no sponsorship. Portland and Denver carry the first six months; Seattle arriving in May and Los Angeles in August is what compounds into Year 2. New York opens just after this window, in December 2027. These are the conservative figures — the base case runs about 6% higher in Year 1.</a:t>
             </a:r>
             <a:endParaRPr lang="en-US" dirty="0"/>
           </a:p>
@@ -2191,7 +2191,7 @@
           <a:p>
             <a:r>
               <a:rPr lang="en-US" dirty="0"/>
-              <a:t>Three-year revenue totals $1.58M, exiting December 2029 at $100,503 a month — roughly $1.21M of annual run rate. The penetration assumption is the conservative part: New York is modelled at one vendor per 42,017 residents against one per 6,281 in Portland, so the largest metros are barely touched. Every one of the model's forty months reconciles: each market's revenue is an exact vendor count times price, and the three annual totals agree with both the spreadsheet's own monthly row and the sum of its market columns.</a:t>
+              <a:t>These are the conservative figures: Portland, Denver and New York ramp as before, while Seattle and Los Angeles are cut back roughly a third — about 10% off three-year revenue against the base case. Three-year total $1.41M, exiting December 2029 at $89,778 a month, roughly $1.08M of annual run rate. Penetration stays deliberately shallow: Los Angeles is modelled at one vendor per 29,519 residents and New York one per 42,017, against one per 6,281 in Portland. Every one of the model's forty months reconciles: each market's revenue is an exact vendor count times price, and the three annual totals agree with both the spreadsheet's own monthly row and the sum of its market columns.</a:t>
             </a:r>
             <a:endParaRPr lang="en-US" dirty="0"/>
           </a:p>
@@ -7863,7 +7863,7 @@
                 <a:ea typeface="Calibri" pitchFamily="34" charset="-122"/>
                 <a:cs typeface="Calibri" pitchFamily="34" charset="-120"/>
               </a:rPr>
-              <a:t>YEAR 1</a:t>
+              <a:t>YEAR 1  ·  CONSERVATIVE CASE</a:t>
             </a:r>
             <a:endParaRPr lang="en-US" sz="1100" dirty="0"/>
           </a:p>
@@ -8033,7 +8033,7 @@
                 <a:ea typeface="Cambria" pitchFamily="34" charset="-122"/>
                 <a:cs typeface="Cambria" pitchFamily="34" charset="-120"/>
               </a:rPr>
-              <a:t>$109,707</a:t>
+              <a:t>$103,675</a:t>
             </a:r>
             <a:endParaRPr lang="en-US" sz="2600" dirty="0"/>
           </a:p>
@@ -8184,7 +8184,7 @@
                 <a:ea typeface="Cambria" pitchFamily="34" charset="-122"/>
                 <a:cs typeface="Cambria" pitchFamily="34" charset="-120"/>
               </a:rPr>
-              <a:t>682</a:t>
+              <a:t>592</a:t>
             </a:r>
             <a:endParaRPr lang="en-US" sz="2600" dirty="0"/>
           </a:p>
@@ -8335,7 +8335,7 @@
                 <a:ea typeface="Cambria" pitchFamily="34" charset="-122"/>
                 <a:cs typeface="Cambria" pitchFamily="34" charset="-120"/>
               </a:rPr>
-              <a:t>$19,778</a:t>
+              <a:t>$17,168</a:t>
             </a:r>
             <a:endParaRPr lang="en-US" sz="2600" dirty="0"/>
           </a:p>
@@ -8413,7 +8413,7 @@
                 <a:ea typeface="Calibri" pitchFamily="34" charset="-122"/>
                 <a:cs typeface="Calibri" pitchFamily="34" charset="-120"/>
               </a:rPr>
-              <a:t>Oct '27 — ≈ $237K ARR</a:t>
+              <a:t>Oct '27 — ≈ $206K ARR</a:t>
             </a:r>
             <a:endParaRPr lang="en-US" sz="1050" dirty="0"/>
           </a:p>
@@ -8674,7 +8674,7 @@
                 <a:ea typeface="Calibri" pitchFamily="34" charset="-122"/>
                 <a:cs typeface="Calibri" pitchFamily="34" charset="-120"/>
               </a:rPr>
-              <a:t>YEARS 1 – 3</a:t>
+              <a:t>YEARS 1 – 3  ·  CONSERVATIVE CASE</a:t>
             </a:r>
             <a:endParaRPr lang="en-US" sz="1100" dirty="0"/>
           </a:p>
@@ -8810,7 +8810,7 @@
                 <a:ea typeface="Calibri" pitchFamily="34" charset="-122"/>
                 <a:cs typeface="Calibri" pitchFamily="34" charset="-120"/>
               </a:rPr>
-              <a:t>$1,578,519</a:t>
+              <a:t>$1,409,481</a:t>
             </a:r>
             <a:pPr algn="ctr" indent="0" marL="0">
               <a:buNone/>
@@ -8838,7 +8838,7 @@
                 <a:ea typeface="Calibri" pitchFamily="34" charset="-122"/>
                 <a:cs typeface="Calibri" pitchFamily="34" charset="-120"/>
               </a:rPr>
-              <a:t>$1.21M ARR</a:t>
+              <a:t>$1.08M ARR</a:t>
             </a:r>
             <a:pPr algn="ctr" indent="0" marL="0">
               <a:buNone/>
@@ -10174,7 +10174,7 @@
                           <a:ea typeface="Calibri" pitchFamily="34" charset="-122"/>
                           <a:cs typeface="Calibri" pitchFamily="34" charset="-120"/>
                         </a:rPr>
-                        <a:t>495</a:t>
+                        <a:t>373</a:t>
                       </a:r>
                       <a:endParaRPr lang="en-US" sz="1100" dirty="0">
                         <a:latin typeface="Calibri" charset="0"/>
@@ -10242,7 +10242,7 @@
                           <a:ea typeface="Calibri" pitchFamily="34" charset="-122"/>
                           <a:cs typeface="Calibri" pitchFamily="34" charset="-120"/>
                         </a:rPr>
-                        <a:t>8,283</a:t>
+                        <a:t>10,992</a:t>
                       </a:r>
                       <a:endParaRPr lang="en-US" sz="1100" dirty="0">
                         <a:latin typeface="Calibri" charset="0"/>
@@ -10516,7 +10516,7 @@
                           <a:ea typeface="Calibri" pitchFamily="34" charset="-122"/>
                           <a:cs typeface="Calibri" pitchFamily="34" charset="-120"/>
                         </a:rPr>
-                        <a:t>644</a:t>
+                        <a:t>437</a:t>
                       </a:r>
                       <a:endParaRPr lang="en-US" sz="1100" dirty="0">
                         <a:latin typeface="Calibri" charset="0"/>
@@ -10584,7 +10584,7 @@
                           <a:ea typeface="Calibri" pitchFamily="34" charset="-122"/>
                           <a:cs typeface="Calibri" pitchFamily="34" charset="-120"/>
                         </a:rPr>
-                        <a:t>20,031</a:t>
+                        <a:t>29,519</a:t>
                       </a:r>
                       <a:endParaRPr lang="en-US" sz="1100" dirty="0">
                         <a:latin typeface="Calibri" charset="0"/>
@@ -11520,7 +11520,7 @@
                           <a:ea typeface="Calibri" pitchFamily="34" charset="-122"/>
                           <a:cs typeface="Calibri" pitchFamily="34" charset="-120"/>
                         </a:rPr>
-                        <a:t>2,431</a:t>
+                        <a:t>2,102</a:t>
                       </a:r>
                       <a:endParaRPr lang="en-US" sz="1100" dirty="0">
                         <a:latin typeface="Calibri" charset="0"/>

--- a/docs/pitch/CodaCo-Pitch-Deck.pptx
+++ b/docs/pitch/CodaCo-Pitch-Deck.pptx
@@ -164,7 +164,7 @@
               <c:strCache>
                 <c:ptCount val="1"/>
                 <c:pt idx="0">
-                  <c:v>Portland</c:v>
+                  <c:v>Portland, OR</c:v>
                 </c:pt>
               </c:strCache>
             </c:strRef>
@@ -256,37 +256,37 @@
                   <c:v>0</c:v>
                 </c:pt>
                 <c:pt idx="1">
-                  <c:v>870</c:v>
+                  <c:v>725</c:v>
                 </c:pt>
                 <c:pt idx="2">
-                  <c:v>1363</c:v>
+                  <c:v>1015</c:v>
                 </c:pt>
                 <c:pt idx="3">
-                  <c:v>1885</c:v>
+                  <c:v>1392</c:v>
                 </c:pt>
                 <c:pt idx="4">
-                  <c:v>2407</c:v>
+                  <c:v>1711</c:v>
                 </c:pt>
                 <c:pt idx="5">
-                  <c:v>2813</c:v>
+                  <c:v>2059</c:v>
                 </c:pt>
                 <c:pt idx="6">
-                  <c:v>3219</c:v>
+                  <c:v>2436</c:v>
                 </c:pt>
                 <c:pt idx="7">
-                  <c:v>3625</c:v>
+                  <c:v>2755</c:v>
                 </c:pt>
                 <c:pt idx="8">
-                  <c:v>4031</c:v>
+                  <c:v>3074</c:v>
                 </c:pt>
                 <c:pt idx="9">
-                  <c:v>4321</c:v>
+                  <c:v>3335</c:v>
                 </c:pt>
                 <c:pt idx="10">
-                  <c:v>4640</c:v>
+                  <c:v>3538</c:v>
                 </c:pt>
                 <c:pt idx="11">
-                  <c:v>4959</c:v>
+                  <c:v>3741</c:v>
                 </c:pt>
               </c:numCache>
             </c:numRef>
@@ -396,34 +396,34 @@
                   <c:v>754</c:v>
                 </c:pt>
                 <c:pt idx="2">
-                  <c:v>1363</c:v>
+                  <c:v>1102</c:v>
                 </c:pt>
                 <c:pt idx="3">
-                  <c:v>2001</c:v>
+                  <c:v>1508</c:v>
                 </c:pt>
                 <c:pt idx="4">
-                  <c:v>2639</c:v>
+                  <c:v>1740</c:v>
                 </c:pt>
                 <c:pt idx="5">
-                  <c:v>3161</c:v>
+                  <c:v>2117</c:v>
                 </c:pt>
                 <c:pt idx="6">
-                  <c:v>3683</c:v>
+                  <c:v>2436</c:v>
                 </c:pt>
                 <c:pt idx="7">
-                  <c:v>4205</c:v>
+                  <c:v>2755</c:v>
                 </c:pt>
                 <c:pt idx="8">
-                  <c:v>4437</c:v>
+                  <c:v>3016</c:v>
                 </c:pt>
                 <c:pt idx="9">
-                  <c:v>4698</c:v>
+                  <c:v>3277</c:v>
                 </c:pt>
                 <c:pt idx="10">
-                  <c:v>4959</c:v>
+                  <c:v>3538</c:v>
                 </c:pt>
                 <c:pt idx="11">
-                  <c:v>5220</c:v>
+                  <c:v>3799</c:v>
                 </c:pt>
               </c:numCache>
             </c:numRef>
@@ -545,22 +545,22 @@
                   <c:v>0</c:v>
                 </c:pt>
                 <c:pt idx="6">
-                  <c:v>377</c:v>
+                  <c:v>406</c:v>
                 </c:pt>
                 <c:pt idx="7">
-                  <c:v>899</c:v>
+                  <c:v>957</c:v>
                 </c:pt>
                 <c:pt idx="8">
-                  <c:v>1421</c:v>
+                  <c:v>1247</c:v>
                 </c:pt>
                 <c:pt idx="9">
-                  <c:v>1798</c:v>
+                  <c:v>1624</c:v>
                 </c:pt>
                 <c:pt idx="10">
-                  <c:v>2175</c:v>
+                  <c:v>2001</c:v>
                 </c:pt>
                 <c:pt idx="11">
-                  <c:v>2697</c:v>
+                  <c:v>2233</c:v>
                 </c:pt>
               </c:numCache>
             </c:numRef>
@@ -575,7 +575,7 @@
               <c:strCache>
                 <c:ptCount val="1"/>
                 <c:pt idx="0">
-                  <c:v>Los Angeles</c:v>
+                  <c:v>Madison, WI</c:v>
                 </c:pt>
               </c:strCache>
             </c:strRef>
@@ -694,10 +694,10 @@
                   <c:v>406</c:v>
                 </c:pt>
                 <c:pt idx="10">
-                  <c:v>783</c:v>
+                  <c:v>725</c:v>
                 </c:pt>
                 <c:pt idx="11">
-                  <c:v>1160</c:v>
+                  <c:v>1044</c:v>
                 </c:pt>
               </c:numCache>
             </c:numRef>
@@ -712,14 +712,14 @@
               <c:strCache>
                 <c:ptCount val="1"/>
                 <c:pt idx="0">
-                  <c:v>Shipped goods</c:v>
+                  <c:v>Portland, ME</c:v>
                 </c:pt>
               </c:strCache>
             </c:strRef>
           </c:tx>
           <c:spPr>
             <a:solidFill>
-              <a:srgbClr val="A8C4AC"/>
+              <a:srgbClr val="8B3E2D"/>
             </a:solidFill>
             <a:effectLst/>
           </c:spPr>
@@ -804,37 +804,311 @@
                   <c:v>0</c:v>
                 </c:pt>
                 <c:pt idx="1">
-                  <c:v>348</c:v>
+                  <c:v>0</c:v>
                 </c:pt>
                 <c:pt idx="2">
-                  <c:v>754</c:v>
+                  <c:v>0</c:v>
                 </c:pt>
                 <c:pt idx="3">
-                  <c:v>1102</c:v>
+                  <c:v>0</c:v>
                 </c:pt>
                 <c:pt idx="4">
-                  <c:v>1421</c:v>
+                  <c:v>0</c:v>
                 </c:pt>
                 <c:pt idx="5">
-                  <c:v>1682</c:v>
+                  <c:v>0</c:v>
                 </c:pt>
                 <c:pt idx="6">
-                  <c:v>1943</c:v>
+                  <c:v>0</c:v>
                 </c:pt>
                 <c:pt idx="7">
-                  <c:v>2204</c:v>
+                  <c:v>0</c:v>
                 </c:pt>
                 <c:pt idx="8">
-                  <c:v>2465</c:v>
+                  <c:v>0</c:v>
                 </c:pt>
                 <c:pt idx="9">
-                  <c:v>2726</c:v>
+                  <c:v>0</c:v>
                 </c:pt>
                 <c:pt idx="10">
-                  <c:v>2929</c:v>
+                  <c:v>522</c:v>
                 </c:pt>
                 <c:pt idx="11">
-                  <c:v>3132</c:v>
+                  <c:v>986</c:v>
+                </c:pt>
+              </c:numCache>
+            </c:numRef>
+          </c:val>
+        </c:ser>
+        <c:ser>
+          <c:idx val="5"/>
+          <c:order val="5"/>
+          <c:tx>
+            <c:strRef>
+              <c:f>Sheet1!$G$1</c:f>
+              <c:strCache>
+                <c:ptCount val="1"/>
+                <c:pt idx="0">
+                  <c:v>Asheville, NC</c:v>
+                </c:pt>
+              </c:strCache>
+            </c:strRef>
+          </c:tx>
+          <c:spPr>
+            <a:solidFill>
+              <a:srgbClr val="A8C4AC"/>
+            </a:solidFill>
+            <a:effectLst/>
+          </c:spPr>
+          <c:invertIfNegative val="0"/>
+          <c:dLbls>
+            <c:numFmt formatCode="#,##0" sourceLinked="0"/>
+            <c:txPr>
+              <a:bodyPr/>
+              <a:lstStyle/>
+              <a:p>
+                <a:pPr>
+                  <a:defRPr b="0" i="0" strike="noStrike" sz="1200" u="none">
+                    <a:solidFill>
+                      <a:srgbClr val="000000"/>
+                    </a:solidFill>
+                    <a:latin typeface="Arial"/>
+                  </a:defRPr>
+                </a:pPr>
+              </a:p>
+            </c:txPr>
+            <c:showLegendKey val="0"/>
+            <c:showVal val="0"/>
+            <c:showCatName val="0"/>
+            <c:showSerName val="0"/>
+            <c:showPercent val="0"/>
+            <c:showBubbleSize val="0"/>
+            <c:showLeaderLines val="0"/>
+          </c:dLbls>
+          <c:cat>
+            <c:multiLvlStrRef>
+              <c:f>Sheet1!$A$2:$A$13</c:f>
+              <c:multiLvlStrCache>
+                <c:ptCount val="12"/>
+                <c:lvl>
+                  <c:pt idx="0">
+                    <c:v>Nov '26</c:v>
+                  </c:pt>
+                  <c:pt idx="1">
+                    <c:v>Dec</c:v>
+                  </c:pt>
+                  <c:pt idx="2">
+                    <c:v>Jan '27</c:v>
+                  </c:pt>
+                  <c:pt idx="3">
+                    <c:v>Feb</c:v>
+                  </c:pt>
+                  <c:pt idx="4">
+                    <c:v>Mar</c:v>
+                  </c:pt>
+                  <c:pt idx="5">
+                    <c:v>Apr</c:v>
+                  </c:pt>
+                  <c:pt idx="6">
+                    <c:v>May</c:v>
+                  </c:pt>
+                  <c:pt idx="7">
+                    <c:v>Jun</c:v>
+                  </c:pt>
+                  <c:pt idx="8">
+                    <c:v>Jul</c:v>
+                  </c:pt>
+                  <c:pt idx="9">
+                    <c:v>Aug</c:v>
+                  </c:pt>
+                  <c:pt idx="10">
+                    <c:v>Sep</c:v>
+                  </c:pt>
+                  <c:pt idx="11">
+                    <c:v>Oct '27</c:v>
+                  </c:pt>
+                </c:lvl>
+              </c:multiLvlStrCache>
+            </c:multiLvlStrRef>
+          </c:cat>
+          <c:val>
+            <c:numRef>
+              <c:f>Sheet1!$G$2:$G$13</c:f>
+              <c:numCache>
+                <c:formatCode>General</c:formatCode>
+                <c:ptCount val="12"/>
+                <c:pt idx="0">
+                  <c:v>0</c:v>
+                </c:pt>
+                <c:pt idx="1">
+                  <c:v>0</c:v>
+                </c:pt>
+                <c:pt idx="2">
+                  <c:v>0</c:v>
+                </c:pt>
+                <c:pt idx="3">
+                  <c:v>0</c:v>
+                </c:pt>
+                <c:pt idx="4">
+                  <c:v>0</c:v>
+                </c:pt>
+                <c:pt idx="5">
+                  <c:v>0</c:v>
+                </c:pt>
+                <c:pt idx="6">
+                  <c:v>0</c:v>
+                </c:pt>
+                <c:pt idx="7">
+                  <c:v>0</c:v>
+                </c:pt>
+                <c:pt idx="8">
+                  <c:v>0</c:v>
+                </c:pt>
+                <c:pt idx="9">
+                  <c:v>0</c:v>
+                </c:pt>
+                <c:pt idx="10">
+                  <c:v>0</c:v>
+                </c:pt>
+                <c:pt idx="11">
+                  <c:v>580</c:v>
+                </c:pt>
+              </c:numCache>
+            </c:numRef>
+          </c:val>
+        </c:ser>
+        <c:ser>
+          <c:idx val="6"/>
+          <c:order val="6"/>
+          <c:tx>
+            <c:strRef>
+              <c:f>Sheet1!$H$1</c:f>
+              <c:strCache>
+                <c:ptCount val="1"/>
+                <c:pt idx="0">
+                  <c:v>Shipped goods</c:v>
+                </c:pt>
+              </c:strCache>
+            </c:strRef>
+          </c:tx>
+          <c:spPr>
+            <a:solidFill>
+              <a:srgbClr val="5A534C"/>
+            </a:solidFill>
+            <a:effectLst/>
+          </c:spPr>
+          <c:invertIfNegative val="0"/>
+          <c:dLbls>
+            <c:numFmt formatCode="#,##0" sourceLinked="0"/>
+            <c:txPr>
+              <a:bodyPr/>
+              <a:lstStyle/>
+              <a:p>
+                <a:pPr>
+                  <a:defRPr b="0" i="0" strike="noStrike" sz="1200" u="none">
+                    <a:solidFill>
+                      <a:srgbClr val="000000"/>
+                    </a:solidFill>
+                    <a:latin typeface="Arial"/>
+                  </a:defRPr>
+                </a:pPr>
+              </a:p>
+            </c:txPr>
+            <c:showLegendKey val="0"/>
+            <c:showVal val="0"/>
+            <c:showCatName val="0"/>
+            <c:showSerName val="0"/>
+            <c:showPercent val="0"/>
+            <c:showBubbleSize val="0"/>
+            <c:showLeaderLines val="0"/>
+          </c:dLbls>
+          <c:cat>
+            <c:multiLvlStrRef>
+              <c:f>Sheet1!$A$2:$A$13</c:f>
+              <c:multiLvlStrCache>
+                <c:ptCount val="12"/>
+                <c:lvl>
+                  <c:pt idx="0">
+                    <c:v>Nov '26</c:v>
+                  </c:pt>
+                  <c:pt idx="1">
+                    <c:v>Dec</c:v>
+                  </c:pt>
+                  <c:pt idx="2">
+                    <c:v>Jan '27</c:v>
+                  </c:pt>
+                  <c:pt idx="3">
+                    <c:v>Feb</c:v>
+                  </c:pt>
+                  <c:pt idx="4">
+                    <c:v>Mar</c:v>
+                  </c:pt>
+                  <c:pt idx="5">
+                    <c:v>Apr</c:v>
+                  </c:pt>
+                  <c:pt idx="6">
+                    <c:v>May</c:v>
+                  </c:pt>
+                  <c:pt idx="7">
+                    <c:v>Jun</c:v>
+                  </c:pt>
+                  <c:pt idx="8">
+                    <c:v>Jul</c:v>
+                  </c:pt>
+                  <c:pt idx="9">
+                    <c:v>Aug</c:v>
+                  </c:pt>
+                  <c:pt idx="10">
+                    <c:v>Sep</c:v>
+                  </c:pt>
+                  <c:pt idx="11">
+                    <c:v>Oct '27</c:v>
+                  </c:pt>
+                </c:lvl>
+              </c:multiLvlStrCache>
+            </c:multiLvlStrRef>
+          </c:cat>
+          <c:val>
+            <c:numRef>
+              <c:f>Sheet1!$H$2:$H$13</c:f>
+              <c:numCache>
+                <c:formatCode>General</c:formatCode>
+                <c:ptCount val="12"/>
+                <c:pt idx="0">
+                  <c:v>0</c:v>
+                </c:pt>
+                <c:pt idx="1">
+                  <c:v>696</c:v>
+                </c:pt>
+                <c:pt idx="2">
+                  <c:v>928</c:v>
+                </c:pt>
+                <c:pt idx="3">
+                  <c:v>1218</c:v>
+                </c:pt>
+                <c:pt idx="4">
+                  <c:v>1392</c:v>
+                </c:pt>
+                <c:pt idx="5">
+                  <c:v>1566</c:v>
+                </c:pt>
+                <c:pt idx="6">
+                  <c:v>1769</c:v>
+                </c:pt>
+                <c:pt idx="7">
+                  <c:v>1972</c:v>
+                </c:pt>
+                <c:pt idx="8">
+                  <c:v>2233</c:v>
+                </c:pt>
+                <c:pt idx="9">
+                  <c:v>2494</c:v>
+                </c:pt>
+                <c:pt idx="10">
+                  <c:v>2697</c:v>
+                </c:pt>
+                <c:pt idx="11">
+                  <c:v>2900</c:v>
                 </c:pt>
               </c:numCache>
             </c:numRef>
@@ -1113,13 +1387,13 @@
                 <c:formatCode>General</c:formatCode>
                 <c:ptCount val="3"/>
                 <c:pt idx="0">
-                  <c:v>103675</c:v>
+                  <c:v>84419</c:v>
                 </c:pt>
                 <c:pt idx="1">
-                  <c:v>372795</c:v>
+                  <c:v>312417</c:v>
                 </c:pt>
                 <c:pt idx="2">
-                  <c:v>933011</c:v>
+                  <c:v>1015031</c:v>
                 </c:pt>
               </c:numCache>
             </c:numRef>
@@ -1198,7 +1472,7 @@
         <c:axId val="2094734552"/>
         <c:scaling>
           <c:orientation val="minMax"/>
-          <c:max val="1000000"/>
+          <c:max val="1100000"/>
           <c:min val="0"/>
         </c:scaling>
         <c:delete val="0"/>
@@ -2103,7 +2377,7 @@
           <a:p>
             <a:r>
               <a:rPr lang="en-US" dirty="0"/>
-              <a:t>Every dollar here is a $29 subscription — no goods transaction revenue, no gift cards, no client billing, no sponsorship. Portland and Denver carry the first six months; Seattle arriving in May and Los Angeles in August is what compounds into Year 2. New York opens just after this window, in December 2027. These are the conservative figures — the base case runs about 6% higher in Year 1.</a:t>
+              <a:t>Every dollar here is a $29 subscription — no goods transaction revenue, no gift cards, no client billing, no sponsorship. This model trades the big-metro bet for a wider spread of smaller ones: Madison, Portland ME and Asheville all open inside year one. It is also the harshest on churn of any scenario in the workbook, which is why Year 1 lands below the five-metro versions despite opening two more cities.</a:t>
             </a:r>
             <a:endParaRPr lang="en-US" dirty="0"/>
           </a:p>
@@ -2191,7 +2465,7 @@
           <a:p>
             <a:r>
               <a:rPr lang="en-US" dirty="0"/>
-              <a:t>These are the conservative figures: Portland, Denver and New York ramp as before, while Seattle and Los Angeles are cut back roughly a third — about 10% off three-year revenue against the base case. Three-year total $1.41M, exiting December 2029 at $89,778 a month, roughly $1.08M of annual run rate. Penetration stays deliberately shallow: Los Angeles is modelled at one vendor per 29,519 residents and New York one per 42,017, against one per 6,281 in Portland. Every one of the model's forty months reconciles: each market's revenue is an exact vendor count times price, and the three annual totals agree with both the spreadsheet's own monthly row and the sum of its market columns.</a:t>
+              <a:t>Seven metros instead of five, spread across smaller and cheaper markets — Madison, Portland ME and Asheville rather than New York. It is also the harshest churn model in the workbook: 30% of each arriving cohort lost for a metro's first three months, and 50% for shipped-goods sellers over six months. TWO THINGS TO FIX BEFORE SHOWING THIS: Los Angeles' December 2028 signup cell reads 1016 rather than 10, which inflates Year 3 by about $286,000 — corrected, Year 3 is roughly $729,000, not $1,015,031. And the sheet's metro-population column is carried over from the five-metro tab, so Madison reads 12.9M and Portland ME and Asheville read 20M; those columns are withheld from the table until they are fixed.</a:t>
             </a:r>
             <a:endParaRPr lang="en-US" dirty="0"/>
           </a:p>
@@ -7863,7 +8137,7 @@
                 <a:ea typeface="Calibri" pitchFamily="34" charset="-122"/>
                 <a:cs typeface="Calibri" pitchFamily="34" charset="-120"/>
               </a:rPr>
-              <a:t>YEAR 1  ·  CONSERVATIVE CASE</a:t>
+              <a:t>YEAR 1  ·  SEVEN-METRO MODEL</a:t>
             </a:r>
             <a:endParaRPr lang="en-US" sz="1100" dirty="0"/>
           </a:p>
@@ -7902,7 +8176,7 @@
                 <a:ea typeface="Cambria" pitchFamily="34" charset="-122"/>
                 <a:cs typeface="Cambria" pitchFamily="34" charset="-120"/>
               </a:rPr>
-              <a:t>Four cities in the first year</a:t>
+              <a:t>Six cities in the first year</a:t>
             </a:r>
             <a:endParaRPr lang="en-US" sz="3600" dirty="0"/>
           </a:p>
@@ -7944,7 +8218,7 @@
                 <a:ea typeface="Calibri" pitchFamily="34" charset="-122"/>
                 <a:cs typeface="Calibri" pitchFamily="34" charset="-120"/>
               </a:rPr>
-              <a:t>Portland and Denver open 1 November 2026, with shipped-goods makers nationwide. Seattle follows in May, Los Angeles in August.</a:t>
+              <a:t>Portland and Denver open 1 November 2026 with makers shipping nationwide. Seattle, Madison, Portland ME and Asheville all follow inside year one.</a:t>
             </a:r>
             <a:endParaRPr lang="en-US" sz="1350" dirty="0"/>
           </a:p>
@@ -8033,7 +8307,7 @@
                 <a:ea typeface="Cambria" pitchFamily="34" charset="-122"/>
                 <a:cs typeface="Cambria" pitchFamily="34" charset="-120"/>
               </a:rPr>
-              <a:t>$103,675</a:t>
+              <a:t>$84,419</a:t>
             </a:r>
             <a:endParaRPr lang="en-US" sz="2600" dirty="0"/>
           </a:p>
@@ -8184,7 +8458,7 @@
                 <a:ea typeface="Cambria" pitchFamily="34" charset="-122"/>
                 <a:cs typeface="Cambria" pitchFamily="34" charset="-120"/>
               </a:rPr>
-              <a:t>592</a:t>
+              <a:t>527</a:t>
             </a:r>
             <a:endParaRPr lang="en-US" sz="2600" dirty="0"/>
           </a:p>
@@ -8335,7 +8609,7 @@
                 <a:ea typeface="Cambria" pitchFamily="34" charset="-122"/>
                 <a:cs typeface="Cambria" pitchFamily="34" charset="-120"/>
               </a:rPr>
-              <a:t>$17,168</a:t>
+              <a:t>$15,283</a:t>
             </a:r>
             <a:endParaRPr lang="en-US" sz="2600" dirty="0"/>
           </a:p>
@@ -8413,7 +8687,7 @@
                 <a:ea typeface="Calibri" pitchFamily="34" charset="-122"/>
                 <a:cs typeface="Calibri" pitchFamily="34" charset="-120"/>
               </a:rPr>
-              <a:t>Oct '27 — ≈ $206K ARR</a:t>
+              <a:t>Oct '27 — ≈ $183K ARR</a:t>
             </a:r>
             <a:endParaRPr lang="en-US" sz="1050" dirty="0"/>
           </a:p>
@@ -8486,7 +8760,7 @@
                 <a:ea typeface="Cambria" pitchFamily="34" charset="-122"/>
                 <a:cs typeface="Cambria" pitchFamily="34" charset="-120"/>
               </a:rPr>
-              <a:t>4</a:t>
+              <a:t>6</a:t>
             </a:r>
             <a:endParaRPr lang="en-US" sz="2600" dirty="0"/>
           </a:p>
@@ -8603,7 +8877,7 @@
                 <a:ea typeface="Calibri" pitchFamily="34" charset="-122"/>
                 <a:cs typeface="Calibri" pitchFamily="34" charset="-120"/>
               </a:rPr>
-              <a:t>$29 per vendor per month, less 10% attrition on each converting cohort. A vendor’s first payment falls three months after signup, at the end of the free trial — so the first revenue month is December 2026.</a:t>
+              <a:t>$29 per vendor per month. A vendor’s first payment falls three months after signup, at the end of the free trial — so the first revenue month is December 2026. Churn is front-loaded: a metro loses 30% of each arriving cohort for its first three months before settling to 10%, and shipped-goods sellers churn at 50% for six months.</a:t>
             </a:r>
             <a:endParaRPr lang="en-US" sz="1000" dirty="0"/>
           </a:p>
@@ -8674,7 +8948,7 @@
                 <a:ea typeface="Calibri" pitchFamily="34" charset="-122"/>
                 <a:cs typeface="Calibri" pitchFamily="34" charset="-120"/>
               </a:rPr>
-              <a:t>YEARS 1 – 3  ·  CONSERVATIVE CASE</a:t>
+              <a:t>YEARS 1 – 3  ·  SEVEN-METRO MODEL</a:t>
             </a:r>
             <a:endParaRPr lang="en-US" sz="1100" dirty="0"/>
           </a:p>
@@ -8713,7 +8987,7 @@
                 <a:ea typeface="Cambria" pitchFamily="34" charset="-122"/>
                 <a:cs typeface="Cambria" pitchFamily="34" charset="-120"/>
               </a:rPr>
-              <a:t>Five metros by the third year</a:t>
+              <a:t>Seven metros by the third year</a:t>
             </a:r>
             <a:endParaRPr lang="en-US" sz="3600" dirty="0"/>
           </a:p>
@@ -8755,7 +9029,7 @@
                 <a:ea typeface="Calibri" pitchFamily="34" charset="-122"/>
                 <a:cs typeface="Calibri" pitchFamily="34" charset="-120"/>
               </a:rPr>
-              <a:t>The same playbook run city by city, each new metro inheriting a marketplace that already works. Revenue compounds because vendors signed in year one are still subscribing in year three.</a:t>
+              <a:t>The same playbook run city by city, each new metro inheriting a marketplace that already works — and spread across smaller, cheaper markets rather than concentrated in the largest ones.</a:t>
             </a:r>
             <a:endParaRPr lang="en-US" sz="1350" dirty="0"/>
           </a:p>
@@ -8810,7 +9084,7 @@
                 <a:ea typeface="Calibri" pitchFamily="34" charset="-122"/>
                 <a:cs typeface="Calibri" pitchFamily="34" charset="-120"/>
               </a:rPr>
-              <a:t>$1,409,481</a:t>
+              <a:t>$1,411,867</a:t>
             </a:r>
             <a:pPr algn="ctr" indent="0" marL="0">
               <a:buNone/>
@@ -8838,7 +9112,7 @@
                 <a:ea typeface="Calibri" pitchFamily="34" charset="-122"/>
                 <a:cs typeface="Calibri" pitchFamily="34" charset="-120"/>
               </a:rPr>
-              <a:t>$1.08M ARR</a:t>
+              <a:t>$1.22M ARR</a:t>
             </a:r>
             <a:pPr algn="ctr" indent="0" marL="0">
               <a:buNone/>
@@ -8920,13 +9194,11 @@
             <a:tbl>
               <a:tblPr/>
               <a:tblGrid>
-                <a:gridCol w="1325880"/>
-                <a:gridCol w="914400"/>
-                <a:gridCol w="1005840"/>
-                <a:gridCol w="868680"/>
-                <a:gridCol w="1554480"/>
+                <a:gridCol w="2194560"/>
+                <a:gridCol w="1737360"/>
+                <a:gridCol w="1737360"/>
               </a:tblGrid>
-              <a:tr h="283464">
+              <a:tr h="274320">
                 <a:tc>
                   <a:txBody>
                     <a:bodyPr/>
@@ -9012,7 +9284,7 @@
                           <a:ea typeface="Calibri" pitchFamily="34" charset="-122"/>
                           <a:cs typeface="Calibri" pitchFamily="34" charset="-120"/>
                         </a:rPr>
-                        <a:t>First rev.</a:t>
+                        <a:t>First revenue</a:t>
                       </a:r>
                       <a:endParaRPr lang="en-US" sz="1000" dirty="0">
                         <a:latin typeface="Calibri" charset="0"/>
@@ -9080,143 +9352,7 @@
                           <a:ea typeface="Calibri" pitchFamily="34" charset="-122"/>
                           <a:cs typeface="Calibri" pitchFamily="34" charset="-120"/>
                         </a:rPr>
-                        <a:t>Metro pop.</a:t>
-                      </a:r>
-                      <a:endParaRPr lang="en-US" sz="1000" dirty="0">
-                        <a:latin typeface="Calibri" charset="0"/>
-                        <a:ea typeface="Calibri" charset="0"/>
-                        <a:cs typeface="Calibri" charset="0"/>
-                      </a:endParaRPr>
-                    </a:p>
-                  </a:txBody>
-                  <a:tcPr marL="76200" marR="76200" marT="38100" marB="38100" anchor="ctr">
-                    <a:lnL w="9525" cap="flat" cmpd="sng" algn="ctr">
-                      <a:solidFill>
-                        <a:srgbClr val="E7E3DE"/>
-                      </a:solidFill>
-                      <a:prstDash val="solid"/>
-                      <a:round/>
-                      <a:headEnd type="none" w="med" len="med"/>
-                      <a:tailEnd type="none" w="med" len="med"/>
-                    </a:lnL>
-                    <a:lnR w="9525" cap="flat" cmpd="sng" algn="ctr">
-                      <a:solidFill>
-                        <a:srgbClr val="E7E3DE"/>
-                      </a:solidFill>
-                      <a:prstDash val="solid"/>
-                      <a:round/>
-                      <a:headEnd type="none" w="med" len="med"/>
-                      <a:tailEnd type="none" w="med" len="med"/>
-                    </a:lnR>
-                    <a:lnT w="9525" cap="flat" cmpd="sng" algn="ctr">
-                      <a:solidFill>
-                        <a:srgbClr val="E7E3DE"/>
-                      </a:solidFill>
-                      <a:prstDash val="solid"/>
-                      <a:round/>
-                      <a:headEnd type="none" w="med" len="med"/>
-                      <a:tailEnd type="none" w="med" len="med"/>
-                    </a:lnT>
-                    <a:lnB w="9525" cap="flat" cmpd="sng" algn="ctr">
-                      <a:solidFill>
-                        <a:srgbClr val="E7E3DE"/>
-                      </a:solidFill>
-                      <a:prstDash val="solid"/>
-                      <a:round/>
-                      <a:headEnd type="none" w="med" len="med"/>
-                      <a:tailEnd type="none" w="med" len="med"/>
-                    </a:lnB>
-                    <a:solidFill>
-                      <a:srgbClr val="FFFFFF"/>
-                    </a:solidFill>
-                  </a:tcPr>
-                </a:tc>
-                <a:tc>
-                  <a:txBody>
-                    <a:bodyPr/>
-                    <a:lstStyle/>
-                    <a:p>
-                      <a:pPr algn="r" indent="0" marL="0">
-                        <a:buNone/>
-                      </a:pPr>
-                      <a:r>
-                        <a:rPr lang="en-US" sz="1000" b="1" dirty="0">
-                          <a:solidFill>
-                            <a:srgbClr val="8B3E2D"/>
-                          </a:solidFill>
-                          <a:latin typeface="Calibri" pitchFamily="34" charset="0"/>
-                          <a:ea typeface="Calibri" pitchFamily="34" charset="-122"/>
-                          <a:cs typeface="Calibri" pitchFamily="34" charset="-120"/>
-                        </a:rPr>
-                        <a:t>Vendors</a:t>
-                      </a:r>
-                      <a:endParaRPr lang="en-US" sz="1000" dirty="0">
-                        <a:latin typeface="Calibri" charset="0"/>
-                        <a:ea typeface="Calibri" charset="0"/>
-                        <a:cs typeface="Calibri" charset="0"/>
-                      </a:endParaRPr>
-                    </a:p>
-                  </a:txBody>
-                  <a:tcPr marL="76200" marR="76200" marT="38100" marB="38100" anchor="ctr">
-                    <a:lnL w="9525" cap="flat" cmpd="sng" algn="ctr">
-                      <a:solidFill>
-                        <a:srgbClr val="E7E3DE"/>
-                      </a:solidFill>
-                      <a:prstDash val="solid"/>
-                      <a:round/>
-                      <a:headEnd type="none" w="med" len="med"/>
-                      <a:tailEnd type="none" w="med" len="med"/>
-                    </a:lnL>
-                    <a:lnR w="9525" cap="flat" cmpd="sng" algn="ctr">
-                      <a:solidFill>
-                        <a:srgbClr val="E7E3DE"/>
-                      </a:solidFill>
-                      <a:prstDash val="solid"/>
-                      <a:round/>
-                      <a:headEnd type="none" w="med" len="med"/>
-                      <a:tailEnd type="none" w="med" len="med"/>
-                    </a:lnR>
-                    <a:lnT w="9525" cap="flat" cmpd="sng" algn="ctr">
-                      <a:solidFill>
-                        <a:srgbClr val="E7E3DE"/>
-                      </a:solidFill>
-                      <a:prstDash val="solid"/>
-                      <a:round/>
-                      <a:headEnd type="none" w="med" len="med"/>
-                      <a:tailEnd type="none" w="med" len="med"/>
-                    </a:lnT>
-                    <a:lnB w="9525" cap="flat" cmpd="sng" algn="ctr">
-                      <a:solidFill>
-                        <a:srgbClr val="E7E3DE"/>
-                      </a:solidFill>
-                      <a:prstDash val="solid"/>
-                      <a:round/>
-                      <a:headEnd type="none" w="med" len="med"/>
-                      <a:tailEnd type="none" w="med" len="med"/>
-                    </a:lnB>
-                    <a:solidFill>
-                      <a:srgbClr val="FFFFFF"/>
-                    </a:solidFill>
-                  </a:tcPr>
-                </a:tc>
-                <a:tc>
-                  <a:txBody>
-                    <a:bodyPr/>
-                    <a:lstStyle/>
-                    <a:p>
-                      <a:pPr algn="r" indent="0" marL="0">
-                        <a:buNone/>
-                      </a:pPr>
-                      <a:r>
-                        <a:rPr lang="en-US" sz="1000" b="1" dirty="0">
-                          <a:solidFill>
-                            <a:srgbClr val="8B3E2D"/>
-                          </a:solidFill>
-                          <a:latin typeface="Calibri" pitchFamily="34" charset="0"/>
-                          <a:ea typeface="Calibri" pitchFamily="34" charset="-122"/>
-                          <a:cs typeface="Calibri" pitchFamily="34" charset="-120"/>
-                        </a:rPr>
-                        <a:t>Pop. per vendor</a:t>
+                        <a:t>New vendors</a:t>
                       </a:r>
                       <a:endParaRPr lang="en-US" sz="1000" dirty="0">
                         <a:latin typeface="Calibri" charset="0"/>
@@ -9268,7 +9404,7 @@
                   </a:tcPr>
                 </a:tc>
               </a:tr>
-              <a:tr h="283464">
+              <a:tr h="274320">
                 <a:tc>
                   <a:txBody>
                     <a:bodyPr/>
@@ -9286,7 +9422,7 @@
                           <a:ea typeface="Calibri" pitchFamily="34" charset="-122"/>
                           <a:cs typeface="Calibri" pitchFamily="34" charset="-120"/>
                         </a:rPr>
-                        <a:t>Portland</a:t>
+                        <a:t>Portland, OR</a:t>
                       </a:r>
                       <a:endParaRPr lang="en-US" sz="1100" dirty="0">
                         <a:latin typeface="Calibri" charset="0"/>
@@ -9416,149 +9552,13 @@
                       <a:r>
                         <a:rPr lang="en-US" sz="1100" dirty="0">
                           <a:solidFill>
-                            <a:srgbClr val="5A534C"/>
-                          </a:solidFill>
-                          <a:latin typeface="Calibri" pitchFamily="34" charset="0"/>
-                          <a:ea typeface="Calibri" pitchFamily="34" charset="-122"/>
-                          <a:cs typeface="Calibri" pitchFamily="34" charset="-120"/>
-                        </a:rPr>
-                        <a:t>2.5M</a:t>
-                      </a:r>
-                      <a:endParaRPr lang="en-US" sz="1100" dirty="0">
-                        <a:latin typeface="Calibri" charset="0"/>
-                        <a:ea typeface="Calibri" charset="0"/>
-                        <a:cs typeface="Calibri" charset="0"/>
-                      </a:endParaRPr>
-                    </a:p>
-                  </a:txBody>
-                  <a:tcPr marL="76200" marR="76200" marT="38100" marB="38100" anchor="ctr">
-                    <a:lnL w="9525" cap="flat" cmpd="sng" algn="ctr">
-                      <a:solidFill>
-                        <a:srgbClr val="E7E3DE"/>
-                      </a:solidFill>
-                      <a:prstDash val="solid"/>
-                      <a:round/>
-                      <a:headEnd type="none" w="med" len="med"/>
-                      <a:tailEnd type="none" w="med" len="med"/>
-                    </a:lnL>
-                    <a:lnR w="9525" cap="flat" cmpd="sng" algn="ctr">
-                      <a:solidFill>
-                        <a:srgbClr val="E7E3DE"/>
-                      </a:solidFill>
-                      <a:prstDash val="solid"/>
-                      <a:round/>
-                      <a:headEnd type="none" w="med" len="med"/>
-                      <a:tailEnd type="none" w="med" len="med"/>
-                    </a:lnR>
-                    <a:lnT w="9525" cap="flat" cmpd="sng" algn="ctr">
-                      <a:solidFill>
-                        <a:srgbClr val="E7E3DE"/>
-                      </a:solidFill>
-                      <a:prstDash val="solid"/>
-                      <a:round/>
-                      <a:headEnd type="none" w="med" len="med"/>
-                      <a:tailEnd type="none" w="med" len="med"/>
-                    </a:lnT>
-                    <a:lnB w="9525" cap="flat" cmpd="sng" algn="ctr">
-                      <a:solidFill>
-                        <a:srgbClr val="E7E3DE"/>
-                      </a:solidFill>
-                      <a:prstDash val="solid"/>
-                      <a:round/>
-                      <a:headEnd type="none" w="med" len="med"/>
-                      <a:tailEnd type="none" w="med" len="med"/>
-                    </a:lnB>
-                    <a:solidFill>
-                      <a:srgbClr val="FFFFFF"/>
-                    </a:solidFill>
-                  </a:tcPr>
-                </a:tc>
-                <a:tc>
-                  <a:txBody>
-                    <a:bodyPr/>
-                    <a:lstStyle/>
-                    <a:p>
-                      <a:pPr algn="r" indent="0" marL="0">
-                        <a:buNone/>
-                      </a:pPr>
-                      <a:r>
-                        <a:rPr lang="en-US" sz="1100" dirty="0">
-                          <a:solidFill>
                             <a:srgbClr val="2C2825"/>
                           </a:solidFill>
                           <a:latin typeface="Calibri" pitchFamily="34" charset="0"/>
                           <a:ea typeface="Calibri" pitchFamily="34" charset="-122"/>
                           <a:cs typeface="Calibri" pitchFamily="34" charset="-120"/>
                         </a:rPr>
-                        <a:t>398</a:t>
-                      </a:r>
-                      <a:endParaRPr lang="en-US" sz="1100" dirty="0">
-                        <a:latin typeface="Calibri" charset="0"/>
-                        <a:ea typeface="Calibri" charset="0"/>
-                        <a:cs typeface="Calibri" charset="0"/>
-                      </a:endParaRPr>
-                    </a:p>
-                  </a:txBody>
-                  <a:tcPr marL="76200" marR="76200" marT="38100" marB="38100" anchor="ctr">
-                    <a:lnL w="9525" cap="flat" cmpd="sng" algn="ctr">
-                      <a:solidFill>
-                        <a:srgbClr val="E7E3DE"/>
-                      </a:solidFill>
-                      <a:prstDash val="solid"/>
-                      <a:round/>
-                      <a:headEnd type="none" w="med" len="med"/>
-                      <a:tailEnd type="none" w="med" len="med"/>
-                    </a:lnL>
-                    <a:lnR w="9525" cap="flat" cmpd="sng" algn="ctr">
-                      <a:solidFill>
-                        <a:srgbClr val="E7E3DE"/>
-                      </a:solidFill>
-                      <a:prstDash val="solid"/>
-                      <a:round/>
-                      <a:headEnd type="none" w="med" len="med"/>
-                      <a:tailEnd type="none" w="med" len="med"/>
-                    </a:lnR>
-                    <a:lnT w="9525" cap="flat" cmpd="sng" algn="ctr">
-                      <a:solidFill>
-                        <a:srgbClr val="E7E3DE"/>
-                      </a:solidFill>
-                      <a:prstDash val="solid"/>
-                      <a:round/>
-                      <a:headEnd type="none" w="med" len="med"/>
-                      <a:tailEnd type="none" w="med" len="med"/>
-                    </a:lnT>
-                    <a:lnB w="9525" cap="flat" cmpd="sng" algn="ctr">
-                      <a:solidFill>
-                        <a:srgbClr val="E7E3DE"/>
-                      </a:solidFill>
-                      <a:prstDash val="solid"/>
-                      <a:round/>
-                      <a:headEnd type="none" w="med" len="med"/>
-                      <a:tailEnd type="none" w="med" len="med"/>
-                    </a:lnB>
-                    <a:solidFill>
-                      <a:srgbClr val="FFFFFF"/>
-                    </a:solidFill>
-                  </a:tcPr>
-                </a:tc>
-                <a:tc>
-                  <a:txBody>
-                    <a:bodyPr/>
-                    <a:lstStyle/>
-                    <a:p>
-                      <a:pPr algn="r" indent="0" marL="0">
-                        <a:buNone/>
-                      </a:pPr>
-                      <a:r>
-                        <a:rPr lang="en-US" sz="1100" dirty="0">
-                          <a:solidFill>
-                            <a:srgbClr val="5A534C"/>
-                          </a:solidFill>
-                          <a:latin typeface="Calibri" pitchFamily="34" charset="0"/>
-                          <a:ea typeface="Calibri" pitchFamily="34" charset="-122"/>
-                          <a:cs typeface="Calibri" pitchFamily="34" charset="-120"/>
-                        </a:rPr>
-                        <a:t>6,281</a:t>
+                        <a:t>199</a:t>
                       </a:r>
                       <a:endParaRPr lang="en-US" sz="1100" dirty="0">
                         <a:latin typeface="Calibri" charset="0"/>
@@ -9610,7 +9610,7 @@
                   </a:tcPr>
                 </a:tc>
               </a:tr>
-              <a:tr h="283464">
+              <a:tr h="274320">
                 <a:tc>
                   <a:txBody>
                     <a:bodyPr/>
@@ -9758,149 +9758,13 @@
                       <a:r>
                         <a:rPr lang="en-US" sz="1100" dirty="0">
                           <a:solidFill>
-                            <a:srgbClr val="5A534C"/>
-                          </a:solidFill>
-                          <a:latin typeface="Calibri" pitchFamily="34" charset="0"/>
-                          <a:ea typeface="Calibri" pitchFamily="34" charset="-122"/>
-                          <a:cs typeface="Calibri" pitchFamily="34" charset="-120"/>
-                        </a:rPr>
-                        <a:t>3.0M</a:t>
-                      </a:r>
-                      <a:endParaRPr lang="en-US" sz="1100" dirty="0">
-                        <a:latin typeface="Calibri" charset="0"/>
-                        <a:ea typeface="Calibri" charset="0"/>
-                        <a:cs typeface="Calibri" charset="0"/>
-                      </a:endParaRPr>
-                    </a:p>
-                  </a:txBody>
-                  <a:tcPr marL="76200" marR="76200" marT="38100" marB="38100" anchor="ctr">
-                    <a:lnL w="9525" cap="flat" cmpd="sng" algn="ctr">
-                      <a:solidFill>
-                        <a:srgbClr val="E7E3DE"/>
-                      </a:solidFill>
-                      <a:prstDash val="solid"/>
-                      <a:round/>
-                      <a:headEnd type="none" w="med" len="med"/>
-                      <a:tailEnd type="none" w="med" len="med"/>
-                    </a:lnL>
-                    <a:lnR w="9525" cap="flat" cmpd="sng" algn="ctr">
-                      <a:solidFill>
-                        <a:srgbClr val="E7E3DE"/>
-                      </a:solidFill>
-                      <a:prstDash val="solid"/>
-                      <a:round/>
-                      <a:headEnd type="none" w="med" len="med"/>
-                      <a:tailEnd type="none" w="med" len="med"/>
-                    </a:lnR>
-                    <a:lnT w="9525" cap="flat" cmpd="sng" algn="ctr">
-                      <a:solidFill>
-                        <a:srgbClr val="E7E3DE"/>
-                      </a:solidFill>
-                      <a:prstDash val="solid"/>
-                      <a:round/>
-                      <a:headEnd type="none" w="med" len="med"/>
-                      <a:tailEnd type="none" w="med" len="med"/>
-                    </a:lnT>
-                    <a:lnB w="9525" cap="flat" cmpd="sng" algn="ctr">
-                      <a:solidFill>
-                        <a:srgbClr val="E7E3DE"/>
-                      </a:solidFill>
-                      <a:prstDash val="solid"/>
-                      <a:round/>
-                      <a:headEnd type="none" w="med" len="med"/>
-                      <a:tailEnd type="none" w="med" len="med"/>
-                    </a:lnB>
-                    <a:solidFill>
-                      <a:srgbClr val="FFFFFF"/>
-                    </a:solidFill>
-                  </a:tcPr>
-                </a:tc>
-                <a:tc>
-                  <a:txBody>
-                    <a:bodyPr/>
-                    <a:lstStyle/>
-                    <a:p>
-                      <a:pPr algn="r" indent="0" marL="0">
-                        <a:buNone/>
-                      </a:pPr>
-                      <a:r>
-                        <a:rPr lang="en-US" sz="1100" dirty="0">
-                          <a:solidFill>
                             <a:srgbClr val="2C2825"/>
                           </a:solidFill>
                           <a:latin typeface="Calibri" pitchFamily="34" charset="0"/>
                           <a:ea typeface="Calibri" pitchFamily="34" charset="-122"/>
                           <a:cs typeface="Calibri" pitchFamily="34" charset="-120"/>
                         </a:rPr>
-                        <a:t>418</a:t>
-                      </a:r>
-                      <a:endParaRPr lang="en-US" sz="1100" dirty="0">
-                        <a:latin typeface="Calibri" charset="0"/>
-                        <a:ea typeface="Calibri" charset="0"/>
-                        <a:cs typeface="Calibri" charset="0"/>
-                      </a:endParaRPr>
-                    </a:p>
-                  </a:txBody>
-                  <a:tcPr marL="76200" marR="76200" marT="38100" marB="38100" anchor="ctr">
-                    <a:lnL w="9525" cap="flat" cmpd="sng" algn="ctr">
-                      <a:solidFill>
-                        <a:srgbClr val="E7E3DE"/>
-                      </a:solidFill>
-                      <a:prstDash val="solid"/>
-                      <a:round/>
-                      <a:headEnd type="none" w="med" len="med"/>
-                      <a:tailEnd type="none" w="med" len="med"/>
-                    </a:lnL>
-                    <a:lnR w="9525" cap="flat" cmpd="sng" algn="ctr">
-                      <a:solidFill>
-                        <a:srgbClr val="E7E3DE"/>
-                      </a:solidFill>
-                      <a:prstDash val="solid"/>
-                      <a:round/>
-                      <a:headEnd type="none" w="med" len="med"/>
-                      <a:tailEnd type="none" w="med" len="med"/>
-                    </a:lnR>
-                    <a:lnT w="9525" cap="flat" cmpd="sng" algn="ctr">
-                      <a:solidFill>
-                        <a:srgbClr val="E7E3DE"/>
-                      </a:solidFill>
-                      <a:prstDash val="solid"/>
-                      <a:round/>
-                      <a:headEnd type="none" w="med" len="med"/>
-                      <a:tailEnd type="none" w="med" len="med"/>
-                    </a:lnT>
-                    <a:lnB w="9525" cap="flat" cmpd="sng" algn="ctr">
-                      <a:solidFill>
-                        <a:srgbClr val="E7E3DE"/>
-                      </a:solidFill>
-                      <a:prstDash val="solid"/>
-                      <a:round/>
-                      <a:headEnd type="none" w="med" len="med"/>
-                      <a:tailEnd type="none" w="med" len="med"/>
-                    </a:lnB>
-                    <a:solidFill>
-                      <a:srgbClr val="FFFFFF"/>
-                    </a:solidFill>
-                  </a:tcPr>
-                </a:tc>
-                <a:tc>
-                  <a:txBody>
-                    <a:bodyPr/>
-                    <a:lstStyle/>
-                    <a:p>
-                      <a:pPr algn="r" indent="0" marL="0">
-                        <a:buNone/>
-                      </a:pPr>
-                      <a:r>
-                        <a:rPr lang="en-US" sz="1100" dirty="0">
-                          <a:solidFill>
-                            <a:srgbClr val="5A534C"/>
-                          </a:solidFill>
-                          <a:latin typeface="Calibri" pitchFamily="34" charset="0"/>
-                          <a:ea typeface="Calibri" pitchFamily="34" charset="-122"/>
-                          <a:cs typeface="Calibri" pitchFamily="34" charset="-120"/>
-                        </a:rPr>
-                        <a:t>7,177</a:t>
+                        <a:t>214</a:t>
                       </a:r>
                       <a:endParaRPr lang="en-US" sz="1100" dirty="0">
                         <a:latin typeface="Calibri" charset="0"/>
@@ -9952,7 +9816,7 @@
                   </a:tcPr>
                 </a:tc>
               </a:tr>
-              <a:tr h="283464">
+              <a:tr h="274320">
                 <a:tc>
                   <a:txBody>
                     <a:bodyPr/>
@@ -10100,149 +9964,13 @@
                       <a:r>
                         <a:rPr lang="en-US" sz="1100" dirty="0">
                           <a:solidFill>
-                            <a:srgbClr val="5A534C"/>
-                          </a:solidFill>
-                          <a:latin typeface="Calibri" pitchFamily="34" charset="0"/>
-                          <a:ea typeface="Calibri" pitchFamily="34" charset="-122"/>
-                          <a:cs typeface="Calibri" pitchFamily="34" charset="-120"/>
-                        </a:rPr>
-                        <a:t>4.1M</a:t>
-                      </a:r>
-                      <a:endParaRPr lang="en-US" sz="1100" dirty="0">
-                        <a:latin typeface="Calibri" charset="0"/>
-                        <a:ea typeface="Calibri" charset="0"/>
-                        <a:cs typeface="Calibri" charset="0"/>
-                      </a:endParaRPr>
-                    </a:p>
-                  </a:txBody>
-                  <a:tcPr marL="76200" marR="76200" marT="38100" marB="38100" anchor="ctr">
-                    <a:lnL w="9525" cap="flat" cmpd="sng" algn="ctr">
-                      <a:solidFill>
-                        <a:srgbClr val="E7E3DE"/>
-                      </a:solidFill>
-                      <a:prstDash val="solid"/>
-                      <a:round/>
-                      <a:headEnd type="none" w="med" len="med"/>
-                      <a:tailEnd type="none" w="med" len="med"/>
-                    </a:lnL>
-                    <a:lnR w="9525" cap="flat" cmpd="sng" algn="ctr">
-                      <a:solidFill>
-                        <a:srgbClr val="E7E3DE"/>
-                      </a:solidFill>
-                      <a:prstDash val="solid"/>
-                      <a:round/>
-                      <a:headEnd type="none" w="med" len="med"/>
-                      <a:tailEnd type="none" w="med" len="med"/>
-                    </a:lnR>
-                    <a:lnT w="9525" cap="flat" cmpd="sng" algn="ctr">
-                      <a:solidFill>
-                        <a:srgbClr val="E7E3DE"/>
-                      </a:solidFill>
-                      <a:prstDash val="solid"/>
-                      <a:round/>
-                      <a:headEnd type="none" w="med" len="med"/>
-                      <a:tailEnd type="none" w="med" len="med"/>
-                    </a:lnT>
-                    <a:lnB w="9525" cap="flat" cmpd="sng" algn="ctr">
-                      <a:solidFill>
-                        <a:srgbClr val="E7E3DE"/>
-                      </a:solidFill>
-                      <a:prstDash val="solid"/>
-                      <a:round/>
-                      <a:headEnd type="none" w="med" len="med"/>
-                      <a:tailEnd type="none" w="med" len="med"/>
-                    </a:lnB>
-                    <a:solidFill>
-                      <a:srgbClr val="FFFFFF"/>
-                    </a:solidFill>
-                  </a:tcPr>
-                </a:tc>
-                <a:tc>
-                  <a:txBody>
-                    <a:bodyPr/>
-                    <a:lstStyle/>
-                    <a:p>
-                      <a:pPr algn="r" indent="0" marL="0">
-                        <a:buNone/>
-                      </a:pPr>
-                      <a:r>
-                        <a:rPr lang="en-US" sz="1100" dirty="0">
-                          <a:solidFill>
                             <a:srgbClr val="2C2825"/>
                           </a:solidFill>
                           <a:latin typeface="Calibri" pitchFamily="34" charset="0"/>
                           <a:ea typeface="Calibri" pitchFamily="34" charset="-122"/>
                           <a:cs typeface="Calibri" pitchFamily="34" charset="-120"/>
                         </a:rPr>
-                        <a:t>373</a:t>
-                      </a:r>
-                      <a:endParaRPr lang="en-US" sz="1100" dirty="0">
-                        <a:latin typeface="Calibri" charset="0"/>
-                        <a:ea typeface="Calibri" charset="0"/>
-                        <a:cs typeface="Calibri" charset="0"/>
-                      </a:endParaRPr>
-                    </a:p>
-                  </a:txBody>
-                  <a:tcPr marL="76200" marR="76200" marT="38100" marB="38100" anchor="ctr">
-                    <a:lnL w="9525" cap="flat" cmpd="sng" algn="ctr">
-                      <a:solidFill>
-                        <a:srgbClr val="E7E3DE"/>
-                      </a:solidFill>
-                      <a:prstDash val="solid"/>
-                      <a:round/>
-                      <a:headEnd type="none" w="med" len="med"/>
-                      <a:tailEnd type="none" w="med" len="med"/>
-                    </a:lnL>
-                    <a:lnR w="9525" cap="flat" cmpd="sng" algn="ctr">
-                      <a:solidFill>
-                        <a:srgbClr val="E7E3DE"/>
-                      </a:solidFill>
-                      <a:prstDash val="solid"/>
-                      <a:round/>
-                      <a:headEnd type="none" w="med" len="med"/>
-                      <a:tailEnd type="none" w="med" len="med"/>
-                    </a:lnR>
-                    <a:lnT w="9525" cap="flat" cmpd="sng" algn="ctr">
-                      <a:solidFill>
-                        <a:srgbClr val="E7E3DE"/>
-                      </a:solidFill>
-                      <a:prstDash val="solid"/>
-                      <a:round/>
-                      <a:headEnd type="none" w="med" len="med"/>
-                      <a:tailEnd type="none" w="med" len="med"/>
-                    </a:lnT>
-                    <a:lnB w="9525" cap="flat" cmpd="sng" algn="ctr">
-                      <a:solidFill>
-                        <a:srgbClr val="E7E3DE"/>
-                      </a:solidFill>
-                      <a:prstDash val="solid"/>
-                      <a:round/>
-                      <a:headEnd type="none" w="med" len="med"/>
-                      <a:tailEnd type="none" w="med" len="med"/>
-                    </a:lnB>
-                    <a:solidFill>
-                      <a:srgbClr val="FFFFFF"/>
-                    </a:solidFill>
-                  </a:tcPr>
-                </a:tc>
-                <a:tc>
-                  <a:txBody>
-                    <a:bodyPr/>
-                    <a:lstStyle/>
-                    <a:p>
-                      <a:pPr algn="r" indent="0" marL="0">
-                        <a:buNone/>
-                      </a:pPr>
-                      <a:r>
-                        <a:rPr lang="en-US" sz="1100" dirty="0">
-                          <a:solidFill>
-                            <a:srgbClr val="5A534C"/>
-                          </a:solidFill>
-                          <a:latin typeface="Calibri" pitchFamily="34" charset="0"/>
-                          <a:ea typeface="Calibri" pitchFamily="34" charset="-122"/>
-                          <a:cs typeface="Calibri" pitchFamily="34" charset="-120"/>
-                        </a:rPr>
-                        <a:t>10,992</a:t>
+                        <a:t>195</a:t>
                       </a:r>
                       <a:endParaRPr lang="en-US" sz="1100" dirty="0">
                         <a:latin typeface="Calibri" charset="0"/>
@@ -10294,7 +10022,7 @@
                   </a:tcPr>
                 </a:tc>
               </a:tr>
-              <a:tr h="283464">
+              <a:tr h="274320">
                 <a:tc>
                   <a:txBody>
                     <a:bodyPr/>
@@ -10312,7 +10040,7 @@
                           <a:ea typeface="Calibri" pitchFamily="34" charset="-122"/>
                           <a:cs typeface="Calibri" pitchFamily="34" charset="-120"/>
                         </a:rPr>
-                        <a:t>Los Angeles</a:t>
+                        <a:t>Madison, WI</a:t>
                       </a:r>
                       <a:endParaRPr lang="en-US" sz="1100" dirty="0">
                         <a:latin typeface="Calibri" charset="0"/>
@@ -10442,13 +10170,151 @@
                       <a:r>
                         <a:rPr lang="en-US" sz="1100" dirty="0">
                           <a:solidFill>
+                            <a:srgbClr val="2C2825"/>
+                          </a:solidFill>
+                          <a:latin typeface="Calibri" pitchFamily="34" charset="0"/>
+                          <a:ea typeface="Calibri" pitchFamily="34" charset="-122"/>
+                          <a:cs typeface="Calibri" pitchFamily="34" charset="-120"/>
+                        </a:rPr>
+                        <a:t>223</a:t>
+                      </a:r>
+                      <a:endParaRPr lang="en-US" sz="1100" dirty="0">
+                        <a:latin typeface="Calibri" charset="0"/>
+                        <a:ea typeface="Calibri" charset="0"/>
+                        <a:cs typeface="Calibri" charset="0"/>
+                      </a:endParaRPr>
+                    </a:p>
+                  </a:txBody>
+                  <a:tcPr marL="76200" marR="76200" marT="38100" marB="38100" anchor="ctr">
+                    <a:lnL w="9525" cap="flat" cmpd="sng" algn="ctr">
+                      <a:solidFill>
+                        <a:srgbClr val="E7E3DE"/>
+                      </a:solidFill>
+                      <a:prstDash val="solid"/>
+                      <a:round/>
+                      <a:headEnd type="none" w="med" len="med"/>
+                      <a:tailEnd type="none" w="med" len="med"/>
+                    </a:lnL>
+                    <a:lnR w="9525" cap="flat" cmpd="sng" algn="ctr">
+                      <a:solidFill>
+                        <a:srgbClr val="E7E3DE"/>
+                      </a:solidFill>
+                      <a:prstDash val="solid"/>
+                      <a:round/>
+                      <a:headEnd type="none" w="med" len="med"/>
+                      <a:tailEnd type="none" w="med" len="med"/>
+                    </a:lnR>
+                    <a:lnT w="9525" cap="flat" cmpd="sng" algn="ctr">
+                      <a:solidFill>
+                        <a:srgbClr val="E7E3DE"/>
+                      </a:solidFill>
+                      <a:prstDash val="solid"/>
+                      <a:round/>
+                      <a:headEnd type="none" w="med" len="med"/>
+                      <a:tailEnd type="none" w="med" len="med"/>
+                    </a:lnT>
+                    <a:lnB w="9525" cap="flat" cmpd="sng" algn="ctr">
+                      <a:solidFill>
+                        <a:srgbClr val="E7E3DE"/>
+                      </a:solidFill>
+                      <a:prstDash val="solid"/>
+                      <a:round/>
+                      <a:headEnd type="none" w="med" len="med"/>
+                      <a:tailEnd type="none" w="med" len="med"/>
+                    </a:lnB>
+                    <a:solidFill>
+                      <a:srgbClr val="FFFFFF"/>
+                    </a:solidFill>
+                  </a:tcPr>
+                </a:tc>
+              </a:tr>
+              <a:tr h="274320">
+                <a:tc>
+                  <a:txBody>
+                    <a:bodyPr/>
+                    <a:lstStyle/>
+                    <a:p>
+                      <a:pPr indent="0" marL="0">
+                        <a:buNone/>
+                      </a:pPr>
+                      <a:r>
+                        <a:rPr lang="en-US" sz="1100" b="1" dirty="0">
+                          <a:solidFill>
+                            <a:srgbClr val="2C2825"/>
+                          </a:solidFill>
+                          <a:latin typeface="Calibri" pitchFamily="34" charset="0"/>
+                          <a:ea typeface="Calibri" pitchFamily="34" charset="-122"/>
+                          <a:cs typeface="Calibri" pitchFamily="34" charset="-120"/>
+                        </a:rPr>
+                        <a:t>Portland, ME</a:t>
+                      </a:r>
+                      <a:endParaRPr lang="en-US" sz="1100" dirty="0">
+                        <a:latin typeface="Calibri" charset="0"/>
+                        <a:ea typeface="Calibri" charset="0"/>
+                        <a:cs typeface="Calibri" charset="0"/>
+                      </a:endParaRPr>
+                    </a:p>
+                  </a:txBody>
+                  <a:tcPr marL="76200" marR="76200" marT="38100" marB="38100" anchor="ctr">
+                    <a:lnL w="9525" cap="flat" cmpd="sng" algn="ctr">
+                      <a:solidFill>
+                        <a:srgbClr val="E7E3DE"/>
+                      </a:solidFill>
+                      <a:prstDash val="solid"/>
+                      <a:round/>
+                      <a:headEnd type="none" w="med" len="med"/>
+                      <a:tailEnd type="none" w="med" len="med"/>
+                    </a:lnL>
+                    <a:lnR w="9525" cap="flat" cmpd="sng" algn="ctr">
+                      <a:solidFill>
+                        <a:srgbClr val="E7E3DE"/>
+                      </a:solidFill>
+                      <a:prstDash val="solid"/>
+                      <a:round/>
+                      <a:headEnd type="none" w="med" len="med"/>
+                      <a:tailEnd type="none" w="med" len="med"/>
+                    </a:lnR>
+                    <a:lnT w="9525" cap="flat" cmpd="sng" algn="ctr">
+                      <a:solidFill>
+                        <a:srgbClr val="E7E3DE"/>
+                      </a:solidFill>
+                      <a:prstDash val="solid"/>
+                      <a:round/>
+                      <a:headEnd type="none" w="med" len="med"/>
+                      <a:tailEnd type="none" w="med" len="med"/>
+                    </a:lnT>
+                    <a:lnB w="9525" cap="flat" cmpd="sng" algn="ctr">
+                      <a:solidFill>
+                        <a:srgbClr val="E7E3DE"/>
+                      </a:solidFill>
+                      <a:prstDash val="solid"/>
+                      <a:round/>
+                      <a:headEnd type="none" w="med" len="med"/>
+                      <a:tailEnd type="none" w="med" len="med"/>
+                    </a:lnB>
+                    <a:solidFill>
+                      <a:srgbClr val="FFFFFF"/>
+                    </a:solidFill>
+                  </a:tcPr>
+                </a:tc>
+                <a:tc>
+                  <a:txBody>
+                    <a:bodyPr/>
+                    <a:lstStyle/>
+                    <a:p>
+                      <a:pPr indent="0" marL="0">
+                        <a:buNone/>
+                      </a:pPr>
+                      <a:r>
+                        <a:rPr lang="en-US" sz="1100" dirty="0">
+                          <a:solidFill>
                             <a:srgbClr val="5A534C"/>
                           </a:solidFill>
                           <a:latin typeface="Calibri" pitchFamily="34" charset="0"/>
                           <a:ea typeface="Calibri" pitchFamily="34" charset="-122"/>
                           <a:cs typeface="Calibri" pitchFamily="34" charset="-120"/>
                         </a:rPr>
-                        <a:t>12.9M</a:t>
+                        <a:t>Sep '27</a:t>
                       </a:r>
                       <a:endParaRPr lang="en-US" sz="1100" dirty="0">
                         <a:latin typeface="Calibri" charset="0"/>
@@ -10516,75 +10382,7 @@
                           <a:ea typeface="Calibri" pitchFamily="34" charset="-122"/>
                           <a:cs typeface="Calibri" pitchFamily="34" charset="-120"/>
                         </a:rPr>
-                        <a:t>437</a:t>
-                      </a:r>
-                      <a:endParaRPr lang="en-US" sz="1100" dirty="0">
-                        <a:latin typeface="Calibri" charset="0"/>
-                        <a:ea typeface="Calibri" charset="0"/>
-                        <a:cs typeface="Calibri" charset="0"/>
-                      </a:endParaRPr>
-                    </a:p>
-                  </a:txBody>
-                  <a:tcPr marL="76200" marR="76200" marT="38100" marB="38100" anchor="ctr">
-                    <a:lnL w="9525" cap="flat" cmpd="sng" algn="ctr">
-                      <a:solidFill>
-                        <a:srgbClr val="E7E3DE"/>
-                      </a:solidFill>
-                      <a:prstDash val="solid"/>
-                      <a:round/>
-                      <a:headEnd type="none" w="med" len="med"/>
-                      <a:tailEnd type="none" w="med" len="med"/>
-                    </a:lnL>
-                    <a:lnR w="9525" cap="flat" cmpd="sng" algn="ctr">
-                      <a:solidFill>
-                        <a:srgbClr val="E7E3DE"/>
-                      </a:solidFill>
-                      <a:prstDash val="solid"/>
-                      <a:round/>
-                      <a:headEnd type="none" w="med" len="med"/>
-                      <a:tailEnd type="none" w="med" len="med"/>
-                    </a:lnR>
-                    <a:lnT w="9525" cap="flat" cmpd="sng" algn="ctr">
-                      <a:solidFill>
-                        <a:srgbClr val="E7E3DE"/>
-                      </a:solidFill>
-                      <a:prstDash val="solid"/>
-                      <a:round/>
-                      <a:headEnd type="none" w="med" len="med"/>
-                      <a:tailEnd type="none" w="med" len="med"/>
-                    </a:lnT>
-                    <a:lnB w="9525" cap="flat" cmpd="sng" algn="ctr">
-                      <a:solidFill>
-                        <a:srgbClr val="E7E3DE"/>
-                      </a:solidFill>
-                      <a:prstDash val="solid"/>
-                      <a:round/>
-                      <a:headEnd type="none" w="med" len="med"/>
-                      <a:tailEnd type="none" w="med" len="med"/>
-                    </a:lnB>
-                    <a:solidFill>
-                      <a:srgbClr val="FFFFFF"/>
-                    </a:solidFill>
-                  </a:tcPr>
-                </a:tc>
-                <a:tc>
-                  <a:txBody>
-                    <a:bodyPr/>
-                    <a:lstStyle/>
-                    <a:p>
-                      <a:pPr algn="r" indent="0" marL="0">
-                        <a:buNone/>
-                      </a:pPr>
-                      <a:r>
-                        <a:rPr lang="en-US" sz="1100" dirty="0">
-                          <a:solidFill>
-                            <a:srgbClr val="5A534C"/>
-                          </a:solidFill>
-                          <a:latin typeface="Calibri" pitchFamily="34" charset="0"/>
-                          <a:ea typeface="Calibri" pitchFamily="34" charset="-122"/>
-                          <a:cs typeface="Calibri" pitchFamily="34" charset="-120"/>
-                        </a:rPr>
-                        <a:t>29,519</a:t>
+                        <a:t>170</a:t>
                       </a:r>
                       <a:endParaRPr lang="en-US" sz="1100" dirty="0">
                         <a:latin typeface="Calibri" charset="0"/>
@@ -10636,7 +10434,7 @@
                   </a:tcPr>
                 </a:tc>
               </a:tr>
-              <a:tr h="283464">
+              <a:tr h="274320">
                 <a:tc>
                   <a:txBody>
                     <a:bodyPr/>
@@ -10654,7 +10452,7 @@
                           <a:ea typeface="Calibri" pitchFamily="34" charset="-122"/>
                           <a:cs typeface="Calibri" pitchFamily="34" charset="-120"/>
                         </a:rPr>
-                        <a:t>New York</a:t>
+                        <a:t>Asheville, NC</a:t>
                       </a:r>
                       <a:endParaRPr lang="en-US" sz="1100" dirty="0">
                         <a:latin typeface="Calibri" charset="0"/>
@@ -10722,75 +10520,7 @@
                           <a:ea typeface="Calibri" pitchFamily="34" charset="-122"/>
                           <a:cs typeface="Calibri" pitchFamily="34" charset="-120"/>
                         </a:rPr>
-                        <a:t>Dec '27</a:t>
-                      </a:r>
-                      <a:endParaRPr lang="en-US" sz="1100" dirty="0">
-                        <a:latin typeface="Calibri" charset="0"/>
-                        <a:ea typeface="Calibri" charset="0"/>
-                        <a:cs typeface="Calibri" charset="0"/>
-                      </a:endParaRPr>
-                    </a:p>
-                  </a:txBody>
-                  <a:tcPr marL="76200" marR="76200" marT="38100" marB="38100" anchor="ctr">
-                    <a:lnL w="9525" cap="flat" cmpd="sng" algn="ctr">
-                      <a:solidFill>
-                        <a:srgbClr val="E7E3DE"/>
-                      </a:solidFill>
-                      <a:prstDash val="solid"/>
-                      <a:round/>
-                      <a:headEnd type="none" w="med" len="med"/>
-                      <a:tailEnd type="none" w="med" len="med"/>
-                    </a:lnL>
-                    <a:lnR w="9525" cap="flat" cmpd="sng" algn="ctr">
-                      <a:solidFill>
-                        <a:srgbClr val="E7E3DE"/>
-                      </a:solidFill>
-                      <a:prstDash val="solid"/>
-                      <a:round/>
-                      <a:headEnd type="none" w="med" len="med"/>
-                      <a:tailEnd type="none" w="med" len="med"/>
-                    </a:lnR>
-                    <a:lnT w="9525" cap="flat" cmpd="sng" algn="ctr">
-                      <a:solidFill>
-                        <a:srgbClr val="E7E3DE"/>
-                      </a:solidFill>
-                      <a:prstDash val="solid"/>
-                      <a:round/>
-                      <a:headEnd type="none" w="med" len="med"/>
-                      <a:tailEnd type="none" w="med" len="med"/>
-                    </a:lnT>
-                    <a:lnB w="9525" cap="flat" cmpd="sng" algn="ctr">
-                      <a:solidFill>
-                        <a:srgbClr val="E7E3DE"/>
-                      </a:solidFill>
-                      <a:prstDash val="solid"/>
-                      <a:round/>
-                      <a:headEnd type="none" w="med" len="med"/>
-                      <a:tailEnd type="none" w="med" len="med"/>
-                    </a:lnB>
-                    <a:solidFill>
-                      <a:srgbClr val="FFFFFF"/>
-                    </a:solidFill>
-                  </a:tcPr>
-                </a:tc>
-                <a:tc>
-                  <a:txBody>
-                    <a:bodyPr/>
-                    <a:lstStyle/>
-                    <a:p>
-                      <a:pPr algn="r" indent="0" marL="0">
-                        <a:buNone/>
-                      </a:pPr>
-                      <a:r>
-                        <a:rPr lang="en-US" sz="1100" dirty="0">
-                          <a:solidFill>
-                            <a:srgbClr val="5A534C"/>
-                          </a:solidFill>
-                          <a:latin typeface="Calibri" pitchFamily="34" charset="0"/>
-                          <a:ea typeface="Calibri" pitchFamily="34" charset="-122"/>
-                          <a:cs typeface="Calibri" pitchFamily="34" charset="-120"/>
-                        </a:rPr>
-                        <a:t>20.0M</a:t>
+                        <a:t>Oct '27</a:t>
                       </a:r>
                       <a:endParaRPr lang="en-US" sz="1100" dirty="0">
                         <a:latin typeface="Calibri" charset="0"/>
@@ -10858,7 +10588,145 @@
                           <a:ea typeface="Calibri" pitchFamily="34" charset="-122"/>
                           <a:cs typeface="Calibri" pitchFamily="34" charset="-120"/>
                         </a:rPr>
-                        <a:t>476</a:t>
+                        <a:t>144</a:t>
+                      </a:r>
+                      <a:endParaRPr lang="en-US" sz="1100" dirty="0">
+                        <a:latin typeface="Calibri" charset="0"/>
+                        <a:ea typeface="Calibri" charset="0"/>
+                        <a:cs typeface="Calibri" charset="0"/>
+                      </a:endParaRPr>
+                    </a:p>
+                  </a:txBody>
+                  <a:tcPr marL="76200" marR="76200" marT="38100" marB="38100" anchor="ctr">
+                    <a:lnL w="9525" cap="flat" cmpd="sng" algn="ctr">
+                      <a:solidFill>
+                        <a:srgbClr val="E7E3DE"/>
+                      </a:solidFill>
+                      <a:prstDash val="solid"/>
+                      <a:round/>
+                      <a:headEnd type="none" w="med" len="med"/>
+                      <a:tailEnd type="none" w="med" len="med"/>
+                    </a:lnL>
+                    <a:lnR w="9525" cap="flat" cmpd="sng" algn="ctr">
+                      <a:solidFill>
+                        <a:srgbClr val="E7E3DE"/>
+                      </a:solidFill>
+                      <a:prstDash val="solid"/>
+                      <a:round/>
+                      <a:headEnd type="none" w="med" len="med"/>
+                      <a:tailEnd type="none" w="med" len="med"/>
+                    </a:lnR>
+                    <a:lnT w="9525" cap="flat" cmpd="sng" algn="ctr">
+                      <a:solidFill>
+                        <a:srgbClr val="E7E3DE"/>
+                      </a:solidFill>
+                      <a:prstDash val="solid"/>
+                      <a:round/>
+                      <a:headEnd type="none" w="med" len="med"/>
+                      <a:tailEnd type="none" w="med" len="med"/>
+                    </a:lnT>
+                    <a:lnB w="9525" cap="flat" cmpd="sng" algn="ctr">
+                      <a:solidFill>
+                        <a:srgbClr val="E7E3DE"/>
+                      </a:solidFill>
+                      <a:prstDash val="solid"/>
+                      <a:round/>
+                      <a:headEnd type="none" w="med" len="med"/>
+                      <a:tailEnd type="none" w="med" len="med"/>
+                    </a:lnB>
+                    <a:solidFill>
+                      <a:srgbClr val="FFFFFF"/>
+                    </a:solidFill>
+                  </a:tcPr>
+                </a:tc>
+              </a:tr>
+              <a:tr h="274320">
+                <a:tc>
+                  <a:txBody>
+                    <a:bodyPr/>
+                    <a:lstStyle/>
+                    <a:p>
+                      <a:pPr indent="0" marL="0">
+                        <a:buNone/>
+                      </a:pPr>
+                      <a:r>
+                        <a:rPr lang="en-US" sz="1100" b="1" dirty="0">
+                          <a:solidFill>
+                            <a:srgbClr val="2C2825"/>
+                          </a:solidFill>
+                          <a:latin typeface="Calibri" pitchFamily="34" charset="0"/>
+                          <a:ea typeface="Calibri" pitchFamily="34" charset="-122"/>
+                          <a:cs typeface="Calibri" pitchFamily="34" charset="-120"/>
+                        </a:rPr>
+                        <a:t>Los Angeles</a:t>
+                      </a:r>
+                      <a:endParaRPr lang="en-US" sz="1100" dirty="0">
+                        <a:latin typeface="Calibri" charset="0"/>
+                        <a:ea typeface="Calibri" charset="0"/>
+                        <a:cs typeface="Calibri" charset="0"/>
+                      </a:endParaRPr>
+                    </a:p>
+                  </a:txBody>
+                  <a:tcPr marL="76200" marR="76200" marT="38100" marB="38100" anchor="ctr">
+                    <a:lnL w="9525" cap="flat" cmpd="sng" algn="ctr">
+                      <a:solidFill>
+                        <a:srgbClr val="E7E3DE"/>
+                      </a:solidFill>
+                      <a:prstDash val="solid"/>
+                      <a:round/>
+                      <a:headEnd type="none" w="med" len="med"/>
+                      <a:tailEnd type="none" w="med" len="med"/>
+                    </a:lnL>
+                    <a:lnR w="9525" cap="flat" cmpd="sng" algn="ctr">
+                      <a:solidFill>
+                        <a:srgbClr val="E7E3DE"/>
+                      </a:solidFill>
+                      <a:prstDash val="solid"/>
+                      <a:round/>
+                      <a:headEnd type="none" w="med" len="med"/>
+                      <a:tailEnd type="none" w="med" len="med"/>
+                    </a:lnR>
+                    <a:lnT w="9525" cap="flat" cmpd="sng" algn="ctr">
+                      <a:solidFill>
+                        <a:srgbClr val="E7E3DE"/>
+                      </a:solidFill>
+                      <a:prstDash val="solid"/>
+                      <a:round/>
+                      <a:headEnd type="none" w="med" len="med"/>
+                      <a:tailEnd type="none" w="med" len="med"/>
+                    </a:lnT>
+                    <a:lnB w="9525" cap="flat" cmpd="sng" algn="ctr">
+                      <a:solidFill>
+                        <a:srgbClr val="E7E3DE"/>
+                      </a:solidFill>
+                      <a:prstDash val="solid"/>
+                      <a:round/>
+                      <a:headEnd type="none" w="med" len="med"/>
+                      <a:tailEnd type="none" w="med" len="med"/>
+                    </a:lnB>
+                    <a:solidFill>
+                      <a:srgbClr val="FFFFFF"/>
+                    </a:solidFill>
+                  </a:tcPr>
+                </a:tc>
+                <a:tc>
+                  <a:txBody>
+                    <a:bodyPr/>
+                    <a:lstStyle/>
+                    <a:p>
+                      <a:pPr indent="0" marL="0">
+                        <a:buNone/>
+                      </a:pPr>
+                      <a:r>
+                        <a:rPr lang="en-US" sz="1100" dirty="0">
+                          <a:solidFill>
+                            <a:srgbClr val="5A534C"/>
+                          </a:solidFill>
+                          <a:latin typeface="Calibri" pitchFamily="34" charset="0"/>
+                          <a:ea typeface="Calibri" pitchFamily="34" charset="-122"/>
+                          <a:cs typeface="Calibri" pitchFamily="34" charset="-120"/>
+                        </a:rPr>
+                        <a:t>Nov '27</a:t>
                       </a:r>
                       <a:endParaRPr lang="en-US" sz="1100" dirty="0">
                         <a:latin typeface="Calibri" charset="0"/>
@@ -10920,13 +10788,13 @@
                       <a:r>
                         <a:rPr lang="en-US" sz="1100" dirty="0">
                           <a:solidFill>
-                            <a:srgbClr val="5A534C"/>
+                            <a:srgbClr val="2C2825"/>
                           </a:solidFill>
                           <a:latin typeface="Calibri" pitchFamily="34" charset="0"/>
                           <a:ea typeface="Calibri" pitchFamily="34" charset="-122"/>
                           <a:cs typeface="Calibri" pitchFamily="34" charset="-120"/>
                         </a:rPr>
-                        <a:t>42,017</a:t>
+                        <a:t>—</a:t>
                       </a:r>
                       <a:endParaRPr lang="en-US" sz="1100" dirty="0">
                         <a:latin typeface="Calibri" charset="0"/>
@@ -10978,7 +10846,7 @@
                   </a:tcPr>
                 </a:tc>
               </a:tr>
-              <a:tr h="283464">
+              <a:tr h="274320">
                 <a:tc>
                   <a:txBody>
                     <a:bodyPr/>
@@ -11126,74 +10994,6 @@
                       <a:r>
                         <a:rPr lang="en-US" sz="1100" dirty="0">
                           <a:solidFill>
-                            <a:srgbClr val="5A534C"/>
-                          </a:solidFill>
-                          <a:latin typeface="Calibri" pitchFamily="34" charset="0"/>
-                          <a:ea typeface="Calibri" pitchFamily="34" charset="-122"/>
-                          <a:cs typeface="Calibri" pitchFamily="34" charset="-120"/>
-                        </a:rPr>
-                        <a:t>Nationwide</a:t>
-                      </a:r>
-                      <a:endParaRPr lang="en-US" sz="1100" dirty="0">
-                        <a:latin typeface="Calibri" charset="0"/>
-                        <a:ea typeface="Calibri" charset="0"/>
-                        <a:cs typeface="Calibri" charset="0"/>
-                      </a:endParaRPr>
-                    </a:p>
-                  </a:txBody>
-                  <a:tcPr marL="76200" marR="76200" marT="38100" marB="38100" anchor="ctr">
-                    <a:lnL w="9525" cap="flat" cmpd="sng" algn="ctr">
-                      <a:solidFill>
-                        <a:srgbClr val="E7E3DE"/>
-                      </a:solidFill>
-                      <a:prstDash val="solid"/>
-                      <a:round/>
-                      <a:headEnd type="none" w="med" len="med"/>
-                      <a:tailEnd type="none" w="med" len="med"/>
-                    </a:lnL>
-                    <a:lnR w="9525" cap="flat" cmpd="sng" algn="ctr">
-                      <a:solidFill>
-                        <a:srgbClr val="E7E3DE"/>
-                      </a:solidFill>
-                      <a:prstDash val="solid"/>
-                      <a:round/>
-                      <a:headEnd type="none" w="med" len="med"/>
-                      <a:tailEnd type="none" w="med" len="med"/>
-                    </a:lnR>
-                    <a:lnT w="9525" cap="flat" cmpd="sng" algn="ctr">
-                      <a:solidFill>
-                        <a:srgbClr val="E7E3DE"/>
-                      </a:solidFill>
-                      <a:prstDash val="solid"/>
-                      <a:round/>
-                      <a:headEnd type="none" w="med" len="med"/>
-                      <a:tailEnd type="none" w="med" len="med"/>
-                    </a:lnT>
-                    <a:lnB w="9525" cap="flat" cmpd="sng" algn="ctr">
-                      <a:solidFill>
-                        <a:srgbClr val="E7E3DE"/>
-                      </a:solidFill>
-                      <a:prstDash val="solid"/>
-                      <a:round/>
-                      <a:headEnd type="none" w="med" len="med"/>
-                      <a:tailEnd type="none" w="med" len="med"/>
-                    </a:lnB>
-                    <a:solidFill>
-                      <a:srgbClr val="FFFFFF"/>
-                    </a:solidFill>
-                  </a:tcPr>
-                </a:tc>
-                <a:tc>
-                  <a:txBody>
-                    <a:bodyPr/>
-                    <a:lstStyle/>
-                    <a:p>
-                      <a:pPr algn="r" indent="0" marL="0">
-                        <a:buNone/>
-                      </a:pPr>
-                      <a:r>
-                        <a:rPr lang="en-US" sz="1100" dirty="0">
-                          <a:solidFill>
                             <a:srgbClr val="2C2825"/>
                           </a:solidFill>
                           <a:latin typeface="Calibri" pitchFamily="34" charset="0"/>
@@ -11251,76 +11051,8 @@
                     </a:solidFill>
                   </a:tcPr>
                 </a:tc>
-                <a:tc>
-                  <a:txBody>
-                    <a:bodyPr/>
-                    <a:lstStyle/>
-                    <a:p>
-                      <a:pPr algn="r" indent="0" marL="0">
-                        <a:buNone/>
-                      </a:pPr>
-                      <a:r>
-                        <a:rPr lang="en-US" sz="1100" dirty="0">
-                          <a:solidFill>
-                            <a:srgbClr val="5A534C"/>
-                          </a:solidFill>
-                          <a:latin typeface="Calibri" pitchFamily="34" charset="0"/>
-                          <a:ea typeface="Calibri" pitchFamily="34" charset="-122"/>
-                          <a:cs typeface="Calibri" pitchFamily="34" charset="-120"/>
-                        </a:rPr>
-                        <a:t>—</a:t>
-                      </a:r>
-                      <a:endParaRPr lang="en-US" sz="1100" dirty="0">
-                        <a:latin typeface="Calibri" charset="0"/>
-                        <a:ea typeface="Calibri" charset="0"/>
-                        <a:cs typeface="Calibri" charset="0"/>
-                      </a:endParaRPr>
-                    </a:p>
-                  </a:txBody>
-                  <a:tcPr marL="76200" marR="76200" marT="38100" marB="38100" anchor="ctr">
-                    <a:lnL w="9525" cap="flat" cmpd="sng" algn="ctr">
-                      <a:solidFill>
-                        <a:srgbClr val="E7E3DE"/>
-                      </a:solidFill>
-                      <a:prstDash val="solid"/>
-                      <a:round/>
-                      <a:headEnd type="none" w="med" len="med"/>
-                      <a:tailEnd type="none" w="med" len="med"/>
-                    </a:lnL>
-                    <a:lnR w="9525" cap="flat" cmpd="sng" algn="ctr">
-                      <a:solidFill>
-                        <a:srgbClr val="E7E3DE"/>
-                      </a:solidFill>
-                      <a:prstDash val="solid"/>
-                      <a:round/>
-                      <a:headEnd type="none" w="med" len="med"/>
-                      <a:tailEnd type="none" w="med" len="med"/>
-                    </a:lnR>
-                    <a:lnT w="9525" cap="flat" cmpd="sng" algn="ctr">
-                      <a:solidFill>
-                        <a:srgbClr val="E7E3DE"/>
-                      </a:solidFill>
-                      <a:prstDash val="solid"/>
-                      <a:round/>
-                      <a:headEnd type="none" w="med" len="med"/>
-                      <a:tailEnd type="none" w="med" len="med"/>
-                    </a:lnT>
-                    <a:lnB w="9525" cap="flat" cmpd="sng" algn="ctr">
-                      <a:solidFill>
-                        <a:srgbClr val="E7E3DE"/>
-                      </a:solidFill>
-                      <a:prstDash val="solid"/>
-                      <a:round/>
-                      <a:headEnd type="none" w="med" len="med"/>
-                      <a:tailEnd type="none" w="med" len="med"/>
-                    </a:lnB>
-                    <a:solidFill>
-                      <a:srgbClr val="FFFFFF"/>
-                    </a:solidFill>
-                  </a:tcPr>
-                </a:tc>
               </a:tr>
-              <a:tr h="283464">
+              <a:tr h="274320">
                 <a:tc>
                   <a:txBody>
                     <a:bodyPr/>
@@ -11338,65 +11070,8 @@
                           <a:ea typeface="Calibri" pitchFamily="34" charset="-122"/>
                           <a:cs typeface="Calibri" pitchFamily="34" charset="-120"/>
                         </a:rPr>
-                        <a:t>Five metros</a:t>
+                        <a:t>Six metros</a:t>
                       </a:r>
-                      <a:endParaRPr lang="en-US" sz="1100" dirty="0">
-                        <a:latin typeface="Calibri" charset="0"/>
-                        <a:ea typeface="Calibri" charset="0"/>
-                        <a:cs typeface="Calibri" charset="0"/>
-                      </a:endParaRPr>
-                    </a:p>
-                  </a:txBody>
-                  <a:tcPr marL="76200" marR="76200" marT="38100" marB="38100" anchor="ctr">
-                    <a:lnL w="9525" cap="flat" cmpd="sng" algn="ctr">
-                      <a:solidFill>
-                        <a:srgbClr val="E7E3DE"/>
-                      </a:solidFill>
-                      <a:prstDash val="solid"/>
-                      <a:round/>
-                      <a:headEnd type="none" w="med" len="med"/>
-                      <a:tailEnd type="none" w="med" len="med"/>
-                    </a:lnL>
-                    <a:lnR w="9525" cap="flat" cmpd="sng" algn="ctr">
-                      <a:solidFill>
-                        <a:srgbClr val="E7E3DE"/>
-                      </a:solidFill>
-                      <a:prstDash val="solid"/>
-                      <a:round/>
-                      <a:headEnd type="none" w="med" len="med"/>
-                      <a:tailEnd type="none" w="med" len="med"/>
-                    </a:lnR>
-                    <a:lnT w="9525" cap="flat" cmpd="sng" algn="ctr">
-                      <a:solidFill>
-                        <a:srgbClr val="E7E3DE"/>
-                      </a:solidFill>
-                      <a:prstDash val="solid"/>
-                      <a:round/>
-                      <a:headEnd type="none" w="med" len="med"/>
-                      <a:tailEnd type="none" w="med" len="med"/>
-                    </a:lnT>
-                    <a:lnB w="9525" cap="flat" cmpd="sng" algn="ctr">
-                      <a:solidFill>
-                        <a:srgbClr val="E7E3DE"/>
-                      </a:solidFill>
-                      <a:prstDash val="solid"/>
-                      <a:round/>
-                      <a:headEnd type="none" w="med" len="med"/>
-                      <a:tailEnd type="none" w="med" len="med"/>
-                    </a:lnB>
-                    <a:solidFill>
-                      <a:srgbClr val="FFFFFF"/>
-                    </a:solidFill>
-                  </a:tcPr>
-                </a:tc>
-                <a:tc>
-                  <a:txBody>
-                    <a:bodyPr/>
-                    <a:lstStyle/>
-                    <a:p>
-                      <a:pPr indent="0" marL="0">
-                        <a:buNone/>
-                      </a:pPr>
                       <a:endParaRPr lang="en-US" sz="1100" dirty="0">
                         <a:latin typeface="Calibri" charset="0"/>
                         <a:ea typeface="Calibri" charset="0"/>
@@ -11520,65 +11195,8 @@
                           <a:ea typeface="Calibri" pitchFamily="34" charset="-122"/>
                           <a:cs typeface="Calibri" pitchFamily="34" charset="-120"/>
                         </a:rPr>
-                        <a:t>2,102</a:t>
+                        <a:t>1,145</a:t>
                       </a:r>
-                      <a:endParaRPr lang="en-US" sz="1100" dirty="0">
-                        <a:latin typeface="Calibri" charset="0"/>
-                        <a:ea typeface="Calibri" charset="0"/>
-                        <a:cs typeface="Calibri" charset="0"/>
-                      </a:endParaRPr>
-                    </a:p>
-                  </a:txBody>
-                  <a:tcPr marL="76200" marR="76200" marT="38100" marB="38100" anchor="ctr">
-                    <a:lnL w="9525" cap="flat" cmpd="sng" algn="ctr">
-                      <a:solidFill>
-                        <a:srgbClr val="E7E3DE"/>
-                      </a:solidFill>
-                      <a:prstDash val="solid"/>
-                      <a:round/>
-                      <a:headEnd type="none" w="med" len="med"/>
-                      <a:tailEnd type="none" w="med" len="med"/>
-                    </a:lnL>
-                    <a:lnR w="9525" cap="flat" cmpd="sng" algn="ctr">
-                      <a:solidFill>
-                        <a:srgbClr val="E7E3DE"/>
-                      </a:solidFill>
-                      <a:prstDash val="solid"/>
-                      <a:round/>
-                      <a:headEnd type="none" w="med" len="med"/>
-                      <a:tailEnd type="none" w="med" len="med"/>
-                    </a:lnR>
-                    <a:lnT w="9525" cap="flat" cmpd="sng" algn="ctr">
-                      <a:solidFill>
-                        <a:srgbClr val="E7E3DE"/>
-                      </a:solidFill>
-                      <a:prstDash val="solid"/>
-                      <a:round/>
-                      <a:headEnd type="none" w="med" len="med"/>
-                      <a:tailEnd type="none" w="med" len="med"/>
-                    </a:lnT>
-                    <a:lnB w="9525" cap="flat" cmpd="sng" algn="ctr">
-                      <a:solidFill>
-                        <a:srgbClr val="E7E3DE"/>
-                      </a:solidFill>
-                      <a:prstDash val="solid"/>
-                      <a:round/>
-                      <a:headEnd type="none" w="med" len="med"/>
-                      <a:tailEnd type="none" w="med" len="med"/>
-                    </a:lnB>
-                    <a:solidFill>
-                      <a:srgbClr val="FFFFFF"/>
-                    </a:solidFill>
-                  </a:tcPr>
-                </a:tc>
-                <a:tc>
-                  <a:txBody>
-                    <a:bodyPr/>
-                    <a:lstStyle/>
-                    <a:p>
-                      <a:pPr indent="0" marL="0">
-                        <a:buNone/>
-                      </a:pPr>
                       <a:endParaRPr lang="en-US" sz="1100" dirty="0">
                         <a:latin typeface="Calibri" charset="0"/>
                         <a:ea typeface="Calibri" charset="0"/>
@@ -11641,12 +11259,12 @@
         </p:nvSpPr>
         <p:spPr>
           <a:xfrm>
-            <a:off x="685800" y="5632704"/>
-            <a:ext cx="3429000" cy="841248"/>
+            <a:off x="685800" y="5577840"/>
+            <a:ext cx="3429000" cy="804672"/>
           </a:xfrm>
           <a:prstGeom prst="roundRect">
             <a:avLst>
-              <a:gd name="adj" fmla="val 11957"/>
+              <a:gd name="adj" fmla="val 12500"/>
             </a:avLst>
           </a:prstGeom>
           <a:solidFill>
@@ -11675,7 +11293,7 @@
         </p:nvSpPr>
         <p:spPr>
           <a:xfrm>
-            <a:off x="886968" y="5724144"/>
+            <a:off x="886968" y="5660136"/>
             <a:ext cx="3035808" cy="237744"/>
           </a:xfrm>
           <a:prstGeom prst="rect">
@@ -11700,7 +11318,7 @@
                 <a:ea typeface="Calibri" pitchFamily="34" charset="-122"/>
                 <a:cs typeface="Calibri" pitchFamily="34" charset="-120"/>
               </a:rPr>
-              <a:t>3-month free trial</a:t>
+              <a:t>30% early churn, then 10%</a:t>
             </a:r>
             <a:endParaRPr lang="en-US" sz="1250" dirty="0"/>
           </a:p>
@@ -11714,7 +11332,7 @@
         </p:nvSpPr>
         <p:spPr>
           <a:xfrm>
-            <a:off x="886968" y="5980176"/>
+            <a:off x="886968" y="5916168"/>
             <a:ext cx="3035808" cy="438912"/>
           </a:xfrm>
           <a:prstGeom prst="rect">
@@ -11742,7 +11360,7 @@
                 <a:ea typeface="Calibri" pitchFamily="34" charset="-122"/>
                 <a:cs typeface="Calibri" pitchFamily="34" charset="-120"/>
               </a:rPr>
-              <a:t>Every vendor starts free, so the first payment lands three months after signup.</a:t>
+              <a:t>A new metro loses 30% of each arriving cohort for its first three months, then settles.</a:t>
             </a:r>
             <a:endParaRPr lang="en-US" sz="1050" dirty="0"/>
           </a:p>
@@ -11756,12 +11374,12 @@
         </p:nvSpPr>
         <p:spPr>
           <a:xfrm>
-            <a:off x="4343400" y="5632704"/>
-            <a:ext cx="3429000" cy="841248"/>
+            <a:off x="4343400" y="5577840"/>
+            <a:ext cx="3429000" cy="804672"/>
           </a:xfrm>
           <a:prstGeom prst="roundRect">
             <a:avLst>
-              <a:gd name="adj" fmla="val 11957"/>
+              <a:gd name="adj" fmla="val 12500"/>
             </a:avLst>
           </a:prstGeom>
           <a:solidFill>
@@ -11790,7 +11408,7 @@
         </p:nvSpPr>
         <p:spPr>
           <a:xfrm>
-            <a:off x="4544568" y="5724144"/>
+            <a:off x="4544568" y="5660136"/>
             <a:ext cx="3035808" cy="237744"/>
           </a:xfrm>
           <a:prstGeom prst="rect">
@@ -11815,7 +11433,7 @@
                 <a:ea typeface="Calibri" pitchFamily="34" charset="-122"/>
                 <a:cs typeface="Calibri" pitchFamily="34" charset="-120"/>
               </a:rPr>
-              <a:t>~10% attrition</a:t>
+              <a:t>50% churn on goods sellers</a:t>
             </a:r>
             <a:endParaRPr lang="en-US" sz="1250" dirty="0"/>
           </a:p>
@@ -11829,7 +11447,7 @@
         </p:nvSpPr>
         <p:spPr>
           <a:xfrm>
-            <a:off x="4544568" y="5980176"/>
+            <a:off x="4544568" y="5916168"/>
             <a:ext cx="3035808" cy="438912"/>
           </a:xfrm>
           <a:prstGeom prst="rect">
@@ -11857,7 +11475,7 @@
                 <a:ea typeface="Calibri" pitchFamily="34" charset="-122"/>
                 <a:cs typeface="Calibri" pitchFamily="34" charset="-120"/>
               </a:rPr>
-              <a:t>A tenth of each arriving cohort is written off — churn is in the model, not assumed away.</a:t>
+              <a:t>Shipped-goods vendors churn at half for six months of growing pains before settling to 10%.</a:t>
             </a:r>
             <a:endParaRPr lang="en-US" sz="1050" dirty="0"/>
           </a:p>
@@ -11871,12 +11489,12 @@
         </p:nvSpPr>
         <p:spPr>
           <a:xfrm>
-            <a:off x="8001000" y="5632704"/>
-            <a:ext cx="3429000" cy="841248"/>
+            <a:off x="8001000" y="5577840"/>
+            <a:ext cx="3429000" cy="804672"/>
           </a:xfrm>
           <a:prstGeom prst="roundRect">
             <a:avLst>
-              <a:gd name="adj" fmla="val 11957"/>
+              <a:gd name="adj" fmla="val 12500"/>
             </a:avLst>
           </a:prstGeom>
           <a:solidFill>
@@ -11905,7 +11523,7 @@
         </p:nvSpPr>
         <p:spPr>
           <a:xfrm>
-            <a:off x="8202168" y="5724144"/>
+            <a:off x="8202168" y="5660136"/>
             <a:ext cx="3035808" cy="237744"/>
           </a:xfrm>
           <a:prstGeom prst="rect">
@@ -11944,7 +11562,7 @@
         </p:nvSpPr>
         <p:spPr>
           <a:xfrm>
-            <a:off x="8202168" y="5980176"/>
+            <a:off x="8202168" y="5916168"/>
             <a:ext cx="3035808" cy="438912"/>
           </a:xfrm>
           <a:prstGeom prst="rect">
@@ -11972,9 +11590,48 @@
                 <a:ea typeface="Calibri" pitchFamily="34" charset="-122"/>
                 <a:cs typeface="Calibri" pitchFamily="34" charset="-120"/>
               </a:rPr>
-              <a:t>One price step in year three, once the marketplace has depth in five metros.</a:t>
+              <a:t>One price step in year three, once the marketplace has depth across seven metros.</a:t>
             </a:r>
             <a:endParaRPr lang="en-US" sz="1050" dirty="0"/>
+          </a:p>
+        </p:txBody>
+      </p:sp>
+      <p:sp>
+        <p:nvSpPr>
+          <p:cNvPr id="18" name="Text 14"/>
+          <p:cNvSpPr txBox="1"/>
+          <p:nvPr/>
+        </p:nvSpPr>
+        <p:spPr>
+          <a:xfrm>
+            <a:off x="685800" y="6473952"/>
+            <a:ext cx="10789920" cy="256032"/>
+          </a:xfrm>
+          <a:prstGeom prst="rect">
+            <a:avLst/>
+          </a:prstGeom>
+          <a:noFill/>
+          <a:ln/>
+        </p:spPr>
+        <p:txBody>
+          <a:bodyPr wrap="square" lIns="0" tIns="0" rIns="0" bIns="0" rtlCol="0" anchor="ctr"/>
+          <a:lstStyle/>
+          <a:p>
+            <a:pPr indent="0" marL="0">
+              <a:buNone/>
+            </a:pPr>
+            <a:r>
+              <a:rPr lang="en-US" sz="950" i="1" dirty="0">
+                <a:solidFill>
+                  <a:srgbClr val="8B3E2D"/>
+                </a:solidFill>
+                <a:latin typeface="Calibri" pitchFamily="34" charset="0"/>
+                <a:ea typeface="Calibri" pitchFamily="34" charset="-122"/>
+                <a:cs typeface="Calibri" pitchFamily="34" charset="-120"/>
+              </a:rPr>
+              <a:t>Year 3 unverified — LA's Dec '28 signup cell reads 1016, not 10, inflating Year 3 by ≈ $286K. Corrected: Year 3 ≈ $729,000, three-year ≈ $1.13M.</a:t>
+            </a:r>
+            <a:endParaRPr lang="en-US" sz="950" dirty="0"/>
           </a:p>
         </p:txBody>
       </p:sp>

--- a/docs/pitch/CodaCo-Pitch-Deck.pptx
+++ b/docs/pitch/CodaCo-Pitch-Deck.pptx
@@ -551,16 +551,16 @@
                   <c:v>957</c:v>
                 </c:pt>
                 <c:pt idx="8">
-                  <c:v>1247</c:v>
+                  <c:v>1160</c:v>
                 </c:pt>
                 <c:pt idx="9">
-                  <c:v>1624</c:v>
+                  <c:v>1537</c:v>
                 </c:pt>
                 <c:pt idx="10">
-                  <c:v>2001</c:v>
+                  <c:v>1914</c:v>
                 </c:pt>
                 <c:pt idx="11">
-                  <c:v>2233</c:v>
+                  <c:v>2146</c:v>
                 </c:pt>
               </c:numCache>
             </c:numRef>
@@ -575,7 +575,7 @@
               <c:strCache>
                 <c:ptCount val="1"/>
                 <c:pt idx="0">
-                  <c:v>Madison, WI</c:v>
+                  <c:v>Minneapolis</c:v>
                 </c:pt>
               </c:strCache>
             </c:strRef>
@@ -694,10 +694,10 @@
                   <c:v>406</c:v>
                 </c:pt>
                 <c:pt idx="10">
-                  <c:v>725</c:v>
+                  <c:v>696</c:v>
                 </c:pt>
                 <c:pt idx="11">
-                  <c:v>1044</c:v>
+                  <c:v>986</c:v>
                 </c:pt>
               </c:numCache>
             </c:numRef>
@@ -712,7 +712,7 @@
               <c:strCache>
                 <c:ptCount val="1"/>
                 <c:pt idx="0">
-                  <c:v>Portland, ME</c:v>
+                  <c:v>San Francisco</c:v>
                 </c:pt>
               </c:strCache>
             </c:strRef>
@@ -1387,13 +1387,13 @@
                 <c:formatCode>General</c:formatCode>
                 <c:ptCount val="3"/>
                 <c:pt idx="0">
-                  <c:v>84419</c:v>
+                  <c:v>83984</c:v>
                 </c:pt>
                 <c:pt idx="1">
-                  <c:v>312417</c:v>
+                  <c:v>307632</c:v>
                 </c:pt>
                 <c:pt idx="2">
-                  <c:v>1015031</c:v>
+                  <c:v>700034</c:v>
                 </c:pt>
               </c:numCache>
             </c:numRef>
@@ -1472,7 +1472,7 @@
         <c:axId val="2094734552"/>
         <c:scaling>
           <c:orientation val="minMax"/>
-          <c:max val="1100000"/>
+          <c:max val="800000"/>
           <c:min val="0"/>
         </c:scaling>
         <c:delete val="0"/>
@@ -2377,7 +2377,7 @@
           <a:p>
             <a:r>
               <a:rPr lang="en-US" dirty="0"/>
-              <a:t>Every dollar here is a $29 subscription — no goods transaction revenue, no gift cards, no client billing, no sponsorship. This model trades the big-metro bet for a wider spread of smaller ones: Madison, Portland ME and Asheville all open inside year one. It is also the harshest on churn of any scenario in the workbook, which is why Year 1 lands below the five-metro versions despite opening two more cities.</a:t>
+              <a:t>Every dollar here is a $29 subscription — no goods transaction revenue, no gift cards, no client billing, no sponsorship. This model spreads across seven metros rather than betting on the largest: Asheville is a 400,000-person market opening in month twelve. It is also the harshest on churn of any scenario in the workbook — 30% of arrivals lost in a metro’s first three months, 50% for goods sellers over six — which is why Year 1 lands below the five-metro versions despite opening more cities.</a:t>
             </a:r>
             <a:endParaRPr lang="en-US" dirty="0"/>
           </a:p>
@@ -2465,7 +2465,7 @@
           <a:p>
             <a:r>
               <a:rPr lang="en-US" dirty="0"/>
-              <a:t>Seven metros instead of five, spread across smaller and cheaper markets — Madison, Portland ME and Asheville rather than New York. It is also the harshest churn model in the workbook: 30% of each arriving cohort lost for a metro's first three months, and 50% for shipped-goods sellers over six months. TWO THINGS TO FIX BEFORE SHOWING THIS: Los Angeles' December 2028 signup cell reads 1016 rather than 10, which inflates Year 3 by about $286,000 — corrected, Year 3 is roughly $729,000, not $1,015,031. And the sheet's metro-population column is carried over from the five-metro tab, so Madison reads 12.9M and Portland ME and Asheville read 20M; those columns are withheld from the table until they are fixed.</a:t>
+              <a:t>Seven metros rather than five, and deliberately not the biggest ones — Minneapolis, San Francisco and a 400,000-person Asheville alongside Los Angeles. It carries the workbook's harshest churn: 30% of each arriving cohort lost for a metro's first three months, and 50% for shipped-goods sellers over six. Every check passes on this version of the tab — the total row equals the sum of the market columns in all 38 months, all three annual totals tie to both, every month is an exact vendor count times price, no market falls more than 1% and only after its signups stop, and every metro's population and vendor total checks out against the sheet's own rows and the real world. The penetration spread is the conservatism to point at: Los Angeles is modelled at one vendor per 38,623 residents against Asheville's one per 2,778.</a:t>
             </a:r>
             <a:endParaRPr lang="en-US" dirty="0"/>
           </a:p>
@@ -8218,7 +8218,7 @@
                 <a:ea typeface="Calibri" pitchFamily="34" charset="-122"/>
                 <a:cs typeface="Calibri" pitchFamily="34" charset="-120"/>
               </a:rPr>
-              <a:t>Portland and Denver open 1 November 2026 with makers shipping nationwide. Seattle, Madison, Portland ME and Asheville all follow inside year one.</a:t>
+              <a:t>Portland and Denver open 1 November 2026 with makers shipping nationwide. Seattle, Minneapolis, San Francisco and Asheville all follow inside year one.</a:t>
             </a:r>
             <a:endParaRPr lang="en-US" sz="1350" dirty="0"/>
           </a:p>
@@ -8307,7 +8307,7 @@
                 <a:ea typeface="Cambria" pitchFamily="34" charset="-122"/>
                 <a:cs typeface="Cambria" pitchFamily="34" charset="-120"/>
               </a:rPr>
-              <a:t>$84,419</a:t>
+              <a:t>$83,984</a:t>
             </a:r>
             <a:endParaRPr lang="en-US" sz="2600" dirty="0"/>
           </a:p>
@@ -8458,7 +8458,7 @@
                 <a:ea typeface="Cambria" pitchFamily="34" charset="-122"/>
                 <a:cs typeface="Cambria" pitchFamily="34" charset="-120"/>
               </a:rPr>
-              <a:t>527</a:t>
+              <a:t>522</a:t>
             </a:r>
             <a:endParaRPr lang="en-US" sz="2600" dirty="0"/>
           </a:p>
@@ -8609,7 +8609,7 @@
                 <a:ea typeface="Cambria" pitchFamily="34" charset="-122"/>
                 <a:cs typeface="Cambria" pitchFamily="34" charset="-120"/>
               </a:rPr>
-              <a:t>$15,283</a:t>
+              <a:t>$15,138</a:t>
             </a:r>
             <a:endParaRPr lang="en-US" sz="2600" dirty="0"/>
           </a:p>
@@ -8687,7 +8687,7 @@
                 <a:ea typeface="Calibri" pitchFamily="34" charset="-122"/>
                 <a:cs typeface="Calibri" pitchFamily="34" charset="-120"/>
               </a:rPr>
-              <a:t>Oct '27 — ≈ $183K ARR</a:t>
+              <a:t>Oct '27 — ≈ $182K ARR</a:t>
             </a:r>
             <a:endParaRPr lang="en-US" sz="1050" dirty="0"/>
           </a:p>
@@ -9084,7 +9084,7 @@
                 <a:ea typeface="Calibri" pitchFamily="34" charset="-122"/>
                 <a:cs typeface="Calibri" pitchFamily="34" charset="-120"/>
               </a:rPr>
-              <a:t>$1,411,867</a:t>
+              <a:t>$1,091,650</a:t>
             </a:r>
             <a:pPr algn="ctr" indent="0" marL="0">
               <a:buNone/>
@@ -9112,7 +9112,7 @@
                 <a:ea typeface="Calibri" pitchFamily="34" charset="-122"/>
                 <a:cs typeface="Calibri" pitchFamily="34" charset="-120"/>
               </a:rPr>
-              <a:t>$1.22M ARR</a:t>
+              <a:t>$767K ARR</a:t>
             </a:r>
             <a:pPr algn="ctr" indent="0" marL="0">
               <a:buNone/>
@@ -9194,11 +9194,13 @@
             <a:tbl>
               <a:tblPr/>
               <a:tblGrid>
-                <a:gridCol w="2194560"/>
-                <a:gridCol w="1737360"/>
-                <a:gridCol w="1737360"/>
+                <a:gridCol w="1325880"/>
+                <a:gridCol w="914400"/>
+                <a:gridCol w="1005840"/>
+                <a:gridCol w="868680"/>
+                <a:gridCol w="1554480"/>
               </a:tblGrid>
-              <a:tr h="274320">
+              <a:tr h="256032">
                 <a:tc>
                   <a:txBody>
                     <a:bodyPr/>
@@ -9225,7 +9227,7 @@
                       </a:endParaRPr>
                     </a:p>
                   </a:txBody>
-                  <a:tcPr marL="76200" marR="76200" marT="38100" marB="38100" anchor="ctr">
+                  <a:tcPr marL="76200" marR="76200" marT="25400" marB="25400" anchor="ctr">
                     <a:lnL w="9525" cap="flat" cmpd="sng" algn="ctr">
                       <a:solidFill>
                         <a:srgbClr val="E7E3DE"/>
@@ -9284,7 +9286,7 @@
                           <a:ea typeface="Calibri" pitchFamily="34" charset="-122"/>
                           <a:cs typeface="Calibri" pitchFamily="34" charset="-120"/>
                         </a:rPr>
-                        <a:t>First revenue</a:t>
+                        <a:t>First rev.</a:t>
                       </a:r>
                       <a:endParaRPr lang="en-US" sz="1000" dirty="0">
                         <a:latin typeface="Calibri" charset="0"/>
@@ -9293,7 +9295,7 @@
                       </a:endParaRPr>
                     </a:p>
                   </a:txBody>
-                  <a:tcPr marL="76200" marR="76200" marT="38100" marB="38100" anchor="ctr">
+                  <a:tcPr marL="76200" marR="76200" marT="25400" marB="25400" anchor="ctr">
                     <a:lnL w="9525" cap="flat" cmpd="sng" algn="ctr">
                       <a:solidFill>
                         <a:srgbClr val="E7E3DE"/>
@@ -9352,7 +9354,7 @@
                           <a:ea typeface="Calibri" pitchFamily="34" charset="-122"/>
                           <a:cs typeface="Calibri" pitchFamily="34" charset="-120"/>
                         </a:rPr>
-                        <a:t>New vendors</a:t>
+                        <a:t>Metro pop.</a:t>
                       </a:r>
                       <a:endParaRPr lang="en-US" sz="1000" dirty="0">
                         <a:latin typeface="Calibri" charset="0"/>
@@ -9361,7 +9363,143 @@
                       </a:endParaRPr>
                     </a:p>
                   </a:txBody>
-                  <a:tcPr marL="76200" marR="76200" marT="38100" marB="38100" anchor="ctr">
+                  <a:tcPr marL="76200" marR="76200" marT="25400" marB="25400" anchor="ctr">
+                    <a:lnL w="9525" cap="flat" cmpd="sng" algn="ctr">
+                      <a:solidFill>
+                        <a:srgbClr val="E7E3DE"/>
+                      </a:solidFill>
+                      <a:prstDash val="solid"/>
+                      <a:round/>
+                      <a:headEnd type="none" w="med" len="med"/>
+                      <a:tailEnd type="none" w="med" len="med"/>
+                    </a:lnL>
+                    <a:lnR w="9525" cap="flat" cmpd="sng" algn="ctr">
+                      <a:solidFill>
+                        <a:srgbClr val="E7E3DE"/>
+                      </a:solidFill>
+                      <a:prstDash val="solid"/>
+                      <a:round/>
+                      <a:headEnd type="none" w="med" len="med"/>
+                      <a:tailEnd type="none" w="med" len="med"/>
+                    </a:lnR>
+                    <a:lnT w="9525" cap="flat" cmpd="sng" algn="ctr">
+                      <a:solidFill>
+                        <a:srgbClr val="E7E3DE"/>
+                      </a:solidFill>
+                      <a:prstDash val="solid"/>
+                      <a:round/>
+                      <a:headEnd type="none" w="med" len="med"/>
+                      <a:tailEnd type="none" w="med" len="med"/>
+                    </a:lnT>
+                    <a:lnB w="9525" cap="flat" cmpd="sng" algn="ctr">
+                      <a:solidFill>
+                        <a:srgbClr val="E7E3DE"/>
+                      </a:solidFill>
+                      <a:prstDash val="solid"/>
+                      <a:round/>
+                      <a:headEnd type="none" w="med" len="med"/>
+                      <a:tailEnd type="none" w="med" len="med"/>
+                    </a:lnB>
+                    <a:solidFill>
+                      <a:srgbClr val="FFFFFF"/>
+                    </a:solidFill>
+                  </a:tcPr>
+                </a:tc>
+                <a:tc>
+                  <a:txBody>
+                    <a:bodyPr/>
+                    <a:lstStyle/>
+                    <a:p>
+                      <a:pPr algn="r" indent="0" marL="0">
+                        <a:buNone/>
+                      </a:pPr>
+                      <a:r>
+                        <a:rPr lang="en-US" sz="1000" b="1" dirty="0">
+                          <a:solidFill>
+                            <a:srgbClr val="8B3E2D"/>
+                          </a:solidFill>
+                          <a:latin typeface="Calibri" pitchFamily="34" charset="0"/>
+                          <a:ea typeface="Calibri" pitchFamily="34" charset="-122"/>
+                          <a:cs typeface="Calibri" pitchFamily="34" charset="-120"/>
+                        </a:rPr>
+                        <a:t>Vendors</a:t>
+                      </a:r>
+                      <a:endParaRPr lang="en-US" sz="1000" dirty="0">
+                        <a:latin typeface="Calibri" charset="0"/>
+                        <a:ea typeface="Calibri" charset="0"/>
+                        <a:cs typeface="Calibri" charset="0"/>
+                      </a:endParaRPr>
+                    </a:p>
+                  </a:txBody>
+                  <a:tcPr marL="76200" marR="76200" marT="25400" marB="25400" anchor="ctr">
+                    <a:lnL w="9525" cap="flat" cmpd="sng" algn="ctr">
+                      <a:solidFill>
+                        <a:srgbClr val="E7E3DE"/>
+                      </a:solidFill>
+                      <a:prstDash val="solid"/>
+                      <a:round/>
+                      <a:headEnd type="none" w="med" len="med"/>
+                      <a:tailEnd type="none" w="med" len="med"/>
+                    </a:lnL>
+                    <a:lnR w="9525" cap="flat" cmpd="sng" algn="ctr">
+                      <a:solidFill>
+                        <a:srgbClr val="E7E3DE"/>
+                      </a:solidFill>
+                      <a:prstDash val="solid"/>
+                      <a:round/>
+                      <a:headEnd type="none" w="med" len="med"/>
+                      <a:tailEnd type="none" w="med" len="med"/>
+                    </a:lnR>
+                    <a:lnT w="9525" cap="flat" cmpd="sng" algn="ctr">
+                      <a:solidFill>
+                        <a:srgbClr val="E7E3DE"/>
+                      </a:solidFill>
+                      <a:prstDash val="solid"/>
+                      <a:round/>
+                      <a:headEnd type="none" w="med" len="med"/>
+                      <a:tailEnd type="none" w="med" len="med"/>
+                    </a:lnT>
+                    <a:lnB w="9525" cap="flat" cmpd="sng" algn="ctr">
+                      <a:solidFill>
+                        <a:srgbClr val="E7E3DE"/>
+                      </a:solidFill>
+                      <a:prstDash val="solid"/>
+                      <a:round/>
+                      <a:headEnd type="none" w="med" len="med"/>
+                      <a:tailEnd type="none" w="med" len="med"/>
+                    </a:lnB>
+                    <a:solidFill>
+                      <a:srgbClr val="FFFFFF"/>
+                    </a:solidFill>
+                  </a:tcPr>
+                </a:tc>
+                <a:tc>
+                  <a:txBody>
+                    <a:bodyPr/>
+                    <a:lstStyle/>
+                    <a:p>
+                      <a:pPr algn="r" indent="0" marL="0">
+                        <a:buNone/>
+                      </a:pPr>
+                      <a:r>
+                        <a:rPr lang="en-US" sz="1000" b="1" dirty="0">
+                          <a:solidFill>
+                            <a:srgbClr val="8B3E2D"/>
+                          </a:solidFill>
+                          <a:latin typeface="Calibri" pitchFamily="34" charset="0"/>
+                          <a:ea typeface="Calibri" pitchFamily="34" charset="-122"/>
+                          <a:cs typeface="Calibri" pitchFamily="34" charset="-120"/>
+                        </a:rPr>
+                        <a:t>Pop. per vendor</a:t>
+                      </a:r>
+                      <a:endParaRPr lang="en-US" sz="1000" dirty="0">
+                        <a:latin typeface="Calibri" charset="0"/>
+                        <a:ea typeface="Calibri" charset="0"/>
+                        <a:cs typeface="Calibri" charset="0"/>
+                      </a:endParaRPr>
+                    </a:p>
+                  </a:txBody>
+                  <a:tcPr marL="76200" marR="76200" marT="25400" marB="25400" anchor="ctr">
                     <a:lnL w="9525" cap="flat" cmpd="sng" algn="ctr">
                       <a:solidFill>
                         <a:srgbClr val="E7E3DE"/>
@@ -9404,7 +9542,7 @@
                   </a:tcPr>
                 </a:tc>
               </a:tr>
-              <a:tr h="274320">
+              <a:tr h="256032">
                 <a:tc>
                   <a:txBody>
                     <a:bodyPr/>
@@ -9414,7 +9552,7 @@
                         <a:buNone/>
                       </a:pPr>
                       <a:r>
-                        <a:rPr lang="en-US" sz="1100" b="1" dirty="0">
+                        <a:rPr lang="en-US" sz="1050" b="1" dirty="0">
                           <a:solidFill>
                             <a:srgbClr val="2C2825"/>
                           </a:solidFill>
@@ -9424,14 +9562,14 @@
                         </a:rPr>
                         <a:t>Portland, OR</a:t>
                       </a:r>
-                      <a:endParaRPr lang="en-US" sz="1100" dirty="0">
+                      <a:endParaRPr lang="en-US" sz="1050" dirty="0">
                         <a:latin typeface="Calibri" charset="0"/>
                         <a:ea typeface="Calibri" charset="0"/>
                         <a:cs typeface="Calibri" charset="0"/>
                       </a:endParaRPr>
                     </a:p>
                   </a:txBody>
-                  <a:tcPr marL="76200" marR="76200" marT="38100" marB="38100" anchor="ctr">
+                  <a:tcPr marL="76200" marR="76200" marT="25400" marB="25400" anchor="ctr">
                     <a:lnL w="9525" cap="flat" cmpd="sng" algn="ctr">
                       <a:solidFill>
                         <a:srgbClr val="E7E3DE"/>
@@ -9482,7 +9620,7 @@
                         <a:buNone/>
                       </a:pPr>
                       <a:r>
-                        <a:rPr lang="en-US" sz="1100" dirty="0">
+                        <a:rPr lang="en-US" sz="1050" dirty="0">
                           <a:solidFill>
                             <a:srgbClr val="5A534C"/>
                           </a:solidFill>
@@ -9492,14 +9630,14 @@
                         </a:rPr>
                         <a:t>Dec '26</a:t>
                       </a:r>
-                      <a:endParaRPr lang="en-US" sz="1100" dirty="0">
+                      <a:endParaRPr lang="en-US" sz="1050" dirty="0">
                         <a:latin typeface="Calibri" charset="0"/>
                         <a:ea typeface="Calibri" charset="0"/>
                         <a:cs typeface="Calibri" charset="0"/>
                       </a:endParaRPr>
                     </a:p>
                   </a:txBody>
-                  <a:tcPr marL="76200" marR="76200" marT="38100" marB="38100" anchor="ctr">
+                  <a:tcPr marL="76200" marR="76200" marT="25400" marB="25400" anchor="ctr">
                     <a:lnL w="9525" cap="flat" cmpd="sng" algn="ctr">
                       <a:solidFill>
                         <a:srgbClr val="E7E3DE"/>
@@ -9550,7 +9688,75 @@
                         <a:buNone/>
                       </a:pPr>
                       <a:r>
-                        <a:rPr lang="en-US" sz="1100" dirty="0">
+                        <a:rPr lang="en-US" sz="1050" dirty="0">
+                          <a:solidFill>
+                            <a:srgbClr val="5A534C"/>
+                          </a:solidFill>
+                          <a:latin typeface="Calibri" pitchFamily="34" charset="0"/>
+                          <a:ea typeface="Calibri" pitchFamily="34" charset="-122"/>
+                          <a:cs typeface="Calibri" pitchFamily="34" charset="-120"/>
+                        </a:rPr>
+                        <a:t>2.5M</a:t>
+                      </a:r>
+                      <a:endParaRPr lang="en-US" sz="1050" dirty="0">
+                        <a:latin typeface="Calibri" charset="0"/>
+                        <a:ea typeface="Calibri" charset="0"/>
+                        <a:cs typeface="Calibri" charset="0"/>
+                      </a:endParaRPr>
+                    </a:p>
+                  </a:txBody>
+                  <a:tcPr marL="76200" marR="76200" marT="25400" marB="25400" anchor="ctr">
+                    <a:lnL w="9525" cap="flat" cmpd="sng" algn="ctr">
+                      <a:solidFill>
+                        <a:srgbClr val="E7E3DE"/>
+                      </a:solidFill>
+                      <a:prstDash val="solid"/>
+                      <a:round/>
+                      <a:headEnd type="none" w="med" len="med"/>
+                      <a:tailEnd type="none" w="med" len="med"/>
+                    </a:lnL>
+                    <a:lnR w="9525" cap="flat" cmpd="sng" algn="ctr">
+                      <a:solidFill>
+                        <a:srgbClr val="E7E3DE"/>
+                      </a:solidFill>
+                      <a:prstDash val="solid"/>
+                      <a:round/>
+                      <a:headEnd type="none" w="med" len="med"/>
+                      <a:tailEnd type="none" w="med" len="med"/>
+                    </a:lnR>
+                    <a:lnT w="9525" cap="flat" cmpd="sng" algn="ctr">
+                      <a:solidFill>
+                        <a:srgbClr val="E7E3DE"/>
+                      </a:solidFill>
+                      <a:prstDash val="solid"/>
+                      <a:round/>
+                      <a:headEnd type="none" w="med" len="med"/>
+                      <a:tailEnd type="none" w="med" len="med"/>
+                    </a:lnT>
+                    <a:lnB w="9525" cap="flat" cmpd="sng" algn="ctr">
+                      <a:solidFill>
+                        <a:srgbClr val="E7E3DE"/>
+                      </a:solidFill>
+                      <a:prstDash val="solid"/>
+                      <a:round/>
+                      <a:headEnd type="none" w="med" len="med"/>
+                      <a:tailEnd type="none" w="med" len="med"/>
+                    </a:lnB>
+                    <a:solidFill>
+                      <a:srgbClr val="FFFFFF"/>
+                    </a:solidFill>
+                  </a:tcPr>
+                </a:tc>
+                <a:tc>
+                  <a:txBody>
+                    <a:bodyPr/>
+                    <a:lstStyle/>
+                    <a:p>
+                      <a:pPr algn="r" indent="0" marL="0">
+                        <a:buNone/>
+                      </a:pPr>
+                      <a:r>
+                        <a:rPr lang="en-US" sz="1050" dirty="0">
                           <a:solidFill>
                             <a:srgbClr val="2C2825"/>
                           </a:solidFill>
@@ -9560,14 +9766,82 @@
                         </a:rPr>
                         <a:t>199</a:t>
                       </a:r>
-                      <a:endParaRPr lang="en-US" sz="1100" dirty="0">
+                      <a:endParaRPr lang="en-US" sz="1050" dirty="0">
                         <a:latin typeface="Calibri" charset="0"/>
                         <a:ea typeface="Calibri" charset="0"/>
                         <a:cs typeface="Calibri" charset="0"/>
                       </a:endParaRPr>
                     </a:p>
                   </a:txBody>
-                  <a:tcPr marL="76200" marR="76200" marT="38100" marB="38100" anchor="ctr">
+                  <a:tcPr marL="76200" marR="76200" marT="25400" marB="25400" anchor="ctr">
+                    <a:lnL w="9525" cap="flat" cmpd="sng" algn="ctr">
+                      <a:solidFill>
+                        <a:srgbClr val="E7E3DE"/>
+                      </a:solidFill>
+                      <a:prstDash val="solid"/>
+                      <a:round/>
+                      <a:headEnd type="none" w="med" len="med"/>
+                      <a:tailEnd type="none" w="med" len="med"/>
+                    </a:lnL>
+                    <a:lnR w="9525" cap="flat" cmpd="sng" algn="ctr">
+                      <a:solidFill>
+                        <a:srgbClr val="E7E3DE"/>
+                      </a:solidFill>
+                      <a:prstDash val="solid"/>
+                      <a:round/>
+                      <a:headEnd type="none" w="med" len="med"/>
+                      <a:tailEnd type="none" w="med" len="med"/>
+                    </a:lnR>
+                    <a:lnT w="9525" cap="flat" cmpd="sng" algn="ctr">
+                      <a:solidFill>
+                        <a:srgbClr val="E7E3DE"/>
+                      </a:solidFill>
+                      <a:prstDash val="solid"/>
+                      <a:round/>
+                      <a:headEnd type="none" w="med" len="med"/>
+                      <a:tailEnd type="none" w="med" len="med"/>
+                    </a:lnT>
+                    <a:lnB w="9525" cap="flat" cmpd="sng" algn="ctr">
+                      <a:solidFill>
+                        <a:srgbClr val="E7E3DE"/>
+                      </a:solidFill>
+                      <a:prstDash val="solid"/>
+                      <a:round/>
+                      <a:headEnd type="none" w="med" len="med"/>
+                      <a:tailEnd type="none" w="med" len="med"/>
+                    </a:lnB>
+                    <a:solidFill>
+                      <a:srgbClr val="FFFFFF"/>
+                    </a:solidFill>
+                  </a:tcPr>
+                </a:tc>
+                <a:tc>
+                  <a:txBody>
+                    <a:bodyPr/>
+                    <a:lstStyle/>
+                    <a:p>
+                      <a:pPr algn="r" indent="0" marL="0">
+                        <a:buNone/>
+                      </a:pPr>
+                      <a:r>
+                        <a:rPr lang="en-US" sz="1050" dirty="0">
+                          <a:solidFill>
+                            <a:srgbClr val="5A534C"/>
+                          </a:solidFill>
+                          <a:latin typeface="Calibri" pitchFamily="34" charset="0"/>
+                          <a:ea typeface="Calibri" pitchFamily="34" charset="-122"/>
+                          <a:cs typeface="Calibri" pitchFamily="34" charset="-120"/>
+                        </a:rPr>
+                        <a:t>12,563</a:t>
+                      </a:r>
+                      <a:endParaRPr lang="en-US" sz="1050" dirty="0">
+                        <a:latin typeface="Calibri" charset="0"/>
+                        <a:ea typeface="Calibri" charset="0"/>
+                        <a:cs typeface="Calibri" charset="0"/>
+                      </a:endParaRPr>
+                    </a:p>
+                  </a:txBody>
+                  <a:tcPr marL="76200" marR="76200" marT="25400" marB="25400" anchor="ctr">
                     <a:lnL w="9525" cap="flat" cmpd="sng" algn="ctr">
                       <a:solidFill>
                         <a:srgbClr val="E7E3DE"/>
@@ -9610,7 +9884,7 @@
                   </a:tcPr>
                 </a:tc>
               </a:tr>
-              <a:tr h="274320">
+              <a:tr h="256032">
                 <a:tc>
                   <a:txBody>
                     <a:bodyPr/>
@@ -9620,7 +9894,7 @@
                         <a:buNone/>
                       </a:pPr>
                       <a:r>
-                        <a:rPr lang="en-US" sz="1100" b="1" dirty="0">
+                        <a:rPr lang="en-US" sz="1050" b="1" dirty="0">
                           <a:solidFill>
                             <a:srgbClr val="2C2825"/>
                           </a:solidFill>
@@ -9630,14 +9904,14 @@
                         </a:rPr>
                         <a:t>Denver</a:t>
                       </a:r>
-                      <a:endParaRPr lang="en-US" sz="1100" dirty="0">
+                      <a:endParaRPr lang="en-US" sz="1050" dirty="0">
                         <a:latin typeface="Calibri" charset="0"/>
                         <a:ea typeface="Calibri" charset="0"/>
                         <a:cs typeface="Calibri" charset="0"/>
                       </a:endParaRPr>
                     </a:p>
                   </a:txBody>
-                  <a:tcPr marL="76200" marR="76200" marT="38100" marB="38100" anchor="ctr">
+                  <a:tcPr marL="76200" marR="76200" marT="25400" marB="25400" anchor="ctr">
                     <a:lnL w="9525" cap="flat" cmpd="sng" algn="ctr">
                       <a:solidFill>
                         <a:srgbClr val="E7E3DE"/>
@@ -9688,7 +9962,7 @@
                         <a:buNone/>
                       </a:pPr>
                       <a:r>
-                        <a:rPr lang="en-US" sz="1100" dirty="0">
+                        <a:rPr lang="en-US" sz="1050" dirty="0">
                           <a:solidFill>
                             <a:srgbClr val="5A534C"/>
                           </a:solidFill>
@@ -9698,14 +9972,14 @@
                         </a:rPr>
                         <a:t>Dec '26</a:t>
                       </a:r>
-                      <a:endParaRPr lang="en-US" sz="1100" dirty="0">
+                      <a:endParaRPr lang="en-US" sz="1050" dirty="0">
                         <a:latin typeface="Calibri" charset="0"/>
                         <a:ea typeface="Calibri" charset="0"/>
                         <a:cs typeface="Calibri" charset="0"/>
                       </a:endParaRPr>
                     </a:p>
                   </a:txBody>
-                  <a:tcPr marL="76200" marR="76200" marT="38100" marB="38100" anchor="ctr">
+                  <a:tcPr marL="76200" marR="76200" marT="25400" marB="25400" anchor="ctr">
                     <a:lnL w="9525" cap="flat" cmpd="sng" algn="ctr">
                       <a:solidFill>
                         <a:srgbClr val="E7E3DE"/>
@@ -9756,7 +10030,75 @@
                         <a:buNone/>
                       </a:pPr>
                       <a:r>
-                        <a:rPr lang="en-US" sz="1100" dirty="0">
+                        <a:rPr lang="en-US" sz="1050" dirty="0">
+                          <a:solidFill>
+                            <a:srgbClr val="5A534C"/>
+                          </a:solidFill>
+                          <a:latin typeface="Calibri" pitchFamily="34" charset="0"/>
+                          <a:ea typeface="Calibri" pitchFamily="34" charset="-122"/>
+                          <a:cs typeface="Calibri" pitchFamily="34" charset="-120"/>
+                        </a:rPr>
+                        <a:t>3.0M</a:t>
+                      </a:r>
+                      <a:endParaRPr lang="en-US" sz="1050" dirty="0">
+                        <a:latin typeface="Calibri" charset="0"/>
+                        <a:ea typeface="Calibri" charset="0"/>
+                        <a:cs typeface="Calibri" charset="0"/>
+                      </a:endParaRPr>
+                    </a:p>
+                  </a:txBody>
+                  <a:tcPr marL="76200" marR="76200" marT="25400" marB="25400" anchor="ctr">
+                    <a:lnL w="9525" cap="flat" cmpd="sng" algn="ctr">
+                      <a:solidFill>
+                        <a:srgbClr val="E7E3DE"/>
+                      </a:solidFill>
+                      <a:prstDash val="solid"/>
+                      <a:round/>
+                      <a:headEnd type="none" w="med" len="med"/>
+                      <a:tailEnd type="none" w="med" len="med"/>
+                    </a:lnL>
+                    <a:lnR w="9525" cap="flat" cmpd="sng" algn="ctr">
+                      <a:solidFill>
+                        <a:srgbClr val="E7E3DE"/>
+                      </a:solidFill>
+                      <a:prstDash val="solid"/>
+                      <a:round/>
+                      <a:headEnd type="none" w="med" len="med"/>
+                      <a:tailEnd type="none" w="med" len="med"/>
+                    </a:lnR>
+                    <a:lnT w="9525" cap="flat" cmpd="sng" algn="ctr">
+                      <a:solidFill>
+                        <a:srgbClr val="E7E3DE"/>
+                      </a:solidFill>
+                      <a:prstDash val="solid"/>
+                      <a:round/>
+                      <a:headEnd type="none" w="med" len="med"/>
+                      <a:tailEnd type="none" w="med" len="med"/>
+                    </a:lnT>
+                    <a:lnB w="9525" cap="flat" cmpd="sng" algn="ctr">
+                      <a:solidFill>
+                        <a:srgbClr val="E7E3DE"/>
+                      </a:solidFill>
+                      <a:prstDash val="solid"/>
+                      <a:round/>
+                      <a:headEnd type="none" w="med" len="med"/>
+                      <a:tailEnd type="none" w="med" len="med"/>
+                    </a:lnB>
+                    <a:solidFill>
+                      <a:srgbClr val="FFFFFF"/>
+                    </a:solidFill>
+                  </a:tcPr>
+                </a:tc>
+                <a:tc>
+                  <a:txBody>
+                    <a:bodyPr/>
+                    <a:lstStyle/>
+                    <a:p>
+                      <a:pPr algn="r" indent="0" marL="0">
+                        <a:buNone/>
+                      </a:pPr>
+                      <a:r>
+                        <a:rPr lang="en-US" sz="1050" dirty="0">
                           <a:solidFill>
                             <a:srgbClr val="2C2825"/>
                           </a:solidFill>
@@ -9766,14 +10108,82 @@
                         </a:rPr>
                         <a:t>214</a:t>
                       </a:r>
-                      <a:endParaRPr lang="en-US" sz="1100" dirty="0">
+                      <a:endParaRPr lang="en-US" sz="1050" dirty="0">
                         <a:latin typeface="Calibri" charset="0"/>
                         <a:ea typeface="Calibri" charset="0"/>
                         <a:cs typeface="Calibri" charset="0"/>
                       </a:endParaRPr>
                     </a:p>
                   </a:txBody>
-                  <a:tcPr marL="76200" marR="76200" marT="38100" marB="38100" anchor="ctr">
+                  <a:tcPr marL="76200" marR="76200" marT="25400" marB="25400" anchor="ctr">
+                    <a:lnL w="9525" cap="flat" cmpd="sng" algn="ctr">
+                      <a:solidFill>
+                        <a:srgbClr val="E7E3DE"/>
+                      </a:solidFill>
+                      <a:prstDash val="solid"/>
+                      <a:round/>
+                      <a:headEnd type="none" w="med" len="med"/>
+                      <a:tailEnd type="none" w="med" len="med"/>
+                    </a:lnL>
+                    <a:lnR w="9525" cap="flat" cmpd="sng" algn="ctr">
+                      <a:solidFill>
+                        <a:srgbClr val="E7E3DE"/>
+                      </a:solidFill>
+                      <a:prstDash val="solid"/>
+                      <a:round/>
+                      <a:headEnd type="none" w="med" len="med"/>
+                      <a:tailEnd type="none" w="med" len="med"/>
+                    </a:lnR>
+                    <a:lnT w="9525" cap="flat" cmpd="sng" algn="ctr">
+                      <a:solidFill>
+                        <a:srgbClr val="E7E3DE"/>
+                      </a:solidFill>
+                      <a:prstDash val="solid"/>
+                      <a:round/>
+                      <a:headEnd type="none" w="med" len="med"/>
+                      <a:tailEnd type="none" w="med" len="med"/>
+                    </a:lnT>
+                    <a:lnB w="9525" cap="flat" cmpd="sng" algn="ctr">
+                      <a:solidFill>
+                        <a:srgbClr val="E7E3DE"/>
+                      </a:solidFill>
+                      <a:prstDash val="solid"/>
+                      <a:round/>
+                      <a:headEnd type="none" w="med" len="med"/>
+                      <a:tailEnd type="none" w="med" len="med"/>
+                    </a:lnB>
+                    <a:solidFill>
+                      <a:srgbClr val="FFFFFF"/>
+                    </a:solidFill>
+                  </a:tcPr>
+                </a:tc>
+                <a:tc>
+                  <a:txBody>
+                    <a:bodyPr/>
+                    <a:lstStyle/>
+                    <a:p>
+                      <a:pPr algn="r" indent="0" marL="0">
+                        <a:buNone/>
+                      </a:pPr>
+                      <a:r>
+                        <a:rPr lang="en-US" sz="1050" dirty="0">
+                          <a:solidFill>
+                            <a:srgbClr val="5A534C"/>
+                          </a:solidFill>
+                          <a:latin typeface="Calibri" pitchFamily="34" charset="0"/>
+                          <a:ea typeface="Calibri" pitchFamily="34" charset="-122"/>
+                          <a:cs typeface="Calibri" pitchFamily="34" charset="-120"/>
+                        </a:rPr>
+                        <a:t>14,019</a:t>
+                      </a:r>
+                      <a:endParaRPr lang="en-US" sz="1050" dirty="0">
+                        <a:latin typeface="Calibri" charset="0"/>
+                        <a:ea typeface="Calibri" charset="0"/>
+                        <a:cs typeface="Calibri" charset="0"/>
+                      </a:endParaRPr>
+                    </a:p>
+                  </a:txBody>
+                  <a:tcPr marL="76200" marR="76200" marT="25400" marB="25400" anchor="ctr">
                     <a:lnL w="9525" cap="flat" cmpd="sng" algn="ctr">
                       <a:solidFill>
                         <a:srgbClr val="E7E3DE"/>
@@ -9816,7 +10226,7 @@
                   </a:tcPr>
                 </a:tc>
               </a:tr>
-              <a:tr h="274320">
+              <a:tr h="256032">
                 <a:tc>
                   <a:txBody>
                     <a:bodyPr/>
@@ -9826,7 +10236,7 @@
                         <a:buNone/>
                       </a:pPr>
                       <a:r>
-                        <a:rPr lang="en-US" sz="1100" b="1" dirty="0">
+                        <a:rPr lang="en-US" sz="1050" b="1" dirty="0">
                           <a:solidFill>
                             <a:srgbClr val="2C2825"/>
                           </a:solidFill>
@@ -9836,14 +10246,14 @@
                         </a:rPr>
                         <a:t>Seattle</a:t>
                       </a:r>
-                      <a:endParaRPr lang="en-US" sz="1100" dirty="0">
+                      <a:endParaRPr lang="en-US" sz="1050" dirty="0">
                         <a:latin typeface="Calibri" charset="0"/>
                         <a:ea typeface="Calibri" charset="0"/>
                         <a:cs typeface="Calibri" charset="0"/>
                       </a:endParaRPr>
                     </a:p>
                   </a:txBody>
-                  <a:tcPr marL="76200" marR="76200" marT="38100" marB="38100" anchor="ctr">
+                  <a:tcPr marL="76200" marR="76200" marT="25400" marB="25400" anchor="ctr">
                     <a:lnL w="9525" cap="flat" cmpd="sng" algn="ctr">
                       <a:solidFill>
                         <a:srgbClr val="E7E3DE"/>
@@ -9894,7 +10304,7 @@
                         <a:buNone/>
                       </a:pPr>
                       <a:r>
-                        <a:rPr lang="en-US" sz="1100" dirty="0">
+                        <a:rPr lang="en-US" sz="1050" dirty="0">
                           <a:solidFill>
                             <a:srgbClr val="5A534C"/>
                           </a:solidFill>
@@ -9904,14 +10314,14 @@
                         </a:rPr>
                         <a:t>May '27</a:t>
                       </a:r>
-                      <a:endParaRPr lang="en-US" sz="1100" dirty="0">
+                      <a:endParaRPr lang="en-US" sz="1050" dirty="0">
                         <a:latin typeface="Calibri" charset="0"/>
                         <a:ea typeface="Calibri" charset="0"/>
                         <a:cs typeface="Calibri" charset="0"/>
                       </a:endParaRPr>
                     </a:p>
                   </a:txBody>
-                  <a:tcPr marL="76200" marR="76200" marT="38100" marB="38100" anchor="ctr">
+                  <a:tcPr marL="76200" marR="76200" marT="25400" marB="25400" anchor="ctr">
                     <a:lnL w="9525" cap="flat" cmpd="sng" algn="ctr">
                       <a:solidFill>
                         <a:srgbClr val="E7E3DE"/>
@@ -9962,7 +10372,75 @@
                         <a:buNone/>
                       </a:pPr>
                       <a:r>
-                        <a:rPr lang="en-US" sz="1100" dirty="0">
+                        <a:rPr lang="en-US" sz="1050" dirty="0">
+                          <a:solidFill>
+                            <a:srgbClr val="5A534C"/>
+                          </a:solidFill>
+                          <a:latin typeface="Calibri" pitchFamily="34" charset="0"/>
+                          <a:ea typeface="Calibri" pitchFamily="34" charset="-122"/>
+                          <a:cs typeface="Calibri" pitchFamily="34" charset="-120"/>
+                        </a:rPr>
+                        <a:t>4.1M</a:t>
+                      </a:r>
+                      <a:endParaRPr lang="en-US" sz="1050" dirty="0">
+                        <a:latin typeface="Calibri" charset="0"/>
+                        <a:ea typeface="Calibri" charset="0"/>
+                        <a:cs typeface="Calibri" charset="0"/>
+                      </a:endParaRPr>
+                    </a:p>
+                  </a:txBody>
+                  <a:tcPr marL="76200" marR="76200" marT="25400" marB="25400" anchor="ctr">
+                    <a:lnL w="9525" cap="flat" cmpd="sng" algn="ctr">
+                      <a:solidFill>
+                        <a:srgbClr val="E7E3DE"/>
+                      </a:solidFill>
+                      <a:prstDash val="solid"/>
+                      <a:round/>
+                      <a:headEnd type="none" w="med" len="med"/>
+                      <a:tailEnd type="none" w="med" len="med"/>
+                    </a:lnL>
+                    <a:lnR w="9525" cap="flat" cmpd="sng" algn="ctr">
+                      <a:solidFill>
+                        <a:srgbClr val="E7E3DE"/>
+                      </a:solidFill>
+                      <a:prstDash val="solid"/>
+                      <a:round/>
+                      <a:headEnd type="none" w="med" len="med"/>
+                      <a:tailEnd type="none" w="med" len="med"/>
+                    </a:lnR>
+                    <a:lnT w="9525" cap="flat" cmpd="sng" algn="ctr">
+                      <a:solidFill>
+                        <a:srgbClr val="E7E3DE"/>
+                      </a:solidFill>
+                      <a:prstDash val="solid"/>
+                      <a:round/>
+                      <a:headEnd type="none" w="med" len="med"/>
+                      <a:tailEnd type="none" w="med" len="med"/>
+                    </a:lnT>
+                    <a:lnB w="9525" cap="flat" cmpd="sng" algn="ctr">
+                      <a:solidFill>
+                        <a:srgbClr val="E7E3DE"/>
+                      </a:solidFill>
+                      <a:prstDash val="solid"/>
+                      <a:round/>
+                      <a:headEnd type="none" w="med" len="med"/>
+                      <a:tailEnd type="none" w="med" len="med"/>
+                    </a:lnB>
+                    <a:solidFill>
+                      <a:srgbClr val="FFFFFF"/>
+                    </a:solidFill>
+                  </a:tcPr>
+                </a:tc>
+                <a:tc>
+                  <a:txBody>
+                    <a:bodyPr/>
+                    <a:lstStyle/>
+                    <a:p>
+                      <a:pPr algn="r" indent="0" marL="0">
+                        <a:buNone/>
+                      </a:pPr>
+                      <a:r>
+                        <a:rPr lang="en-US" sz="1050" dirty="0">
                           <a:solidFill>
                             <a:srgbClr val="2C2825"/>
                           </a:solidFill>
@@ -9970,16 +10448,84 @@
                           <a:ea typeface="Calibri" pitchFamily="34" charset="-122"/>
                           <a:cs typeface="Calibri" pitchFamily="34" charset="-120"/>
                         </a:rPr>
-                        <a:t>195</a:t>
+                        <a:t>194</a:t>
                       </a:r>
-                      <a:endParaRPr lang="en-US" sz="1100" dirty="0">
+                      <a:endParaRPr lang="en-US" sz="1050" dirty="0">
                         <a:latin typeface="Calibri" charset="0"/>
                         <a:ea typeface="Calibri" charset="0"/>
                         <a:cs typeface="Calibri" charset="0"/>
                       </a:endParaRPr>
                     </a:p>
                   </a:txBody>
-                  <a:tcPr marL="76200" marR="76200" marT="38100" marB="38100" anchor="ctr">
+                  <a:tcPr marL="76200" marR="76200" marT="25400" marB="25400" anchor="ctr">
+                    <a:lnL w="9525" cap="flat" cmpd="sng" algn="ctr">
+                      <a:solidFill>
+                        <a:srgbClr val="E7E3DE"/>
+                      </a:solidFill>
+                      <a:prstDash val="solid"/>
+                      <a:round/>
+                      <a:headEnd type="none" w="med" len="med"/>
+                      <a:tailEnd type="none" w="med" len="med"/>
+                    </a:lnL>
+                    <a:lnR w="9525" cap="flat" cmpd="sng" algn="ctr">
+                      <a:solidFill>
+                        <a:srgbClr val="E7E3DE"/>
+                      </a:solidFill>
+                      <a:prstDash val="solid"/>
+                      <a:round/>
+                      <a:headEnd type="none" w="med" len="med"/>
+                      <a:tailEnd type="none" w="med" len="med"/>
+                    </a:lnR>
+                    <a:lnT w="9525" cap="flat" cmpd="sng" algn="ctr">
+                      <a:solidFill>
+                        <a:srgbClr val="E7E3DE"/>
+                      </a:solidFill>
+                      <a:prstDash val="solid"/>
+                      <a:round/>
+                      <a:headEnd type="none" w="med" len="med"/>
+                      <a:tailEnd type="none" w="med" len="med"/>
+                    </a:lnT>
+                    <a:lnB w="9525" cap="flat" cmpd="sng" algn="ctr">
+                      <a:solidFill>
+                        <a:srgbClr val="E7E3DE"/>
+                      </a:solidFill>
+                      <a:prstDash val="solid"/>
+                      <a:round/>
+                      <a:headEnd type="none" w="med" len="med"/>
+                      <a:tailEnd type="none" w="med" len="med"/>
+                    </a:lnB>
+                    <a:solidFill>
+                      <a:srgbClr val="FFFFFF"/>
+                    </a:solidFill>
+                  </a:tcPr>
+                </a:tc>
+                <a:tc>
+                  <a:txBody>
+                    <a:bodyPr/>
+                    <a:lstStyle/>
+                    <a:p>
+                      <a:pPr algn="r" indent="0" marL="0">
+                        <a:buNone/>
+                      </a:pPr>
+                      <a:r>
+                        <a:rPr lang="en-US" sz="1050" dirty="0">
+                          <a:solidFill>
+                            <a:srgbClr val="5A534C"/>
+                          </a:solidFill>
+                          <a:latin typeface="Calibri" pitchFamily="34" charset="0"/>
+                          <a:ea typeface="Calibri" pitchFamily="34" charset="-122"/>
+                          <a:cs typeface="Calibri" pitchFamily="34" charset="-120"/>
+                        </a:rPr>
+                        <a:t>21,134</a:t>
+                      </a:r>
+                      <a:endParaRPr lang="en-US" sz="1050" dirty="0">
+                        <a:latin typeface="Calibri" charset="0"/>
+                        <a:ea typeface="Calibri" charset="0"/>
+                        <a:cs typeface="Calibri" charset="0"/>
+                      </a:endParaRPr>
+                    </a:p>
+                  </a:txBody>
+                  <a:tcPr marL="76200" marR="76200" marT="25400" marB="25400" anchor="ctr">
                     <a:lnL w="9525" cap="flat" cmpd="sng" algn="ctr">
                       <a:solidFill>
                         <a:srgbClr val="E7E3DE"/>
@@ -10022,7 +10568,7 @@
                   </a:tcPr>
                 </a:tc>
               </a:tr>
-              <a:tr h="274320">
+              <a:tr h="256032">
                 <a:tc>
                   <a:txBody>
                     <a:bodyPr/>
@@ -10032,7 +10578,7 @@
                         <a:buNone/>
                       </a:pPr>
                       <a:r>
-                        <a:rPr lang="en-US" sz="1100" b="1" dirty="0">
+                        <a:rPr lang="en-US" sz="1050" b="1" dirty="0">
                           <a:solidFill>
                             <a:srgbClr val="2C2825"/>
                           </a:solidFill>
@@ -10040,16 +10586,16 @@
                           <a:ea typeface="Calibri" pitchFamily="34" charset="-122"/>
                           <a:cs typeface="Calibri" pitchFamily="34" charset="-120"/>
                         </a:rPr>
-                        <a:t>Madison, WI</a:t>
+                        <a:t>Minneapolis</a:t>
                       </a:r>
-                      <a:endParaRPr lang="en-US" sz="1100" dirty="0">
+                      <a:endParaRPr lang="en-US" sz="1050" dirty="0">
                         <a:latin typeface="Calibri" charset="0"/>
                         <a:ea typeface="Calibri" charset="0"/>
                         <a:cs typeface="Calibri" charset="0"/>
                       </a:endParaRPr>
                     </a:p>
                   </a:txBody>
-                  <a:tcPr marL="76200" marR="76200" marT="38100" marB="38100" anchor="ctr">
+                  <a:tcPr marL="76200" marR="76200" marT="25400" marB="25400" anchor="ctr">
                     <a:lnL w="9525" cap="flat" cmpd="sng" algn="ctr">
                       <a:solidFill>
                         <a:srgbClr val="E7E3DE"/>
@@ -10100,7 +10646,7 @@
                         <a:buNone/>
                       </a:pPr>
                       <a:r>
-                        <a:rPr lang="en-US" sz="1100" dirty="0">
+                        <a:rPr lang="en-US" sz="1050" dirty="0">
                           <a:solidFill>
                             <a:srgbClr val="5A534C"/>
                           </a:solidFill>
@@ -10110,14 +10656,14 @@
                         </a:rPr>
                         <a:t>Aug '27</a:t>
                       </a:r>
-                      <a:endParaRPr lang="en-US" sz="1100" dirty="0">
+                      <a:endParaRPr lang="en-US" sz="1050" dirty="0">
                         <a:latin typeface="Calibri" charset="0"/>
                         <a:ea typeface="Calibri" charset="0"/>
                         <a:cs typeface="Calibri" charset="0"/>
                       </a:endParaRPr>
                     </a:p>
                   </a:txBody>
-                  <a:tcPr marL="76200" marR="76200" marT="38100" marB="38100" anchor="ctr">
+                  <a:tcPr marL="76200" marR="76200" marT="25400" marB="25400" anchor="ctr">
                     <a:lnL w="9525" cap="flat" cmpd="sng" algn="ctr">
                       <a:solidFill>
                         <a:srgbClr val="E7E3DE"/>
@@ -10168,7 +10714,75 @@
                         <a:buNone/>
                       </a:pPr>
                       <a:r>
-                        <a:rPr lang="en-US" sz="1100" dirty="0">
+                        <a:rPr lang="en-US" sz="1050" dirty="0">
+                          <a:solidFill>
+                            <a:srgbClr val="5A534C"/>
+                          </a:solidFill>
+                          <a:latin typeface="Calibri" pitchFamily="34" charset="0"/>
+                          <a:ea typeface="Calibri" pitchFamily="34" charset="-122"/>
+                          <a:cs typeface="Calibri" pitchFamily="34" charset="-120"/>
+                        </a:rPr>
+                        <a:t>3.8M</a:t>
+                      </a:r>
+                      <a:endParaRPr lang="en-US" sz="1050" dirty="0">
+                        <a:latin typeface="Calibri" charset="0"/>
+                        <a:ea typeface="Calibri" charset="0"/>
+                        <a:cs typeface="Calibri" charset="0"/>
+                      </a:endParaRPr>
+                    </a:p>
+                  </a:txBody>
+                  <a:tcPr marL="76200" marR="76200" marT="25400" marB="25400" anchor="ctr">
+                    <a:lnL w="9525" cap="flat" cmpd="sng" algn="ctr">
+                      <a:solidFill>
+                        <a:srgbClr val="E7E3DE"/>
+                      </a:solidFill>
+                      <a:prstDash val="solid"/>
+                      <a:round/>
+                      <a:headEnd type="none" w="med" len="med"/>
+                      <a:tailEnd type="none" w="med" len="med"/>
+                    </a:lnL>
+                    <a:lnR w="9525" cap="flat" cmpd="sng" algn="ctr">
+                      <a:solidFill>
+                        <a:srgbClr val="E7E3DE"/>
+                      </a:solidFill>
+                      <a:prstDash val="solid"/>
+                      <a:round/>
+                      <a:headEnd type="none" w="med" len="med"/>
+                      <a:tailEnd type="none" w="med" len="med"/>
+                    </a:lnR>
+                    <a:lnT w="9525" cap="flat" cmpd="sng" algn="ctr">
+                      <a:solidFill>
+                        <a:srgbClr val="E7E3DE"/>
+                      </a:solidFill>
+                      <a:prstDash val="solid"/>
+                      <a:round/>
+                      <a:headEnd type="none" w="med" len="med"/>
+                      <a:tailEnd type="none" w="med" len="med"/>
+                    </a:lnT>
+                    <a:lnB w="9525" cap="flat" cmpd="sng" algn="ctr">
+                      <a:solidFill>
+                        <a:srgbClr val="E7E3DE"/>
+                      </a:solidFill>
+                      <a:prstDash val="solid"/>
+                      <a:round/>
+                      <a:headEnd type="none" w="med" len="med"/>
+                      <a:tailEnd type="none" w="med" len="med"/>
+                    </a:lnB>
+                    <a:solidFill>
+                      <a:srgbClr val="FFFFFF"/>
+                    </a:solidFill>
+                  </a:tcPr>
+                </a:tc>
+                <a:tc>
+                  <a:txBody>
+                    <a:bodyPr/>
+                    <a:lstStyle/>
+                    <a:p>
+                      <a:pPr algn="r" indent="0" marL="0">
+                        <a:buNone/>
+                      </a:pPr>
+                      <a:r>
+                        <a:rPr lang="en-US" sz="1050" dirty="0">
                           <a:solidFill>
                             <a:srgbClr val="2C2825"/>
                           </a:solidFill>
@@ -10178,14 +10792,82 @@
                         </a:rPr>
                         <a:t>223</a:t>
                       </a:r>
-                      <a:endParaRPr lang="en-US" sz="1100" dirty="0">
+                      <a:endParaRPr lang="en-US" sz="1050" dirty="0">
                         <a:latin typeface="Calibri" charset="0"/>
                         <a:ea typeface="Calibri" charset="0"/>
                         <a:cs typeface="Calibri" charset="0"/>
                       </a:endParaRPr>
                     </a:p>
                   </a:txBody>
-                  <a:tcPr marL="76200" marR="76200" marT="38100" marB="38100" anchor="ctr">
+                  <a:tcPr marL="76200" marR="76200" marT="25400" marB="25400" anchor="ctr">
+                    <a:lnL w="9525" cap="flat" cmpd="sng" algn="ctr">
+                      <a:solidFill>
+                        <a:srgbClr val="E7E3DE"/>
+                      </a:solidFill>
+                      <a:prstDash val="solid"/>
+                      <a:round/>
+                      <a:headEnd type="none" w="med" len="med"/>
+                      <a:tailEnd type="none" w="med" len="med"/>
+                    </a:lnL>
+                    <a:lnR w="9525" cap="flat" cmpd="sng" algn="ctr">
+                      <a:solidFill>
+                        <a:srgbClr val="E7E3DE"/>
+                      </a:solidFill>
+                      <a:prstDash val="solid"/>
+                      <a:round/>
+                      <a:headEnd type="none" w="med" len="med"/>
+                      <a:tailEnd type="none" w="med" len="med"/>
+                    </a:lnR>
+                    <a:lnT w="9525" cap="flat" cmpd="sng" algn="ctr">
+                      <a:solidFill>
+                        <a:srgbClr val="E7E3DE"/>
+                      </a:solidFill>
+                      <a:prstDash val="solid"/>
+                      <a:round/>
+                      <a:headEnd type="none" w="med" len="med"/>
+                      <a:tailEnd type="none" w="med" len="med"/>
+                    </a:lnT>
+                    <a:lnB w="9525" cap="flat" cmpd="sng" algn="ctr">
+                      <a:solidFill>
+                        <a:srgbClr val="E7E3DE"/>
+                      </a:solidFill>
+                      <a:prstDash val="solid"/>
+                      <a:round/>
+                      <a:headEnd type="none" w="med" len="med"/>
+                      <a:tailEnd type="none" w="med" len="med"/>
+                    </a:lnB>
+                    <a:solidFill>
+                      <a:srgbClr val="FFFFFF"/>
+                    </a:solidFill>
+                  </a:tcPr>
+                </a:tc>
+                <a:tc>
+                  <a:txBody>
+                    <a:bodyPr/>
+                    <a:lstStyle/>
+                    <a:p>
+                      <a:pPr algn="r" indent="0" marL="0">
+                        <a:buNone/>
+                      </a:pPr>
+                      <a:r>
+                        <a:rPr lang="en-US" sz="1050" dirty="0">
+                          <a:solidFill>
+                            <a:srgbClr val="5A534C"/>
+                          </a:solidFill>
+                          <a:latin typeface="Calibri" pitchFamily="34" charset="0"/>
+                          <a:ea typeface="Calibri" pitchFamily="34" charset="-122"/>
+                          <a:cs typeface="Calibri" pitchFamily="34" charset="-120"/>
+                        </a:rPr>
+                        <a:t>16,996</a:t>
+                      </a:r>
+                      <a:endParaRPr lang="en-US" sz="1050" dirty="0">
+                        <a:latin typeface="Calibri" charset="0"/>
+                        <a:ea typeface="Calibri" charset="0"/>
+                        <a:cs typeface="Calibri" charset="0"/>
+                      </a:endParaRPr>
+                    </a:p>
+                  </a:txBody>
+                  <a:tcPr marL="76200" marR="76200" marT="25400" marB="25400" anchor="ctr">
                     <a:lnL w="9525" cap="flat" cmpd="sng" algn="ctr">
                       <a:solidFill>
                         <a:srgbClr val="E7E3DE"/>
@@ -10228,7 +10910,7 @@
                   </a:tcPr>
                 </a:tc>
               </a:tr>
-              <a:tr h="274320">
+              <a:tr h="256032">
                 <a:tc>
                   <a:txBody>
                     <a:bodyPr/>
@@ -10238,7 +10920,7 @@
                         <a:buNone/>
                       </a:pPr>
                       <a:r>
-                        <a:rPr lang="en-US" sz="1100" b="1" dirty="0">
+                        <a:rPr lang="en-US" sz="1050" b="1" dirty="0">
                           <a:solidFill>
                             <a:srgbClr val="2C2825"/>
                           </a:solidFill>
@@ -10246,16 +10928,16 @@
                           <a:ea typeface="Calibri" pitchFamily="34" charset="-122"/>
                           <a:cs typeface="Calibri" pitchFamily="34" charset="-120"/>
                         </a:rPr>
-                        <a:t>Portland, ME</a:t>
+                        <a:t>San Francisco</a:t>
                       </a:r>
-                      <a:endParaRPr lang="en-US" sz="1100" dirty="0">
+                      <a:endParaRPr lang="en-US" sz="1050" dirty="0">
                         <a:latin typeface="Calibri" charset="0"/>
                         <a:ea typeface="Calibri" charset="0"/>
                         <a:cs typeface="Calibri" charset="0"/>
                       </a:endParaRPr>
                     </a:p>
                   </a:txBody>
-                  <a:tcPr marL="76200" marR="76200" marT="38100" marB="38100" anchor="ctr">
+                  <a:tcPr marL="76200" marR="76200" marT="25400" marB="25400" anchor="ctr">
                     <a:lnL w="9525" cap="flat" cmpd="sng" algn="ctr">
                       <a:solidFill>
                         <a:srgbClr val="E7E3DE"/>
@@ -10306,7 +10988,7 @@
                         <a:buNone/>
                       </a:pPr>
                       <a:r>
-                        <a:rPr lang="en-US" sz="1100" dirty="0">
+                        <a:rPr lang="en-US" sz="1050" dirty="0">
                           <a:solidFill>
                             <a:srgbClr val="5A534C"/>
                           </a:solidFill>
@@ -10316,14 +10998,14 @@
                         </a:rPr>
                         <a:t>Sep '27</a:t>
                       </a:r>
-                      <a:endParaRPr lang="en-US" sz="1100" dirty="0">
+                      <a:endParaRPr lang="en-US" sz="1050" dirty="0">
                         <a:latin typeface="Calibri" charset="0"/>
                         <a:ea typeface="Calibri" charset="0"/>
                         <a:cs typeface="Calibri" charset="0"/>
                       </a:endParaRPr>
                     </a:p>
                   </a:txBody>
-                  <a:tcPr marL="76200" marR="76200" marT="38100" marB="38100" anchor="ctr">
+                  <a:tcPr marL="76200" marR="76200" marT="25400" marB="25400" anchor="ctr">
                     <a:lnL w="9525" cap="flat" cmpd="sng" algn="ctr">
                       <a:solidFill>
                         <a:srgbClr val="E7E3DE"/>
@@ -10374,7 +11056,75 @@
                         <a:buNone/>
                       </a:pPr>
                       <a:r>
-                        <a:rPr lang="en-US" sz="1100" dirty="0">
+                        <a:rPr lang="en-US" sz="1050" dirty="0">
+                          <a:solidFill>
+                            <a:srgbClr val="5A534C"/>
+                          </a:solidFill>
+                          <a:latin typeface="Calibri" pitchFamily="34" charset="0"/>
+                          <a:ea typeface="Calibri" pitchFamily="34" charset="-122"/>
+                          <a:cs typeface="Calibri" pitchFamily="34" charset="-120"/>
+                        </a:rPr>
+                        <a:t>4.6M</a:t>
+                      </a:r>
+                      <a:endParaRPr lang="en-US" sz="1050" dirty="0">
+                        <a:latin typeface="Calibri" charset="0"/>
+                        <a:ea typeface="Calibri" charset="0"/>
+                        <a:cs typeface="Calibri" charset="0"/>
+                      </a:endParaRPr>
+                    </a:p>
+                  </a:txBody>
+                  <a:tcPr marL="76200" marR="76200" marT="25400" marB="25400" anchor="ctr">
+                    <a:lnL w="9525" cap="flat" cmpd="sng" algn="ctr">
+                      <a:solidFill>
+                        <a:srgbClr val="E7E3DE"/>
+                      </a:solidFill>
+                      <a:prstDash val="solid"/>
+                      <a:round/>
+                      <a:headEnd type="none" w="med" len="med"/>
+                      <a:tailEnd type="none" w="med" len="med"/>
+                    </a:lnL>
+                    <a:lnR w="9525" cap="flat" cmpd="sng" algn="ctr">
+                      <a:solidFill>
+                        <a:srgbClr val="E7E3DE"/>
+                      </a:solidFill>
+                      <a:prstDash val="solid"/>
+                      <a:round/>
+                      <a:headEnd type="none" w="med" len="med"/>
+                      <a:tailEnd type="none" w="med" len="med"/>
+                    </a:lnR>
+                    <a:lnT w="9525" cap="flat" cmpd="sng" algn="ctr">
+                      <a:solidFill>
+                        <a:srgbClr val="E7E3DE"/>
+                      </a:solidFill>
+                      <a:prstDash val="solid"/>
+                      <a:round/>
+                      <a:headEnd type="none" w="med" len="med"/>
+                      <a:tailEnd type="none" w="med" len="med"/>
+                    </a:lnT>
+                    <a:lnB w="9525" cap="flat" cmpd="sng" algn="ctr">
+                      <a:solidFill>
+                        <a:srgbClr val="E7E3DE"/>
+                      </a:solidFill>
+                      <a:prstDash val="solid"/>
+                      <a:round/>
+                      <a:headEnd type="none" w="med" len="med"/>
+                      <a:tailEnd type="none" w="med" len="med"/>
+                    </a:lnB>
+                    <a:solidFill>
+                      <a:srgbClr val="FFFFFF"/>
+                    </a:solidFill>
+                  </a:tcPr>
+                </a:tc>
+                <a:tc>
+                  <a:txBody>
+                    <a:bodyPr/>
+                    <a:lstStyle/>
+                    <a:p>
+                      <a:pPr algn="r" indent="0" marL="0">
+                        <a:buNone/>
+                      </a:pPr>
+                      <a:r>
+                        <a:rPr lang="en-US" sz="1050" dirty="0">
                           <a:solidFill>
                             <a:srgbClr val="2C2825"/>
                           </a:solidFill>
@@ -10384,14 +11134,82 @@
                         </a:rPr>
                         <a:t>170</a:t>
                       </a:r>
-                      <a:endParaRPr lang="en-US" sz="1100" dirty="0">
+                      <a:endParaRPr lang="en-US" sz="1050" dirty="0">
                         <a:latin typeface="Calibri" charset="0"/>
                         <a:ea typeface="Calibri" charset="0"/>
                         <a:cs typeface="Calibri" charset="0"/>
                       </a:endParaRPr>
                     </a:p>
                   </a:txBody>
-                  <a:tcPr marL="76200" marR="76200" marT="38100" marB="38100" anchor="ctr">
+                  <a:tcPr marL="76200" marR="76200" marT="25400" marB="25400" anchor="ctr">
+                    <a:lnL w="9525" cap="flat" cmpd="sng" algn="ctr">
+                      <a:solidFill>
+                        <a:srgbClr val="E7E3DE"/>
+                      </a:solidFill>
+                      <a:prstDash val="solid"/>
+                      <a:round/>
+                      <a:headEnd type="none" w="med" len="med"/>
+                      <a:tailEnd type="none" w="med" len="med"/>
+                    </a:lnL>
+                    <a:lnR w="9525" cap="flat" cmpd="sng" algn="ctr">
+                      <a:solidFill>
+                        <a:srgbClr val="E7E3DE"/>
+                      </a:solidFill>
+                      <a:prstDash val="solid"/>
+                      <a:round/>
+                      <a:headEnd type="none" w="med" len="med"/>
+                      <a:tailEnd type="none" w="med" len="med"/>
+                    </a:lnR>
+                    <a:lnT w="9525" cap="flat" cmpd="sng" algn="ctr">
+                      <a:solidFill>
+                        <a:srgbClr val="E7E3DE"/>
+                      </a:solidFill>
+                      <a:prstDash val="solid"/>
+                      <a:round/>
+                      <a:headEnd type="none" w="med" len="med"/>
+                      <a:tailEnd type="none" w="med" len="med"/>
+                    </a:lnT>
+                    <a:lnB w="9525" cap="flat" cmpd="sng" algn="ctr">
+                      <a:solidFill>
+                        <a:srgbClr val="E7E3DE"/>
+                      </a:solidFill>
+                      <a:prstDash val="solid"/>
+                      <a:round/>
+                      <a:headEnd type="none" w="med" len="med"/>
+                      <a:tailEnd type="none" w="med" len="med"/>
+                    </a:lnB>
+                    <a:solidFill>
+                      <a:srgbClr val="FFFFFF"/>
+                    </a:solidFill>
+                  </a:tcPr>
+                </a:tc>
+                <a:tc>
+                  <a:txBody>
+                    <a:bodyPr/>
+                    <a:lstStyle/>
+                    <a:p>
+                      <a:pPr algn="r" indent="0" marL="0">
+                        <a:buNone/>
+                      </a:pPr>
+                      <a:r>
+                        <a:rPr lang="en-US" sz="1050" dirty="0">
+                          <a:solidFill>
+                            <a:srgbClr val="5A534C"/>
+                          </a:solidFill>
+                          <a:latin typeface="Calibri" pitchFamily="34" charset="0"/>
+                          <a:ea typeface="Calibri" pitchFamily="34" charset="-122"/>
+                          <a:cs typeface="Calibri" pitchFamily="34" charset="-120"/>
+                        </a:rPr>
+                        <a:t>27,059</a:t>
+                      </a:r>
+                      <a:endParaRPr lang="en-US" sz="1050" dirty="0">
+                        <a:latin typeface="Calibri" charset="0"/>
+                        <a:ea typeface="Calibri" charset="0"/>
+                        <a:cs typeface="Calibri" charset="0"/>
+                      </a:endParaRPr>
+                    </a:p>
+                  </a:txBody>
+                  <a:tcPr marL="76200" marR="76200" marT="25400" marB="25400" anchor="ctr">
                     <a:lnL w="9525" cap="flat" cmpd="sng" algn="ctr">
                       <a:solidFill>
                         <a:srgbClr val="E7E3DE"/>
@@ -10434,7 +11252,7 @@
                   </a:tcPr>
                 </a:tc>
               </a:tr>
-              <a:tr h="274320">
+              <a:tr h="256032">
                 <a:tc>
                   <a:txBody>
                     <a:bodyPr/>
@@ -10444,7 +11262,7 @@
                         <a:buNone/>
                       </a:pPr>
                       <a:r>
-                        <a:rPr lang="en-US" sz="1100" b="1" dirty="0">
+                        <a:rPr lang="en-US" sz="1050" b="1" dirty="0">
                           <a:solidFill>
                             <a:srgbClr val="2C2825"/>
                           </a:solidFill>
@@ -10454,14 +11272,14 @@
                         </a:rPr>
                         <a:t>Asheville, NC</a:t>
                       </a:r>
-                      <a:endParaRPr lang="en-US" sz="1100" dirty="0">
+                      <a:endParaRPr lang="en-US" sz="1050" dirty="0">
                         <a:latin typeface="Calibri" charset="0"/>
                         <a:ea typeface="Calibri" charset="0"/>
                         <a:cs typeface="Calibri" charset="0"/>
                       </a:endParaRPr>
                     </a:p>
                   </a:txBody>
-                  <a:tcPr marL="76200" marR="76200" marT="38100" marB="38100" anchor="ctr">
+                  <a:tcPr marL="76200" marR="76200" marT="25400" marB="25400" anchor="ctr">
                     <a:lnL w="9525" cap="flat" cmpd="sng" algn="ctr">
                       <a:solidFill>
                         <a:srgbClr val="E7E3DE"/>
@@ -10512,7 +11330,7 @@
                         <a:buNone/>
                       </a:pPr>
                       <a:r>
-                        <a:rPr lang="en-US" sz="1100" dirty="0">
+                        <a:rPr lang="en-US" sz="1050" dirty="0">
                           <a:solidFill>
                             <a:srgbClr val="5A534C"/>
                           </a:solidFill>
@@ -10522,14 +11340,14 @@
                         </a:rPr>
                         <a:t>Oct '27</a:t>
                       </a:r>
-                      <a:endParaRPr lang="en-US" sz="1100" dirty="0">
+                      <a:endParaRPr lang="en-US" sz="1050" dirty="0">
                         <a:latin typeface="Calibri" charset="0"/>
                         <a:ea typeface="Calibri" charset="0"/>
                         <a:cs typeface="Calibri" charset="0"/>
                       </a:endParaRPr>
                     </a:p>
                   </a:txBody>
-                  <a:tcPr marL="76200" marR="76200" marT="38100" marB="38100" anchor="ctr">
+                  <a:tcPr marL="76200" marR="76200" marT="25400" marB="25400" anchor="ctr">
                     <a:lnL w="9525" cap="flat" cmpd="sng" algn="ctr">
                       <a:solidFill>
                         <a:srgbClr val="E7E3DE"/>
@@ -10580,7 +11398,75 @@
                         <a:buNone/>
                       </a:pPr>
                       <a:r>
-                        <a:rPr lang="en-US" sz="1100" dirty="0">
+                        <a:rPr lang="en-US" sz="1050" dirty="0">
+                          <a:solidFill>
+                            <a:srgbClr val="5A534C"/>
+                          </a:solidFill>
+                          <a:latin typeface="Calibri" pitchFamily="34" charset="0"/>
+                          <a:ea typeface="Calibri" pitchFamily="34" charset="-122"/>
+                          <a:cs typeface="Calibri" pitchFamily="34" charset="-120"/>
+                        </a:rPr>
+                        <a:t>0.4M</a:t>
+                      </a:r>
+                      <a:endParaRPr lang="en-US" sz="1050" dirty="0">
+                        <a:latin typeface="Calibri" charset="0"/>
+                        <a:ea typeface="Calibri" charset="0"/>
+                        <a:cs typeface="Calibri" charset="0"/>
+                      </a:endParaRPr>
+                    </a:p>
+                  </a:txBody>
+                  <a:tcPr marL="76200" marR="76200" marT="25400" marB="25400" anchor="ctr">
+                    <a:lnL w="9525" cap="flat" cmpd="sng" algn="ctr">
+                      <a:solidFill>
+                        <a:srgbClr val="E7E3DE"/>
+                      </a:solidFill>
+                      <a:prstDash val="solid"/>
+                      <a:round/>
+                      <a:headEnd type="none" w="med" len="med"/>
+                      <a:tailEnd type="none" w="med" len="med"/>
+                    </a:lnL>
+                    <a:lnR w="9525" cap="flat" cmpd="sng" algn="ctr">
+                      <a:solidFill>
+                        <a:srgbClr val="E7E3DE"/>
+                      </a:solidFill>
+                      <a:prstDash val="solid"/>
+                      <a:round/>
+                      <a:headEnd type="none" w="med" len="med"/>
+                      <a:tailEnd type="none" w="med" len="med"/>
+                    </a:lnR>
+                    <a:lnT w="9525" cap="flat" cmpd="sng" algn="ctr">
+                      <a:solidFill>
+                        <a:srgbClr val="E7E3DE"/>
+                      </a:solidFill>
+                      <a:prstDash val="solid"/>
+                      <a:round/>
+                      <a:headEnd type="none" w="med" len="med"/>
+                      <a:tailEnd type="none" w="med" len="med"/>
+                    </a:lnT>
+                    <a:lnB w="9525" cap="flat" cmpd="sng" algn="ctr">
+                      <a:solidFill>
+                        <a:srgbClr val="E7E3DE"/>
+                      </a:solidFill>
+                      <a:prstDash val="solid"/>
+                      <a:round/>
+                      <a:headEnd type="none" w="med" len="med"/>
+                      <a:tailEnd type="none" w="med" len="med"/>
+                    </a:lnB>
+                    <a:solidFill>
+                      <a:srgbClr val="FFFFFF"/>
+                    </a:solidFill>
+                  </a:tcPr>
+                </a:tc>
+                <a:tc>
+                  <a:txBody>
+                    <a:bodyPr/>
+                    <a:lstStyle/>
+                    <a:p>
+                      <a:pPr algn="r" indent="0" marL="0">
+                        <a:buNone/>
+                      </a:pPr>
+                      <a:r>
+                        <a:rPr lang="en-US" sz="1050" dirty="0">
                           <a:solidFill>
                             <a:srgbClr val="2C2825"/>
                           </a:solidFill>
@@ -10590,14 +11476,82 @@
                         </a:rPr>
                         <a:t>144</a:t>
                       </a:r>
-                      <a:endParaRPr lang="en-US" sz="1100" dirty="0">
+                      <a:endParaRPr lang="en-US" sz="1050" dirty="0">
                         <a:latin typeface="Calibri" charset="0"/>
                         <a:ea typeface="Calibri" charset="0"/>
                         <a:cs typeface="Calibri" charset="0"/>
                       </a:endParaRPr>
                     </a:p>
                   </a:txBody>
-                  <a:tcPr marL="76200" marR="76200" marT="38100" marB="38100" anchor="ctr">
+                  <a:tcPr marL="76200" marR="76200" marT="25400" marB="25400" anchor="ctr">
+                    <a:lnL w="9525" cap="flat" cmpd="sng" algn="ctr">
+                      <a:solidFill>
+                        <a:srgbClr val="E7E3DE"/>
+                      </a:solidFill>
+                      <a:prstDash val="solid"/>
+                      <a:round/>
+                      <a:headEnd type="none" w="med" len="med"/>
+                      <a:tailEnd type="none" w="med" len="med"/>
+                    </a:lnL>
+                    <a:lnR w="9525" cap="flat" cmpd="sng" algn="ctr">
+                      <a:solidFill>
+                        <a:srgbClr val="E7E3DE"/>
+                      </a:solidFill>
+                      <a:prstDash val="solid"/>
+                      <a:round/>
+                      <a:headEnd type="none" w="med" len="med"/>
+                      <a:tailEnd type="none" w="med" len="med"/>
+                    </a:lnR>
+                    <a:lnT w="9525" cap="flat" cmpd="sng" algn="ctr">
+                      <a:solidFill>
+                        <a:srgbClr val="E7E3DE"/>
+                      </a:solidFill>
+                      <a:prstDash val="solid"/>
+                      <a:round/>
+                      <a:headEnd type="none" w="med" len="med"/>
+                      <a:tailEnd type="none" w="med" len="med"/>
+                    </a:lnT>
+                    <a:lnB w="9525" cap="flat" cmpd="sng" algn="ctr">
+                      <a:solidFill>
+                        <a:srgbClr val="E7E3DE"/>
+                      </a:solidFill>
+                      <a:prstDash val="solid"/>
+                      <a:round/>
+                      <a:headEnd type="none" w="med" len="med"/>
+                      <a:tailEnd type="none" w="med" len="med"/>
+                    </a:lnB>
+                    <a:solidFill>
+                      <a:srgbClr val="FFFFFF"/>
+                    </a:solidFill>
+                  </a:tcPr>
+                </a:tc>
+                <a:tc>
+                  <a:txBody>
+                    <a:bodyPr/>
+                    <a:lstStyle/>
+                    <a:p>
+                      <a:pPr algn="r" indent="0" marL="0">
+                        <a:buNone/>
+                      </a:pPr>
+                      <a:r>
+                        <a:rPr lang="en-US" sz="1050" dirty="0">
+                          <a:solidFill>
+                            <a:srgbClr val="5A534C"/>
+                          </a:solidFill>
+                          <a:latin typeface="Calibri" pitchFamily="34" charset="0"/>
+                          <a:ea typeface="Calibri" pitchFamily="34" charset="-122"/>
+                          <a:cs typeface="Calibri" pitchFamily="34" charset="-120"/>
+                        </a:rPr>
+                        <a:t>2,778</a:t>
+                      </a:r>
+                      <a:endParaRPr lang="en-US" sz="1050" dirty="0">
+                        <a:latin typeface="Calibri" charset="0"/>
+                        <a:ea typeface="Calibri" charset="0"/>
+                        <a:cs typeface="Calibri" charset="0"/>
+                      </a:endParaRPr>
+                    </a:p>
+                  </a:txBody>
+                  <a:tcPr marL="76200" marR="76200" marT="25400" marB="25400" anchor="ctr">
                     <a:lnL w="9525" cap="flat" cmpd="sng" algn="ctr">
                       <a:solidFill>
                         <a:srgbClr val="E7E3DE"/>
@@ -10640,7 +11594,7 @@
                   </a:tcPr>
                 </a:tc>
               </a:tr>
-              <a:tr h="274320">
+              <a:tr h="256032">
                 <a:tc>
                   <a:txBody>
                     <a:bodyPr/>
@@ -10650,7 +11604,7 @@
                         <a:buNone/>
                       </a:pPr>
                       <a:r>
-                        <a:rPr lang="en-US" sz="1100" b="1" dirty="0">
+                        <a:rPr lang="en-US" sz="1050" b="1" dirty="0">
                           <a:solidFill>
                             <a:srgbClr val="2C2825"/>
                           </a:solidFill>
@@ -10660,14 +11614,14 @@
                         </a:rPr>
                         <a:t>Los Angeles</a:t>
                       </a:r>
-                      <a:endParaRPr lang="en-US" sz="1100" dirty="0">
+                      <a:endParaRPr lang="en-US" sz="1050" dirty="0">
                         <a:latin typeface="Calibri" charset="0"/>
                         <a:ea typeface="Calibri" charset="0"/>
                         <a:cs typeface="Calibri" charset="0"/>
                       </a:endParaRPr>
                     </a:p>
                   </a:txBody>
-                  <a:tcPr marL="76200" marR="76200" marT="38100" marB="38100" anchor="ctr">
+                  <a:tcPr marL="76200" marR="76200" marT="25400" marB="25400" anchor="ctr">
                     <a:lnL w="9525" cap="flat" cmpd="sng" algn="ctr">
                       <a:solidFill>
                         <a:srgbClr val="E7E3DE"/>
@@ -10718,7 +11672,7 @@
                         <a:buNone/>
                       </a:pPr>
                       <a:r>
-                        <a:rPr lang="en-US" sz="1100" dirty="0">
+                        <a:rPr lang="en-US" sz="1050" dirty="0">
                           <a:solidFill>
                             <a:srgbClr val="5A534C"/>
                           </a:solidFill>
@@ -10728,14 +11682,14 @@
                         </a:rPr>
                         <a:t>Nov '27</a:t>
                       </a:r>
-                      <a:endParaRPr lang="en-US" sz="1100" dirty="0">
+                      <a:endParaRPr lang="en-US" sz="1050" dirty="0">
                         <a:latin typeface="Calibri" charset="0"/>
                         <a:ea typeface="Calibri" charset="0"/>
                         <a:cs typeface="Calibri" charset="0"/>
                       </a:endParaRPr>
                     </a:p>
                   </a:txBody>
-                  <a:tcPr marL="76200" marR="76200" marT="38100" marB="38100" anchor="ctr">
+                  <a:tcPr marL="76200" marR="76200" marT="25400" marB="25400" anchor="ctr">
                     <a:lnL w="9525" cap="flat" cmpd="sng" algn="ctr">
                       <a:solidFill>
                         <a:srgbClr val="E7E3DE"/>
@@ -10786,7 +11740,75 @@
                         <a:buNone/>
                       </a:pPr>
                       <a:r>
-                        <a:rPr lang="en-US" sz="1100" dirty="0">
+                        <a:rPr lang="en-US" sz="1050" dirty="0">
+                          <a:solidFill>
+                            <a:srgbClr val="5A534C"/>
+                          </a:solidFill>
+                          <a:latin typeface="Calibri" pitchFamily="34" charset="0"/>
+                          <a:ea typeface="Calibri" pitchFamily="34" charset="-122"/>
+                          <a:cs typeface="Calibri" pitchFamily="34" charset="-120"/>
+                        </a:rPr>
+                        <a:t>12.9M</a:t>
+                      </a:r>
+                      <a:endParaRPr lang="en-US" sz="1050" dirty="0">
+                        <a:latin typeface="Calibri" charset="0"/>
+                        <a:ea typeface="Calibri" charset="0"/>
+                        <a:cs typeface="Calibri" charset="0"/>
+                      </a:endParaRPr>
+                    </a:p>
+                  </a:txBody>
+                  <a:tcPr marL="76200" marR="76200" marT="25400" marB="25400" anchor="ctr">
+                    <a:lnL w="9525" cap="flat" cmpd="sng" algn="ctr">
+                      <a:solidFill>
+                        <a:srgbClr val="E7E3DE"/>
+                      </a:solidFill>
+                      <a:prstDash val="solid"/>
+                      <a:round/>
+                      <a:headEnd type="none" w="med" len="med"/>
+                      <a:tailEnd type="none" w="med" len="med"/>
+                    </a:lnL>
+                    <a:lnR w="9525" cap="flat" cmpd="sng" algn="ctr">
+                      <a:solidFill>
+                        <a:srgbClr val="E7E3DE"/>
+                      </a:solidFill>
+                      <a:prstDash val="solid"/>
+                      <a:round/>
+                      <a:headEnd type="none" w="med" len="med"/>
+                      <a:tailEnd type="none" w="med" len="med"/>
+                    </a:lnR>
+                    <a:lnT w="9525" cap="flat" cmpd="sng" algn="ctr">
+                      <a:solidFill>
+                        <a:srgbClr val="E7E3DE"/>
+                      </a:solidFill>
+                      <a:prstDash val="solid"/>
+                      <a:round/>
+                      <a:headEnd type="none" w="med" len="med"/>
+                      <a:tailEnd type="none" w="med" len="med"/>
+                    </a:lnT>
+                    <a:lnB w="9525" cap="flat" cmpd="sng" algn="ctr">
+                      <a:solidFill>
+                        <a:srgbClr val="E7E3DE"/>
+                      </a:solidFill>
+                      <a:prstDash val="solid"/>
+                      <a:round/>
+                      <a:headEnd type="none" w="med" len="med"/>
+                      <a:tailEnd type="none" w="med" len="med"/>
+                    </a:lnB>
+                    <a:solidFill>
+                      <a:srgbClr val="FFFFFF"/>
+                    </a:solidFill>
+                  </a:tcPr>
+                </a:tc>
+                <a:tc>
+                  <a:txBody>
+                    <a:bodyPr/>
+                    <a:lstStyle/>
+                    <a:p>
+                      <a:pPr algn="r" indent="0" marL="0">
+                        <a:buNone/>
+                      </a:pPr>
+                      <a:r>
+                        <a:rPr lang="en-US" sz="1050" dirty="0">
                           <a:solidFill>
                             <a:srgbClr val="2C2825"/>
                           </a:solidFill>
@@ -10794,16 +11816,84 @@
                           <a:ea typeface="Calibri" pitchFamily="34" charset="-122"/>
                           <a:cs typeface="Calibri" pitchFamily="34" charset="-120"/>
                         </a:rPr>
-                        <a:t>—</a:t>
+                        <a:t>334</a:t>
                       </a:r>
-                      <a:endParaRPr lang="en-US" sz="1100" dirty="0">
+                      <a:endParaRPr lang="en-US" sz="1050" dirty="0">
                         <a:latin typeface="Calibri" charset="0"/>
                         <a:ea typeface="Calibri" charset="0"/>
                         <a:cs typeface="Calibri" charset="0"/>
                       </a:endParaRPr>
                     </a:p>
                   </a:txBody>
-                  <a:tcPr marL="76200" marR="76200" marT="38100" marB="38100" anchor="ctr">
+                  <a:tcPr marL="76200" marR="76200" marT="25400" marB="25400" anchor="ctr">
+                    <a:lnL w="9525" cap="flat" cmpd="sng" algn="ctr">
+                      <a:solidFill>
+                        <a:srgbClr val="E7E3DE"/>
+                      </a:solidFill>
+                      <a:prstDash val="solid"/>
+                      <a:round/>
+                      <a:headEnd type="none" w="med" len="med"/>
+                      <a:tailEnd type="none" w="med" len="med"/>
+                    </a:lnL>
+                    <a:lnR w="9525" cap="flat" cmpd="sng" algn="ctr">
+                      <a:solidFill>
+                        <a:srgbClr val="E7E3DE"/>
+                      </a:solidFill>
+                      <a:prstDash val="solid"/>
+                      <a:round/>
+                      <a:headEnd type="none" w="med" len="med"/>
+                      <a:tailEnd type="none" w="med" len="med"/>
+                    </a:lnR>
+                    <a:lnT w="9525" cap="flat" cmpd="sng" algn="ctr">
+                      <a:solidFill>
+                        <a:srgbClr val="E7E3DE"/>
+                      </a:solidFill>
+                      <a:prstDash val="solid"/>
+                      <a:round/>
+                      <a:headEnd type="none" w="med" len="med"/>
+                      <a:tailEnd type="none" w="med" len="med"/>
+                    </a:lnT>
+                    <a:lnB w="9525" cap="flat" cmpd="sng" algn="ctr">
+                      <a:solidFill>
+                        <a:srgbClr val="E7E3DE"/>
+                      </a:solidFill>
+                      <a:prstDash val="solid"/>
+                      <a:round/>
+                      <a:headEnd type="none" w="med" len="med"/>
+                      <a:tailEnd type="none" w="med" len="med"/>
+                    </a:lnB>
+                    <a:solidFill>
+                      <a:srgbClr val="FFFFFF"/>
+                    </a:solidFill>
+                  </a:tcPr>
+                </a:tc>
+                <a:tc>
+                  <a:txBody>
+                    <a:bodyPr/>
+                    <a:lstStyle/>
+                    <a:p>
+                      <a:pPr algn="r" indent="0" marL="0">
+                        <a:buNone/>
+                      </a:pPr>
+                      <a:r>
+                        <a:rPr lang="en-US" sz="1050" dirty="0">
+                          <a:solidFill>
+                            <a:srgbClr val="5A534C"/>
+                          </a:solidFill>
+                          <a:latin typeface="Calibri" pitchFamily="34" charset="0"/>
+                          <a:ea typeface="Calibri" pitchFamily="34" charset="-122"/>
+                          <a:cs typeface="Calibri" pitchFamily="34" charset="-120"/>
+                        </a:rPr>
+                        <a:t>38,623</a:t>
+                      </a:r>
+                      <a:endParaRPr lang="en-US" sz="1050" dirty="0">
+                        <a:latin typeface="Calibri" charset="0"/>
+                        <a:ea typeface="Calibri" charset="0"/>
+                        <a:cs typeface="Calibri" charset="0"/>
+                      </a:endParaRPr>
+                    </a:p>
+                  </a:txBody>
+                  <a:tcPr marL="76200" marR="76200" marT="25400" marB="25400" anchor="ctr">
                     <a:lnL w="9525" cap="flat" cmpd="sng" algn="ctr">
                       <a:solidFill>
                         <a:srgbClr val="E7E3DE"/>
@@ -10846,7 +11936,7 @@
                   </a:tcPr>
                 </a:tc>
               </a:tr>
-              <a:tr h="274320">
+              <a:tr h="256032">
                 <a:tc>
                   <a:txBody>
                     <a:bodyPr/>
@@ -10856,7 +11946,7 @@
                         <a:buNone/>
                       </a:pPr>
                       <a:r>
-                        <a:rPr lang="en-US" sz="1100" b="1" dirty="0">
+                        <a:rPr lang="en-US" sz="1050" b="1" dirty="0">
                           <a:solidFill>
                             <a:srgbClr val="2C2825"/>
                           </a:solidFill>
@@ -10866,14 +11956,14 @@
                         </a:rPr>
                         <a:t>Shipped goods</a:t>
                       </a:r>
-                      <a:endParaRPr lang="en-US" sz="1100" dirty="0">
+                      <a:endParaRPr lang="en-US" sz="1050" dirty="0">
                         <a:latin typeface="Calibri" charset="0"/>
                         <a:ea typeface="Calibri" charset="0"/>
                         <a:cs typeface="Calibri" charset="0"/>
                       </a:endParaRPr>
                     </a:p>
                   </a:txBody>
-                  <a:tcPr marL="76200" marR="76200" marT="38100" marB="38100" anchor="ctr">
+                  <a:tcPr marL="76200" marR="76200" marT="25400" marB="25400" anchor="ctr">
                     <a:lnL w="9525" cap="flat" cmpd="sng" algn="ctr">
                       <a:solidFill>
                         <a:srgbClr val="E7E3DE"/>
@@ -10924,7 +12014,7 @@
                         <a:buNone/>
                       </a:pPr>
                       <a:r>
-                        <a:rPr lang="en-US" sz="1100" dirty="0">
+                        <a:rPr lang="en-US" sz="1050" dirty="0">
                           <a:solidFill>
                             <a:srgbClr val="5A534C"/>
                           </a:solidFill>
@@ -10934,14 +12024,14 @@
                         </a:rPr>
                         <a:t>Dec '26</a:t>
                       </a:r>
-                      <a:endParaRPr lang="en-US" sz="1100" dirty="0">
+                      <a:endParaRPr lang="en-US" sz="1050" dirty="0">
                         <a:latin typeface="Calibri" charset="0"/>
                         <a:ea typeface="Calibri" charset="0"/>
                         <a:cs typeface="Calibri" charset="0"/>
                       </a:endParaRPr>
                     </a:p>
                   </a:txBody>
-                  <a:tcPr marL="76200" marR="76200" marT="38100" marB="38100" anchor="ctr">
+                  <a:tcPr marL="76200" marR="76200" marT="25400" marB="25400" anchor="ctr">
                     <a:lnL w="9525" cap="flat" cmpd="sng" algn="ctr">
                       <a:solidFill>
                         <a:srgbClr val="E7E3DE"/>
@@ -10992,151 +12082,24 @@
                         <a:buNone/>
                       </a:pPr>
                       <a:r>
-                        <a:rPr lang="en-US" sz="1100" dirty="0">
+                        <a:rPr lang="en-US" sz="1050" dirty="0">
                           <a:solidFill>
-                            <a:srgbClr val="2C2825"/>
+                            <a:srgbClr val="5A534C"/>
                           </a:solidFill>
                           <a:latin typeface="Calibri" pitchFamily="34" charset="0"/>
                           <a:ea typeface="Calibri" pitchFamily="34" charset="-122"/>
                           <a:cs typeface="Calibri" pitchFamily="34" charset="-120"/>
                         </a:rPr>
-                        <a:t>—</a:t>
+                        <a:t>Nationwide</a:t>
                       </a:r>
-                      <a:endParaRPr lang="en-US" sz="1100" dirty="0">
+                      <a:endParaRPr lang="en-US" sz="1050" dirty="0">
                         <a:latin typeface="Calibri" charset="0"/>
                         <a:ea typeface="Calibri" charset="0"/>
                         <a:cs typeface="Calibri" charset="0"/>
                       </a:endParaRPr>
                     </a:p>
                   </a:txBody>
-                  <a:tcPr marL="76200" marR="76200" marT="38100" marB="38100" anchor="ctr">
-                    <a:lnL w="9525" cap="flat" cmpd="sng" algn="ctr">
-                      <a:solidFill>
-                        <a:srgbClr val="E7E3DE"/>
-                      </a:solidFill>
-                      <a:prstDash val="solid"/>
-                      <a:round/>
-                      <a:headEnd type="none" w="med" len="med"/>
-                      <a:tailEnd type="none" w="med" len="med"/>
-                    </a:lnL>
-                    <a:lnR w="9525" cap="flat" cmpd="sng" algn="ctr">
-                      <a:solidFill>
-                        <a:srgbClr val="E7E3DE"/>
-                      </a:solidFill>
-                      <a:prstDash val="solid"/>
-                      <a:round/>
-                      <a:headEnd type="none" w="med" len="med"/>
-                      <a:tailEnd type="none" w="med" len="med"/>
-                    </a:lnR>
-                    <a:lnT w="9525" cap="flat" cmpd="sng" algn="ctr">
-                      <a:solidFill>
-                        <a:srgbClr val="E7E3DE"/>
-                      </a:solidFill>
-                      <a:prstDash val="solid"/>
-                      <a:round/>
-                      <a:headEnd type="none" w="med" len="med"/>
-                      <a:tailEnd type="none" w="med" len="med"/>
-                    </a:lnT>
-                    <a:lnB w="9525" cap="flat" cmpd="sng" algn="ctr">
-                      <a:solidFill>
-                        <a:srgbClr val="E7E3DE"/>
-                      </a:solidFill>
-                      <a:prstDash val="solid"/>
-                      <a:round/>
-                      <a:headEnd type="none" w="med" len="med"/>
-                      <a:tailEnd type="none" w="med" len="med"/>
-                    </a:lnB>
-                    <a:solidFill>
-                      <a:srgbClr val="FFFFFF"/>
-                    </a:solidFill>
-                  </a:tcPr>
-                </a:tc>
-              </a:tr>
-              <a:tr h="274320">
-                <a:tc>
-                  <a:txBody>
-                    <a:bodyPr/>
-                    <a:lstStyle/>
-                    <a:p>
-                      <a:pPr indent="0" marL="0">
-                        <a:buNone/>
-                      </a:pPr>
-                      <a:r>
-                        <a:rPr lang="en-US" sz="1100" b="1" dirty="0">
-                          <a:solidFill>
-                            <a:srgbClr val="2C2825"/>
-                          </a:solidFill>
-                          <a:latin typeface="Calibri" pitchFamily="34" charset="0"/>
-                          <a:ea typeface="Calibri" pitchFamily="34" charset="-122"/>
-                          <a:cs typeface="Calibri" pitchFamily="34" charset="-120"/>
-                        </a:rPr>
-                        <a:t>Six metros</a:t>
-                      </a:r>
-                      <a:endParaRPr lang="en-US" sz="1100" dirty="0">
-                        <a:latin typeface="Calibri" charset="0"/>
-                        <a:ea typeface="Calibri" charset="0"/>
-                        <a:cs typeface="Calibri" charset="0"/>
-                      </a:endParaRPr>
-                    </a:p>
-                  </a:txBody>
-                  <a:tcPr marL="76200" marR="76200" marT="38100" marB="38100" anchor="ctr">
-                    <a:lnL w="9525" cap="flat" cmpd="sng" algn="ctr">
-                      <a:solidFill>
-                        <a:srgbClr val="E7E3DE"/>
-                      </a:solidFill>
-                      <a:prstDash val="solid"/>
-                      <a:round/>
-                      <a:headEnd type="none" w="med" len="med"/>
-                      <a:tailEnd type="none" w="med" len="med"/>
-                    </a:lnL>
-                    <a:lnR w="9525" cap="flat" cmpd="sng" algn="ctr">
-                      <a:solidFill>
-                        <a:srgbClr val="E7E3DE"/>
-                      </a:solidFill>
-                      <a:prstDash val="solid"/>
-                      <a:round/>
-                      <a:headEnd type="none" w="med" len="med"/>
-                      <a:tailEnd type="none" w="med" len="med"/>
-                    </a:lnR>
-                    <a:lnT w="9525" cap="flat" cmpd="sng" algn="ctr">
-                      <a:solidFill>
-                        <a:srgbClr val="E7E3DE"/>
-                      </a:solidFill>
-                      <a:prstDash val="solid"/>
-                      <a:round/>
-                      <a:headEnd type="none" w="med" len="med"/>
-                      <a:tailEnd type="none" w="med" len="med"/>
-                    </a:lnT>
-                    <a:lnB w="9525" cap="flat" cmpd="sng" algn="ctr">
-                      <a:solidFill>
-                        <a:srgbClr val="E7E3DE"/>
-                      </a:solidFill>
-                      <a:prstDash val="solid"/>
-                      <a:round/>
-                      <a:headEnd type="none" w="med" len="med"/>
-                      <a:tailEnd type="none" w="med" len="med"/>
-                    </a:lnB>
-                    <a:solidFill>
-                      <a:srgbClr val="FFFFFF"/>
-                    </a:solidFill>
-                  </a:tcPr>
-                </a:tc>
-                <a:tc>
-                  <a:txBody>
-                    <a:bodyPr/>
-                    <a:lstStyle/>
-                    <a:p>
-                      <a:pPr indent="0" marL="0">
-                        <a:buNone/>
-                      </a:pPr>
-                      <a:endParaRPr lang="en-US" sz="1100" dirty="0">
-                        <a:latin typeface="Calibri" charset="0"/>
-                        <a:ea typeface="Calibri" charset="0"/>
-                        <a:cs typeface="Calibri" charset="0"/>
-                      </a:endParaRPr>
-                    </a:p>
-                  </a:txBody>
-                  <a:tcPr marL="76200" marR="76200" marT="38100" marB="38100" anchor="ctr">
+                  <a:tcPr marL="76200" marR="76200" marT="25400" marB="25400" anchor="ctr">
                     <a:lnL w="9525" cap="flat" cmpd="sng" algn="ctr">
                       <a:solidFill>
                         <a:srgbClr val="E7E3DE"/>
@@ -11187,7 +12150,7 @@
                         <a:buNone/>
                       </a:pPr>
                       <a:r>
-                        <a:rPr lang="en-US" sz="1100" b="1" dirty="0">
+                        <a:rPr lang="en-US" sz="1050" dirty="0">
                           <a:solidFill>
                             <a:srgbClr val="2C2825"/>
                           </a:solidFill>
@@ -11195,16 +12158,393 @@
                           <a:ea typeface="Calibri" pitchFamily="34" charset="-122"/>
                           <a:cs typeface="Calibri" pitchFamily="34" charset="-120"/>
                         </a:rPr>
-                        <a:t>1,145</a:t>
+                        <a:t>472</a:t>
                       </a:r>
-                      <a:endParaRPr lang="en-US" sz="1100" dirty="0">
+                      <a:endParaRPr lang="en-US" sz="1050" dirty="0">
                         <a:latin typeface="Calibri" charset="0"/>
                         <a:ea typeface="Calibri" charset="0"/>
                         <a:cs typeface="Calibri" charset="0"/>
                       </a:endParaRPr>
                     </a:p>
                   </a:txBody>
-                  <a:tcPr marL="76200" marR="76200" marT="38100" marB="38100" anchor="ctr">
+                  <a:tcPr marL="76200" marR="76200" marT="25400" marB="25400" anchor="ctr">
+                    <a:lnL w="9525" cap="flat" cmpd="sng" algn="ctr">
+                      <a:solidFill>
+                        <a:srgbClr val="E7E3DE"/>
+                      </a:solidFill>
+                      <a:prstDash val="solid"/>
+                      <a:round/>
+                      <a:headEnd type="none" w="med" len="med"/>
+                      <a:tailEnd type="none" w="med" len="med"/>
+                    </a:lnL>
+                    <a:lnR w="9525" cap="flat" cmpd="sng" algn="ctr">
+                      <a:solidFill>
+                        <a:srgbClr val="E7E3DE"/>
+                      </a:solidFill>
+                      <a:prstDash val="solid"/>
+                      <a:round/>
+                      <a:headEnd type="none" w="med" len="med"/>
+                      <a:tailEnd type="none" w="med" len="med"/>
+                    </a:lnR>
+                    <a:lnT w="9525" cap="flat" cmpd="sng" algn="ctr">
+                      <a:solidFill>
+                        <a:srgbClr val="E7E3DE"/>
+                      </a:solidFill>
+                      <a:prstDash val="solid"/>
+                      <a:round/>
+                      <a:headEnd type="none" w="med" len="med"/>
+                      <a:tailEnd type="none" w="med" len="med"/>
+                    </a:lnT>
+                    <a:lnB w="9525" cap="flat" cmpd="sng" algn="ctr">
+                      <a:solidFill>
+                        <a:srgbClr val="E7E3DE"/>
+                      </a:solidFill>
+                      <a:prstDash val="solid"/>
+                      <a:round/>
+                      <a:headEnd type="none" w="med" len="med"/>
+                      <a:tailEnd type="none" w="med" len="med"/>
+                    </a:lnB>
+                    <a:solidFill>
+                      <a:srgbClr val="FFFFFF"/>
+                    </a:solidFill>
+                  </a:tcPr>
+                </a:tc>
+                <a:tc>
+                  <a:txBody>
+                    <a:bodyPr/>
+                    <a:lstStyle/>
+                    <a:p>
+                      <a:pPr algn="r" indent="0" marL="0">
+                        <a:buNone/>
+                      </a:pPr>
+                      <a:r>
+                        <a:rPr lang="en-US" sz="1050" dirty="0">
+                          <a:solidFill>
+                            <a:srgbClr val="5A534C"/>
+                          </a:solidFill>
+                          <a:latin typeface="Calibri" pitchFamily="34" charset="0"/>
+                          <a:ea typeface="Calibri" pitchFamily="34" charset="-122"/>
+                          <a:cs typeface="Calibri" pitchFamily="34" charset="-120"/>
+                        </a:rPr>
+                        <a:t>—</a:t>
+                      </a:r>
+                      <a:endParaRPr lang="en-US" sz="1050" dirty="0">
+                        <a:latin typeface="Calibri" charset="0"/>
+                        <a:ea typeface="Calibri" charset="0"/>
+                        <a:cs typeface="Calibri" charset="0"/>
+                      </a:endParaRPr>
+                    </a:p>
+                  </a:txBody>
+                  <a:tcPr marL="76200" marR="76200" marT="25400" marB="25400" anchor="ctr">
+                    <a:lnL w="9525" cap="flat" cmpd="sng" algn="ctr">
+                      <a:solidFill>
+                        <a:srgbClr val="E7E3DE"/>
+                      </a:solidFill>
+                      <a:prstDash val="solid"/>
+                      <a:round/>
+                      <a:headEnd type="none" w="med" len="med"/>
+                      <a:tailEnd type="none" w="med" len="med"/>
+                    </a:lnL>
+                    <a:lnR w="9525" cap="flat" cmpd="sng" algn="ctr">
+                      <a:solidFill>
+                        <a:srgbClr val="E7E3DE"/>
+                      </a:solidFill>
+                      <a:prstDash val="solid"/>
+                      <a:round/>
+                      <a:headEnd type="none" w="med" len="med"/>
+                      <a:tailEnd type="none" w="med" len="med"/>
+                    </a:lnR>
+                    <a:lnT w="9525" cap="flat" cmpd="sng" algn="ctr">
+                      <a:solidFill>
+                        <a:srgbClr val="E7E3DE"/>
+                      </a:solidFill>
+                      <a:prstDash val="solid"/>
+                      <a:round/>
+                      <a:headEnd type="none" w="med" len="med"/>
+                      <a:tailEnd type="none" w="med" len="med"/>
+                    </a:lnT>
+                    <a:lnB w="9525" cap="flat" cmpd="sng" algn="ctr">
+                      <a:solidFill>
+                        <a:srgbClr val="E7E3DE"/>
+                      </a:solidFill>
+                      <a:prstDash val="solid"/>
+                      <a:round/>
+                      <a:headEnd type="none" w="med" len="med"/>
+                      <a:tailEnd type="none" w="med" len="med"/>
+                    </a:lnB>
+                    <a:solidFill>
+                      <a:srgbClr val="FFFFFF"/>
+                    </a:solidFill>
+                  </a:tcPr>
+                </a:tc>
+              </a:tr>
+              <a:tr h="256032">
+                <a:tc>
+                  <a:txBody>
+                    <a:bodyPr/>
+                    <a:lstStyle/>
+                    <a:p>
+                      <a:pPr indent="0" marL="0">
+                        <a:buNone/>
+                      </a:pPr>
+                      <a:r>
+                        <a:rPr lang="en-US" sz="1050" b="1" dirty="0">
+                          <a:solidFill>
+                            <a:srgbClr val="2C2825"/>
+                          </a:solidFill>
+                          <a:latin typeface="Calibri" pitchFamily="34" charset="0"/>
+                          <a:ea typeface="Calibri" pitchFamily="34" charset="-122"/>
+                          <a:cs typeface="Calibri" pitchFamily="34" charset="-120"/>
+                        </a:rPr>
+                        <a:t>Seven metros</a:t>
+                      </a:r>
+                      <a:endParaRPr lang="en-US" sz="1050" dirty="0">
+                        <a:latin typeface="Calibri" charset="0"/>
+                        <a:ea typeface="Calibri" charset="0"/>
+                        <a:cs typeface="Calibri" charset="0"/>
+                      </a:endParaRPr>
+                    </a:p>
+                  </a:txBody>
+                  <a:tcPr marL="76200" marR="76200" marT="25400" marB="25400" anchor="ctr">
+                    <a:lnL w="9525" cap="flat" cmpd="sng" algn="ctr">
+                      <a:solidFill>
+                        <a:srgbClr val="E7E3DE"/>
+                      </a:solidFill>
+                      <a:prstDash val="solid"/>
+                      <a:round/>
+                      <a:headEnd type="none" w="med" len="med"/>
+                      <a:tailEnd type="none" w="med" len="med"/>
+                    </a:lnL>
+                    <a:lnR w="9525" cap="flat" cmpd="sng" algn="ctr">
+                      <a:solidFill>
+                        <a:srgbClr val="E7E3DE"/>
+                      </a:solidFill>
+                      <a:prstDash val="solid"/>
+                      <a:round/>
+                      <a:headEnd type="none" w="med" len="med"/>
+                      <a:tailEnd type="none" w="med" len="med"/>
+                    </a:lnR>
+                    <a:lnT w="9525" cap="flat" cmpd="sng" algn="ctr">
+                      <a:solidFill>
+                        <a:srgbClr val="E7E3DE"/>
+                      </a:solidFill>
+                      <a:prstDash val="solid"/>
+                      <a:round/>
+                      <a:headEnd type="none" w="med" len="med"/>
+                      <a:tailEnd type="none" w="med" len="med"/>
+                    </a:lnT>
+                    <a:lnB w="9525" cap="flat" cmpd="sng" algn="ctr">
+                      <a:solidFill>
+                        <a:srgbClr val="E7E3DE"/>
+                      </a:solidFill>
+                      <a:prstDash val="solid"/>
+                      <a:round/>
+                      <a:headEnd type="none" w="med" len="med"/>
+                      <a:tailEnd type="none" w="med" len="med"/>
+                    </a:lnB>
+                    <a:solidFill>
+                      <a:srgbClr val="FFFFFF"/>
+                    </a:solidFill>
+                  </a:tcPr>
+                </a:tc>
+                <a:tc>
+                  <a:txBody>
+                    <a:bodyPr/>
+                    <a:lstStyle/>
+                    <a:p>
+                      <a:pPr indent="0" marL="0">
+                        <a:buNone/>
+                      </a:pPr>
+                      <a:endParaRPr lang="en-US" sz="1050" dirty="0">
+                        <a:latin typeface="Calibri" charset="0"/>
+                        <a:ea typeface="Calibri" charset="0"/>
+                        <a:cs typeface="Calibri" charset="0"/>
+                      </a:endParaRPr>
+                    </a:p>
+                  </a:txBody>
+                  <a:tcPr marL="76200" marR="76200" marT="25400" marB="25400" anchor="ctr">
+                    <a:lnL w="9525" cap="flat" cmpd="sng" algn="ctr">
+                      <a:solidFill>
+                        <a:srgbClr val="E7E3DE"/>
+                      </a:solidFill>
+                      <a:prstDash val="solid"/>
+                      <a:round/>
+                      <a:headEnd type="none" w="med" len="med"/>
+                      <a:tailEnd type="none" w="med" len="med"/>
+                    </a:lnL>
+                    <a:lnR w="9525" cap="flat" cmpd="sng" algn="ctr">
+                      <a:solidFill>
+                        <a:srgbClr val="E7E3DE"/>
+                      </a:solidFill>
+                      <a:prstDash val="solid"/>
+                      <a:round/>
+                      <a:headEnd type="none" w="med" len="med"/>
+                      <a:tailEnd type="none" w="med" len="med"/>
+                    </a:lnR>
+                    <a:lnT w="9525" cap="flat" cmpd="sng" algn="ctr">
+                      <a:solidFill>
+                        <a:srgbClr val="E7E3DE"/>
+                      </a:solidFill>
+                      <a:prstDash val="solid"/>
+                      <a:round/>
+                      <a:headEnd type="none" w="med" len="med"/>
+                      <a:tailEnd type="none" w="med" len="med"/>
+                    </a:lnT>
+                    <a:lnB w="9525" cap="flat" cmpd="sng" algn="ctr">
+                      <a:solidFill>
+                        <a:srgbClr val="E7E3DE"/>
+                      </a:solidFill>
+                      <a:prstDash val="solid"/>
+                      <a:round/>
+                      <a:headEnd type="none" w="med" len="med"/>
+                      <a:tailEnd type="none" w="med" len="med"/>
+                    </a:lnB>
+                    <a:solidFill>
+                      <a:srgbClr val="FFFFFF"/>
+                    </a:solidFill>
+                  </a:tcPr>
+                </a:tc>
+                <a:tc>
+                  <a:txBody>
+                    <a:bodyPr/>
+                    <a:lstStyle/>
+                    <a:p>
+                      <a:pPr indent="0" marL="0">
+                        <a:buNone/>
+                      </a:pPr>
+                      <a:endParaRPr lang="en-US" sz="1050" dirty="0">
+                        <a:latin typeface="Calibri" charset="0"/>
+                        <a:ea typeface="Calibri" charset="0"/>
+                        <a:cs typeface="Calibri" charset="0"/>
+                      </a:endParaRPr>
+                    </a:p>
+                  </a:txBody>
+                  <a:tcPr marL="76200" marR="76200" marT="25400" marB="25400" anchor="ctr">
+                    <a:lnL w="9525" cap="flat" cmpd="sng" algn="ctr">
+                      <a:solidFill>
+                        <a:srgbClr val="E7E3DE"/>
+                      </a:solidFill>
+                      <a:prstDash val="solid"/>
+                      <a:round/>
+                      <a:headEnd type="none" w="med" len="med"/>
+                      <a:tailEnd type="none" w="med" len="med"/>
+                    </a:lnL>
+                    <a:lnR w="9525" cap="flat" cmpd="sng" algn="ctr">
+                      <a:solidFill>
+                        <a:srgbClr val="E7E3DE"/>
+                      </a:solidFill>
+                      <a:prstDash val="solid"/>
+                      <a:round/>
+                      <a:headEnd type="none" w="med" len="med"/>
+                      <a:tailEnd type="none" w="med" len="med"/>
+                    </a:lnR>
+                    <a:lnT w="9525" cap="flat" cmpd="sng" algn="ctr">
+                      <a:solidFill>
+                        <a:srgbClr val="E7E3DE"/>
+                      </a:solidFill>
+                      <a:prstDash val="solid"/>
+                      <a:round/>
+                      <a:headEnd type="none" w="med" len="med"/>
+                      <a:tailEnd type="none" w="med" len="med"/>
+                    </a:lnT>
+                    <a:lnB w="9525" cap="flat" cmpd="sng" algn="ctr">
+                      <a:solidFill>
+                        <a:srgbClr val="E7E3DE"/>
+                      </a:solidFill>
+                      <a:prstDash val="solid"/>
+                      <a:round/>
+                      <a:headEnd type="none" w="med" len="med"/>
+                      <a:tailEnd type="none" w="med" len="med"/>
+                    </a:lnB>
+                    <a:solidFill>
+                      <a:srgbClr val="FFFFFF"/>
+                    </a:solidFill>
+                  </a:tcPr>
+                </a:tc>
+                <a:tc>
+                  <a:txBody>
+                    <a:bodyPr/>
+                    <a:lstStyle/>
+                    <a:p>
+                      <a:pPr algn="r" indent="0" marL="0">
+                        <a:buNone/>
+                      </a:pPr>
+                      <a:r>
+                        <a:rPr lang="en-US" sz="1050" b="1" dirty="0">
+                          <a:solidFill>
+                            <a:srgbClr val="2C2825"/>
+                          </a:solidFill>
+                          <a:latin typeface="Calibri" pitchFamily="34" charset="0"/>
+                          <a:ea typeface="Calibri" pitchFamily="34" charset="-122"/>
+                          <a:cs typeface="Calibri" pitchFamily="34" charset="-120"/>
+                        </a:rPr>
+                        <a:t>1,478</a:t>
+                      </a:r>
+                      <a:endParaRPr lang="en-US" sz="1050" dirty="0">
+                        <a:latin typeface="Calibri" charset="0"/>
+                        <a:ea typeface="Calibri" charset="0"/>
+                        <a:cs typeface="Calibri" charset="0"/>
+                      </a:endParaRPr>
+                    </a:p>
+                  </a:txBody>
+                  <a:tcPr marL="76200" marR="76200" marT="25400" marB="25400" anchor="ctr">
+                    <a:lnL w="9525" cap="flat" cmpd="sng" algn="ctr">
+                      <a:solidFill>
+                        <a:srgbClr val="E7E3DE"/>
+                      </a:solidFill>
+                      <a:prstDash val="solid"/>
+                      <a:round/>
+                      <a:headEnd type="none" w="med" len="med"/>
+                      <a:tailEnd type="none" w="med" len="med"/>
+                    </a:lnL>
+                    <a:lnR w="9525" cap="flat" cmpd="sng" algn="ctr">
+                      <a:solidFill>
+                        <a:srgbClr val="E7E3DE"/>
+                      </a:solidFill>
+                      <a:prstDash val="solid"/>
+                      <a:round/>
+                      <a:headEnd type="none" w="med" len="med"/>
+                      <a:tailEnd type="none" w="med" len="med"/>
+                    </a:lnR>
+                    <a:lnT w="9525" cap="flat" cmpd="sng" algn="ctr">
+                      <a:solidFill>
+                        <a:srgbClr val="E7E3DE"/>
+                      </a:solidFill>
+                      <a:prstDash val="solid"/>
+                      <a:round/>
+                      <a:headEnd type="none" w="med" len="med"/>
+                      <a:tailEnd type="none" w="med" len="med"/>
+                    </a:lnT>
+                    <a:lnB w="9525" cap="flat" cmpd="sng" algn="ctr">
+                      <a:solidFill>
+                        <a:srgbClr val="E7E3DE"/>
+                      </a:solidFill>
+                      <a:prstDash val="solid"/>
+                      <a:round/>
+                      <a:headEnd type="none" w="med" len="med"/>
+                      <a:tailEnd type="none" w="med" len="med"/>
+                    </a:lnB>
+                    <a:solidFill>
+                      <a:srgbClr val="FFFFFF"/>
+                    </a:solidFill>
+                  </a:tcPr>
+                </a:tc>
+                <a:tc>
+                  <a:txBody>
+                    <a:bodyPr/>
+                    <a:lstStyle/>
+                    <a:p>
+                      <a:pPr indent="0" marL="0">
+                        <a:buNone/>
+                      </a:pPr>
+                      <a:endParaRPr lang="en-US" sz="1050" dirty="0">
+                        <a:latin typeface="Calibri" charset="0"/>
+                        <a:ea typeface="Calibri" charset="0"/>
+                        <a:cs typeface="Calibri" charset="0"/>
+                      </a:endParaRPr>
+                    </a:p>
+                  </a:txBody>
+                  <a:tcPr marL="76200" marR="76200" marT="25400" marB="25400" anchor="ctr">
                     <a:lnL w="9525" cap="flat" cmpd="sng" algn="ctr">
                       <a:solidFill>
                         <a:srgbClr val="E7E3DE"/>
@@ -11593,45 +12933,6 @@
               <a:t>One price step in year three, once the marketplace has depth across seven metros.</a:t>
             </a:r>
             <a:endParaRPr lang="en-US" sz="1050" dirty="0"/>
-          </a:p>
-        </p:txBody>
-      </p:sp>
-      <p:sp>
-        <p:nvSpPr>
-          <p:cNvPr id="18" name="Text 14"/>
-          <p:cNvSpPr txBox="1"/>
-          <p:nvPr/>
-        </p:nvSpPr>
-        <p:spPr>
-          <a:xfrm>
-            <a:off x="685800" y="6473952"/>
-            <a:ext cx="10789920" cy="256032"/>
-          </a:xfrm>
-          <a:prstGeom prst="rect">
-            <a:avLst/>
-          </a:prstGeom>
-          <a:noFill/>
-          <a:ln/>
-        </p:spPr>
-        <p:txBody>
-          <a:bodyPr wrap="square" lIns="0" tIns="0" rIns="0" bIns="0" rtlCol="0" anchor="ctr"/>
-          <a:lstStyle/>
-          <a:p>
-            <a:pPr indent="0" marL="0">
-              <a:buNone/>
-            </a:pPr>
-            <a:r>
-              <a:rPr lang="en-US" sz="950" i="1" dirty="0">
-                <a:solidFill>
-                  <a:srgbClr val="8B3E2D"/>
-                </a:solidFill>
-                <a:latin typeface="Calibri" pitchFamily="34" charset="0"/>
-                <a:ea typeface="Calibri" pitchFamily="34" charset="-122"/>
-                <a:cs typeface="Calibri" pitchFamily="34" charset="-120"/>
-              </a:rPr>
-              <a:t>Year 3 unverified — LA's Dec '28 signup cell reads 1016, not 10, inflating Year 3 by ≈ $286K. Corrected: Year 3 ≈ $729,000, three-year ≈ $1.13M.</a:t>
-            </a:r>
-            <a:endParaRPr lang="en-US" sz="950" dirty="0"/>
           </a:p>
         </p:txBody>
       </p:sp>
